--- a/Tech_Challenge_Fase1.pptx
+++ b/Tech_Challenge_Fase1.pptx
@@ -12,6 +12,12 @@
     <p:sldId id="257" r:id="rId3"/>
     <p:sldId id="258" r:id="rId4"/>
     <p:sldId id="259" r:id="rId5"/>
+    <p:sldId id="260" r:id="rId11"/>
+    <p:sldId id="261" r:id="rId12"/>
+    <p:sldId id="262" r:id="rId13"/>
+    <p:sldId id="263" r:id="rId14"/>
+    <p:sldId id="264" r:id="rId15"/>
+    <p:sldId id="265" r:id="rId16"/>
   </p:sldIdLst>
   <p:sldSz cx="12192000" cy="6858000"/>
   <p:notesSz cx="6858000" cy="12192000"/>
@@ -7201,6 +7207,856 @@
 </p:sld>
 </file>
 
+<file path=ppt/slides/slide10.xml><?xml version="1.0" encoding="utf-8"?>
+<p:sld xmlns:a="http://schemas.openxmlformats.org/drawingml/2006/main" xmlns:p="http://schemas.openxmlformats.org/presentationml/2006/main" xmlns:r="http://schemas.openxmlformats.org/officeDocument/2006/relationships">
+  <p:cSld>
+    <p:bg>
+      <p:bgPr>
+        <a:solidFill>
+          <a:srgbClr val="F5F6F8"/>
+        </a:solidFill>
+        <a:effectLst/>
+      </p:bgPr>
+    </p:bg>
+    <p:spTree>
+      <p:nvGrpSpPr>
+        <p:cNvPr id="1" name=""/>
+        <p:cNvGrpSpPr/>
+        <p:nvPr/>
+      </p:nvGrpSpPr>
+      <p:grpSpPr/>
+      <p:sp>
+        <p:nvSpPr>
+          <p:cNvPr id="2" name="TextBox 1"/>
+          <p:cNvSpPr txBox="1"/>
+          <p:nvPr/>
+        </p:nvSpPr>
+        <p:spPr>
+          <a:xfrm>
+            <a:off x="658368" y="384048"/>
+            <a:ext cx="5943600" cy="201168"/>
+          </a:xfrm>
+          <a:prstGeom prst="rect">
+            <a:avLst/>
+          </a:prstGeom>
+          <a:noFill/>
+        </p:spPr>
+        <p:txBody>
+          <a:bodyPr wrap="square" anchor="t" lIns="0" rIns="0" tIns="0" bIns="0">
+            <a:spAutoFit/>
+          </a:bodyPr>
+          <a:lstStyle/>
+          <a:p>
+            <a:pPr algn="l"/>
+            <a:r>
+              <a:rPr sz="950" b="1" i="0">
+                <a:solidFill>
+                  <a:srgbClr val="25C7E5"/>
+                </a:solidFill>
+                <a:latin typeface="Aptos"/>
+              </a:rPr>
+              <a:t>PARTE 5 · LIMITAÇÕES E PRÓXIMOS PASSOS</a:t>
+            </a:r>
+          </a:p>
+        </p:txBody>
+      </p:sp>
+      <p:sp>
+        <p:nvSpPr>
+          <p:cNvPr id="3" name="TextBox 2"/>
+          <p:cNvSpPr txBox="1"/>
+          <p:nvPr/>
+        </p:nvSpPr>
+        <p:spPr>
+          <a:xfrm>
+            <a:off x="658368" y="786384"/>
+            <a:ext cx="10881360" cy="749808"/>
+          </a:xfrm>
+          <a:prstGeom prst="rect">
+            <a:avLst/>
+          </a:prstGeom>
+          <a:noFill/>
+        </p:spPr>
+        <p:txBody>
+          <a:bodyPr wrap="square" anchor="t" lIns="0" rIns="0" tIns="0" bIns="0">
+            <a:spAutoFit/>
+          </a:bodyPr>
+          <a:lstStyle/>
+          <a:p>
+            <a:pPr algn="l">
+              <a:lnSpc>
+                <a:spcPct val="102000"/>
+              </a:lnSpc>
+            </a:pPr>
+            <a:r>
+              <a:rPr sz="2900" b="1" i="0">
+                <a:solidFill>
+                  <a:srgbClr val="111827"/>
+                </a:solidFill>
+                <a:latin typeface="Aptos Display"/>
+              </a:rPr>
+              <a:t>O que ainda não podemos afirmar — e o que fazemos a seguir.</a:t>
+            </a:r>
+          </a:p>
+        </p:txBody>
+      </p:sp>
+      <p:sp>
+        <p:nvSpPr>
+          <p:cNvPr id="4" name="TextBox 3"/>
+          <p:cNvSpPr txBox="1"/>
+          <p:nvPr/>
+        </p:nvSpPr>
+        <p:spPr>
+          <a:xfrm>
+            <a:off x="658368" y="1572768"/>
+            <a:ext cx="10607040" cy="365760"/>
+          </a:xfrm>
+          <a:prstGeom prst="rect">
+            <a:avLst/>
+          </a:prstGeom>
+          <a:noFill/>
+        </p:spPr>
+        <p:txBody>
+          <a:bodyPr wrap="square" anchor="t" lIns="0" rIns="0" tIns="0" bIns="0">
+            <a:spAutoFit/>
+          </a:bodyPr>
+          <a:lstStyle/>
+          <a:p>
+            <a:pPr algn="l"/>
+            <a:r>
+              <a:rPr sz="1210" b="0" i="0">
+                <a:solidFill>
+                  <a:srgbClr val="667085"/>
+                </a:solidFill>
+                <a:latin typeface="Aptos"/>
+              </a:rPr>
+              <a:t>Honestidade sobre os limites da análise antes de qualquer decisão de negócio.</a:t>
+            </a:r>
+          </a:p>
+        </p:txBody>
+      </p:sp>
+      <p:sp>
+        <p:nvSpPr>
+          <p:cNvPr id="5" name="Rounded Rectangle 4"/>
+          <p:cNvSpPr/>
+          <p:nvPr/>
+        </p:nvSpPr>
+        <p:spPr>
+          <a:xfrm>
+            <a:off x="658368" y="2212848"/>
+            <a:ext cx="3429000" cy="1783080"/>
+          </a:xfrm>
+          <a:prstGeom prst="roundRect">
+            <a:avLst>
+              <a:gd name="adj" fmla="val 4500"/>
+            </a:avLst>
+          </a:prstGeom>
+          <a:solidFill>
+            <a:srgbClr val="FFFFFF"/>
+          </a:solidFill>
+          <a:ln w="12700">
+            <a:solidFill>
+              <a:srgbClr val="E3E7ED"/>
+            </a:solidFill>
+          </a:ln>
+          <a:effectLst/>
+        </p:spPr>
+        <p:style>
+          <a:lnRef idx="1">
+            <a:schemeClr val="accent1"/>
+          </a:lnRef>
+          <a:fillRef idx="3">
+            <a:schemeClr val="accent1"/>
+          </a:fillRef>
+          <a:effectRef idx="2">
+            <a:schemeClr val="accent1"/>
+          </a:effectRef>
+          <a:fontRef idx="minor">
+            <a:schemeClr val="lt1"/>
+          </a:fontRef>
+        </p:style>
+        <p:txBody>
+          <a:bodyPr rtlCol="0" anchor="ctr"/>
+          <a:lstStyle/>
+          <a:p>
+            <a:pPr algn="ctr"/>
+          </a:p>
+        </p:txBody>
+      </p:sp>
+      <p:sp>
+        <p:nvSpPr>
+          <p:cNvPr id="6" name="Rounded Rectangle 5"/>
+          <p:cNvSpPr/>
+          <p:nvPr/>
+        </p:nvSpPr>
+        <p:spPr>
+          <a:xfrm>
+            <a:off x="914400" y="2450591"/>
+            <a:ext cx="329184" cy="54864"/>
+          </a:xfrm>
+          <a:prstGeom prst="roundRect">
+            <a:avLst>
+              <a:gd name="adj" fmla="val 50000"/>
+            </a:avLst>
+          </a:prstGeom>
+          <a:solidFill>
+            <a:srgbClr val="F4B64A"/>
+          </a:solidFill>
+          <a:ln>
+            <a:noFill/>
+          </a:ln>
+          <a:effectLst/>
+        </p:spPr>
+        <p:style>
+          <a:lnRef idx="1">
+            <a:schemeClr val="accent1"/>
+          </a:lnRef>
+          <a:fillRef idx="3">
+            <a:schemeClr val="accent1"/>
+          </a:fillRef>
+          <a:effectRef idx="2">
+            <a:schemeClr val="accent1"/>
+          </a:effectRef>
+          <a:fontRef idx="minor">
+            <a:schemeClr val="lt1"/>
+          </a:fontRef>
+        </p:style>
+        <p:txBody>
+          <a:bodyPr rtlCol="0" anchor="ctr"/>
+          <a:lstStyle/>
+          <a:p>
+            <a:pPr algn="ctr"/>
+          </a:p>
+        </p:txBody>
+      </p:sp>
+      <p:sp>
+        <p:nvSpPr>
+          <p:cNvPr id="7" name="TextBox 6"/>
+          <p:cNvSpPr txBox="1"/>
+          <p:nvPr/>
+        </p:nvSpPr>
+        <p:spPr>
+          <a:xfrm>
+            <a:off x="914400" y="2633472"/>
+            <a:ext cx="2916936" cy="457200"/>
+          </a:xfrm>
+          <a:prstGeom prst="rect">
+            <a:avLst/>
+          </a:prstGeom>
+          <a:noFill/>
+        </p:spPr>
+        <p:txBody>
+          <a:bodyPr wrap="square" anchor="t" lIns="0" rIns="0" tIns="0" bIns="0">
+            <a:spAutoFit/>
+          </a:bodyPr>
+          <a:lstStyle/>
+          <a:p>
+            <a:pPr algn="l">
+              <a:lnSpc>
+                <a:spcPct val="102000"/>
+              </a:lnSpc>
+            </a:pPr>
+            <a:r>
+              <a:rPr sz="1350" b="1" i="0">
+                <a:solidFill>
+                  <a:srgbClr val="111827"/>
+                </a:solidFill>
+                <a:latin typeface="Aptos Display"/>
+              </a:rPr>
+              <a:t>Correlação não é causalidade</a:t>
+            </a:r>
+          </a:p>
+        </p:txBody>
+      </p:sp>
+      <p:sp>
+        <p:nvSpPr>
+          <p:cNvPr id="8" name="TextBox 7"/>
+          <p:cNvSpPr txBox="1"/>
+          <p:nvPr/>
+        </p:nvSpPr>
+        <p:spPr>
+          <a:xfrm>
+            <a:off x="914400" y="3108960"/>
+            <a:ext cx="2916936" cy="822960"/>
+          </a:xfrm>
+          <a:prstGeom prst="rect">
+            <a:avLst/>
+          </a:prstGeom>
+          <a:noFill/>
+        </p:spPr>
+        <p:txBody>
+          <a:bodyPr wrap="square" anchor="t" lIns="0" rIns="0" tIns="0" bIns="0">
+            <a:spAutoFit/>
+          </a:bodyPr>
+          <a:lstStyle/>
+          <a:p>
+            <a:pPr algn="l">
+              <a:lnSpc>
+                <a:spcPct val="115000"/>
+              </a:lnSpc>
+            </a:pPr>
+            <a:r>
+              <a:rPr sz="980" b="0" i="0">
+                <a:solidFill>
+                  <a:srgbClr val="667085"/>
+                </a:solidFill>
+                <a:latin typeface="Aptos"/>
+              </a:rPr>
+              <a:t>o padrão atraso → reclamação → detrator é consistente nos dados, mas não foi testado em um experimento controlado.</a:t>
+            </a:r>
+          </a:p>
+        </p:txBody>
+      </p:sp>
+      <p:sp>
+        <p:nvSpPr>
+          <p:cNvPr id="9" name="Rounded Rectangle 8"/>
+          <p:cNvSpPr/>
+          <p:nvPr/>
+        </p:nvSpPr>
+        <p:spPr>
+          <a:xfrm>
+            <a:off x="4379976" y="2212848"/>
+            <a:ext cx="3429000" cy="1783080"/>
+          </a:xfrm>
+          <a:prstGeom prst="roundRect">
+            <a:avLst>
+              <a:gd name="adj" fmla="val 4500"/>
+            </a:avLst>
+          </a:prstGeom>
+          <a:solidFill>
+            <a:srgbClr val="FFFFFF"/>
+          </a:solidFill>
+          <a:ln w="12700">
+            <a:solidFill>
+              <a:srgbClr val="E3E7ED"/>
+            </a:solidFill>
+          </a:ln>
+          <a:effectLst/>
+        </p:spPr>
+        <p:style>
+          <a:lnRef idx="1">
+            <a:schemeClr val="accent1"/>
+          </a:lnRef>
+          <a:fillRef idx="3">
+            <a:schemeClr val="accent1"/>
+          </a:fillRef>
+          <a:effectRef idx="2">
+            <a:schemeClr val="accent1"/>
+          </a:effectRef>
+          <a:fontRef idx="minor">
+            <a:schemeClr val="lt1"/>
+          </a:fontRef>
+        </p:style>
+        <p:txBody>
+          <a:bodyPr rtlCol="0" anchor="ctr"/>
+          <a:lstStyle/>
+          <a:p>
+            <a:pPr algn="ctr"/>
+          </a:p>
+        </p:txBody>
+      </p:sp>
+      <p:sp>
+        <p:nvSpPr>
+          <p:cNvPr id="10" name="Rounded Rectangle 9"/>
+          <p:cNvSpPr/>
+          <p:nvPr/>
+        </p:nvSpPr>
+        <p:spPr>
+          <a:xfrm>
+            <a:off x="4636008" y="2450591"/>
+            <a:ext cx="329184" cy="54864"/>
+          </a:xfrm>
+          <a:prstGeom prst="roundRect">
+            <a:avLst>
+              <a:gd name="adj" fmla="val 50000"/>
+            </a:avLst>
+          </a:prstGeom>
+          <a:solidFill>
+            <a:srgbClr val="F4B64A"/>
+          </a:solidFill>
+          <a:ln>
+            <a:noFill/>
+          </a:ln>
+          <a:effectLst/>
+        </p:spPr>
+        <p:style>
+          <a:lnRef idx="1">
+            <a:schemeClr val="accent1"/>
+          </a:lnRef>
+          <a:fillRef idx="3">
+            <a:schemeClr val="accent1"/>
+          </a:fillRef>
+          <a:effectRef idx="2">
+            <a:schemeClr val="accent1"/>
+          </a:effectRef>
+          <a:fontRef idx="minor">
+            <a:schemeClr val="lt1"/>
+          </a:fontRef>
+        </p:style>
+        <p:txBody>
+          <a:bodyPr rtlCol="0" anchor="ctr"/>
+          <a:lstStyle/>
+          <a:p>
+            <a:pPr algn="ctr"/>
+          </a:p>
+        </p:txBody>
+      </p:sp>
+      <p:sp>
+        <p:nvSpPr>
+          <p:cNvPr id="11" name="TextBox 10"/>
+          <p:cNvSpPr txBox="1"/>
+          <p:nvPr/>
+        </p:nvSpPr>
+        <p:spPr>
+          <a:xfrm>
+            <a:off x="4636008" y="2633472"/>
+            <a:ext cx="2916936" cy="457200"/>
+          </a:xfrm>
+          <a:prstGeom prst="rect">
+            <a:avLst/>
+          </a:prstGeom>
+          <a:noFill/>
+        </p:spPr>
+        <p:txBody>
+          <a:bodyPr wrap="square" anchor="t" lIns="0" rIns="0" tIns="0" bIns="0">
+            <a:spAutoFit/>
+          </a:bodyPr>
+          <a:lstStyle/>
+          <a:p>
+            <a:pPr algn="l">
+              <a:lnSpc>
+                <a:spcPct val="102000"/>
+              </a:lnSpc>
+            </a:pPr>
+            <a:r>
+              <a:rPr sz="1350" b="1" i="0">
+                <a:solidFill>
+                  <a:srgbClr val="111827"/>
+                </a:solidFill>
+                <a:latin typeface="Aptos Display"/>
+              </a:rPr>
+              <a:t>Fotografia histórica</a:t>
+            </a:r>
+          </a:p>
+        </p:txBody>
+      </p:sp>
+      <p:sp>
+        <p:nvSpPr>
+          <p:cNvPr id="12" name="TextBox 11"/>
+          <p:cNvSpPr txBox="1"/>
+          <p:nvPr/>
+        </p:nvSpPr>
+        <p:spPr>
+          <a:xfrm>
+            <a:off x="4636008" y="3108960"/>
+            <a:ext cx="2916936" cy="822960"/>
+          </a:xfrm>
+          <a:prstGeom prst="rect">
+            <a:avLst/>
+          </a:prstGeom>
+          <a:noFill/>
+        </p:spPr>
+        <p:txBody>
+          <a:bodyPr wrap="square" anchor="t" lIns="0" rIns="0" tIns="0" bIns="0">
+            <a:spAutoFit/>
+          </a:bodyPr>
+          <a:lstStyle/>
+          <a:p>
+            <a:pPr algn="l">
+              <a:lnSpc>
+                <a:spcPct val="115000"/>
+              </a:lnSpc>
+            </a:pPr>
+            <a:r>
+              <a:rPr sz="980" b="0" i="0">
+                <a:solidFill>
+                  <a:srgbClr val="667085"/>
+                </a:solidFill>
+                <a:latin typeface="Aptos"/>
+              </a:rPr>
+              <a:t>os dados não incorporam sazonalidade, concorrência ou tipo de produto vendido.</a:t>
+            </a:r>
+          </a:p>
+        </p:txBody>
+      </p:sp>
+      <p:sp>
+        <p:nvSpPr>
+          <p:cNvPr id="13" name="Rounded Rectangle 12"/>
+          <p:cNvSpPr/>
+          <p:nvPr/>
+        </p:nvSpPr>
+        <p:spPr>
+          <a:xfrm>
+            <a:off x="8101584" y="2212848"/>
+            <a:ext cx="3429000" cy="1783080"/>
+          </a:xfrm>
+          <a:prstGeom prst="roundRect">
+            <a:avLst>
+              <a:gd name="adj" fmla="val 4500"/>
+            </a:avLst>
+          </a:prstGeom>
+          <a:solidFill>
+            <a:srgbClr val="FFFFFF"/>
+          </a:solidFill>
+          <a:ln w="12700">
+            <a:solidFill>
+              <a:srgbClr val="E3E7ED"/>
+            </a:solidFill>
+          </a:ln>
+          <a:effectLst/>
+        </p:spPr>
+        <p:style>
+          <a:lnRef idx="1">
+            <a:schemeClr val="accent1"/>
+          </a:lnRef>
+          <a:fillRef idx="3">
+            <a:schemeClr val="accent1"/>
+          </a:fillRef>
+          <a:effectRef idx="2">
+            <a:schemeClr val="accent1"/>
+          </a:effectRef>
+          <a:fontRef idx="minor">
+            <a:schemeClr val="lt1"/>
+          </a:fontRef>
+        </p:style>
+        <p:txBody>
+          <a:bodyPr rtlCol="0" anchor="ctr"/>
+          <a:lstStyle/>
+          <a:p>
+            <a:pPr algn="ctr"/>
+          </a:p>
+        </p:txBody>
+      </p:sp>
+      <p:sp>
+        <p:nvSpPr>
+          <p:cNvPr id="14" name="Rounded Rectangle 13"/>
+          <p:cNvSpPr/>
+          <p:nvPr/>
+        </p:nvSpPr>
+        <p:spPr>
+          <a:xfrm>
+            <a:off x="8357616" y="2450591"/>
+            <a:ext cx="329184" cy="54864"/>
+          </a:xfrm>
+          <a:prstGeom prst="roundRect">
+            <a:avLst>
+              <a:gd name="adj" fmla="val 50000"/>
+            </a:avLst>
+          </a:prstGeom>
+          <a:solidFill>
+            <a:srgbClr val="F4B64A"/>
+          </a:solidFill>
+          <a:ln>
+            <a:noFill/>
+          </a:ln>
+          <a:effectLst/>
+        </p:spPr>
+        <p:style>
+          <a:lnRef idx="1">
+            <a:schemeClr val="accent1"/>
+          </a:lnRef>
+          <a:fillRef idx="3">
+            <a:schemeClr val="accent1"/>
+          </a:fillRef>
+          <a:effectRef idx="2">
+            <a:schemeClr val="accent1"/>
+          </a:effectRef>
+          <a:fontRef idx="minor">
+            <a:schemeClr val="lt1"/>
+          </a:fontRef>
+        </p:style>
+        <p:txBody>
+          <a:bodyPr rtlCol="0" anchor="ctr"/>
+          <a:lstStyle/>
+          <a:p>
+            <a:pPr algn="ctr"/>
+          </a:p>
+        </p:txBody>
+      </p:sp>
+      <p:sp>
+        <p:nvSpPr>
+          <p:cNvPr id="15" name="TextBox 14"/>
+          <p:cNvSpPr txBox="1"/>
+          <p:nvPr/>
+        </p:nvSpPr>
+        <p:spPr>
+          <a:xfrm>
+            <a:off x="8357616" y="2633472"/>
+            <a:ext cx="2916936" cy="457200"/>
+          </a:xfrm>
+          <a:prstGeom prst="rect">
+            <a:avLst/>
+          </a:prstGeom>
+          <a:noFill/>
+        </p:spPr>
+        <p:txBody>
+          <a:bodyPr wrap="square" anchor="t" lIns="0" rIns="0" tIns="0" bIns="0">
+            <a:spAutoFit/>
+          </a:bodyPr>
+          <a:lstStyle/>
+          <a:p>
+            <a:pPr algn="l">
+              <a:lnSpc>
+                <a:spcPct val="102000"/>
+              </a:lnSpc>
+            </a:pPr>
+            <a:r>
+              <a:rPr sz="1350" b="1" i="0">
+                <a:solidFill>
+                  <a:srgbClr val="111827"/>
+                </a:solidFill>
+                <a:latin typeface="Aptos Display"/>
+              </a:rPr>
+              <a:t>Base desbalanceada</a:t>
+            </a:r>
+          </a:p>
+        </p:txBody>
+      </p:sp>
+      <p:sp>
+        <p:nvSpPr>
+          <p:cNvPr id="16" name="TextBox 15"/>
+          <p:cNvSpPr txBox="1"/>
+          <p:nvPr/>
+        </p:nvSpPr>
+        <p:spPr>
+          <a:xfrm>
+            <a:off x="8357616" y="3108960"/>
+            <a:ext cx="2916936" cy="822960"/>
+          </a:xfrm>
+          <a:prstGeom prst="rect">
+            <a:avLst/>
+          </a:prstGeom>
+          <a:noFill/>
+        </p:spPr>
+        <p:txBody>
+          <a:bodyPr wrap="square" anchor="t" lIns="0" rIns="0" tIns="0" bIns="0">
+            <a:spAutoFit/>
+          </a:bodyPr>
+          <a:lstStyle/>
+          <a:p>
+            <a:pPr algn="l">
+              <a:lnSpc>
+                <a:spcPct val="115000"/>
+              </a:lnSpc>
+            </a:pPr>
+            <a:r>
+              <a:rPr sz="980" b="0" i="0">
+                <a:solidFill>
+                  <a:srgbClr val="667085"/>
+                </a:solidFill>
+                <a:latin typeface="Aptos"/>
+              </a:rPr>
+              <a:t>83,1% dos pedidos são detratores, o que exige cautela ao validar conclusões sobre a minoria de promotores.</a:t>
+            </a:r>
+          </a:p>
+        </p:txBody>
+      </p:sp>
+      <p:sp>
+        <p:nvSpPr>
+          <p:cNvPr id="17" name="Rounded Rectangle 16"/>
+          <p:cNvSpPr/>
+          <p:nvPr/>
+        </p:nvSpPr>
+        <p:spPr>
+          <a:xfrm>
+            <a:off x="658368" y="4224528"/>
+            <a:ext cx="10881360" cy="1417320"/>
+          </a:xfrm>
+          <a:prstGeom prst="roundRect">
+            <a:avLst>
+              <a:gd name="adj" fmla="val 4500"/>
+            </a:avLst>
+          </a:prstGeom>
+          <a:solidFill>
+            <a:srgbClr val="091220"/>
+          </a:solidFill>
+          <a:ln>
+            <a:noFill/>
+          </a:ln>
+          <a:effectLst/>
+        </p:spPr>
+        <p:style>
+          <a:lnRef idx="1">
+            <a:schemeClr val="accent1"/>
+          </a:lnRef>
+          <a:fillRef idx="3">
+            <a:schemeClr val="accent1"/>
+          </a:fillRef>
+          <a:effectRef idx="2">
+            <a:schemeClr val="accent1"/>
+          </a:effectRef>
+          <a:fontRef idx="minor">
+            <a:schemeClr val="lt1"/>
+          </a:fontRef>
+        </p:style>
+        <p:txBody>
+          <a:bodyPr rtlCol="0" anchor="ctr"/>
+          <a:lstStyle/>
+          <a:p>
+            <a:pPr algn="ctr"/>
+          </a:p>
+        </p:txBody>
+      </p:sp>
+      <p:sp>
+        <p:nvSpPr>
+          <p:cNvPr id="18" name="TextBox 17"/>
+          <p:cNvSpPr txBox="1"/>
+          <p:nvPr/>
+        </p:nvSpPr>
+        <p:spPr>
+          <a:xfrm>
+            <a:off x="960120" y="4443984"/>
+            <a:ext cx="1463040" cy="219456"/>
+          </a:xfrm>
+          <a:prstGeom prst="rect">
+            <a:avLst/>
+          </a:prstGeom>
+          <a:noFill/>
+        </p:spPr>
+        <p:txBody>
+          <a:bodyPr wrap="square" anchor="t" lIns="0" rIns="0" tIns="0" bIns="0">
+            <a:spAutoFit/>
+          </a:bodyPr>
+          <a:lstStyle/>
+          <a:p>
+            <a:pPr algn="l"/>
+            <a:r>
+              <a:rPr sz="940" b="1" i="0">
+                <a:solidFill>
+                  <a:srgbClr val="25C7E5"/>
+                </a:solidFill>
+                <a:latin typeface="Aptos"/>
+              </a:rPr>
+              <a:t>MENSAGEM FINAL</a:t>
+            </a:r>
+          </a:p>
+        </p:txBody>
+      </p:sp>
+      <p:sp>
+        <p:nvSpPr>
+          <p:cNvPr id="19" name="TextBox 18"/>
+          <p:cNvSpPr txBox="1"/>
+          <p:nvPr/>
+        </p:nvSpPr>
+        <p:spPr>
+          <a:xfrm>
+            <a:off x="960120" y="4718304"/>
+            <a:ext cx="9966960" cy="603504"/>
+          </a:xfrm>
+          <a:prstGeom prst="rect">
+            <a:avLst/>
+          </a:prstGeom>
+          <a:noFill/>
+        </p:spPr>
+        <p:txBody>
+          <a:bodyPr wrap="square" anchor="t" lIns="0" rIns="0" tIns="0" bIns="0">
+            <a:spAutoFit/>
+          </a:bodyPr>
+          <a:lstStyle/>
+          <a:p>
+            <a:pPr algn="l">
+              <a:lnSpc>
+                <a:spcPct val="115000"/>
+              </a:lnSpc>
+            </a:pPr>
+            <a:r>
+              <a:rPr sz="1350" b="0" i="0">
+                <a:solidFill>
+                  <a:srgbClr val="FFFFFF"/>
+                </a:solidFill>
+                <a:latin typeface="Aptos"/>
+              </a:rPr>
+              <a:t>De 2.202 pedidos, 1.829 são detratores. A maior alavanca já identificada: </a:t>
+            </a:r>
+            <a:r>
+              <a:rPr sz="1350" b="1" i="0">
+                <a:solidFill>
+                  <a:srgbClr val="87E5F2"/>
+                </a:solidFill>
+                <a:latin typeface="Aptos"/>
+              </a:rPr>
+              <a:t>eliminar o primeiro dia de atraso na entrega.</a:t>
+            </a:r>
+          </a:p>
+        </p:txBody>
+      </p:sp>
+      <p:sp>
+        <p:nvSpPr>
+          <p:cNvPr id="20" name="TextBox 19"/>
+          <p:cNvSpPr txBox="1"/>
+          <p:nvPr/>
+        </p:nvSpPr>
+        <p:spPr>
+          <a:xfrm>
+            <a:off x="658368" y="6501384"/>
+            <a:ext cx="3749039" cy="164592"/>
+          </a:xfrm>
+          <a:prstGeom prst="rect">
+            <a:avLst/>
+          </a:prstGeom>
+          <a:noFill/>
+        </p:spPr>
+        <p:txBody>
+          <a:bodyPr wrap="square" anchor="t" lIns="0" rIns="0" tIns="0" bIns="0">
+            <a:spAutoFit/>
+          </a:bodyPr>
+          <a:lstStyle/>
+          <a:p>
+            <a:pPr algn="l"/>
+            <a:r>
+              <a:rPr sz="850" b="0" i="0">
+                <a:solidFill>
+                  <a:srgbClr val="98A2B3"/>
+                </a:solidFill>
+                <a:latin typeface="Aptos"/>
+              </a:rPr>
+              <a:t>NPS Preditivo  ·  Tech Challenge Fase 1</a:t>
+            </a:r>
+          </a:p>
+        </p:txBody>
+      </p:sp>
+      <p:sp>
+        <p:nvSpPr>
+          <p:cNvPr id="21" name="TextBox 20"/>
+          <p:cNvSpPr txBox="1"/>
+          <p:nvPr/>
+        </p:nvSpPr>
+        <p:spPr>
+          <a:xfrm>
+            <a:off x="11137392" y="6473952"/>
+            <a:ext cx="384048" cy="164592"/>
+          </a:xfrm>
+          <a:prstGeom prst="rect">
+            <a:avLst/>
+          </a:prstGeom>
+          <a:noFill/>
+        </p:spPr>
+        <p:txBody>
+          <a:bodyPr wrap="square" anchor="t" lIns="0" rIns="0" tIns="0" bIns="0">
+            <a:spAutoFit/>
+          </a:bodyPr>
+          <a:lstStyle/>
+          <a:p>
+            <a:pPr algn="r"/>
+            <a:r>
+              <a:rPr sz="850" b="0" i="0">
+                <a:solidFill>
+                  <a:srgbClr val="98A2B3"/>
+                </a:solidFill>
+                <a:latin typeface="Aptos"/>
+              </a:rPr>
+              <a:t>10</a:t>
+            </a:r>
+          </a:p>
+        </p:txBody>
+      </p:sp>
+    </p:spTree>
+  </p:cSld>
+  <p:clrMapOvr>
+    <a:masterClrMapping/>
+  </p:clrMapOvr>
+</p:sld>
+</file>
+
 <file path=ppt/slides/slide2.xml><?xml version="1.0" encoding="utf-8"?>
 <p:sld xmlns:a="http://schemas.openxmlformats.org/drawingml/2006/main" xmlns:r="http://schemas.openxmlformats.org/officeDocument/2006/relationships" xmlns:p="http://schemas.openxmlformats.org/presentationml/2006/main">
   <p:cSld>
@@ -16215,6 +17071,6121 @@
               <a:uFillTx/>
               <a:latin typeface="Arial"/>
             </a:endParaRPr>
+          </a:p>
+        </p:txBody>
+      </p:sp>
+    </p:spTree>
+  </p:cSld>
+  <p:clrMapOvr>
+    <a:masterClrMapping/>
+  </p:clrMapOvr>
+</p:sld>
+</file>
+
+<file path=ppt/slides/slide5.xml><?xml version="1.0" encoding="utf-8"?>
+<p:sld xmlns:a="http://schemas.openxmlformats.org/drawingml/2006/main" xmlns:p="http://schemas.openxmlformats.org/presentationml/2006/main" xmlns:r="http://schemas.openxmlformats.org/officeDocument/2006/relationships">
+  <p:cSld>
+    <p:bg>
+      <p:bgPr>
+        <a:solidFill>
+          <a:srgbClr val="091220"/>
+        </a:solidFill>
+        <a:effectLst/>
+      </p:bgPr>
+    </p:bg>
+    <p:spTree>
+      <p:nvGrpSpPr>
+        <p:cNvPr id="1" name=""/>
+        <p:cNvGrpSpPr/>
+        <p:nvPr/>
+      </p:nvGrpSpPr>
+      <p:grpSpPr/>
+      <p:sp>
+        <p:nvSpPr>
+          <p:cNvPr id="2" name="TextBox 1"/>
+          <p:cNvSpPr txBox="1"/>
+          <p:nvPr/>
+        </p:nvSpPr>
+        <p:spPr>
+          <a:xfrm>
+            <a:off x="658368" y="384048"/>
+            <a:ext cx="5943600" cy="201168"/>
+          </a:xfrm>
+          <a:prstGeom prst="rect">
+            <a:avLst/>
+          </a:prstGeom>
+          <a:noFill/>
+        </p:spPr>
+        <p:txBody>
+          <a:bodyPr wrap="square" anchor="t" lIns="0" rIns="0" tIns="0" bIns="0">
+            <a:spAutoFit/>
+          </a:bodyPr>
+          <a:lstStyle/>
+          <a:p>
+            <a:pPr algn="l"/>
+            <a:r>
+              <a:rPr sz="950" b="1" i="0">
+                <a:solidFill>
+                  <a:srgbClr val="25C7E5"/>
+                </a:solidFill>
+                <a:latin typeface="Aptos"/>
+              </a:rPr>
+              <a:t>PARTE 3 · O QUE OS DADOS MOSTRAM</a:t>
+            </a:r>
+          </a:p>
+        </p:txBody>
+      </p:sp>
+      <p:sp>
+        <p:nvSpPr>
+          <p:cNvPr id="3" name="TextBox 2"/>
+          <p:cNvSpPr txBox="1"/>
+          <p:nvPr/>
+        </p:nvSpPr>
+        <p:spPr>
+          <a:xfrm>
+            <a:off x="658368" y="786384"/>
+            <a:ext cx="10881360" cy="749808"/>
+          </a:xfrm>
+          <a:prstGeom prst="rect">
+            <a:avLst/>
+          </a:prstGeom>
+          <a:noFill/>
+        </p:spPr>
+        <p:txBody>
+          <a:bodyPr wrap="square" anchor="t" lIns="0" rIns="0" tIns="0" bIns="0">
+            <a:spAutoFit/>
+          </a:bodyPr>
+          <a:lstStyle/>
+          <a:p>
+            <a:pPr algn="l">
+              <a:lnSpc>
+                <a:spcPct val="102000"/>
+              </a:lnSpc>
+            </a:pPr>
+            <a:r>
+              <a:rPr sz="2900" b="1" i="0">
+                <a:solidFill>
+                  <a:srgbClr val="FFFFFF"/>
+                </a:solidFill>
+                <a:latin typeface="Aptos Display"/>
+              </a:rPr>
+              <a:t>Quatro em cada cinco pedidos terminam com um cliente insatisfeito.</a:t>
+            </a:r>
+          </a:p>
+        </p:txBody>
+      </p:sp>
+      <p:sp>
+        <p:nvSpPr>
+          <p:cNvPr id="4" name="TextBox 3"/>
+          <p:cNvSpPr txBox="1"/>
+          <p:nvPr/>
+        </p:nvSpPr>
+        <p:spPr>
+          <a:xfrm>
+            <a:off x="658368" y="1572768"/>
+            <a:ext cx="10607040" cy="365760"/>
+          </a:xfrm>
+          <a:prstGeom prst="rect">
+            <a:avLst/>
+          </a:prstGeom>
+          <a:noFill/>
+        </p:spPr>
+        <p:txBody>
+          <a:bodyPr wrap="square" anchor="t" lIns="0" rIns="0" tIns="0" bIns="0">
+            <a:spAutoFit/>
+          </a:bodyPr>
+          <a:lstStyle/>
+          <a:p>
+            <a:pPr algn="l"/>
+            <a:r>
+              <a:rPr sz="1210" b="0" i="0">
+                <a:solidFill>
+                  <a:srgbClr val="9FB0C6"/>
+                </a:solidFill>
+                <a:latin typeface="Aptos"/>
+              </a:rPr>
+              <a:t>Distribuição do NPS entre os 2.202 pedidos analisados após o tratamento da base.</a:t>
+            </a:r>
+          </a:p>
+        </p:txBody>
+      </p:sp>
+      <p:sp>
+        <p:nvSpPr>
+          <p:cNvPr id="5" name="TextBox 4"/>
+          <p:cNvSpPr txBox="1"/>
+          <p:nvPr/>
+        </p:nvSpPr>
+        <p:spPr>
+          <a:xfrm>
+            <a:off x="658368" y="2331720"/>
+            <a:ext cx="2377440" cy="658368"/>
+          </a:xfrm>
+          <a:prstGeom prst="rect">
+            <a:avLst/>
+          </a:prstGeom>
+          <a:noFill/>
+        </p:spPr>
+        <p:txBody>
+          <a:bodyPr wrap="square" anchor="t" lIns="0" rIns="0" tIns="0" bIns="0">
+            <a:spAutoFit/>
+          </a:bodyPr>
+          <a:lstStyle/>
+          <a:p>
+            <a:pPr algn="l"/>
+            <a:r>
+              <a:rPr sz="4900" b="1" i="0">
+                <a:solidFill>
+                  <a:srgbClr val="EE5A62"/>
+                </a:solidFill>
+                <a:latin typeface="Aptos Display"/>
+              </a:rPr>
+              <a:t>83,1%</a:t>
+            </a:r>
+          </a:p>
+        </p:txBody>
+      </p:sp>
+      <p:sp>
+        <p:nvSpPr>
+          <p:cNvPr id="6" name="TextBox 5"/>
+          <p:cNvSpPr txBox="1"/>
+          <p:nvPr/>
+        </p:nvSpPr>
+        <p:spPr>
+          <a:xfrm>
+            <a:off x="685800" y="3218688"/>
+            <a:ext cx="2423160" cy="603504"/>
+          </a:xfrm>
+          <a:prstGeom prst="rect">
+            <a:avLst/>
+          </a:prstGeom>
+          <a:noFill/>
+        </p:spPr>
+        <p:txBody>
+          <a:bodyPr wrap="square" anchor="t" lIns="0" rIns="0" tIns="0" bIns="0">
+            <a:spAutoFit/>
+          </a:bodyPr>
+          <a:lstStyle/>
+          <a:p>
+            <a:pPr algn="l"/>
+            <a:r>
+              <a:rPr sz="1520" b="1" i="0">
+                <a:solidFill>
+                  <a:srgbClr val="FFFFFF"/>
+                </a:solidFill>
+                <a:latin typeface="Aptos"/>
+              </a:rPr>
+              <a:t>são detratores</a:t>
+            </a:r>
+          </a:p>
+        </p:txBody>
+      </p:sp>
+      <p:sp>
+        <p:nvSpPr>
+          <p:cNvPr id="7" name="TextBox 6"/>
+          <p:cNvSpPr txBox="1"/>
+          <p:nvPr/>
+        </p:nvSpPr>
+        <p:spPr>
+          <a:xfrm>
+            <a:off x="685800" y="3749039"/>
+            <a:ext cx="2651760" cy="219456"/>
+          </a:xfrm>
+          <a:prstGeom prst="rect">
+            <a:avLst/>
+          </a:prstGeom>
+          <a:noFill/>
+        </p:spPr>
+        <p:txBody>
+          <a:bodyPr wrap="square" anchor="t" lIns="0" rIns="0" tIns="0" bIns="0">
+            <a:spAutoFit/>
+          </a:bodyPr>
+          <a:lstStyle/>
+          <a:p>
+            <a:pPr algn="l"/>
+            <a:r>
+              <a:rPr sz="1040" b="0" i="0">
+                <a:solidFill>
+                  <a:srgbClr val="9FB0C6"/>
+                </a:solidFill>
+                <a:latin typeface="Aptos"/>
+              </a:rPr>
+              <a:t>1.829 de 2.202 pedidos</a:t>
+            </a:r>
+          </a:p>
+        </p:txBody>
+      </p:sp>
+      <p:sp>
+        <p:nvSpPr>
+          <p:cNvPr id="8" name="Rounded Rectangle 7"/>
+          <p:cNvSpPr/>
+          <p:nvPr/>
+        </p:nvSpPr>
+        <p:spPr>
+          <a:xfrm>
+            <a:off x="685800" y="4114800"/>
+            <a:ext cx="1737360" cy="292608"/>
+          </a:xfrm>
+          <a:prstGeom prst="roundRect">
+            <a:avLst>
+              <a:gd name="adj" fmla="val 50000"/>
+            </a:avLst>
+          </a:prstGeom>
+          <a:solidFill>
+            <a:srgbClr val="331A25"/>
+          </a:solidFill>
+          <a:ln>
+            <a:noFill/>
+          </a:ln>
+          <a:effectLst/>
+        </p:spPr>
+        <p:style>
+          <a:lnRef idx="1">
+            <a:schemeClr val="accent1"/>
+          </a:lnRef>
+          <a:fillRef idx="3">
+            <a:schemeClr val="accent1"/>
+          </a:fillRef>
+          <a:effectRef idx="2">
+            <a:schemeClr val="accent1"/>
+          </a:effectRef>
+          <a:fontRef idx="minor">
+            <a:schemeClr val="lt1"/>
+          </a:fontRef>
+        </p:style>
+        <p:txBody>
+          <a:bodyPr rtlCol="0" anchor="ctr"/>
+          <a:lstStyle/>
+          <a:p>
+            <a:pPr algn="ctr"/>
+          </a:p>
+        </p:txBody>
+      </p:sp>
+      <p:sp>
+        <p:nvSpPr>
+          <p:cNvPr id="9" name="TextBox 8"/>
+          <p:cNvSpPr txBox="1"/>
+          <p:nvPr/>
+        </p:nvSpPr>
+        <p:spPr>
+          <a:xfrm>
+            <a:off x="758952" y="4133087"/>
+            <a:ext cx="1600200" cy="246888"/>
+          </a:xfrm>
+          <a:prstGeom prst="rect">
+            <a:avLst/>
+          </a:prstGeom>
+          <a:noFill/>
+        </p:spPr>
+        <p:txBody>
+          <a:bodyPr wrap="square" anchor="t" lIns="0" rIns="0" tIns="0" bIns="0">
+            <a:spAutoFit/>
+          </a:bodyPr>
+          <a:lstStyle/>
+          <a:p>
+            <a:pPr algn="ctr"/>
+            <a:r>
+              <a:rPr sz="930" b="1" i="0">
+                <a:solidFill>
+                  <a:srgbClr val="F6A5AA"/>
+                </a:solidFill>
+                <a:latin typeface="Aptos"/>
+              </a:rPr>
+              <a:t>maioria absoluta</a:t>
+            </a:r>
+          </a:p>
+        </p:txBody>
+      </p:sp>
+      <p:sp>
+        <p:nvSpPr>
+          <p:cNvPr id="10" name="Rounded Rectangle 9"/>
+          <p:cNvSpPr/>
+          <p:nvPr/>
+        </p:nvSpPr>
+        <p:spPr>
+          <a:xfrm>
+            <a:off x="3529584" y="2212848"/>
+            <a:ext cx="7991856" cy="3611880"/>
+          </a:xfrm>
+          <a:prstGeom prst="roundRect">
+            <a:avLst>
+              <a:gd name="adj" fmla="val 3000"/>
+            </a:avLst>
+          </a:prstGeom>
+          <a:solidFill>
+            <a:srgbClr val="0D1A2B"/>
+          </a:solidFill>
+          <a:ln>
+            <a:noFill/>
+          </a:ln>
+          <a:effectLst/>
+        </p:spPr>
+        <p:style>
+          <a:lnRef idx="1">
+            <a:schemeClr val="accent1"/>
+          </a:lnRef>
+          <a:fillRef idx="3">
+            <a:schemeClr val="accent1"/>
+          </a:fillRef>
+          <a:effectRef idx="2">
+            <a:schemeClr val="accent1"/>
+          </a:effectRef>
+          <a:fontRef idx="minor">
+            <a:schemeClr val="lt1"/>
+          </a:fontRef>
+        </p:style>
+        <p:txBody>
+          <a:bodyPr rtlCol="0" anchor="ctr"/>
+          <a:lstStyle/>
+          <a:p>
+            <a:pPr algn="ctr"/>
+          </a:p>
+        </p:txBody>
+      </p:sp>
+      <p:sp>
+        <p:nvSpPr>
+          <p:cNvPr id="11" name="TextBox 10"/>
+          <p:cNvSpPr txBox="1"/>
+          <p:nvPr/>
+        </p:nvSpPr>
+        <p:spPr>
+          <a:xfrm>
+            <a:off x="3822191" y="2487168"/>
+            <a:ext cx="3657600" cy="201168"/>
+          </a:xfrm>
+          <a:prstGeom prst="rect">
+            <a:avLst/>
+          </a:prstGeom>
+          <a:noFill/>
+        </p:spPr>
+        <p:txBody>
+          <a:bodyPr wrap="square" anchor="t" lIns="0" rIns="0" tIns="0" bIns="0">
+            <a:spAutoFit/>
+          </a:bodyPr>
+          <a:lstStyle/>
+          <a:p>
+            <a:pPr algn="l"/>
+            <a:r>
+              <a:rPr sz="960" b="1" i="0">
+                <a:solidFill>
+                  <a:srgbClr val="25C7E5"/>
+                </a:solidFill>
+                <a:latin typeface="Aptos"/>
+              </a:rPr>
+              <a:t>DISTRIBUIÇÃO COMPLETA</a:t>
+            </a:r>
+          </a:p>
+        </p:txBody>
+      </p:sp>
+      <p:sp>
+        <p:nvSpPr>
+          <p:cNvPr id="12" name="Oval 11"/>
+          <p:cNvSpPr/>
+          <p:nvPr/>
+        </p:nvSpPr>
+        <p:spPr>
+          <a:xfrm>
+            <a:off x="3822191" y="2990087"/>
+            <a:ext cx="118872" cy="118872"/>
+          </a:xfrm>
+          <a:prstGeom prst="ellipse">
+            <a:avLst/>
+          </a:prstGeom>
+          <a:solidFill>
+            <a:srgbClr val="EE5A62"/>
+          </a:solidFill>
+          <a:ln>
+            <a:noFill/>
+          </a:ln>
+          <a:effectLst/>
+        </p:spPr>
+        <p:style>
+          <a:lnRef idx="1">
+            <a:schemeClr val="accent1"/>
+          </a:lnRef>
+          <a:fillRef idx="3">
+            <a:schemeClr val="accent1"/>
+          </a:fillRef>
+          <a:effectRef idx="2">
+            <a:schemeClr val="accent1"/>
+          </a:effectRef>
+          <a:fontRef idx="minor">
+            <a:schemeClr val="lt1"/>
+          </a:fontRef>
+        </p:style>
+        <p:txBody>
+          <a:bodyPr rtlCol="0" anchor="ctr"/>
+          <a:lstStyle/>
+          <a:p>
+            <a:pPr algn="ctr"/>
+          </a:p>
+        </p:txBody>
+      </p:sp>
+      <p:sp>
+        <p:nvSpPr>
+          <p:cNvPr id="13" name="TextBox 12"/>
+          <p:cNvSpPr txBox="1"/>
+          <p:nvPr/>
+        </p:nvSpPr>
+        <p:spPr>
+          <a:xfrm>
+            <a:off x="4059935" y="2916936"/>
+            <a:ext cx="2011680" cy="237744"/>
+          </a:xfrm>
+          <a:prstGeom prst="rect">
+            <a:avLst/>
+          </a:prstGeom>
+          <a:noFill/>
+        </p:spPr>
+        <p:txBody>
+          <a:bodyPr wrap="square" anchor="t" lIns="0" rIns="0" tIns="0" bIns="0">
+            <a:spAutoFit/>
+          </a:bodyPr>
+          <a:lstStyle/>
+          <a:p>
+            <a:pPr algn="l"/>
+            <a:r>
+              <a:rPr sz="1250" b="1" i="0">
+                <a:solidFill>
+                  <a:srgbClr val="FFFFFF"/>
+                </a:solidFill>
+                <a:latin typeface="Aptos"/>
+              </a:rPr>
+              <a:t>Detrator</a:t>
+            </a:r>
+          </a:p>
+        </p:txBody>
+      </p:sp>
+      <p:sp>
+        <p:nvSpPr>
+          <p:cNvPr id="14" name="TextBox 13"/>
+          <p:cNvSpPr txBox="1"/>
+          <p:nvPr/>
+        </p:nvSpPr>
+        <p:spPr>
+          <a:xfrm>
+            <a:off x="8485632" y="2916936"/>
+            <a:ext cx="2743200" cy="237744"/>
+          </a:xfrm>
+          <a:prstGeom prst="rect">
+            <a:avLst/>
+          </a:prstGeom>
+          <a:noFill/>
+        </p:spPr>
+        <p:txBody>
+          <a:bodyPr wrap="square" anchor="t" lIns="0" rIns="0" tIns="0" bIns="0">
+            <a:spAutoFit/>
+          </a:bodyPr>
+          <a:lstStyle/>
+          <a:p>
+            <a:pPr algn="r"/>
+            <a:r>
+              <a:rPr sz="1080" b="0" i="0">
+                <a:solidFill>
+                  <a:srgbClr val="A6B4C6"/>
+                </a:solidFill>
+                <a:latin typeface="Aptos"/>
+              </a:rPr>
+              <a:t>1.829 pedidos · 83,1%</a:t>
+            </a:r>
+          </a:p>
+        </p:txBody>
+      </p:sp>
+      <p:sp>
+        <p:nvSpPr>
+          <p:cNvPr id="15" name="Rounded Rectangle 14"/>
+          <p:cNvSpPr/>
+          <p:nvPr/>
+        </p:nvSpPr>
+        <p:spPr>
+          <a:xfrm>
+            <a:off x="3822191" y="3273551"/>
+            <a:ext cx="7406640" cy="128016"/>
+          </a:xfrm>
+          <a:prstGeom prst="roundRect">
+            <a:avLst>
+              <a:gd name="adj" fmla="val 50000"/>
+            </a:avLst>
+          </a:prstGeom>
+          <a:solidFill>
+            <a:srgbClr val="14243A"/>
+          </a:solidFill>
+          <a:ln>
+            <a:noFill/>
+          </a:ln>
+          <a:effectLst/>
+        </p:spPr>
+        <p:style>
+          <a:lnRef idx="1">
+            <a:schemeClr val="accent1"/>
+          </a:lnRef>
+          <a:fillRef idx="3">
+            <a:schemeClr val="accent1"/>
+          </a:fillRef>
+          <a:effectRef idx="2">
+            <a:schemeClr val="accent1"/>
+          </a:effectRef>
+          <a:fontRef idx="minor">
+            <a:schemeClr val="lt1"/>
+          </a:fontRef>
+        </p:style>
+        <p:txBody>
+          <a:bodyPr rtlCol="0" anchor="ctr"/>
+          <a:lstStyle/>
+          <a:p>
+            <a:pPr algn="ctr"/>
+          </a:p>
+        </p:txBody>
+      </p:sp>
+      <p:sp>
+        <p:nvSpPr>
+          <p:cNvPr id="16" name="Rounded Rectangle 15"/>
+          <p:cNvSpPr/>
+          <p:nvPr/>
+        </p:nvSpPr>
+        <p:spPr>
+          <a:xfrm>
+            <a:off x="3822191" y="3273551"/>
+            <a:ext cx="6154917" cy="128016"/>
+          </a:xfrm>
+          <a:prstGeom prst="roundRect">
+            <a:avLst>
+              <a:gd name="adj" fmla="val 50000"/>
+            </a:avLst>
+          </a:prstGeom>
+          <a:solidFill>
+            <a:srgbClr val="EE5A62"/>
+          </a:solidFill>
+          <a:ln>
+            <a:noFill/>
+          </a:ln>
+          <a:effectLst/>
+        </p:spPr>
+        <p:style>
+          <a:lnRef idx="1">
+            <a:schemeClr val="accent1"/>
+          </a:lnRef>
+          <a:fillRef idx="3">
+            <a:schemeClr val="accent1"/>
+          </a:fillRef>
+          <a:effectRef idx="2">
+            <a:schemeClr val="accent1"/>
+          </a:effectRef>
+          <a:fontRef idx="minor">
+            <a:schemeClr val="lt1"/>
+          </a:fontRef>
+        </p:style>
+        <p:txBody>
+          <a:bodyPr rtlCol="0" anchor="ctr"/>
+          <a:lstStyle/>
+          <a:p>
+            <a:pPr algn="ctr"/>
+          </a:p>
+        </p:txBody>
+      </p:sp>
+      <p:sp>
+        <p:nvSpPr>
+          <p:cNvPr id="17" name="Oval 16"/>
+          <p:cNvSpPr/>
+          <p:nvPr/>
+        </p:nvSpPr>
+        <p:spPr>
+          <a:xfrm>
+            <a:off x="3822191" y="3776472"/>
+            <a:ext cx="118872" cy="118872"/>
+          </a:xfrm>
+          <a:prstGeom prst="ellipse">
+            <a:avLst/>
+          </a:prstGeom>
+          <a:solidFill>
+            <a:srgbClr val="F4B64A"/>
+          </a:solidFill>
+          <a:ln>
+            <a:noFill/>
+          </a:ln>
+          <a:effectLst/>
+        </p:spPr>
+        <p:style>
+          <a:lnRef idx="1">
+            <a:schemeClr val="accent1"/>
+          </a:lnRef>
+          <a:fillRef idx="3">
+            <a:schemeClr val="accent1"/>
+          </a:fillRef>
+          <a:effectRef idx="2">
+            <a:schemeClr val="accent1"/>
+          </a:effectRef>
+          <a:fontRef idx="minor">
+            <a:schemeClr val="lt1"/>
+          </a:fontRef>
+        </p:style>
+        <p:txBody>
+          <a:bodyPr rtlCol="0" anchor="ctr"/>
+          <a:lstStyle/>
+          <a:p>
+            <a:pPr algn="ctr"/>
+          </a:p>
+        </p:txBody>
+      </p:sp>
+      <p:sp>
+        <p:nvSpPr>
+          <p:cNvPr id="18" name="TextBox 17"/>
+          <p:cNvSpPr txBox="1"/>
+          <p:nvPr/>
+        </p:nvSpPr>
+        <p:spPr>
+          <a:xfrm>
+            <a:off x="4059935" y="3703320"/>
+            <a:ext cx="2011680" cy="237744"/>
+          </a:xfrm>
+          <a:prstGeom prst="rect">
+            <a:avLst/>
+          </a:prstGeom>
+          <a:noFill/>
+        </p:spPr>
+        <p:txBody>
+          <a:bodyPr wrap="square" anchor="t" lIns="0" rIns="0" tIns="0" bIns="0">
+            <a:spAutoFit/>
+          </a:bodyPr>
+          <a:lstStyle/>
+          <a:p>
+            <a:pPr algn="l"/>
+            <a:r>
+              <a:rPr sz="1250" b="1" i="0">
+                <a:solidFill>
+                  <a:srgbClr val="FFFFFF"/>
+                </a:solidFill>
+                <a:latin typeface="Aptos"/>
+              </a:rPr>
+              <a:t>Neutro</a:t>
+            </a:r>
+          </a:p>
+        </p:txBody>
+      </p:sp>
+      <p:sp>
+        <p:nvSpPr>
+          <p:cNvPr id="19" name="TextBox 18"/>
+          <p:cNvSpPr txBox="1"/>
+          <p:nvPr/>
+        </p:nvSpPr>
+        <p:spPr>
+          <a:xfrm>
+            <a:off x="8485632" y="3703320"/>
+            <a:ext cx="2743200" cy="237744"/>
+          </a:xfrm>
+          <a:prstGeom prst="rect">
+            <a:avLst/>
+          </a:prstGeom>
+          <a:noFill/>
+        </p:spPr>
+        <p:txBody>
+          <a:bodyPr wrap="square" anchor="t" lIns="0" rIns="0" tIns="0" bIns="0">
+            <a:spAutoFit/>
+          </a:bodyPr>
+          <a:lstStyle/>
+          <a:p>
+            <a:pPr algn="r"/>
+            <a:r>
+              <a:rPr sz="1080" b="0" i="0">
+                <a:solidFill>
+                  <a:srgbClr val="A6B4C6"/>
+                </a:solidFill>
+                <a:latin typeface="Aptos"/>
+              </a:rPr>
+              <a:t>267 pedidos · 12,1%</a:t>
+            </a:r>
+          </a:p>
+        </p:txBody>
+      </p:sp>
+      <p:sp>
+        <p:nvSpPr>
+          <p:cNvPr id="20" name="Rounded Rectangle 19"/>
+          <p:cNvSpPr/>
+          <p:nvPr/>
+        </p:nvSpPr>
+        <p:spPr>
+          <a:xfrm>
+            <a:off x="3822191" y="4059936"/>
+            <a:ext cx="7406640" cy="128016"/>
+          </a:xfrm>
+          <a:prstGeom prst="roundRect">
+            <a:avLst>
+              <a:gd name="adj" fmla="val 50000"/>
+            </a:avLst>
+          </a:prstGeom>
+          <a:solidFill>
+            <a:srgbClr val="14243A"/>
+          </a:solidFill>
+          <a:ln>
+            <a:noFill/>
+          </a:ln>
+          <a:effectLst/>
+        </p:spPr>
+        <p:style>
+          <a:lnRef idx="1">
+            <a:schemeClr val="accent1"/>
+          </a:lnRef>
+          <a:fillRef idx="3">
+            <a:schemeClr val="accent1"/>
+          </a:fillRef>
+          <a:effectRef idx="2">
+            <a:schemeClr val="accent1"/>
+          </a:effectRef>
+          <a:fontRef idx="minor">
+            <a:schemeClr val="lt1"/>
+          </a:fontRef>
+        </p:style>
+        <p:txBody>
+          <a:bodyPr rtlCol="0" anchor="ctr"/>
+          <a:lstStyle/>
+          <a:p>
+            <a:pPr algn="ctr"/>
+          </a:p>
+        </p:txBody>
+      </p:sp>
+      <p:sp>
+        <p:nvSpPr>
+          <p:cNvPr id="21" name="Rounded Rectangle 20"/>
+          <p:cNvSpPr/>
+          <p:nvPr/>
+        </p:nvSpPr>
+        <p:spPr>
+          <a:xfrm>
+            <a:off x="3822191" y="4059936"/>
+            <a:ext cx="896203" cy="128016"/>
+          </a:xfrm>
+          <a:prstGeom prst="roundRect">
+            <a:avLst>
+              <a:gd name="adj" fmla="val 50000"/>
+            </a:avLst>
+          </a:prstGeom>
+          <a:solidFill>
+            <a:srgbClr val="F4B64A"/>
+          </a:solidFill>
+          <a:ln>
+            <a:noFill/>
+          </a:ln>
+          <a:effectLst/>
+        </p:spPr>
+        <p:style>
+          <a:lnRef idx="1">
+            <a:schemeClr val="accent1"/>
+          </a:lnRef>
+          <a:fillRef idx="3">
+            <a:schemeClr val="accent1"/>
+          </a:fillRef>
+          <a:effectRef idx="2">
+            <a:schemeClr val="accent1"/>
+          </a:effectRef>
+          <a:fontRef idx="minor">
+            <a:schemeClr val="lt1"/>
+          </a:fontRef>
+        </p:style>
+        <p:txBody>
+          <a:bodyPr rtlCol="0" anchor="ctr"/>
+          <a:lstStyle/>
+          <a:p>
+            <a:pPr algn="ctr"/>
+          </a:p>
+        </p:txBody>
+      </p:sp>
+      <p:sp>
+        <p:nvSpPr>
+          <p:cNvPr id="22" name="Oval 21"/>
+          <p:cNvSpPr/>
+          <p:nvPr/>
+        </p:nvSpPr>
+        <p:spPr>
+          <a:xfrm>
+            <a:off x="3822191" y="4562856"/>
+            <a:ext cx="118872" cy="118872"/>
+          </a:xfrm>
+          <a:prstGeom prst="ellipse">
+            <a:avLst/>
+          </a:prstGeom>
+          <a:solidFill>
+            <a:srgbClr val="27A77A"/>
+          </a:solidFill>
+          <a:ln>
+            <a:noFill/>
+          </a:ln>
+          <a:effectLst/>
+        </p:spPr>
+        <p:style>
+          <a:lnRef idx="1">
+            <a:schemeClr val="accent1"/>
+          </a:lnRef>
+          <a:fillRef idx="3">
+            <a:schemeClr val="accent1"/>
+          </a:fillRef>
+          <a:effectRef idx="2">
+            <a:schemeClr val="accent1"/>
+          </a:effectRef>
+          <a:fontRef idx="minor">
+            <a:schemeClr val="lt1"/>
+          </a:fontRef>
+        </p:style>
+        <p:txBody>
+          <a:bodyPr rtlCol="0" anchor="ctr"/>
+          <a:lstStyle/>
+          <a:p>
+            <a:pPr algn="ctr"/>
+          </a:p>
+        </p:txBody>
+      </p:sp>
+      <p:sp>
+        <p:nvSpPr>
+          <p:cNvPr id="23" name="TextBox 22"/>
+          <p:cNvSpPr txBox="1"/>
+          <p:nvPr/>
+        </p:nvSpPr>
+        <p:spPr>
+          <a:xfrm>
+            <a:off x="4059935" y="4489704"/>
+            <a:ext cx="2011680" cy="237744"/>
+          </a:xfrm>
+          <a:prstGeom prst="rect">
+            <a:avLst/>
+          </a:prstGeom>
+          <a:noFill/>
+        </p:spPr>
+        <p:txBody>
+          <a:bodyPr wrap="square" anchor="t" lIns="0" rIns="0" tIns="0" bIns="0">
+            <a:spAutoFit/>
+          </a:bodyPr>
+          <a:lstStyle/>
+          <a:p>
+            <a:pPr algn="l"/>
+            <a:r>
+              <a:rPr sz="1250" b="1" i="0">
+                <a:solidFill>
+                  <a:srgbClr val="FFFFFF"/>
+                </a:solidFill>
+                <a:latin typeface="Aptos"/>
+              </a:rPr>
+              <a:t>Promotor</a:t>
+            </a:r>
+          </a:p>
+        </p:txBody>
+      </p:sp>
+      <p:sp>
+        <p:nvSpPr>
+          <p:cNvPr id="24" name="TextBox 23"/>
+          <p:cNvSpPr txBox="1"/>
+          <p:nvPr/>
+        </p:nvSpPr>
+        <p:spPr>
+          <a:xfrm>
+            <a:off x="8485632" y="4489704"/>
+            <a:ext cx="2743200" cy="237744"/>
+          </a:xfrm>
+          <a:prstGeom prst="rect">
+            <a:avLst/>
+          </a:prstGeom>
+          <a:noFill/>
+        </p:spPr>
+        <p:txBody>
+          <a:bodyPr wrap="square" anchor="t" lIns="0" rIns="0" tIns="0" bIns="0">
+            <a:spAutoFit/>
+          </a:bodyPr>
+          <a:lstStyle/>
+          <a:p>
+            <a:pPr algn="r"/>
+            <a:r>
+              <a:rPr sz="1080" b="0" i="0">
+                <a:solidFill>
+                  <a:srgbClr val="A6B4C6"/>
+                </a:solidFill>
+                <a:latin typeface="Aptos"/>
+              </a:rPr>
+              <a:t>106 pedidos · 4,8%</a:t>
+            </a:r>
+          </a:p>
+        </p:txBody>
+      </p:sp>
+      <p:sp>
+        <p:nvSpPr>
+          <p:cNvPr id="25" name="Rounded Rectangle 24"/>
+          <p:cNvSpPr/>
+          <p:nvPr/>
+        </p:nvSpPr>
+        <p:spPr>
+          <a:xfrm>
+            <a:off x="3822191" y="4846320"/>
+            <a:ext cx="7406640" cy="128016"/>
+          </a:xfrm>
+          <a:prstGeom prst="roundRect">
+            <a:avLst>
+              <a:gd name="adj" fmla="val 50000"/>
+            </a:avLst>
+          </a:prstGeom>
+          <a:solidFill>
+            <a:srgbClr val="14243A"/>
+          </a:solidFill>
+          <a:ln>
+            <a:noFill/>
+          </a:ln>
+          <a:effectLst/>
+        </p:spPr>
+        <p:style>
+          <a:lnRef idx="1">
+            <a:schemeClr val="accent1"/>
+          </a:lnRef>
+          <a:fillRef idx="3">
+            <a:schemeClr val="accent1"/>
+          </a:fillRef>
+          <a:effectRef idx="2">
+            <a:schemeClr val="accent1"/>
+          </a:effectRef>
+          <a:fontRef idx="minor">
+            <a:schemeClr val="lt1"/>
+          </a:fontRef>
+        </p:style>
+        <p:txBody>
+          <a:bodyPr rtlCol="0" anchor="ctr"/>
+          <a:lstStyle/>
+          <a:p>
+            <a:pPr algn="ctr"/>
+          </a:p>
+        </p:txBody>
+      </p:sp>
+      <p:sp>
+        <p:nvSpPr>
+          <p:cNvPr id="26" name="Rounded Rectangle 25"/>
+          <p:cNvSpPr/>
+          <p:nvPr/>
+        </p:nvSpPr>
+        <p:spPr>
+          <a:xfrm>
+            <a:off x="3822191" y="4846320"/>
+            <a:ext cx="355518" cy="128016"/>
+          </a:xfrm>
+          <a:prstGeom prst="roundRect">
+            <a:avLst>
+              <a:gd name="adj" fmla="val 50000"/>
+            </a:avLst>
+          </a:prstGeom>
+          <a:solidFill>
+            <a:srgbClr val="27A77A"/>
+          </a:solidFill>
+          <a:ln>
+            <a:noFill/>
+          </a:ln>
+          <a:effectLst/>
+        </p:spPr>
+        <p:style>
+          <a:lnRef idx="1">
+            <a:schemeClr val="accent1"/>
+          </a:lnRef>
+          <a:fillRef idx="3">
+            <a:schemeClr val="accent1"/>
+          </a:fillRef>
+          <a:effectRef idx="2">
+            <a:schemeClr val="accent1"/>
+          </a:effectRef>
+          <a:fontRef idx="minor">
+            <a:schemeClr val="lt1"/>
+          </a:fontRef>
+        </p:style>
+        <p:txBody>
+          <a:bodyPr rtlCol="0" anchor="ctr"/>
+          <a:lstStyle/>
+          <a:p>
+            <a:pPr algn="ctr"/>
+          </a:p>
+        </p:txBody>
+      </p:sp>
+      <p:cxnSp>
+        <p:nvCxnSpPr>
+          <p:cNvPr id="27" name="Connector 26"/>
+          <p:cNvCxnSpPr/>
+          <p:nvPr/>
+        </p:nvCxnSpPr>
+        <p:spPr>
+          <a:xfrm>
+            <a:off x="3822191" y="5349240"/>
+            <a:ext cx="7406641" cy="0"/>
+          </a:xfrm>
+          <a:prstGeom prst="line">
+            <a:avLst/>
+          </a:prstGeom>
+          <a:ln w="9525">
+            <a:solidFill>
+              <a:srgbClr val="263951"/>
+            </a:solidFill>
+          </a:ln>
+          <a:effectLst/>
+        </p:spPr>
+        <p:style>
+          <a:lnRef idx="2">
+            <a:schemeClr val="accent1"/>
+          </a:lnRef>
+          <a:fillRef idx="0">
+            <a:schemeClr val="accent1"/>
+          </a:fillRef>
+          <a:effectRef idx="1">
+            <a:schemeClr val="accent1"/>
+          </a:effectRef>
+          <a:fontRef idx="minor">
+            <a:schemeClr val="tx1"/>
+          </a:fontRef>
+        </p:style>
+      </p:cxnSp>
+      <p:sp>
+        <p:nvSpPr>
+          <p:cNvPr id="28" name="TextBox 27"/>
+          <p:cNvSpPr txBox="1"/>
+          <p:nvPr/>
+        </p:nvSpPr>
+        <p:spPr>
+          <a:xfrm>
+            <a:off x="3822191" y="5486400"/>
+            <a:ext cx="7406640" cy="457200"/>
+          </a:xfrm>
+          <a:prstGeom prst="rect">
+            <a:avLst/>
+          </a:prstGeom>
+          <a:noFill/>
+        </p:spPr>
+        <p:txBody>
+          <a:bodyPr wrap="square" anchor="t" lIns="0" rIns="0" tIns="0" bIns="0">
+            <a:spAutoFit/>
+          </a:bodyPr>
+          <a:lstStyle/>
+          <a:p>
+            <a:pPr algn="l"/>
+            <a:r>
+              <a:rPr sz="1120" b="1" i="0">
+                <a:solidFill>
+                  <a:srgbClr val="87E5F2"/>
+                </a:solidFill>
+                <a:latin typeface="Aptos"/>
+              </a:rPr>
+              <a:t>NPS médio: </a:t>
+            </a:r>
+            <a:r>
+              <a:rPr sz="1120" b="1" i="0">
+                <a:solidFill>
+                  <a:srgbClr val="FFFFFF"/>
+                </a:solidFill>
+                <a:latin typeface="Aptos"/>
+              </a:rPr>
+              <a:t>4,55</a:t>
+            </a:r>
+            <a:r>
+              <a:rPr sz="1120" b="0" i="0">
+                <a:solidFill>
+                  <a:srgbClr val="A6B4C6"/>
+                </a:solidFill>
+                <a:latin typeface="Aptos"/>
+              </a:rPr>
+              <a:t>   ·   mediana: </a:t>
+            </a:r>
+            <a:r>
+              <a:rPr sz="1120" b="1" i="0">
+                <a:solidFill>
+                  <a:srgbClr val="FFFFFF"/>
+                </a:solidFill>
+                <a:latin typeface="Aptos"/>
+              </a:rPr>
+              <a:t>4,60</a:t>
+            </a:r>
+            <a:r>
+              <a:rPr sz="1120" b="0" i="0">
+                <a:solidFill>
+                  <a:srgbClr val="A6B4C6"/>
+                </a:solidFill>
+                <a:latin typeface="Aptos"/>
+              </a:rPr>
+              <a:t>   ·   escala 0–10</a:t>
+            </a:r>
+          </a:p>
+        </p:txBody>
+      </p:sp>
+      <p:sp>
+        <p:nvSpPr>
+          <p:cNvPr id="29" name="TextBox 28"/>
+          <p:cNvSpPr txBox="1"/>
+          <p:nvPr/>
+        </p:nvSpPr>
+        <p:spPr>
+          <a:xfrm>
+            <a:off x="658368" y="6501384"/>
+            <a:ext cx="3749039" cy="164592"/>
+          </a:xfrm>
+          <a:prstGeom prst="rect">
+            <a:avLst/>
+          </a:prstGeom>
+          <a:noFill/>
+        </p:spPr>
+        <p:txBody>
+          <a:bodyPr wrap="square" anchor="t" lIns="0" rIns="0" tIns="0" bIns="0">
+            <a:spAutoFit/>
+          </a:bodyPr>
+          <a:lstStyle/>
+          <a:p>
+            <a:pPr algn="l"/>
+            <a:r>
+              <a:rPr sz="850" b="0" i="0">
+                <a:solidFill>
+                  <a:srgbClr val="718399"/>
+                </a:solidFill>
+                <a:latin typeface="Aptos"/>
+              </a:rPr>
+              <a:t>NPS Preditivo  ·  Tech Challenge Fase 1</a:t>
+            </a:r>
+          </a:p>
+        </p:txBody>
+      </p:sp>
+      <p:sp>
+        <p:nvSpPr>
+          <p:cNvPr id="30" name="TextBox 29"/>
+          <p:cNvSpPr txBox="1"/>
+          <p:nvPr/>
+        </p:nvSpPr>
+        <p:spPr>
+          <a:xfrm>
+            <a:off x="11137392" y="6473952"/>
+            <a:ext cx="384048" cy="164592"/>
+          </a:xfrm>
+          <a:prstGeom prst="rect">
+            <a:avLst/>
+          </a:prstGeom>
+          <a:noFill/>
+        </p:spPr>
+        <p:txBody>
+          <a:bodyPr wrap="square" anchor="t" lIns="0" rIns="0" tIns="0" bIns="0">
+            <a:spAutoFit/>
+          </a:bodyPr>
+          <a:lstStyle/>
+          <a:p>
+            <a:pPr algn="r"/>
+            <a:r>
+              <a:rPr sz="850" b="0" i="0">
+                <a:solidFill>
+                  <a:srgbClr val="718399"/>
+                </a:solidFill>
+                <a:latin typeface="Aptos"/>
+              </a:rPr>
+              <a:t>05</a:t>
+            </a:r>
+          </a:p>
+        </p:txBody>
+      </p:sp>
+    </p:spTree>
+  </p:cSld>
+  <p:clrMapOvr>
+    <a:masterClrMapping/>
+  </p:clrMapOvr>
+</p:sld>
+</file>
+
+<file path=ppt/slides/slide6.xml><?xml version="1.0" encoding="utf-8"?>
+<p:sld xmlns:a="http://schemas.openxmlformats.org/drawingml/2006/main" xmlns:p="http://schemas.openxmlformats.org/presentationml/2006/main" xmlns:r="http://schemas.openxmlformats.org/officeDocument/2006/relationships">
+  <p:cSld>
+    <p:bg>
+      <p:bgPr>
+        <a:solidFill>
+          <a:srgbClr val="F5F6F8"/>
+        </a:solidFill>
+        <a:effectLst/>
+      </p:bgPr>
+    </p:bg>
+    <p:spTree>
+      <p:nvGrpSpPr>
+        <p:cNvPr id="1" name=""/>
+        <p:cNvGrpSpPr/>
+        <p:nvPr/>
+      </p:nvGrpSpPr>
+      <p:grpSpPr/>
+      <p:sp>
+        <p:nvSpPr>
+          <p:cNvPr id="2" name="TextBox 1"/>
+          <p:cNvSpPr txBox="1"/>
+          <p:nvPr/>
+        </p:nvSpPr>
+        <p:spPr>
+          <a:xfrm>
+            <a:off x="658368" y="384048"/>
+            <a:ext cx="5943600" cy="201168"/>
+          </a:xfrm>
+          <a:prstGeom prst="rect">
+            <a:avLst/>
+          </a:prstGeom>
+          <a:noFill/>
+        </p:spPr>
+        <p:txBody>
+          <a:bodyPr wrap="square" anchor="t" lIns="0" rIns="0" tIns="0" bIns="0">
+            <a:spAutoFit/>
+          </a:bodyPr>
+          <a:lstStyle/>
+          <a:p>
+            <a:pPr algn="l"/>
+            <a:r>
+              <a:rPr sz="950" b="1" i="0">
+                <a:solidFill>
+                  <a:srgbClr val="25C7E5"/>
+                </a:solidFill>
+                <a:latin typeface="Aptos"/>
+              </a:rPr>
+              <a:t>PARTE 3 · FATORES CRÍTICOS</a:t>
+            </a:r>
+          </a:p>
+        </p:txBody>
+      </p:sp>
+      <p:sp>
+        <p:nvSpPr>
+          <p:cNvPr id="3" name="TextBox 2"/>
+          <p:cNvSpPr txBox="1"/>
+          <p:nvPr/>
+        </p:nvSpPr>
+        <p:spPr>
+          <a:xfrm>
+            <a:off x="658368" y="786384"/>
+            <a:ext cx="10881360" cy="749808"/>
+          </a:xfrm>
+          <a:prstGeom prst="rect">
+            <a:avLst/>
+          </a:prstGeom>
+          <a:noFill/>
+        </p:spPr>
+        <p:txBody>
+          <a:bodyPr wrap="square" anchor="t" lIns="0" rIns="0" tIns="0" bIns="0">
+            <a:spAutoFit/>
+          </a:bodyPr>
+          <a:lstStyle/>
+          <a:p>
+            <a:pPr algn="l">
+              <a:lnSpc>
+                <a:spcPct val="102000"/>
+              </a:lnSpc>
+            </a:pPr>
+            <a:r>
+              <a:rPr sz="2900" b="1" i="0">
+                <a:solidFill>
+                  <a:srgbClr val="111827"/>
+                </a:solidFill>
+                <a:latin typeface="Aptos Display"/>
+              </a:rPr>
+              <a:t>Entrega no prazo é o fator com maior peso no NPS.</a:t>
+            </a:r>
+          </a:p>
+        </p:txBody>
+      </p:sp>
+      <p:sp>
+        <p:nvSpPr>
+          <p:cNvPr id="4" name="TextBox 3"/>
+          <p:cNvSpPr txBox="1"/>
+          <p:nvPr/>
+        </p:nvSpPr>
+        <p:spPr>
+          <a:xfrm>
+            <a:off x="658368" y="1572768"/>
+            <a:ext cx="10607040" cy="365760"/>
+          </a:xfrm>
+          <a:prstGeom prst="rect">
+            <a:avLst/>
+          </a:prstGeom>
+          <a:noFill/>
+        </p:spPr>
+        <p:txBody>
+          <a:bodyPr wrap="square" anchor="t" lIns="0" rIns="0" tIns="0" bIns="0">
+            <a:spAutoFit/>
+          </a:bodyPr>
+          <a:lstStyle/>
+          <a:p>
+            <a:pPr algn="l"/>
+            <a:r>
+              <a:rPr sz="1210" b="0" i="0">
+                <a:solidFill>
+                  <a:srgbClr val="667085"/>
+                </a:solidFill>
+                <a:latin typeface="Aptos"/>
+              </a:rPr>
+              <a:t>Correlação de cada variável operacional com o NPS Score, sobre os 2.202 pedidos tratados.</a:t>
+            </a:r>
+          </a:p>
+        </p:txBody>
+      </p:sp>
+      <p:sp>
+        <p:nvSpPr>
+          <p:cNvPr id="5" name="Oval 4"/>
+          <p:cNvSpPr/>
+          <p:nvPr/>
+        </p:nvSpPr>
+        <p:spPr>
+          <a:xfrm>
+            <a:off x="832104" y="2039112"/>
+            <a:ext cx="493776" cy="493776"/>
+          </a:xfrm>
+          <a:prstGeom prst="ellipse">
+            <a:avLst/>
+          </a:prstGeom>
+          <a:solidFill>
+            <a:srgbClr val="25C7E5"/>
+          </a:solidFill>
+          <a:ln>
+            <a:noFill/>
+          </a:ln>
+          <a:effectLst/>
+        </p:spPr>
+        <p:style>
+          <a:lnRef idx="1">
+            <a:schemeClr val="accent1"/>
+          </a:lnRef>
+          <a:fillRef idx="3">
+            <a:schemeClr val="accent1"/>
+          </a:fillRef>
+          <a:effectRef idx="2">
+            <a:schemeClr val="accent1"/>
+          </a:effectRef>
+          <a:fontRef idx="minor">
+            <a:schemeClr val="lt1"/>
+          </a:fontRef>
+        </p:style>
+        <p:txBody>
+          <a:bodyPr rtlCol="0" anchor="ctr"/>
+          <a:lstStyle/>
+          <a:p>
+            <a:pPr algn="ctr"/>
+          </a:p>
+        </p:txBody>
+      </p:sp>
+      <p:sp>
+        <p:nvSpPr>
+          <p:cNvPr id="6" name="TextBox 5"/>
+          <p:cNvSpPr txBox="1"/>
+          <p:nvPr/>
+        </p:nvSpPr>
+        <p:spPr>
+          <a:xfrm>
+            <a:off x="832104" y="2130552"/>
+            <a:ext cx="493776" cy="256032"/>
+          </a:xfrm>
+          <a:prstGeom prst="rect">
+            <a:avLst/>
+          </a:prstGeom>
+          <a:noFill/>
+        </p:spPr>
+        <p:txBody>
+          <a:bodyPr wrap="square" anchor="t" lIns="0" rIns="0" tIns="0" bIns="0">
+            <a:spAutoFit/>
+          </a:bodyPr>
+          <a:lstStyle/>
+          <a:p>
+            <a:pPr algn="ctr"/>
+            <a:r>
+              <a:rPr sz="1080" b="1" i="0">
+                <a:solidFill>
+                  <a:srgbClr val="091220"/>
+                </a:solidFill>
+                <a:latin typeface="Aptos"/>
+              </a:rPr>
+              <a:t>01</a:t>
+            </a:r>
+          </a:p>
+        </p:txBody>
+      </p:sp>
+      <p:sp>
+        <p:nvSpPr>
+          <p:cNvPr id="7" name="TextBox 6"/>
+          <p:cNvSpPr txBox="1"/>
+          <p:nvPr/>
+        </p:nvSpPr>
+        <p:spPr>
+          <a:xfrm>
+            <a:off x="1572768" y="2121408"/>
+            <a:ext cx="5623560" cy="310896"/>
+          </a:xfrm>
+          <a:prstGeom prst="rect">
+            <a:avLst/>
+          </a:prstGeom>
+          <a:noFill/>
+        </p:spPr>
+        <p:txBody>
+          <a:bodyPr wrap="square" anchor="t" lIns="0" rIns="0" tIns="0" bIns="0">
+            <a:spAutoFit/>
+          </a:bodyPr>
+          <a:lstStyle/>
+          <a:p>
+            <a:pPr algn="l"/>
+            <a:r>
+              <a:rPr sz="1720" b="1" i="0">
+                <a:solidFill>
+                  <a:srgbClr val="111827"/>
+                </a:solidFill>
+                <a:latin typeface="Aptos Display"/>
+              </a:rPr>
+              <a:t>Atraso na entrega</a:t>
+            </a:r>
+          </a:p>
+        </p:txBody>
+      </p:sp>
+      <p:sp>
+        <p:nvSpPr>
+          <p:cNvPr id="8" name="TextBox 7"/>
+          <p:cNvSpPr txBox="1"/>
+          <p:nvPr/>
+        </p:nvSpPr>
+        <p:spPr>
+          <a:xfrm>
+            <a:off x="1572768" y="2487168"/>
+            <a:ext cx="5532120" cy="219456"/>
+          </a:xfrm>
+          <a:prstGeom prst="rect">
+            <a:avLst/>
+          </a:prstGeom>
+          <a:noFill/>
+        </p:spPr>
+        <p:txBody>
+          <a:bodyPr wrap="square" anchor="t" lIns="0" rIns="0" tIns="0" bIns="0">
+            <a:spAutoFit/>
+          </a:bodyPr>
+          <a:lstStyle/>
+          <a:p>
+            <a:pPr algn="l"/>
+            <a:r>
+              <a:rPr sz="1060" b="0" i="0">
+                <a:solidFill>
+                  <a:srgbClr val="667085"/>
+                </a:solidFill>
+                <a:latin typeface="Aptos"/>
+              </a:rPr>
+              <a:t>correlação − 0,578 · quanto maior o atraso, menor o NPS</a:t>
+            </a:r>
+          </a:p>
+        </p:txBody>
+      </p:sp>
+      <p:sp>
+        <p:nvSpPr>
+          <p:cNvPr id="9" name="Oval 8"/>
+          <p:cNvSpPr/>
+          <p:nvPr/>
+        </p:nvSpPr>
+        <p:spPr>
+          <a:xfrm>
+            <a:off x="832104" y="2871216"/>
+            <a:ext cx="493776" cy="493776"/>
+          </a:xfrm>
+          <a:prstGeom prst="ellipse">
+            <a:avLst/>
+          </a:prstGeom>
+          <a:solidFill>
+            <a:srgbClr val="FFFFFF"/>
+          </a:solidFill>
+          <a:ln w="12700">
+            <a:solidFill>
+              <a:srgbClr val="D8DEE8"/>
+            </a:solidFill>
+          </a:ln>
+          <a:effectLst/>
+        </p:spPr>
+        <p:style>
+          <a:lnRef idx="1">
+            <a:schemeClr val="accent1"/>
+          </a:lnRef>
+          <a:fillRef idx="3">
+            <a:schemeClr val="accent1"/>
+          </a:fillRef>
+          <a:effectRef idx="2">
+            <a:schemeClr val="accent1"/>
+          </a:effectRef>
+          <a:fontRef idx="minor">
+            <a:schemeClr val="lt1"/>
+          </a:fontRef>
+        </p:style>
+        <p:txBody>
+          <a:bodyPr rtlCol="0" anchor="ctr"/>
+          <a:lstStyle/>
+          <a:p>
+            <a:pPr algn="ctr"/>
+          </a:p>
+        </p:txBody>
+      </p:sp>
+      <p:sp>
+        <p:nvSpPr>
+          <p:cNvPr id="10" name="TextBox 9"/>
+          <p:cNvSpPr txBox="1"/>
+          <p:nvPr/>
+        </p:nvSpPr>
+        <p:spPr>
+          <a:xfrm>
+            <a:off x="832104" y="2962656"/>
+            <a:ext cx="493776" cy="256032"/>
+          </a:xfrm>
+          <a:prstGeom prst="rect">
+            <a:avLst/>
+          </a:prstGeom>
+          <a:noFill/>
+        </p:spPr>
+        <p:txBody>
+          <a:bodyPr wrap="square" anchor="t" lIns="0" rIns="0" tIns="0" bIns="0">
+            <a:spAutoFit/>
+          </a:bodyPr>
+          <a:lstStyle/>
+          <a:p>
+            <a:pPr algn="ctr"/>
+            <a:r>
+              <a:rPr sz="1080" b="1" i="0">
+                <a:solidFill>
+                  <a:srgbClr val="667085"/>
+                </a:solidFill>
+                <a:latin typeface="Aptos"/>
+              </a:rPr>
+              <a:t>02</a:t>
+            </a:r>
+          </a:p>
+        </p:txBody>
+      </p:sp>
+      <p:sp>
+        <p:nvSpPr>
+          <p:cNvPr id="11" name="TextBox 10"/>
+          <p:cNvSpPr txBox="1"/>
+          <p:nvPr/>
+        </p:nvSpPr>
+        <p:spPr>
+          <a:xfrm>
+            <a:off x="1572768" y="2953512"/>
+            <a:ext cx="5623560" cy="310896"/>
+          </a:xfrm>
+          <a:prstGeom prst="rect">
+            <a:avLst/>
+          </a:prstGeom>
+          <a:noFill/>
+        </p:spPr>
+        <p:txBody>
+          <a:bodyPr wrap="square" anchor="t" lIns="0" rIns="0" tIns="0" bIns="0">
+            <a:spAutoFit/>
+          </a:bodyPr>
+          <a:lstStyle/>
+          <a:p>
+            <a:pPr algn="l"/>
+            <a:r>
+              <a:rPr sz="1720" b="1" i="0">
+                <a:solidFill>
+                  <a:srgbClr val="111827"/>
+                </a:solidFill>
+                <a:latin typeface="Aptos Display"/>
+              </a:rPr>
+              <a:t>Recompra em 30 dias</a:t>
+            </a:r>
+          </a:p>
+        </p:txBody>
+      </p:sp>
+      <p:sp>
+        <p:nvSpPr>
+          <p:cNvPr id="12" name="TextBox 11"/>
+          <p:cNvSpPr txBox="1"/>
+          <p:nvPr/>
+        </p:nvSpPr>
+        <p:spPr>
+          <a:xfrm>
+            <a:off x="1572768" y="3319272"/>
+            <a:ext cx="5532120" cy="219456"/>
+          </a:xfrm>
+          <a:prstGeom prst="rect">
+            <a:avLst/>
+          </a:prstGeom>
+          <a:noFill/>
+        </p:spPr>
+        <p:txBody>
+          <a:bodyPr wrap="square" anchor="t" lIns="0" rIns="0" tIns="0" bIns="0">
+            <a:spAutoFit/>
+          </a:bodyPr>
+          <a:lstStyle/>
+          <a:p>
+            <a:pPr algn="l"/>
+            <a:r>
+              <a:rPr sz="1060" b="0" i="0">
+                <a:solidFill>
+                  <a:srgbClr val="667085"/>
+                </a:solidFill>
+                <a:latin typeface="Aptos"/>
+              </a:rPr>
+              <a:t>correlação + 0,578 · cliente satisfeito volta a comprar</a:t>
+            </a:r>
+          </a:p>
+        </p:txBody>
+      </p:sp>
+      <p:sp>
+        <p:nvSpPr>
+          <p:cNvPr id="13" name="Oval 12"/>
+          <p:cNvSpPr/>
+          <p:nvPr/>
+        </p:nvSpPr>
+        <p:spPr>
+          <a:xfrm>
+            <a:off x="832104" y="3703320"/>
+            <a:ext cx="493776" cy="493776"/>
+          </a:xfrm>
+          <a:prstGeom prst="ellipse">
+            <a:avLst/>
+          </a:prstGeom>
+          <a:solidFill>
+            <a:srgbClr val="FFFFFF"/>
+          </a:solidFill>
+          <a:ln w="12700">
+            <a:solidFill>
+              <a:srgbClr val="D8DEE8"/>
+            </a:solidFill>
+          </a:ln>
+          <a:effectLst/>
+        </p:spPr>
+        <p:style>
+          <a:lnRef idx="1">
+            <a:schemeClr val="accent1"/>
+          </a:lnRef>
+          <a:fillRef idx="3">
+            <a:schemeClr val="accent1"/>
+          </a:fillRef>
+          <a:effectRef idx="2">
+            <a:schemeClr val="accent1"/>
+          </a:effectRef>
+          <a:fontRef idx="minor">
+            <a:schemeClr val="lt1"/>
+          </a:fontRef>
+        </p:style>
+        <p:txBody>
+          <a:bodyPr rtlCol="0" anchor="ctr"/>
+          <a:lstStyle/>
+          <a:p>
+            <a:pPr algn="ctr"/>
+          </a:p>
+        </p:txBody>
+      </p:sp>
+      <p:sp>
+        <p:nvSpPr>
+          <p:cNvPr id="14" name="TextBox 13"/>
+          <p:cNvSpPr txBox="1"/>
+          <p:nvPr/>
+        </p:nvSpPr>
+        <p:spPr>
+          <a:xfrm>
+            <a:off x="832104" y="3794759"/>
+            <a:ext cx="493776" cy="256032"/>
+          </a:xfrm>
+          <a:prstGeom prst="rect">
+            <a:avLst/>
+          </a:prstGeom>
+          <a:noFill/>
+        </p:spPr>
+        <p:txBody>
+          <a:bodyPr wrap="square" anchor="t" lIns="0" rIns="0" tIns="0" bIns="0">
+            <a:spAutoFit/>
+          </a:bodyPr>
+          <a:lstStyle/>
+          <a:p>
+            <a:pPr algn="ctr"/>
+            <a:r>
+              <a:rPr sz="1080" b="1" i="0">
+                <a:solidFill>
+                  <a:srgbClr val="667085"/>
+                </a:solidFill>
+                <a:latin typeface="Aptos"/>
+              </a:rPr>
+              <a:t>03</a:t>
+            </a:r>
+          </a:p>
+        </p:txBody>
+      </p:sp>
+      <p:sp>
+        <p:nvSpPr>
+          <p:cNvPr id="15" name="TextBox 14"/>
+          <p:cNvSpPr txBox="1"/>
+          <p:nvPr/>
+        </p:nvSpPr>
+        <p:spPr>
+          <a:xfrm>
+            <a:off x="1572768" y="3785615"/>
+            <a:ext cx="5623560" cy="310896"/>
+          </a:xfrm>
+          <a:prstGeom prst="rect">
+            <a:avLst/>
+          </a:prstGeom>
+          <a:noFill/>
+        </p:spPr>
+        <p:txBody>
+          <a:bodyPr wrap="square" anchor="t" lIns="0" rIns="0" tIns="0" bIns="0">
+            <a:spAutoFit/>
+          </a:bodyPr>
+          <a:lstStyle/>
+          <a:p>
+            <a:pPr algn="l"/>
+            <a:r>
+              <a:rPr sz="1720" b="1" i="0">
+                <a:solidFill>
+                  <a:srgbClr val="111827"/>
+                </a:solidFill>
+                <a:latin typeface="Aptos Display"/>
+              </a:rPr>
+              <a:t>CSAT interno</a:t>
+            </a:r>
+          </a:p>
+        </p:txBody>
+      </p:sp>
+      <p:sp>
+        <p:nvSpPr>
+          <p:cNvPr id="16" name="TextBox 15"/>
+          <p:cNvSpPr txBox="1"/>
+          <p:nvPr/>
+        </p:nvSpPr>
+        <p:spPr>
+          <a:xfrm>
+            <a:off x="1572768" y="4151376"/>
+            <a:ext cx="5532120" cy="219456"/>
+          </a:xfrm>
+          <a:prstGeom prst="rect">
+            <a:avLst/>
+          </a:prstGeom>
+          <a:noFill/>
+        </p:spPr>
+        <p:txBody>
+          <a:bodyPr wrap="square" anchor="t" lIns="0" rIns="0" tIns="0" bIns="0">
+            <a:spAutoFit/>
+          </a:bodyPr>
+          <a:lstStyle/>
+          <a:p>
+            <a:pPr algn="l"/>
+            <a:r>
+              <a:rPr sz="1060" b="0" i="0">
+                <a:solidFill>
+                  <a:srgbClr val="667085"/>
+                </a:solidFill>
+                <a:latin typeface="Aptos"/>
+              </a:rPr>
+              <a:t>correlação + 0,548 · a métrica interna confirma o NPS</a:t>
+            </a:r>
+          </a:p>
+        </p:txBody>
+      </p:sp>
+      <p:sp>
+        <p:nvSpPr>
+          <p:cNvPr id="17" name="Oval 16"/>
+          <p:cNvSpPr/>
+          <p:nvPr/>
+        </p:nvSpPr>
+        <p:spPr>
+          <a:xfrm>
+            <a:off x="832104" y="4535424"/>
+            <a:ext cx="493776" cy="493776"/>
+          </a:xfrm>
+          <a:prstGeom prst="ellipse">
+            <a:avLst/>
+          </a:prstGeom>
+          <a:solidFill>
+            <a:srgbClr val="FFFFFF"/>
+          </a:solidFill>
+          <a:ln w="12700">
+            <a:solidFill>
+              <a:srgbClr val="D8DEE8"/>
+            </a:solidFill>
+          </a:ln>
+          <a:effectLst/>
+        </p:spPr>
+        <p:style>
+          <a:lnRef idx="1">
+            <a:schemeClr val="accent1"/>
+          </a:lnRef>
+          <a:fillRef idx="3">
+            <a:schemeClr val="accent1"/>
+          </a:fillRef>
+          <a:effectRef idx="2">
+            <a:schemeClr val="accent1"/>
+          </a:effectRef>
+          <a:fontRef idx="minor">
+            <a:schemeClr val="lt1"/>
+          </a:fontRef>
+        </p:style>
+        <p:txBody>
+          <a:bodyPr rtlCol="0" anchor="ctr"/>
+          <a:lstStyle/>
+          <a:p>
+            <a:pPr algn="ctr"/>
+          </a:p>
+        </p:txBody>
+      </p:sp>
+      <p:sp>
+        <p:nvSpPr>
+          <p:cNvPr id="18" name="TextBox 17"/>
+          <p:cNvSpPr txBox="1"/>
+          <p:nvPr/>
+        </p:nvSpPr>
+        <p:spPr>
+          <a:xfrm>
+            <a:off x="832104" y="4626864"/>
+            <a:ext cx="493776" cy="256032"/>
+          </a:xfrm>
+          <a:prstGeom prst="rect">
+            <a:avLst/>
+          </a:prstGeom>
+          <a:noFill/>
+        </p:spPr>
+        <p:txBody>
+          <a:bodyPr wrap="square" anchor="t" lIns="0" rIns="0" tIns="0" bIns="0">
+            <a:spAutoFit/>
+          </a:bodyPr>
+          <a:lstStyle/>
+          <a:p>
+            <a:pPr algn="ctr"/>
+            <a:r>
+              <a:rPr sz="1080" b="1" i="0">
+                <a:solidFill>
+                  <a:srgbClr val="667085"/>
+                </a:solidFill>
+                <a:latin typeface="Aptos"/>
+              </a:rPr>
+              <a:t>04</a:t>
+            </a:r>
+          </a:p>
+        </p:txBody>
+      </p:sp>
+      <p:sp>
+        <p:nvSpPr>
+          <p:cNvPr id="19" name="TextBox 18"/>
+          <p:cNvSpPr txBox="1"/>
+          <p:nvPr/>
+        </p:nvSpPr>
+        <p:spPr>
+          <a:xfrm>
+            <a:off x="1572768" y="4617720"/>
+            <a:ext cx="5623560" cy="310896"/>
+          </a:xfrm>
+          <a:prstGeom prst="rect">
+            <a:avLst/>
+          </a:prstGeom>
+          <a:noFill/>
+        </p:spPr>
+        <p:txBody>
+          <a:bodyPr wrap="square" anchor="t" lIns="0" rIns="0" tIns="0" bIns="0">
+            <a:spAutoFit/>
+          </a:bodyPr>
+          <a:lstStyle/>
+          <a:p>
+            <a:pPr algn="l"/>
+            <a:r>
+              <a:rPr sz="1720" b="1" i="0">
+                <a:solidFill>
+                  <a:srgbClr val="111827"/>
+                </a:solidFill>
+                <a:latin typeface="Aptos Display"/>
+              </a:rPr>
+              <a:t>Reclamações registradas</a:t>
+            </a:r>
+          </a:p>
+        </p:txBody>
+      </p:sp>
+      <p:sp>
+        <p:nvSpPr>
+          <p:cNvPr id="20" name="TextBox 19"/>
+          <p:cNvSpPr txBox="1"/>
+          <p:nvPr/>
+        </p:nvSpPr>
+        <p:spPr>
+          <a:xfrm>
+            <a:off x="1572768" y="4983480"/>
+            <a:ext cx="5532120" cy="219456"/>
+          </a:xfrm>
+          <a:prstGeom prst="rect">
+            <a:avLst/>
+          </a:prstGeom>
+          <a:noFill/>
+        </p:spPr>
+        <p:txBody>
+          <a:bodyPr wrap="square" anchor="t" lIns="0" rIns="0" tIns="0" bIns="0">
+            <a:spAutoFit/>
+          </a:bodyPr>
+          <a:lstStyle/>
+          <a:p>
+            <a:pPr algn="l"/>
+            <a:r>
+              <a:rPr sz="1060" b="0" i="0">
+                <a:solidFill>
+                  <a:srgbClr val="667085"/>
+                </a:solidFill>
+                <a:latin typeface="Aptos"/>
+              </a:rPr>
+              <a:t>correlação − 0,507 · mais reclamações, nota mais baixa</a:t>
+            </a:r>
+          </a:p>
+        </p:txBody>
+      </p:sp>
+      <p:sp>
+        <p:nvSpPr>
+          <p:cNvPr id="21" name="Rounded Rectangle 20"/>
+          <p:cNvSpPr/>
+          <p:nvPr/>
+        </p:nvSpPr>
+        <p:spPr>
+          <a:xfrm>
+            <a:off x="7699248" y="2157984"/>
+            <a:ext cx="3794760" cy="3364992"/>
+          </a:xfrm>
+          <a:prstGeom prst="roundRect">
+            <a:avLst>
+              <a:gd name="adj" fmla="val 4500"/>
+            </a:avLst>
+          </a:prstGeom>
+          <a:solidFill>
+            <a:srgbClr val="091220"/>
+          </a:solidFill>
+          <a:ln>
+            <a:noFill/>
+          </a:ln>
+          <a:effectLst/>
+        </p:spPr>
+        <p:style>
+          <a:lnRef idx="1">
+            <a:schemeClr val="accent1"/>
+          </a:lnRef>
+          <a:fillRef idx="3">
+            <a:schemeClr val="accent1"/>
+          </a:fillRef>
+          <a:effectRef idx="2">
+            <a:schemeClr val="accent1"/>
+          </a:effectRef>
+          <a:fontRef idx="minor">
+            <a:schemeClr val="lt1"/>
+          </a:fontRef>
+        </p:style>
+        <p:txBody>
+          <a:bodyPr rtlCol="0" anchor="ctr"/>
+          <a:lstStyle/>
+          <a:p>
+            <a:pPr algn="ctr"/>
+          </a:p>
+        </p:txBody>
+      </p:sp>
+      <p:sp>
+        <p:nvSpPr>
+          <p:cNvPr id="22" name="TextBox 21"/>
+          <p:cNvSpPr txBox="1"/>
+          <p:nvPr/>
+        </p:nvSpPr>
+        <p:spPr>
+          <a:xfrm>
+            <a:off x="8010144" y="2487168"/>
+            <a:ext cx="3017520" cy="237744"/>
+          </a:xfrm>
+          <a:prstGeom prst="rect">
+            <a:avLst/>
+          </a:prstGeom>
+          <a:noFill/>
+        </p:spPr>
+        <p:txBody>
+          <a:bodyPr wrap="square" anchor="t" lIns="0" rIns="0" tIns="0" bIns="0">
+            <a:spAutoFit/>
+          </a:bodyPr>
+          <a:lstStyle/>
+          <a:p>
+            <a:pPr algn="l"/>
+            <a:r>
+              <a:rPr sz="940" b="1" i="0">
+                <a:solidFill>
+                  <a:srgbClr val="25C7E5"/>
+                </a:solidFill>
+                <a:latin typeface="Aptos"/>
+              </a:rPr>
+              <a:t>DETRATOR VS. NÃO-DETRATOR</a:t>
+            </a:r>
+          </a:p>
+        </p:txBody>
+      </p:sp>
+      <p:sp>
+        <p:nvSpPr>
+          <p:cNvPr id="23" name="TextBox 22"/>
+          <p:cNvSpPr txBox="1"/>
+          <p:nvPr/>
+        </p:nvSpPr>
+        <p:spPr>
+          <a:xfrm>
+            <a:off x="8010144" y="2944368"/>
+            <a:ext cx="1188720" cy="310896"/>
+          </a:xfrm>
+          <a:prstGeom prst="rect">
+            <a:avLst/>
+          </a:prstGeom>
+          <a:noFill/>
+        </p:spPr>
+        <p:txBody>
+          <a:bodyPr wrap="square" anchor="t" lIns="0" rIns="0" tIns="0" bIns="0">
+            <a:spAutoFit/>
+          </a:bodyPr>
+          <a:lstStyle/>
+          <a:p>
+            <a:pPr algn="l"/>
+            <a:r>
+              <a:rPr sz="1750" b="1" i="0">
+                <a:solidFill>
+                  <a:srgbClr val="EE5A62"/>
+                </a:solidFill>
+                <a:latin typeface="Aptos Display"/>
+              </a:rPr>
+              <a:t>+144,6%</a:t>
+            </a:r>
+          </a:p>
+        </p:txBody>
+      </p:sp>
+      <p:sp>
+        <p:nvSpPr>
+          <p:cNvPr id="24" name="TextBox 23"/>
+          <p:cNvSpPr txBox="1"/>
+          <p:nvPr/>
+        </p:nvSpPr>
+        <p:spPr>
+          <a:xfrm>
+            <a:off x="9116568" y="2999232"/>
+            <a:ext cx="2103120" cy="365760"/>
+          </a:xfrm>
+          <a:prstGeom prst="rect">
+            <a:avLst/>
+          </a:prstGeom>
+          <a:noFill/>
+        </p:spPr>
+        <p:txBody>
+          <a:bodyPr wrap="square" anchor="t" lIns="0" rIns="0" tIns="0" bIns="0">
+            <a:spAutoFit/>
+          </a:bodyPr>
+          <a:lstStyle/>
+          <a:p>
+            <a:pPr algn="l">
+              <a:lnSpc>
+                <a:spcPct val="105000"/>
+              </a:lnSpc>
+            </a:pPr>
+            <a:r>
+              <a:rPr sz="1019" b="0" i="0">
+                <a:solidFill>
+                  <a:srgbClr val="FFFFFF"/>
+                </a:solidFill>
+                <a:latin typeface="Aptos"/>
+              </a:rPr>
+              <a:t>dias de atraso na entrega</a:t>
+            </a:r>
+          </a:p>
+        </p:txBody>
+      </p:sp>
+      <p:cxnSp>
+        <p:nvCxnSpPr>
+          <p:cNvPr id="25" name="Connector 24"/>
+          <p:cNvCxnSpPr/>
+          <p:nvPr/>
+        </p:nvCxnSpPr>
+        <p:spPr>
+          <a:xfrm>
+            <a:off x="8010144" y="3474720"/>
+            <a:ext cx="3172968" cy="0"/>
+          </a:xfrm>
+          <a:prstGeom prst="line">
+            <a:avLst/>
+          </a:prstGeom>
+          <a:ln w="9525">
+            <a:solidFill>
+              <a:srgbClr val="263951"/>
+            </a:solidFill>
+          </a:ln>
+          <a:effectLst/>
+        </p:spPr>
+        <p:style>
+          <a:lnRef idx="2">
+            <a:schemeClr val="accent1"/>
+          </a:lnRef>
+          <a:fillRef idx="0">
+            <a:schemeClr val="accent1"/>
+          </a:fillRef>
+          <a:effectRef idx="1">
+            <a:schemeClr val="accent1"/>
+          </a:effectRef>
+          <a:fontRef idx="minor">
+            <a:schemeClr val="tx1"/>
+          </a:fontRef>
+        </p:style>
+      </p:cxnSp>
+      <p:sp>
+        <p:nvSpPr>
+          <p:cNvPr id="26" name="TextBox 25"/>
+          <p:cNvSpPr txBox="1"/>
+          <p:nvPr/>
+        </p:nvSpPr>
+        <p:spPr>
+          <a:xfrm>
+            <a:off x="8010144" y="3657600"/>
+            <a:ext cx="1188720" cy="310896"/>
+          </a:xfrm>
+          <a:prstGeom prst="rect">
+            <a:avLst/>
+          </a:prstGeom>
+          <a:noFill/>
+        </p:spPr>
+        <p:txBody>
+          <a:bodyPr wrap="square" anchor="t" lIns="0" rIns="0" tIns="0" bIns="0">
+            <a:spAutoFit/>
+          </a:bodyPr>
+          <a:lstStyle/>
+          <a:p>
+            <a:pPr algn="l"/>
+            <a:r>
+              <a:rPr sz="1750" b="1" i="0">
+                <a:solidFill>
+                  <a:srgbClr val="EE5A62"/>
+                </a:solidFill>
+                <a:latin typeface="Aptos Display"/>
+              </a:rPr>
+              <a:t>+75,3%</a:t>
+            </a:r>
+          </a:p>
+        </p:txBody>
+      </p:sp>
+      <p:sp>
+        <p:nvSpPr>
+          <p:cNvPr id="27" name="TextBox 26"/>
+          <p:cNvSpPr txBox="1"/>
+          <p:nvPr/>
+        </p:nvSpPr>
+        <p:spPr>
+          <a:xfrm>
+            <a:off x="9116568" y="3712463"/>
+            <a:ext cx="2103120" cy="365760"/>
+          </a:xfrm>
+          <a:prstGeom prst="rect">
+            <a:avLst/>
+          </a:prstGeom>
+          <a:noFill/>
+        </p:spPr>
+        <p:txBody>
+          <a:bodyPr wrap="square" anchor="t" lIns="0" rIns="0" tIns="0" bIns="0">
+            <a:spAutoFit/>
+          </a:bodyPr>
+          <a:lstStyle/>
+          <a:p>
+            <a:pPr algn="l">
+              <a:lnSpc>
+                <a:spcPct val="105000"/>
+              </a:lnSpc>
+            </a:pPr>
+            <a:r>
+              <a:rPr sz="1019" b="0" i="0">
+                <a:solidFill>
+                  <a:srgbClr val="FFFFFF"/>
+                </a:solidFill>
+                <a:latin typeface="Aptos"/>
+              </a:rPr>
+              <a:t>contatos com atendimento</a:t>
+            </a:r>
+          </a:p>
+        </p:txBody>
+      </p:sp>
+      <p:cxnSp>
+        <p:nvCxnSpPr>
+          <p:cNvPr id="28" name="Connector 27"/>
+          <p:cNvCxnSpPr/>
+          <p:nvPr/>
+        </p:nvCxnSpPr>
+        <p:spPr>
+          <a:xfrm>
+            <a:off x="8010144" y="4187952"/>
+            <a:ext cx="3172968" cy="0"/>
+          </a:xfrm>
+          <a:prstGeom prst="line">
+            <a:avLst/>
+          </a:prstGeom>
+          <a:ln w="9525">
+            <a:solidFill>
+              <a:srgbClr val="263951"/>
+            </a:solidFill>
+          </a:ln>
+          <a:effectLst/>
+        </p:spPr>
+        <p:style>
+          <a:lnRef idx="2">
+            <a:schemeClr val="accent1"/>
+          </a:lnRef>
+          <a:fillRef idx="0">
+            <a:schemeClr val="accent1"/>
+          </a:fillRef>
+          <a:effectRef idx="1">
+            <a:schemeClr val="accent1"/>
+          </a:effectRef>
+          <a:fontRef idx="minor">
+            <a:schemeClr val="tx1"/>
+          </a:fontRef>
+        </p:style>
+      </p:cxnSp>
+      <p:sp>
+        <p:nvSpPr>
+          <p:cNvPr id="29" name="TextBox 28"/>
+          <p:cNvSpPr txBox="1"/>
+          <p:nvPr/>
+        </p:nvSpPr>
+        <p:spPr>
+          <a:xfrm>
+            <a:off x="8010144" y="4370832"/>
+            <a:ext cx="1188720" cy="310896"/>
+          </a:xfrm>
+          <a:prstGeom prst="rect">
+            <a:avLst/>
+          </a:prstGeom>
+          <a:noFill/>
+        </p:spPr>
+        <p:txBody>
+          <a:bodyPr wrap="square" anchor="t" lIns="0" rIns="0" tIns="0" bIns="0">
+            <a:spAutoFit/>
+          </a:bodyPr>
+          <a:lstStyle/>
+          <a:p>
+            <a:pPr algn="l"/>
+            <a:r>
+              <a:rPr sz="1750" b="1" i="0">
+                <a:solidFill>
+                  <a:srgbClr val="EE5A62"/>
+                </a:solidFill>
+                <a:latin typeface="Aptos Display"/>
+              </a:rPr>
+              <a:t>+71,0%</a:t>
+            </a:r>
+          </a:p>
+        </p:txBody>
+      </p:sp>
+      <p:sp>
+        <p:nvSpPr>
+          <p:cNvPr id="30" name="TextBox 29"/>
+          <p:cNvSpPr txBox="1"/>
+          <p:nvPr/>
+        </p:nvSpPr>
+        <p:spPr>
+          <a:xfrm>
+            <a:off x="9116568" y="4425696"/>
+            <a:ext cx="2103120" cy="365760"/>
+          </a:xfrm>
+          <a:prstGeom prst="rect">
+            <a:avLst/>
+          </a:prstGeom>
+          <a:noFill/>
+        </p:spPr>
+        <p:txBody>
+          <a:bodyPr wrap="square" anchor="t" lIns="0" rIns="0" tIns="0" bIns="0">
+            <a:spAutoFit/>
+          </a:bodyPr>
+          <a:lstStyle/>
+          <a:p>
+            <a:pPr algn="l">
+              <a:lnSpc>
+                <a:spcPct val="105000"/>
+              </a:lnSpc>
+            </a:pPr>
+            <a:r>
+              <a:rPr sz="1019" b="0" i="0">
+                <a:solidFill>
+                  <a:srgbClr val="FFFFFF"/>
+                </a:solidFill>
+                <a:latin typeface="Aptos"/>
+              </a:rPr>
+              <a:t>reclamações registradas</a:t>
+            </a:r>
+          </a:p>
+        </p:txBody>
+      </p:sp>
+      <p:sp>
+        <p:nvSpPr>
+          <p:cNvPr id="31" name="TextBox 30"/>
+          <p:cNvSpPr txBox="1"/>
+          <p:nvPr/>
+        </p:nvSpPr>
+        <p:spPr>
+          <a:xfrm>
+            <a:off x="8010144" y="4919472"/>
+            <a:ext cx="3172968" cy="457200"/>
+          </a:xfrm>
+          <a:prstGeom prst="rect">
+            <a:avLst/>
+          </a:prstGeom>
+          <a:noFill/>
+        </p:spPr>
+        <p:txBody>
+          <a:bodyPr wrap="square" anchor="t" lIns="0" rIns="0" tIns="0" bIns="0">
+            <a:spAutoFit/>
+          </a:bodyPr>
+          <a:lstStyle/>
+          <a:p>
+            <a:pPr algn="l">
+              <a:lnSpc>
+                <a:spcPct val="105000"/>
+              </a:lnSpc>
+            </a:pPr>
+            <a:r>
+              <a:rPr sz="990" b="1" i="0">
+                <a:solidFill>
+                  <a:srgbClr val="87E5F2"/>
+                </a:solidFill>
+                <a:latin typeface="Aptos"/>
+              </a:rPr>
+              <a:t>Fatores demográficos (idade, região, tempo de casa) têm impacto mínimo no NPS.</a:t>
+            </a:r>
+          </a:p>
+        </p:txBody>
+      </p:sp>
+      <p:sp>
+        <p:nvSpPr>
+          <p:cNvPr id="32" name="TextBox 31"/>
+          <p:cNvSpPr txBox="1"/>
+          <p:nvPr/>
+        </p:nvSpPr>
+        <p:spPr>
+          <a:xfrm>
+            <a:off x="658368" y="6501384"/>
+            <a:ext cx="3749039" cy="164592"/>
+          </a:xfrm>
+          <a:prstGeom prst="rect">
+            <a:avLst/>
+          </a:prstGeom>
+          <a:noFill/>
+        </p:spPr>
+        <p:txBody>
+          <a:bodyPr wrap="square" anchor="t" lIns="0" rIns="0" tIns="0" bIns="0">
+            <a:spAutoFit/>
+          </a:bodyPr>
+          <a:lstStyle/>
+          <a:p>
+            <a:pPr algn="l"/>
+            <a:r>
+              <a:rPr sz="850" b="0" i="0">
+                <a:solidFill>
+                  <a:srgbClr val="98A2B3"/>
+                </a:solidFill>
+                <a:latin typeface="Aptos"/>
+              </a:rPr>
+              <a:t>NPS Preditivo  ·  Tech Challenge Fase 1</a:t>
+            </a:r>
+          </a:p>
+        </p:txBody>
+      </p:sp>
+      <p:sp>
+        <p:nvSpPr>
+          <p:cNvPr id="33" name="TextBox 32"/>
+          <p:cNvSpPr txBox="1"/>
+          <p:nvPr/>
+        </p:nvSpPr>
+        <p:spPr>
+          <a:xfrm>
+            <a:off x="11137392" y="6473952"/>
+            <a:ext cx="384048" cy="164592"/>
+          </a:xfrm>
+          <a:prstGeom prst="rect">
+            <a:avLst/>
+          </a:prstGeom>
+          <a:noFill/>
+        </p:spPr>
+        <p:txBody>
+          <a:bodyPr wrap="square" anchor="t" lIns="0" rIns="0" tIns="0" bIns="0">
+            <a:spAutoFit/>
+          </a:bodyPr>
+          <a:lstStyle/>
+          <a:p>
+            <a:pPr algn="r"/>
+            <a:r>
+              <a:rPr sz="850" b="0" i="0">
+                <a:solidFill>
+                  <a:srgbClr val="98A2B3"/>
+                </a:solidFill>
+                <a:latin typeface="Aptos"/>
+              </a:rPr>
+              <a:t>06</a:t>
+            </a:r>
+          </a:p>
+        </p:txBody>
+      </p:sp>
+    </p:spTree>
+  </p:cSld>
+  <p:clrMapOvr>
+    <a:masterClrMapping/>
+  </p:clrMapOvr>
+</p:sld>
+</file>
+
+<file path=ppt/slides/slide7.xml><?xml version="1.0" encoding="utf-8"?>
+<p:sld xmlns:a="http://schemas.openxmlformats.org/drawingml/2006/main" xmlns:p="http://schemas.openxmlformats.org/presentationml/2006/main" xmlns:r="http://schemas.openxmlformats.org/officeDocument/2006/relationships">
+  <p:cSld>
+    <p:bg>
+      <p:bgPr>
+        <a:solidFill>
+          <a:srgbClr val="091220"/>
+        </a:solidFill>
+        <a:effectLst/>
+      </p:bgPr>
+    </p:bg>
+    <p:spTree>
+      <p:nvGrpSpPr>
+        <p:cNvPr id="1" name=""/>
+        <p:cNvGrpSpPr/>
+        <p:nvPr/>
+      </p:nvGrpSpPr>
+      <p:grpSpPr/>
+      <p:sp>
+        <p:nvSpPr>
+          <p:cNvPr id="2" name="TextBox 1"/>
+          <p:cNvSpPr txBox="1"/>
+          <p:nvPr/>
+        </p:nvSpPr>
+        <p:spPr>
+          <a:xfrm>
+            <a:off x="658368" y="384048"/>
+            <a:ext cx="5943600" cy="201168"/>
+          </a:xfrm>
+          <a:prstGeom prst="rect">
+            <a:avLst/>
+          </a:prstGeom>
+          <a:noFill/>
+        </p:spPr>
+        <p:txBody>
+          <a:bodyPr wrap="square" anchor="t" lIns="0" rIns="0" tIns="0" bIns="0">
+            <a:spAutoFit/>
+          </a:bodyPr>
+          <a:lstStyle/>
+          <a:p>
+            <a:pPr algn="l"/>
+            <a:r>
+              <a:rPr sz="950" b="1" i="0">
+                <a:solidFill>
+                  <a:srgbClr val="25C7E5"/>
+                </a:solidFill>
+                <a:latin typeface="Aptos"/>
+              </a:rPr>
+              <a:t>PARTE 3 · PONTO DE RUPTURA</a:t>
+            </a:r>
+          </a:p>
+        </p:txBody>
+      </p:sp>
+      <p:sp>
+        <p:nvSpPr>
+          <p:cNvPr id="3" name="TextBox 2"/>
+          <p:cNvSpPr txBox="1"/>
+          <p:nvPr/>
+        </p:nvSpPr>
+        <p:spPr>
+          <a:xfrm>
+            <a:off x="658368" y="786384"/>
+            <a:ext cx="10881360" cy="749808"/>
+          </a:xfrm>
+          <a:prstGeom prst="rect">
+            <a:avLst/>
+          </a:prstGeom>
+          <a:noFill/>
+        </p:spPr>
+        <p:txBody>
+          <a:bodyPr wrap="square" anchor="t" lIns="0" rIns="0" tIns="0" bIns="0">
+            <a:spAutoFit/>
+          </a:bodyPr>
+          <a:lstStyle/>
+          <a:p>
+            <a:pPr algn="l">
+              <a:lnSpc>
+                <a:spcPct val="102000"/>
+              </a:lnSpc>
+            </a:pPr>
+            <a:r>
+              <a:rPr sz="2900" b="1" i="0">
+                <a:solidFill>
+                  <a:srgbClr val="FFFFFF"/>
+                </a:solidFill>
+                <a:latin typeface="Aptos Display"/>
+              </a:rPr>
+              <a:t>Basta 1 dia de atraso para o NPS despencar.</a:t>
+            </a:r>
+          </a:p>
+        </p:txBody>
+      </p:sp>
+      <p:sp>
+        <p:nvSpPr>
+          <p:cNvPr id="4" name="TextBox 3"/>
+          <p:cNvSpPr txBox="1"/>
+          <p:nvPr/>
+        </p:nvSpPr>
+        <p:spPr>
+          <a:xfrm>
+            <a:off x="658368" y="1572768"/>
+            <a:ext cx="10607040" cy="365760"/>
+          </a:xfrm>
+          <a:prstGeom prst="rect">
+            <a:avLst/>
+          </a:prstGeom>
+          <a:noFill/>
+        </p:spPr>
+        <p:txBody>
+          <a:bodyPr wrap="square" anchor="t" lIns="0" rIns="0" tIns="0" bIns="0">
+            <a:spAutoFit/>
+          </a:bodyPr>
+          <a:lstStyle/>
+          <a:p>
+            <a:pPr algn="l"/>
+            <a:r>
+              <a:rPr sz="1210" b="0" i="0">
+                <a:solidFill>
+                  <a:srgbClr val="9FB0C6"/>
+                </a:solidFill>
+                <a:latin typeface="Aptos"/>
+              </a:rPr>
+              <a:t>NPS médio e proporção de detratores por dias de atraso na entrega (2.202 pedidos).</a:t>
+            </a:r>
+          </a:p>
+        </p:txBody>
+      </p:sp>
+      <p:sp>
+        <p:nvSpPr>
+          <p:cNvPr id="5" name="TextBox 4"/>
+          <p:cNvSpPr txBox="1"/>
+          <p:nvPr/>
+        </p:nvSpPr>
+        <p:spPr>
+          <a:xfrm>
+            <a:off x="658368" y="2286000"/>
+            <a:ext cx="2240280" cy="219456"/>
+          </a:xfrm>
+          <a:prstGeom prst="rect">
+            <a:avLst/>
+          </a:prstGeom>
+          <a:noFill/>
+        </p:spPr>
+        <p:txBody>
+          <a:bodyPr wrap="square" anchor="t" lIns="0" rIns="0" tIns="0" bIns="0">
+            <a:spAutoFit/>
+          </a:bodyPr>
+          <a:lstStyle/>
+          <a:p>
+            <a:pPr algn="l"/>
+            <a:r>
+              <a:rPr sz="1019" b="1" i="0">
+                <a:solidFill>
+                  <a:srgbClr val="9FB0C6"/>
+                </a:solidFill>
+                <a:latin typeface="Aptos"/>
+              </a:rPr>
+              <a:t>0 DIAS</a:t>
+            </a:r>
+          </a:p>
+        </p:txBody>
+      </p:sp>
+      <p:sp>
+        <p:nvSpPr>
+          <p:cNvPr id="6" name="TextBox 5"/>
+          <p:cNvSpPr txBox="1"/>
+          <p:nvPr/>
+        </p:nvSpPr>
+        <p:spPr>
+          <a:xfrm>
+            <a:off x="658368" y="2560320"/>
+            <a:ext cx="2331720" cy="548640"/>
+          </a:xfrm>
+          <a:prstGeom prst="rect">
+            <a:avLst/>
+          </a:prstGeom>
+          <a:noFill/>
+        </p:spPr>
+        <p:txBody>
+          <a:bodyPr wrap="square" anchor="t" lIns="0" rIns="0" tIns="0" bIns="0">
+            <a:spAutoFit/>
+          </a:bodyPr>
+          <a:lstStyle/>
+          <a:p>
+            <a:pPr algn="l"/>
+            <a:r>
+              <a:rPr sz="3400" b="1" i="0">
+                <a:solidFill>
+                  <a:srgbClr val="87E5F2"/>
+                </a:solidFill>
+                <a:latin typeface="Aptos Display"/>
+              </a:rPr>
+              <a:t>6,85</a:t>
+            </a:r>
+          </a:p>
+        </p:txBody>
+      </p:sp>
+      <p:sp>
+        <p:nvSpPr>
+          <p:cNvPr id="7" name="TextBox 6"/>
+          <p:cNvSpPr txBox="1"/>
+          <p:nvPr/>
+        </p:nvSpPr>
+        <p:spPr>
+          <a:xfrm>
+            <a:off x="658368" y="3182112"/>
+            <a:ext cx="2240280" cy="219456"/>
+          </a:xfrm>
+          <a:prstGeom prst="rect">
+            <a:avLst/>
+          </a:prstGeom>
+          <a:noFill/>
+        </p:spPr>
+        <p:txBody>
+          <a:bodyPr wrap="square" anchor="t" lIns="0" rIns="0" tIns="0" bIns="0">
+            <a:spAutoFit/>
+          </a:bodyPr>
+          <a:lstStyle/>
+          <a:p>
+            <a:pPr algn="l"/>
+            <a:r>
+              <a:rPr sz="1120" b="1" i="0">
+                <a:solidFill>
+                  <a:srgbClr val="FFFFFF"/>
+                </a:solidFill>
+                <a:latin typeface="Aptos"/>
+              </a:rPr>
+              <a:t>51,8% detratores</a:t>
+            </a:r>
+          </a:p>
+        </p:txBody>
+      </p:sp>
+      <p:sp>
+        <p:nvSpPr>
+          <p:cNvPr id="8" name="TextBox 7"/>
+          <p:cNvSpPr txBox="1"/>
+          <p:nvPr/>
+        </p:nvSpPr>
+        <p:spPr>
+          <a:xfrm>
+            <a:off x="658368" y="3438144"/>
+            <a:ext cx="2240280" cy="201168"/>
+          </a:xfrm>
+          <a:prstGeom prst="rect">
+            <a:avLst/>
+          </a:prstGeom>
+          <a:noFill/>
+        </p:spPr>
+        <p:txBody>
+          <a:bodyPr wrap="square" anchor="t" lIns="0" rIns="0" tIns="0" bIns="0">
+            <a:spAutoFit/>
+          </a:bodyPr>
+          <a:lstStyle/>
+          <a:p>
+            <a:pPr algn="l"/>
+            <a:r>
+              <a:rPr sz="960" b="0" i="0">
+                <a:solidFill>
+                  <a:srgbClr val="9FB0C6"/>
+                </a:solidFill>
+                <a:latin typeface="Aptos"/>
+              </a:rPr>
+              <a:t>ainda aceitável</a:t>
+            </a:r>
+          </a:p>
+        </p:txBody>
+      </p:sp>
+      <p:cxnSp>
+        <p:nvCxnSpPr>
+          <p:cNvPr id="9" name="Connector 8"/>
+          <p:cNvCxnSpPr/>
+          <p:nvPr/>
+        </p:nvCxnSpPr>
+        <p:spPr>
+          <a:xfrm>
+            <a:off x="3063239" y="2331720"/>
+            <a:ext cx="0" cy="1371600"/>
+          </a:xfrm>
+          <a:prstGeom prst="line">
+            <a:avLst/>
+          </a:prstGeom>
+          <a:ln w="9525">
+            <a:solidFill>
+              <a:srgbClr val="263951"/>
+            </a:solidFill>
+          </a:ln>
+          <a:effectLst/>
+        </p:spPr>
+        <p:style>
+          <a:lnRef idx="2">
+            <a:schemeClr val="accent1"/>
+          </a:lnRef>
+          <a:fillRef idx="0">
+            <a:schemeClr val="accent1"/>
+          </a:fillRef>
+          <a:effectRef idx="1">
+            <a:schemeClr val="accent1"/>
+          </a:effectRef>
+          <a:fontRef idx="minor">
+            <a:schemeClr val="tx1"/>
+          </a:fontRef>
+        </p:style>
+      </p:cxnSp>
+      <p:sp>
+        <p:nvSpPr>
+          <p:cNvPr id="10" name="TextBox 9"/>
+          <p:cNvSpPr txBox="1"/>
+          <p:nvPr/>
+        </p:nvSpPr>
+        <p:spPr>
+          <a:xfrm>
+            <a:off x="3172968" y="2286000"/>
+            <a:ext cx="2240280" cy="219456"/>
+          </a:xfrm>
+          <a:prstGeom prst="rect">
+            <a:avLst/>
+          </a:prstGeom>
+          <a:noFill/>
+        </p:spPr>
+        <p:txBody>
+          <a:bodyPr wrap="square" anchor="t" lIns="0" rIns="0" tIns="0" bIns="0">
+            <a:spAutoFit/>
+          </a:bodyPr>
+          <a:lstStyle/>
+          <a:p>
+            <a:pPr algn="l"/>
+            <a:r>
+              <a:rPr sz="1019" b="1" i="0">
+                <a:solidFill>
+                  <a:srgbClr val="9FB0C6"/>
+                </a:solidFill>
+                <a:latin typeface="Aptos"/>
+              </a:rPr>
+              <a:t>1 DIA</a:t>
+            </a:r>
+          </a:p>
+        </p:txBody>
+      </p:sp>
+      <p:sp>
+        <p:nvSpPr>
+          <p:cNvPr id="11" name="TextBox 10"/>
+          <p:cNvSpPr txBox="1"/>
+          <p:nvPr/>
+        </p:nvSpPr>
+        <p:spPr>
+          <a:xfrm>
+            <a:off x="3172968" y="2560320"/>
+            <a:ext cx="2331720" cy="548640"/>
+          </a:xfrm>
+          <a:prstGeom prst="rect">
+            <a:avLst/>
+          </a:prstGeom>
+          <a:noFill/>
+        </p:spPr>
+        <p:txBody>
+          <a:bodyPr wrap="square" anchor="t" lIns="0" rIns="0" tIns="0" bIns="0">
+            <a:spAutoFit/>
+          </a:bodyPr>
+          <a:lstStyle/>
+          <a:p>
+            <a:pPr algn="l"/>
+            <a:r>
+              <a:rPr sz="3400" b="1" i="0">
+                <a:solidFill>
+                  <a:srgbClr val="F4B64A"/>
+                </a:solidFill>
+                <a:latin typeface="Aptos Display"/>
+              </a:rPr>
+              <a:t>5,55</a:t>
+            </a:r>
+          </a:p>
+        </p:txBody>
+      </p:sp>
+      <p:sp>
+        <p:nvSpPr>
+          <p:cNvPr id="12" name="TextBox 11"/>
+          <p:cNvSpPr txBox="1"/>
+          <p:nvPr/>
+        </p:nvSpPr>
+        <p:spPr>
+          <a:xfrm>
+            <a:off x="3172968" y="3182112"/>
+            <a:ext cx="2240280" cy="219456"/>
+          </a:xfrm>
+          <a:prstGeom prst="rect">
+            <a:avLst/>
+          </a:prstGeom>
+          <a:noFill/>
+        </p:spPr>
+        <p:txBody>
+          <a:bodyPr wrap="square" anchor="t" lIns="0" rIns="0" tIns="0" bIns="0">
+            <a:spAutoFit/>
+          </a:bodyPr>
+          <a:lstStyle/>
+          <a:p>
+            <a:pPr algn="l"/>
+            <a:r>
+              <a:rPr sz="1120" b="1" i="0">
+                <a:solidFill>
+                  <a:srgbClr val="FFFFFF"/>
+                </a:solidFill>
+                <a:latin typeface="Aptos"/>
+              </a:rPr>
+              <a:t>74,1% detratores</a:t>
+            </a:r>
+          </a:p>
+        </p:txBody>
+      </p:sp>
+      <p:sp>
+        <p:nvSpPr>
+          <p:cNvPr id="13" name="TextBox 12"/>
+          <p:cNvSpPr txBox="1"/>
+          <p:nvPr/>
+        </p:nvSpPr>
+        <p:spPr>
+          <a:xfrm>
+            <a:off x="3172968" y="3438144"/>
+            <a:ext cx="2240280" cy="201168"/>
+          </a:xfrm>
+          <a:prstGeom prst="rect">
+            <a:avLst/>
+          </a:prstGeom>
+          <a:noFill/>
+        </p:spPr>
+        <p:txBody>
+          <a:bodyPr wrap="square" anchor="t" lIns="0" rIns="0" tIns="0" bIns="0">
+            <a:spAutoFit/>
+          </a:bodyPr>
+          <a:lstStyle/>
+          <a:p>
+            <a:pPr algn="l"/>
+            <a:r>
+              <a:rPr sz="960" b="0" i="0">
+                <a:solidFill>
+                  <a:srgbClr val="9FB0C6"/>
+                </a:solidFill>
+                <a:latin typeface="Aptos"/>
+              </a:rPr>
+              <a:t>zona crítica</a:t>
+            </a:r>
+          </a:p>
+        </p:txBody>
+      </p:sp>
+      <p:cxnSp>
+        <p:nvCxnSpPr>
+          <p:cNvPr id="14" name="Connector 13"/>
+          <p:cNvCxnSpPr/>
+          <p:nvPr/>
+        </p:nvCxnSpPr>
+        <p:spPr>
+          <a:xfrm>
+            <a:off x="5577840" y="2331720"/>
+            <a:ext cx="0" cy="1371600"/>
+          </a:xfrm>
+          <a:prstGeom prst="line">
+            <a:avLst/>
+          </a:prstGeom>
+          <a:ln w="9525">
+            <a:solidFill>
+              <a:srgbClr val="263951"/>
+            </a:solidFill>
+          </a:ln>
+          <a:effectLst/>
+        </p:spPr>
+        <p:style>
+          <a:lnRef idx="2">
+            <a:schemeClr val="accent1"/>
+          </a:lnRef>
+          <a:fillRef idx="0">
+            <a:schemeClr val="accent1"/>
+          </a:fillRef>
+          <a:effectRef idx="1">
+            <a:schemeClr val="accent1"/>
+          </a:effectRef>
+          <a:fontRef idx="minor">
+            <a:schemeClr val="tx1"/>
+          </a:fontRef>
+        </p:style>
+      </p:cxnSp>
+      <p:sp>
+        <p:nvSpPr>
+          <p:cNvPr id="15" name="TextBox 14"/>
+          <p:cNvSpPr txBox="1"/>
+          <p:nvPr/>
+        </p:nvSpPr>
+        <p:spPr>
+          <a:xfrm>
+            <a:off x="5687568" y="2286000"/>
+            <a:ext cx="2240280" cy="219456"/>
+          </a:xfrm>
+          <a:prstGeom prst="rect">
+            <a:avLst/>
+          </a:prstGeom>
+          <a:noFill/>
+        </p:spPr>
+        <p:txBody>
+          <a:bodyPr wrap="square" anchor="t" lIns="0" rIns="0" tIns="0" bIns="0">
+            <a:spAutoFit/>
+          </a:bodyPr>
+          <a:lstStyle/>
+          <a:p>
+            <a:pPr algn="l"/>
+            <a:r>
+              <a:rPr sz="1019" b="1" i="0">
+                <a:solidFill>
+                  <a:srgbClr val="9FB0C6"/>
+                </a:solidFill>
+                <a:latin typeface="Aptos"/>
+              </a:rPr>
+              <a:t>2 DIAS</a:t>
+            </a:r>
+          </a:p>
+        </p:txBody>
+      </p:sp>
+      <p:sp>
+        <p:nvSpPr>
+          <p:cNvPr id="16" name="TextBox 15"/>
+          <p:cNvSpPr txBox="1"/>
+          <p:nvPr/>
+        </p:nvSpPr>
+        <p:spPr>
+          <a:xfrm>
+            <a:off x="5687568" y="2560320"/>
+            <a:ext cx="2331720" cy="548640"/>
+          </a:xfrm>
+          <a:prstGeom prst="rect">
+            <a:avLst/>
+          </a:prstGeom>
+          <a:noFill/>
+        </p:spPr>
+        <p:txBody>
+          <a:bodyPr wrap="square" anchor="t" lIns="0" rIns="0" tIns="0" bIns="0">
+            <a:spAutoFit/>
+          </a:bodyPr>
+          <a:lstStyle/>
+          <a:p>
+            <a:pPr algn="l"/>
+            <a:r>
+              <a:rPr sz="3400" b="1" i="0">
+                <a:solidFill>
+                  <a:srgbClr val="F08B4C"/>
+                </a:solidFill>
+                <a:latin typeface="Aptos Display"/>
+              </a:rPr>
+              <a:t>4,57</a:t>
+            </a:r>
+          </a:p>
+        </p:txBody>
+      </p:sp>
+      <p:sp>
+        <p:nvSpPr>
+          <p:cNvPr id="17" name="TextBox 16"/>
+          <p:cNvSpPr txBox="1"/>
+          <p:nvPr/>
+        </p:nvSpPr>
+        <p:spPr>
+          <a:xfrm>
+            <a:off x="5687568" y="3182112"/>
+            <a:ext cx="2240280" cy="219456"/>
+          </a:xfrm>
+          <a:prstGeom prst="rect">
+            <a:avLst/>
+          </a:prstGeom>
+          <a:noFill/>
+        </p:spPr>
+        <p:txBody>
+          <a:bodyPr wrap="square" anchor="t" lIns="0" rIns="0" tIns="0" bIns="0">
+            <a:spAutoFit/>
+          </a:bodyPr>
+          <a:lstStyle/>
+          <a:p>
+            <a:pPr algn="l"/>
+            <a:r>
+              <a:rPr sz="1120" b="1" i="0">
+                <a:solidFill>
+                  <a:srgbClr val="FFFFFF"/>
+                </a:solidFill>
+                <a:latin typeface="Aptos"/>
+              </a:rPr>
+              <a:t>87,9% detratores</a:t>
+            </a:r>
+          </a:p>
+        </p:txBody>
+      </p:sp>
+      <p:sp>
+        <p:nvSpPr>
+          <p:cNvPr id="18" name="TextBox 17"/>
+          <p:cNvSpPr txBox="1"/>
+          <p:nvPr/>
+        </p:nvSpPr>
+        <p:spPr>
+          <a:xfrm>
+            <a:off x="5687568" y="3438144"/>
+            <a:ext cx="2240280" cy="201168"/>
+          </a:xfrm>
+          <a:prstGeom prst="rect">
+            <a:avLst/>
+          </a:prstGeom>
+          <a:noFill/>
+        </p:spPr>
+        <p:txBody>
+          <a:bodyPr wrap="square" anchor="t" lIns="0" rIns="0" tIns="0" bIns="0">
+            <a:spAutoFit/>
+          </a:bodyPr>
+          <a:lstStyle/>
+          <a:p>
+            <a:pPr algn="l"/>
+            <a:r>
+              <a:rPr sz="960" b="0" i="0">
+                <a:solidFill>
+                  <a:srgbClr val="9FB0C6"/>
+                </a:solidFill>
+                <a:latin typeface="Aptos"/>
+              </a:rPr>
+              <a:t>deteriora</a:t>
+            </a:r>
+          </a:p>
+        </p:txBody>
+      </p:sp>
+      <p:cxnSp>
+        <p:nvCxnSpPr>
+          <p:cNvPr id="19" name="Connector 18"/>
+          <p:cNvCxnSpPr/>
+          <p:nvPr/>
+        </p:nvCxnSpPr>
+        <p:spPr>
+          <a:xfrm>
+            <a:off x="8092440" y="2331720"/>
+            <a:ext cx="0" cy="1371600"/>
+          </a:xfrm>
+          <a:prstGeom prst="line">
+            <a:avLst/>
+          </a:prstGeom>
+          <a:ln w="9525">
+            <a:solidFill>
+              <a:srgbClr val="263951"/>
+            </a:solidFill>
+          </a:ln>
+          <a:effectLst/>
+        </p:spPr>
+        <p:style>
+          <a:lnRef idx="2">
+            <a:schemeClr val="accent1"/>
+          </a:lnRef>
+          <a:fillRef idx="0">
+            <a:schemeClr val="accent1"/>
+          </a:fillRef>
+          <a:effectRef idx="1">
+            <a:schemeClr val="accent1"/>
+          </a:effectRef>
+          <a:fontRef idx="minor">
+            <a:schemeClr val="tx1"/>
+          </a:fontRef>
+        </p:style>
+      </p:cxnSp>
+      <p:sp>
+        <p:nvSpPr>
+          <p:cNvPr id="20" name="TextBox 19"/>
+          <p:cNvSpPr txBox="1"/>
+          <p:nvPr/>
+        </p:nvSpPr>
+        <p:spPr>
+          <a:xfrm>
+            <a:off x="8202168" y="2286000"/>
+            <a:ext cx="2240280" cy="219456"/>
+          </a:xfrm>
+          <a:prstGeom prst="rect">
+            <a:avLst/>
+          </a:prstGeom>
+          <a:noFill/>
+        </p:spPr>
+        <p:txBody>
+          <a:bodyPr wrap="square" anchor="t" lIns="0" rIns="0" tIns="0" bIns="0">
+            <a:spAutoFit/>
+          </a:bodyPr>
+          <a:lstStyle/>
+          <a:p>
+            <a:pPr algn="l"/>
+            <a:r>
+              <a:rPr sz="1019" b="1" i="0">
+                <a:solidFill>
+                  <a:srgbClr val="9FB0C6"/>
+                </a:solidFill>
+                <a:latin typeface="Aptos"/>
+              </a:rPr>
+              <a:t>3+ DIAS</a:t>
+            </a:r>
+          </a:p>
+        </p:txBody>
+      </p:sp>
+      <p:sp>
+        <p:nvSpPr>
+          <p:cNvPr id="21" name="TextBox 20"/>
+          <p:cNvSpPr txBox="1"/>
+          <p:nvPr/>
+        </p:nvSpPr>
+        <p:spPr>
+          <a:xfrm>
+            <a:off x="8202168" y="2560320"/>
+            <a:ext cx="2331720" cy="548640"/>
+          </a:xfrm>
+          <a:prstGeom prst="rect">
+            <a:avLst/>
+          </a:prstGeom>
+          <a:noFill/>
+        </p:spPr>
+        <p:txBody>
+          <a:bodyPr wrap="square" anchor="t" lIns="0" rIns="0" tIns="0" bIns="0">
+            <a:spAutoFit/>
+          </a:bodyPr>
+          <a:lstStyle/>
+          <a:p>
+            <a:pPr algn="l"/>
+            <a:r>
+              <a:rPr sz="3400" b="1" i="0">
+                <a:solidFill>
+                  <a:srgbClr val="EE5A62"/>
+                </a:solidFill>
+                <a:latin typeface="Aptos Display"/>
+              </a:rPr>
+              <a:t>&lt; 3,50</a:t>
+            </a:r>
+          </a:p>
+        </p:txBody>
+      </p:sp>
+      <p:sp>
+        <p:nvSpPr>
+          <p:cNvPr id="22" name="TextBox 21"/>
+          <p:cNvSpPr txBox="1"/>
+          <p:nvPr/>
+        </p:nvSpPr>
+        <p:spPr>
+          <a:xfrm>
+            <a:off x="8202168" y="3182112"/>
+            <a:ext cx="2240280" cy="219456"/>
+          </a:xfrm>
+          <a:prstGeom prst="rect">
+            <a:avLst/>
+          </a:prstGeom>
+          <a:noFill/>
+        </p:spPr>
+        <p:txBody>
+          <a:bodyPr wrap="square" anchor="t" lIns="0" rIns="0" tIns="0" bIns="0">
+            <a:spAutoFit/>
+          </a:bodyPr>
+          <a:lstStyle/>
+          <a:p>
+            <a:pPr algn="l"/>
+            <a:r>
+              <a:rPr sz="1120" b="1" i="0">
+                <a:solidFill>
+                  <a:srgbClr val="FFFFFF"/>
+                </a:solidFill>
+                <a:latin typeface="Aptos"/>
+              </a:rPr>
+              <a:t>&gt; 95% detratores</a:t>
+            </a:r>
+          </a:p>
+        </p:txBody>
+      </p:sp>
+      <p:sp>
+        <p:nvSpPr>
+          <p:cNvPr id="23" name="TextBox 22"/>
+          <p:cNvSpPr txBox="1"/>
+          <p:nvPr/>
+        </p:nvSpPr>
+        <p:spPr>
+          <a:xfrm>
+            <a:off x="8202168" y="3438144"/>
+            <a:ext cx="2240280" cy="201168"/>
+          </a:xfrm>
+          <a:prstGeom prst="rect">
+            <a:avLst/>
+          </a:prstGeom>
+          <a:noFill/>
+        </p:spPr>
+        <p:txBody>
+          <a:bodyPr wrap="square" anchor="t" lIns="0" rIns="0" tIns="0" bIns="0">
+            <a:spAutoFit/>
+          </a:bodyPr>
+          <a:lstStyle/>
+          <a:p>
+            <a:pPr algn="l"/>
+            <a:r>
+              <a:rPr sz="960" b="0" i="0">
+                <a:solidFill>
+                  <a:srgbClr val="9FB0C6"/>
+                </a:solidFill>
+                <a:latin typeface="Aptos"/>
+              </a:rPr>
+              <a:t>quase perdido</a:t>
+            </a:r>
+          </a:p>
+        </p:txBody>
+      </p:sp>
+      <p:cxnSp>
+        <p:nvCxnSpPr>
+          <p:cNvPr id="24" name="Connector 23"/>
+          <p:cNvCxnSpPr/>
+          <p:nvPr/>
+        </p:nvCxnSpPr>
+        <p:spPr>
+          <a:xfrm>
+            <a:off x="658368" y="3840480"/>
+            <a:ext cx="10863072" cy="0"/>
+          </a:xfrm>
+          <a:prstGeom prst="line">
+            <a:avLst/>
+          </a:prstGeom>
+          <a:ln w="9525">
+            <a:solidFill>
+              <a:srgbClr val="263951"/>
+            </a:solidFill>
+          </a:ln>
+          <a:effectLst/>
+        </p:spPr>
+        <p:style>
+          <a:lnRef idx="2">
+            <a:schemeClr val="accent1"/>
+          </a:lnRef>
+          <a:fillRef idx="0">
+            <a:schemeClr val="accent1"/>
+          </a:fillRef>
+          <a:effectRef idx="1">
+            <a:schemeClr val="accent1"/>
+          </a:effectRef>
+          <a:fontRef idx="minor">
+            <a:schemeClr val="tx1"/>
+          </a:fontRef>
+        </p:style>
+      </p:cxnSp>
+      <p:sp>
+        <p:nvSpPr>
+          <p:cNvPr id="25" name="Rounded Rectangle 24"/>
+          <p:cNvSpPr/>
+          <p:nvPr/>
+        </p:nvSpPr>
+        <p:spPr>
+          <a:xfrm>
+            <a:off x="658368" y="4069080"/>
+            <a:ext cx="10881360" cy="868680"/>
+          </a:xfrm>
+          <a:prstGeom prst="roundRect">
+            <a:avLst>
+              <a:gd name="adj" fmla="val 8000"/>
+            </a:avLst>
+          </a:prstGeom>
+          <a:solidFill>
+            <a:srgbClr val="10263A"/>
+          </a:solidFill>
+          <a:ln>
+            <a:noFill/>
+          </a:ln>
+          <a:effectLst/>
+        </p:spPr>
+        <p:style>
+          <a:lnRef idx="1">
+            <a:schemeClr val="accent1"/>
+          </a:lnRef>
+          <a:fillRef idx="3">
+            <a:schemeClr val="accent1"/>
+          </a:fillRef>
+          <a:effectRef idx="2">
+            <a:schemeClr val="accent1"/>
+          </a:effectRef>
+          <a:fontRef idx="minor">
+            <a:schemeClr val="lt1"/>
+          </a:fontRef>
+        </p:style>
+        <p:txBody>
+          <a:bodyPr rtlCol="0" anchor="ctr"/>
+          <a:lstStyle/>
+          <a:p>
+            <a:pPr algn="ctr"/>
+          </a:p>
+        </p:txBody>
+      </p:sp>
+      <p:sp>
+        <p:nvSpPr>
+          <p:cNvPr id="26" name="TextBox 25"/>
+          <p:cNvSpPr txBox="1"/>
+          <p:nvPr/>
+        </p:nvSpPr>
+        <p:spPr>
+          <a:xfrm>
+            <a:off x="932688" y="4215384"/>
+            <a:ext cx="1828800" cy="566928"/>
+          </a:xfrm>
+          <a:prstGeom prst="rect">
+            <a:avLst/>
+          </a:prstGeom>
+          <a:noFill/>
+        </p:spPr>
+        <p:txBody>
+          <a:bodyPr wrap="square" anchor="t" lIns="0" rIns="0" tIns="0" bIns="0">
+            <a:spAutoFit/>
+          </a:bodyPr>
+          <a:lstStyle/>
+          <a:p>
+            <a:pPr algn="l">
+              <a:lnSpc>
+                <a:spcPct val="100000"/>
+              </a:lnSpc>
+            </a:pPr>
+            <a:r>
+              <a:rPr sz="2600" b="1" i="0">
+                <a:solidFill>
+                  <a:srgbClr val="EE5A62"/>
+                </a:solidFill>
+                <a:latin typeface="Aptos Display"/>
+              </a:rPr>
+              <a:t>−1,3</a:t>
+            </a:r>
+          </a:p>
+          <a:p>
+            <a:pPr algn="l">
+              <a:lnSpc>
+                <a:spcPct val="100000"/>
+              </a:lnSpc>
+            </a:pPr>
+            <a:r>
+              <a:rPr sz="950" b="0" i="0">
+                <a:solidFill>
+                  <a:srgbClr val="A6B4C6"/>
+                </a:solidFill>
+                <a:latin typeface="Aptos"/>
+              </a:rPr>
+              <a:t>pontos de NPS</a:t>
+            </a:r>
+          </a:p>
+        </p:txBody>
+      </p:sp>
+      <p:cxnSp>
+        <p:nvCxnSpPr>
+          <p:cNvPr id="27" name="Connector 26"/>
+          <p:cNvCxnSpPr/>
+          <p:nvPr/>
+        </p:nvCxnSpPr>
+        <p:spPr>
+          <a:xfrm>
+            <a:off x="3063240" y="4233672"/>
+            <a:ext cx="0" cy="548640"/>
+          </a:xfrm>
+          <a:prstGeom prst="line">
+            <a:avLst/>
+          </a:prstGeom>
+          <a:ln w="9525">
+            <a:solidFill>
+              <a:srgbClr val="263951"/>
+            </a:solidFill>
+          </a:ln>
+          <a:effectLst/>
+        </p:spPr>
+        <p:style>
+          <a:lnRef idx="2">
+            <a:schemeClr val="accent1"/>
+          </a:lnRef>
+          <a:fillRef idx="0">
+            <a:schemeClr val="accent1"/>
+          </a:fillRef>
+          <a:effectRef idx="1">
+            <a:schemeClr val="accent1"/>
+          </a:effectRef>
+          <a:fontRef idx="minor">
+            <a:schemeClr val="tx1"/>
+          </a:fontRef>
+        </p:style>
+      </p:cxnSp>
+      <p:sp>
+        <p:nvSpPr>
+          <p:cNvPr id="28" name="TextBox 27"/>
+          <p:cNvSpPr txBox="1"/>
+          <p:nvPr/>
+        </p:nvSpPr>
+        <p:spPr>
+          <a:xfrm>
+            <a:off x="3337560" y="4215384"/>
+            <a:ext cx="1828800" cy="566928"/>
+          </a:xfrm>
+          <a:prstGeom prst="rect">
+            <a:avLst/>
+          </a:prstGeom>
+          <a:noFill/>
+        </p:spPr>
+        <p:txBody>
+          <a:bodyPr wrap="square" anchor="t" lIns="0" rIns="0" tIns="0" bIns="0">
+            <a:spAutoFit/>
+          </a:bodyPr>
+          <a:lstStyle/>
+          <a:p>
+            <a:pPr algn="l">
+              <a:lnSpc>
+                <a:spcPct val="100000"/>
+              </a:lnSpc>
+            </a:pPr>
+            <a:r>
+              <a:rPr sz="2600" b="1" i="0">
+                <a:solidFill>
+                  <a:srgbClr val="EE5A62"/>
+                </a:solidFill>
+                <a:latin typeface="Aptos Display"/>
+              </a:rPr>
+              <a:t>+22,3 p.p.</a:t>
+            </a:r>
+          </a:p>
+          <a:p>
+            <a:pPr algn="l">
+              <a:lnSpc>
+                <a:spcPct val="100000"/>
+              </a:lnSpc>
+            </a:pPr>
+            <a:r>
+              <a:rPr sz="950" b="0" i="0">
+                <a:solidFill>
+                  <a:srgbClr val="A6B4C6"/>
+                </a:solidFill>
+                <a:latin typeface="Aptos"/>
+              </a:rPr>
+              <a:t>mais detratores</a:t>
+            </a:r>
+          </a:p>
+        </p:txBody>
+      </p:sp>
+      <p:cxnSp>
+        <p:nvCxnSpPr>
+          <p:cNvPr id="29" name="Connector 28"/>
+          <p:cNvCxnSpPr/>
+          <p:nvPr/>
+        </p:nvCxnSpPr>
+        <p:spPr>
+          <a:xfrm>
+            <a:off x="5532120" y="4233672"/>
+            <a:ext cx="0" cy="548640"/>
+          </a:xfrm>
+          <a:prstGeom prst="line">
+            <a:avLst/>
+          </a:prstGeom>
+          <a:ln w="9525">
+            <a:solidFill>
+              <a:srgbClr val="263951"/>
+            </a:solidFill>
+          </a:ln>
+          <a:effectLst/>
+        </p:spPr>
+        <p:style>
+          <a:lnRef idx="2">
+            <a:schemeClr val="accent1"/>
+          </a:lnRef>
+          <a:fillRef idx="0">
+            <a:schemeClr val="accent1"/>
+          </a:fillRef>
+          <a:effectRef idx="1">
+            <a:schemeClr val="accent1"/>
+          </a:effectRef>
+          <a:fontRef idx="minor">
+            <a:schemeClr val="tx1"/>
+          </a:fontRef>
+        </p:style>
+      </p:cxnSp>
+      <p:sp>
+        <p:nvSpPr>
+          <p:cNvPr id="30" name="TextBox 29"/>
+          <p:cNvSpPr txBox="1"/>
+          <p:nvPr/>
+        </p:nvSpPr>
+        <p:spPr>
+          <a:xfrm>
+            <a:off x="5806440" y="4251960"/>
+            <a:ext cx="5486400" cy="530352"/>
+          </a:xfrm>
+          <a:prstGeom prst="rect">
+            <a:avLst/>
+          </a:prstGeom>
+          <a:noFill/>
+        </p:spPr>
+        <p:txBody>
+          <a:bodyPr wrap="square" anchor="t" lIns="0" rIns="0" tIns="0" bIns="0">
+            <a:spAutoFit/>
+          </a:bodyPr>
+          <a:lstStyle/>
+          <a:p>
+            <a:pPr algn="l">
+              <a:lnSpc>
+                <a:spcPct val="108000"/>
+              </a:lnSpc>
+            </a:pPr>
+            <a:r>
+              <a:rPr sz="1130" b="1" i="0">
+                <a:solidFill>
+                  <a:srgbClr val="FFFFFF"/>
+                </a:solidFill>
+                <a:latin typeface="Aptos"/>
+              </a:rPr>
+              <a:t>Não existe “atraso aceitável” na percepção do cliente —</a:t>
+            </a:r>
+          </a:p>
+          <a:p>
+            <a:pPr algn="l">
+              <a:lnSpc>
+                <a:spcPct val="108000"/>
+              </a:lnSpc>
+            </a:pPr>
+            <a:r>
+              <a:rPr sz="1130" b="1" i="0">
+                <a:solidFill>
+                  <a:srgbClr val="87E5F2"/>
+                </a:solidFill>
+                <a:latin typeface="Aptos"/>
+              </a:rPr>
+              <a:t>o salto de 0 para 1 dia já é o maior choque de satisfação da jornada.</a:t>
+            </a:r>
+          </a:p>
+        </p:txBody>
+      </p:sp>
+      <p:sp>
+        <p:nvSpPr>
+          <p:cNvPr id="31" name="TextBox 30"/>
+          <p:cNvSpPr txBox="1"/>
+          <p:nvPr/>
+        </p:nvSpPr>
+        <p:spPr>
+          <a:xfrm>
+            <a:off x="658368" y="6501384"/>
+            <a:ext cx="3749039" cy="164592"/>
+          </a:xfrm>
+          <a:prstGeom prst="rect">
+            <a:avLst/>
+          </a:prstGeom>
+          <a:noFill/>
+        </p:spPr>
+        <p:txBody>
+          <a:bodyPr wrap="square" anchor="t" lIns="0" rIns="0" tIns="0" bIns="0">
+            <a:spAutoFit/>
+          </a:bodyPr>
+          <a:lstStyle/>
+          <a:p>
+            <a:pPr algn="l"/>
+            <a:r>
+              <a:rPr sz="850" b="0" i="0">
+                <a:solidFill>
+                  <a:srgbClr val="718399"/>
+                </a:solidFill>
+                <a:latin typeface="Aptos"/>
+              </a:rPr>
+              <a:t>NPS Preditivo  ·  Tech Challenge Fase 1</a:t>
+            </a:r>
+          </a:p>
+        </p:txBody>
+      </p:sp>
+      <p:sp>
+        <p:nvSpPr>
+          <p:cNvPr id="32" name="TextBox 31"/>
+          <p:cNvSpPr txBox="1"/>
+          <p:nvPr/>
+        </p:nvSpPr>
+        <p:spPr>
+          <a:xfrm>
+            <a:off x="11137392" y="6473952"/>
+            <a:ext cx="384048" cy="164592"/>
+          </a:xfrm>
+          <a:prstGeom prst="rect">
+            <a:avLst/>
+          </a:prstGeom>
+          <a:noFill/>
+        </p:spPr>
+        <p:txBody>
+          <a:bodyPr wrap="square" anchor="t" lIns="0" rIns="0" tIns="0" bIns="0">
+            <a:spAutoFit/>
+          </a:bodyPr>
+          <a:lstStyle/>
+          <a:p>
+            <a:pPr algn="r"/>
+            <a:r>
+              <a:rPr sz="850" b="0" i="0">
+                <a:solidFill>
+                  <a:srgbClr val="718399"/>
+                </a:solidFill>
+                <a:latin typeface="Aptos"/>
+              </a:rPr>
+              <a:t>07</a:t>
+            </a:r>
+          </a:p>
+        </p:txBody>
+      </p:sp>
+    </p:spTree>
+  </p:cSld>
+  <p:clrMapOvr>
+    <a:masterClrMapping/>
+  </p:clrMapOvr>
+</p:sld>
+</file>
+
+<file path=ppt/slides/slide8.xml><?xml version="1.0" encoding="utf-8"?>
+<p:sld xmlns:a="http://schemas.openxmlformats.org/drawingml/2006/main" xmlns:p="http://schemas.openxmlformats.org/presentationml/2006/main" xmlns:r="http://schemas.openxmlformats.org/officeDocument/2006/relationships">
+  <p:cSld>
+    <p:bg>
+      <p:bgPr>
+        <a:solidFill>
+          <a:srgbClr val="F5F6F8"/>
+        </a:solidFill>
+        <a:effectLst/>
+      </p:bgPr>
+    </p:bg>
+    <p:spTree>
+      <p:nvGrpSpPr>
+        <p:cNvPr id="1" name=""/>
+        <p:cNvGrpSpPr/>
+        <p:nvPr/>
+      </p:nvGrpSpPr>
+      <p:grpSpPr/>
+      <p:sp>
+        <p:nvSpPr>
+          <p:cNvPr id="2" name="TextBox 1"/>
+          <p:cNvSpPr txBox="1"/>
+          <p:nvPr/>
+        </p:nvSpPr>
+        <p:spPr>
+          <a:xfrm>
+            <a:off x="658368" y="384048"/>
+            <a:ext cx="5943600" cy="201168"/>
+          </a:xfrm>
+          <a:prstGeom prst="rect">
+            <a:avLst/>
+          </a:prstGeom>
+          <a:noFill/>
+        </p:spPr>
+        <p:txBody>
+          <a:bodyPr wrap="square" anchor="t" lIns="0" rIns="0" tIns="0" bIns="0">
+            <a:spAutoFit/>
+          </a:bodyPr>
+          <a:lstStyle/>
+          <a:p>
+            <a:pPr algn="l"/>
+            <a:r>
+              <a:rPr sz="950" b="1" i="0">
+                <a:solidFill>
+                  <a:srgbClr val="25C7E5"/>
+                </a:solidFill>
+                <a:latin typeface="Aptos"/>
+              </a:rPr>
+              <a:t>PARTE 4 · QUEM SÃO ESSES CLIENTES</a:t>
+            </a:r>
+          </a:p>
+        </p:txBody>
+      </p:sp>
+      <p:sp>
+        <p:nvSpPr>
+          <p:cNvPr id="3" name="TextBox 2"/>
+          <p:cNvSpPr txBox="1"/>
+          <p:nvPr/>
+        </p:nvSpPr>
+        <p:spPr>
+          <a:xfrm>
+            <a:off x="658368" y="786384"/>
+            <a:ext cx="10881360" cy="749808"/>
+          </a:xfrm>
+          <a:prstGeom prst="rect">
+            <a:avLst/>
+          </a:prstGeom>
+          <a:noFill/>
+        </p:spPr>
+        <p:txBody>
+          <a:bodyPr wrap="square" anchor="t" lIns="0" rIns="0" tIns="0" bIns="0">
+            <a:spAutoFit/>
+          </a:bodyPr>
+          <a:lstStyle/>
+          <a:p>
+            <a:pPr algn="l">
+              <a:lnSpc>
+                <a:spcPct val="102000"/>
+              </a:lnSpc>
+            </a:pPr>
+            <a:r>
+              <a:rPr sz="2900" b="1" i="0">
+                <a:solidFill>
+                  <a:srgbClr val="111827"/>
+                </a:solidFill>
+                <a:latin typeface="Aptos Display"/>
+              </a:rPr>
+              <a:t>A diferença entre promotor e detrator é operacional, não demográfica.</a:t>
+            </a:r>
+          </a:p>
+        </p:txBody>
+      </p:sp>
+      <p:sp>
+        <p:nvSpPr>
+          <p:cNvPr id="4" name="TextBox 3"/>
+          <p:cNvSpPr txBox="1"/>
+          <p:nvPr/>
+        </p:nvSpPr>
+        <p:spPr>
+          <a:xfrm>
+            <a:off x="658368" y="1572768"/>
+            <a:ext cx="10607040" cy="365760"/>
+          </a:xfrm>
+          <a:prstGeom prst="rect">
+            <a:avLst/>
+          </a:prstGeom>
+          <a:noFill/>
+        </p:spPr>
+        <p:txBody>
+          <a:bodyPr wrap="square" anchor="t" lIns="0" rIns="0" tIns="0" bIns="0">
+            <a:spAutoFit/>
+          </a:bodyPr>
+          <a:lstStyle/>
+          <a:p>
+            <a:pPr algn="l"/>
+            <a:r>
+              <a:rPr sz="1210" b="0" i="0">
+                <a:solidFill>
+                  <a:srgbClr val="667085"/>
+                </a:solidFill>
+                <a:latin typeface="Aptos"/>
+              </a:rPr>
+              <a:t>Comportamento médio dos 106 promotores e dos 1.829 detratores da base tratada.</a:t>
+            </a:r>
+          </a:p>
+        </p:txBody>
+      </p:sp>
+      <p:sp>
+        <p:nvSpPr>
+          <p:cNvPr id="5" name="Rounded Rectangle 4"/>
+          <p:cNvSpPr/>
+          <p:nvPr/>
+        </p:nvSpPr>
+        <p:spPr>
+          <a:xfrm>
+            <a:off x="658368" y="2212848"/>
+            <a:ext cx="5074920" cy="3703320"/>
+          </a:xfrm>
+          <a:prstGeom prst="roundRect">
+            <a:avLst>
+              <a:gd name="adj" fmla="val 3500"/>
+            </a:avLst>
+          </a:prstGeom>
+          <a:solidFill>
+            <a:srgbClr val="E9F7F1"/>
+          </a:solidFill>
+          <a:ln>
+            <a:noFill/>
+          </a:ln>
+          <a:effectLst/>
+        </p:spPr>
+        <p:style>
+          <a:lnRef idx="1">
+            <a:schemeClr val="accent1"/>
+          </a:lnRef>
+          <a:fillRef idx="3">
+            <a:schemeClr val="accent1"/>
+          </a:fillRef>
+          <a:effectRef idx="2">
+            <a:schemeClr val="accent1"/>
+          </a:effectRef>
+          <a:fontRef idx="minor">
+            <a:schemeClr val="lt1"/>
+          </a:fontRef>
+        </p:style>
+        <p:txBody>
+          <a:bodyPr rtlCol="0" anchor="ctr"/>
+          <a:lstStyle/>
+          <a:p>
+            <a:pPr algn="ctr"/>
+          </a:p>
+        </p:txBody>
+      </p:sp>
+      <p:sp>
+        <p:nvSpPr>
+          <p:cNvPr id="6" name="Rounded Rectangle 5"/>
+          <p:cNvSpPr/>
+          <p:nvPr/>
+        </p:nvSpPr>
+        <p:spPr>
+          <a:xfrm>
+            <a:off x="6053327" y="2212848"/>
+            <a:ext cx="5074920" cy="3703320"/>
+          </a:xfrm>
+          <a:prstGeom prst="roundRect">
+            <a:avLst>
+              <a:gd name="adj" fmla="val 3500"/>
+            </a:avLst>
+          </a:prstGeom>
+          <a:solidFill>
+            <a:srgbClr val="FDECEE"/>
+          </a:solidFill>
+          <a:ln>
+            <a:noFill/>
+          </a:ln>
+          <a:effectLst/>
+        </p:spPr>
+        <p:style>
+          <a:lnRef idx="1">
+            <a:schemeClr val="accent1"/>
+          </a:lnRef>
+          <a:fillRef idx="3">
+            <a:schemeClr val="accent1"/>
+          </a:fillRef>
+          <a:effectRef idx="2">
+            <a:schemeClr val="accent1"/>
+          </a:effectRef>
+          <a:fontRef idx="minor">
+            <a:schemeClr val="lt1"/>
+          </a:fontRef>
+        </p:style>
+        <p:txBody>
+          <a:bodyPr rtlCol="0" anchor="ctr"/>
+          <a:lstStyle/>
+          <a:p>
+            <a:pPr algn="ctr"/>
+          </a:p>
+        </p:txBody>
+      </p:sp>
+      <p:sp>
+        <p:nvSpPr>
+          <p:cNvPr id="7" name="TextBox 6"/>
+          <p:cNvSpPr txBox="1"/>
+          <p:nvPr/>
+        </p:nvSpPr>
+        <p:spPr>
+          <a:xfrm>
+            <a:off x="969264" y="2468880"/>
+            <a:ext cx="4453128" cy="274320"/>
+          </a:xfrm>
+          <a:prstGeom prst="rect">
+            <a:avLst/>
+          </a:prstGeom>
+          <a:noFill/>
+        </p:spPr>
+        <p:txBody>
+          <a:bodyPr wrap="square" anchor="t" lIns="0" rIns="0" tIns="0" bIns="0">
+            <a:spAutoFit/>
+          </a:bodyPr>
+          <a:lstStyle/>
+          <a:p>
+            <a:pPr algn="l"/>
+            <a:r>
+              <a:rPr sz="1250" b="1" i="0">
+                <a:solidFill>
+                  <a:srgbClr val="27A77A"/>
+                </a:solidFill>
+                <a:latin typeface="Aptos"/>
+              </a:rPr>
+              <a:t>PROMOTOR</a:t>
+            </a:r>
+          </a:p>
+        </p:txBody>
+      </p:sp>
+      <p:sp>
+        <p:nvSpPr>
+          <p:cNvPr id="8" name="TextBox 7"/>
+          <p:cNvSpPr txBox="1"/>
+          <p:nvPr/>
+        </p:nvSpPr>
+        <p:spPr>
+          <a:xfrm>
+            <a:off x="969264" y="2743200"/>
+            <a:ext cx="4453128" cy="219456"/>
+          </a:xfrm>
+          <a:prstGeom prst="rect">
+            <a:avLst/>
+          </a:prstGeom>
+          <a:noFill/>
+        </p:spPr>
+        <p:txBody>
+          <a:bodyPr wrap="square" anchor="t" lIns="0" rIns="0" tIns="0" bIns="0">
+            <a:spAutoFit/>
+          </a:bodyPr>
+          <a:lstStyle/>
+          <a:p>
+            <a:pPr algn="l"/>
+            <a:r>
+              <a:rPr sz="1000" b="0" i="0">
+                <a:solidFill>
+                  <a:srgbClr val="667085"/>
+                </a:solidFill>
+                <a:latin typeface="Aptos"/>
+              </a:rPr>
+              <a:t>4,8% da base · 106 pedidos</a:t>
+            </a:r>
+          </a:p>
+        </p:txBody>
+      </p:sp>
+      <p:sp>
+        <p:nvSpPr>
+          <p:cNvPr id="9" name="TextBox 8"/>
+          <p:cNvSpPr txBox="1"/>
+          <p:nvPr/>
+        </p:nvSpPr>
+        <p:spPr>
+          <a:xfrm>
+            <a:off x="6364223" y="2468880"/>
+            <a:ext cx="4453128" cy="274320"/>
+          </a:xfrm>
+          <a:prstGeom prst="rect">
+            <a:avLst/>
+          </a:prstGeom>
+          <a:noFill/>
+        </p:spPr>
+        <p:txBody>
+          <a:bodyPr wrap="square" anchor="t" lIns="0" rIns="0" tIns="0" bIns="0">
+            <a:spAutoFit/>
+          </a:bodyPr>
+          <a:lstStyle/>
+          <a:p>
+            <a:pPr algn="l"/>
+            <a:r>
+              <a:rPr sz="1250" b="1" i="0">
+                <a:solidFill>
+                  <a:srgbClr val="EE5A62"/>
+                </a:solidFill>
+                <a:latin typeface="Aptos"/>
+              </a:rPr>
+              <a:t>DETRATOR</a:t>
+            </a:r>
+          </a:p>
+        </p:txBody>
+      </p:sp>
+      <p:sp>
+        <p:nvSpPr>
+          <p:cNvPr id="10" name="TextBox 9"/>
+          <p:cNvSpPr txBox="1"/>
+          <p:nvPr/>
+        </p:nvSpPr>
+        <p:spPr>
+          <a:xfrm>
+            <a:off x="6364223" y="2743200"/>
+            <a:ext cx="4453128" cy="219456"/>
+          </a:xfrm>
+          <a:prstGeom prst="rect">
+            <a:avLst/>
+          </a:prstGeom>
+          <a:noFill/>
+        </p:spPr>
+        <p:txBody>
+          <a:bodyPr wrap="square" anchor="t" lIns="0" rIns="0" tIns="0" bIns="0">
+            <a:spAutoFit/>
+          </a:bodyPr>
+          <a:lstStyle/>
+          <a:p>
+            <a:pPr algn="l"/>
+            <a:r>
+              <a:rPr sz="1000" b="0" i="0">
+                <a:solidFill>
+                  <a:srgbClr val="667085"/>
+                </a:solidFill>
+                <a:latin typeface="Aptos"/>
+              </a:rPr>
+              <a:t>83,1% da base · 1.829 pedidos</a:t>
+            </a:r>
+          </a:p>
+        </p:txBody>
+      </p:sp>
+      <p:sp>
+        <p:nvSpPr>
+          <p:cNvPr id="11" name="TextBox 10"/>
+          <p:cNvSpPr txBox="1"/>
+          <p:nvPr/>
+        </p:nvSpPr>
+        <p:spPr>
+          <a:xfrm>
+            <a:off x="969264" y="3218688"/>
+            <a:ext cx="3520439" cy="237744"/>
+          </a:xfrm>
+          <a:prstGeom prst="rect">
+            <a:avLst/>
+          </a:prstGeom>
+          <a:noFill/>
+        </p:spPr>
+        <p:txBody>
+          <a:bodyPr wrap="square" anchor="t" lIns="0" rIns="0" tIns="0" bIns="0">
+            <a:spAutoFit/>
+          </a:bodyPr>
+          <a:lstStyle/>
+          <a:p>
+            <a:pPr algn="l"/>
+            <a:r>
+              <a:rPr sz="1030" b="0" i="0">
+                <a:solidFill>
+                  <a:srgbClr val="3B4A5F"/>
+                </a:solidFill>
+                <a:latin typeface="Aptos"/>
+              </a:rPr>
+              <a:t>Atraso médio na entrega</a:t>
+            </a:r>
+          </a:p>
+        </p:txBody>
+      </p:sp>
+      <p:sp>
+        <p:nvSpPr>
+          <p:cNvPr id="12" name="TextBox 11"/>
+          <p:cNvSpPr txBox="1"/>
+          <p:nvPr/>
+        </p:nvSpPr>
+        <p:spPr>
+          <a:xfrm>
+            <a:off x="4361688" y="3191256"/>
+            <a:ext cx="1097280" cy="274320"/>
+          </a:xfrm>
+          <a:prstGeom prst="rect">
+            <a:avLst/>
+          </a:prstGeom>
+          <a:noFill/>
+        </p:spPr>
+        <p:txBody>
+          <a:bodyPr wrap="square" anchor="t" lIns="0" rIns="0" tIns="0" bIns="0">
+            <a:spAutoFit/>
+          </a:bodyPr>
+          <a:lstStyle/>
+          <a:p>
+            <a:pPr algn="r"/>
+            <a:r>
+              <a:rPr sz="1350" b="1" i="0">
+                <a:solidFill>
+                  <a:srgbClr val="16794F"/>
+                </a:solidFill>
+                <a:latin typeface="Aptos"/>
+              </a:rPr>
+              <a:t>0,7 dias</a:t>
+            </a:r>
+          </a:p>
+        </p:txBody>
+      </p:sp>
+      <p:sp>
+        <p:nvSpPr>
+          <p:cNvPr id="13" name="TextBox 12"/>
+          <p:cNvSpPr txBox="1"/>
+          <p:nvPr/>
+        </p:nvSpPr>
+        <p:spPr>
+          <a:xfrm>
+            <a:off x="6364223" y="3218688"/>
+            <a:ext cx="3520439" cy="237744"/>
+          </a:xfrm>
+          <a:prstGeom prst="rect">
+            <a:avLst/>
+          </a:prstGeom>
+          <a:noFill/>
+        </p:spPr>
+        <p:txBody>
+          <a:bodyPr wrap="square" anchor="t" lIns="0" rIns="0" tIns="0" bIns="0">
+            <a:spAutoFit/>
+          </a:bodyPr>
+          <a:lstStyle/>
+          <a:p>
+            <a:pPr algn="l"/>
+            <a:r>
+              <a:rPr sz="1030" b="0" i="0">
+                <a:solidFill>
+                  <a:srgbClr val="3B4A5F"/>
+                </a:solidFill>
+                <a:latin typeface="Aptos"/>
+              </a:rPr>
+              <a:t>Atraso médio na entrega</a:t>
+            </a:r>
+          </a:p>
+        </p:txBody>
+      </p:sp>
+      <p:sp>
+        <p:nvSpPr>
+          <p:cNvPr id="14" name="TextBox 13"/>
+          <p:cNvSpPr txBox="1"/>
+          <p:nvPr/>
+        </p:nvSpPr>
+        <p:spPr>
+          <a:xfrm>
+            <a:off x="9756647" y="3191256"/>
+            <a:ext cx="1097280" cy="274320"/>
+          </a:xfrm>
+          <a:prstGeom prst="rect">
+            <a:avLst/>
+          </a:prstGeom>
+          <a:noFill/>
+        </p:spPr>
+        <p:txBody>
+          <a:bodyPr wrap="square" anchor="t" lIns="0" rIns="0" tIns="0" bIns="0">
+            <a:spAutoFit/>
+          </a:bodyPr>
+          <a:lstStyle/>
+          <a:p>
+            <a:pPr algn="r"/>
+            <a:r>
+              <a:rPr sz="1350" b="1" i="0">
+                <a:solidFill>
+                  <a:srgbClr val="B23A40"/>
+                </a:solidFill>
+                <a:latin typeface="Aptos"/>
+              </a:rPr>
+              <a:t>2,3 dias</a:t>
+            </a:r>
+          </a:p>
+        </p:txBody>
+      </p:sp>
+      <p:cxnSp>
+        <p:nvCxnSpPr>
+          <p:cNvPr id="15" name="Connector 14"/>
+          <p:cNvCxnSpPr/>
+          <p:nvPr/>
+        </p:nvCxnSpPr>
+        <p:spPr>
+          <a:xfrm>
+            <a:off x="969264" y="3621024"/>
+            <a:ext cx="4453128" cy="0"/>
+          </a:xfrm>
+          <a:prstGeom prst="line">
+            <a:avLst/>
+          </a:prstGeom>
+          <a:ln w="7620">
+            <a:solidFill>
+              <a:srgbClr val="CFE3D8"/>
+            </a:solidFill>
+          </a:ln>
+          <a:effectLst/>
+        </p:spPr>
+        <p:style>
+          <a:lnRef idx="2">
+            <a:schemeClr val="accent1"/>
+          </a:lnRef>
+          <a:fillRef idx="0">
+            <a:schemeClr val="accent1"/>
+          </a:fillRef>
+          <a:effectRef idx="1">
+            <a:schemeClr val="accent1"/>
+          </a:effectRef>
+          <a:fontRef idx="minor">
+            <a:schemeClr val="tx1"/>
+          </a:fontRef>
+        </p:style>
+      </p:cxnSp>
+      <p:cxnSp>
+        <p:nvCxnSpPr>
+          <p:cNvPr id="16" name="Connector 15"/>
+          <p:cNvCxnSpPr/>
+          <p:nvPr/>
+        </p:nvCxnSpPr>
+        <p:spPr>
+          <a:xfrm>
+            <a:off x="6364223" y="3621024"/>
+            <a:ext cx="4453128" cy="0"/>
+          </a:xfrm>
+          <a:prstGeom prst="line">
+            <a:avLst/>
+          </a:prstGeom>
+          <a:ln w="7620">
+            <a:solidFill>
+              <a:srgbClr val="F3D3D5"/>
+            </a:solidFill>
+          </a:ln>
+          <a:effectLst/>
+        </p:spPr>
+        <p:style>
+          <a:lnRef idx="2">
+            <a:schemeClr val="accent1"/>
+          </a:lnRef>
+          <a:fillRef idx="0">
+            <a:schemeClr val="accent1"/>
+          </a:fillRef>
+          <a:effectRef idx="1">
+            <a:schemeClr val="accent1"/>
+          </a:effectRef>
+          <a:fontRef idx="minor">
+            <a:schemeClr val="tx1"/>
+          </a:fontRef>
+        </p:style>
+      </p:cxnSp>
+      <p:sp>
+        <p:nvSpPr>
+          <p:cNvPr id="17" name="TextBox 16"/>
+          <p:cNvSpPr txBox="1"/>
+          <p:nvPr/>
+        </p:nvSpPr>
+        <p:spPr>
+          <a:xfrm>
+            <a:off x="969264" y="3730752"/>
+            <a:ext cx="3520439" cy="237744"/>
+          </a:xfrm>
+          <a:prstGeom prst="rect">
+            <a:avLst/>
+          </a:prstGeom>
+          <a:noFill/>
+        </p:spPr>
+        <p:txBody>
+          <a:bodyPr wrap="square" anchor="t" lIns="0" rIns="0" tIns="0" bIns="0">
+            <a:spAutoFit/>
+          </a:bodyPr>
+          <a:lstStyle/>
+          <a:p>
+            <a:pPr algn="l"/>
+            <a:r>
+              <a:rPr sz="1030" b="0" i="0">
+                <a:solidFill>
+                  <a:srgbClr val="3B4A5F"/>
+                </a:solidFill>
+                <a:latin typeface="Aptos"/>
+              </a:rPr>
+              <a:t>Reclamações registradas</a:t>
+            </a:r>
+          </a:p>
+        </p:txBody>
+      </p:sp>
+      <p:sp>
+        <p:nvSpPr>
+          <p:cNvPr id="18" name="TextBox 17"/>
+          <p:cNvSpPr txBox="1"/>
+          <p:nvPr/>
+        </p:nvSpPr>
+        <p:spPr>
+          <a:xfrm>
+            <a:off x="4361688" y="3703320"/>
+            <a:ext cx="1097280" cy="274320"/>
+          </a:xfrm>
+          <a:prstGeom prst="rect">
+            <a:avLst/>
+          </a:prstGeom>
+          <a:noFill/>
+        </p:spPr>
+        <p:txBody>
+          <a:bodyPr wrap="square" anchor="t" lIns="0" rIns="0" tIns="0" bIns="0">
+            <a:spAutoFit/>
+          </a:bodyPr>
+          <a:lstStyle/>
+          <a:p>
+            <a:pPr algn="r"/>
+            <a:r>
+              <a:rPr sz="1350" b="1" i="0">
+                <a:solidFill>
+                  <a:srgbClr val="16794F"/>
+                </a:solidFill>
+                <a:latin typeface="Aptos"/>
+              </a:rPr>
+              <a:t>2,3</a:t>
+            </a:r>
+          </a:p>
+        </p:txBody>
+      </p:sp>
+      <p:sp>
+        <p:nvSpPr>
+          <p:cNvPr id="19" name="TextBox 18"/>
+          <p:cNvSpPr txBox="1"/>
+          <p:nvPr/>
+        </p:nvSpPr>
+        <p:spPr>
+          <a:xfrm>
+            <a:off x="6364223" y="3730752"/>
+            <a:ext cx="3520439" cy="237744"/>
+          </a:xfrm>
+          <a:prstGeom prst="rect">
+            <a:avLst/>
+          </a:prstGeom>
+          <a:noFill/>
+        </p:spPr>
+        <p:txBody>
+          <a:bodyPr wrap="square" anchor="t" lIns="0" rIns="0" tIns="0" bIns="0">
+            <a:spAutoFit/>
+          </a:bodyPr>
+          <a:lstStyle/>
+          <a:p>
+            <a:pPr algn="l"/>
+            <a:r>
+              <a:rPr sz="1030" b="0" i="0">
+                <a:solidFill>
+                  <a:srgbClr val="3B4A5F"/>
+                </a:solidFill>
+                <a:latin typeface="Aptos"/>
+              </a:rPr>
+              <a:t>Reclamações registradas</a:t>
+            </a:r>
+          </a:p>
+        </p:txBody>
+      </p:sp>
+      <p:sp>
+        <p:nvSpPr>
+          <p:cNvPr id="20" name="TextBox 19"/>
+          <p:cNvSpPr txBox="1"/>
+          <p:nvPr/>
+        </p:nvSpPr>
+        <p:spPr>
+          <a:xfrm>
+            <a:off x="9756647" y="3703320"/>
+            <a:ext cx="1097280" cy="274320"/>
+          </a:xfrm>
+          <a:prstGeom prst="rect">
+            <a:avLst/>
+          </a:prstGeom>
+          <a:noFill/>
+        </p:spPr>
+        <p:txBody>
+          <a:bodyPr wrap="square" anchor="t" lIns="0" rIns="0" tIns="0" bIns="0">
+            <a:spAutoFit/>
+          </a:bodyPr>
+          <a:lstStyle/>
+          <a:p>
+            <a:pPr algn="r"/>
+            <a:r>
+              <a:rPr sz="1350" b="1" i="0">
+                <a:solidFill>
+                  <a:srgbClr val="B23A40"/>
+                </a:solidFill>
+                <a:latin typeface="Aptos"/>
+              </a:rPr>
+              <a:t>4,4</a:t>
+            </a:r>
+          </a:p>
+        </p:txBody>
+      </p:sp>
+      <p:cxnSp>
+        <p:nvCxnSpPr>
+          <p:cNvPr id="21" name="Connector 20"/>
+          <p:cNvCxnSpPr/>
+          <p:nvPr/>
+        </p:nvCxnSpPr>
+        <p:spPr>
+          <a:xfrm>
+            <a:off x="969264" y="4133088"/>
+            <a:ext cx="4453128" cy="0"/>
+          </a:xfrm>
+          <a:prstGeom prst="line">
+            <a:avLst/>
+          </a:prstGeom>
+          <a:ln w="7620">
+            <a:solidFill>
+              <a:srgbClr val="CFE3D8"/>
+            </a:solidFill>
+          </a:ln>
+          <a:effectLst/>
+        </p:spPr>
+        <p:style>
+          <a:lnRef idx="2">
+            <a:schemeClr val="accent1"/>
+          </a:lnRef>
+          <a:fillRef idx="0">
+            <a:schemeClr val="accent1"/>
+          </a:fillRef>
+          <a:effectRef idx="1">
+            <a:schemeClr val="accent1"/>
+          </a:effectRef>
+          <a:fontRef idx="minor">
+            <a:schemeClr val="tx1"/>
+          </a:fontRef>
+        </p:style>
+      </p:cxnSp>
+      <p:cxnSp>
+        <p:nvCxnSpPr>
+          <p:cNvPr id="22" name="Connector 21"/>
+          <p:cNvCxnSpPr/>
+          <p:nvPr/>
+        </p:nvCxnSpPr>
+        <p:spPr>
+          <a:xfrm>
+            <a:off x="6364223" y="4133088"/>
+            <a:ext cx="4453128" cy="0"/>
+          </a:xfrm>
+          <a:prstGeom prst="line">
+            <a:avLst/>
+          </a:prstGeom>
+          <a:ln w="7620">
+            <a:solidFill>
+              <a:srgbClr val="F3D3D5"/>
+            </a:solidFill>
+          </a:ln>
+          <a:effectLst/>
+        </p:spPr>
+        <p:style>
+          <a:lnRef idx="2">
+            <a:schemeClr val="accent1"/>
+          </a:lnRef>
+          <a:fillRef idx="0">
+            <a:schemeClr val="accent1"/>
+          </a:fillRef>
+          <a:effectRef idx="1">
+            <a:schemeClr val="accent1"/>
+          </a:effectRef>
+          <a:fontRef idx="minor">
+            <a:schemeClr val="tx1"/>
+          </a:fontRef>
+        </p:style>
+      </p:cxnSp>
+      <p:sp>
+        <p:nvSpPr>
+          <p:cNvPr id="23" name="TextBox 22"/>
+          <p:cNvSpPr txBox="1"/>
+          <p:nvPr/>
+        </p:nvSpPr>
+        <p:spPr>
+          <a:xfrm>
+            <a:off x="969264" y="4242816"/>
+            <a:ext cx="3520439" cy="237744"/>
+          </a:xfrm>
+          <a:prstGeom prst="rect">
+            <a:avLst/>
+          </a:prstGeom>
+          <a:noFill/>
+        </p:spPr>
+        <p:txBody>
+          <a:bodyPr wrap="square" anchor="t" lIns="0" rIns="0" tIns="0" bIns="0">
+            <a:spAutoFit/>
+          </a:bodyPr>
+          <a:lstStyle/>
+          <a:p>
+            <a:pPr algn="l"/>
+            <a:r>
+              <a:rPr sz="1030" b="0" i="0">
+                <a:solidFill>
+                  <a:srgbClr val="3B4A5F"/>
+                </a:solidFill>
+                <a:latin typeface="Aptos"/>
+              </a:rPr>
+              <a:t>Contatos com atendimento</a:t>
+            </a:r>
+          </a:p>
+        </p:txBody>
+      </p:sp>
+      <p:sp>
+        <p:nvSpPr>
+          <p:cNvPr id="24" name="TextBox 23"/>
+          <p:cNvSpPr txBox="1"/>
+          <p:nvPr/>
+        </p:nvSpPr>
+        <p:spPr>
+          <a:xfrm>
+            <a:off x="4361688" y="4215384"/>
+            <a:ext cx="1097280" cy="274320"/>
+          </a:xfrm>
+          <a:prstGeom prst="rect">
+            <a:avLst/>
+          </a:prstGeom>
+          <a:noFill/>
+        </p:spPr>
+        <p:txBody>
+          <a:bodyPr wrap="square" anchor="t" lIns="0" rIns="0" tIns="0" bIns="0">
+            <a:spAutoFit/>
+          </a:bodyPr>
+          <a:lstStyle/>
+          <a:p>
+            <a:pPr algn="r"/>
+            <a:r>
+              <a:rPr sz="1350" b="1" i="0">
+                <a:solidFill>
+                  <a:srgbClr val="16794F"/>
+                </a:solidFill>
+                <a:latin typeface="Aptos"/>
+              </a:rPr>
+              <a:t>0,7</a:t>
+            </a:r>
+          </a:p>
+        </p:txBody>
+      </p:sp>
+      <p:sp>
+        <p:nvSpPr>
+          <p:cNvPr id="25" name="TextBox 24"/>
+          <p:cNvSpPr txBox="1"/>
+          <p:nvPr/>
+        </p:nvSpPr>
+        <p:spPr>
+          <a:xfrm>
+            <a:off x="6364223" y="4242816"/>
+            <a:ext cx="3520439" cy="237744"/>
+          </a:xfrm>
+          <a:prstGeom prst="rect">
+            <a:avLst/>
+          </a:prstGeom>
+          <a:noFill/>
+        </p:spPr>
+        <p:txBody>
+          <a:bodyPr wrap="square" anchor="t" lIns="0" rIns="0" tIns="0" bIns="0">
+            <a:spAutoFit/>
+          </a:bodyPr>
+          <a:lstStyle/>
+          <a:p>
+            <a:pPr algn="l"/>
+            <a:r>
+              <a:rPr sz="1030" b="0" i="0">
+                <a:solidFill>
+                  <a:srgbClr val="3B4A5F"/>
+                </a:solidFill>
+                <a:latin typeface="Aptos"/>
+              </a:rPr>
+              <a:t>Contatos com atendimento</a:t>
+            </a:r>
+          </a:p>
+        </p:txBody>
+      </p:sp>
+      <p:sp>
+        <p:nvSpPr>
+          <p:cNvPr id="26" name="TextBox 25"/>
+          <p:cNvSpPr txBox="1"/>
+          <p:nvPr/>
+        </p:nvSpPr>
+        <p:spPr>
+          <a:xfrm>
+            <a:off x="9756647" y="4215384"/>
+            <a:ext cx="1097280" cy="274320"/>
+          </a:xfrm>
+          <a:prstGeom prst="rect">
+            <a:avLst/>
+          </a:prstGeom>
+          <a:noFill/>
+        </p:spPr>
+        <p:txBody>
+          <a:bodyPr wrap="square" anchor="t" lIns="0" rIns="0" tIns="0" bIns="0">
+            <a:spAutoFit/>
+          </a:bodyPr>
+          <a:lstStyle/>
+          <a:p>
+            <a:pPr algn="r"/>
+            <a:r>
+              <a:rPr sz="1350" b="1" i="0">
+                <a:solidFill>
+                  <a:srgbClr val="B23A40"/>
+                </a:solidFill>
+                <a:latin typeface="Aptos"/>
+              </a:rPr>
+              <a:t>1,6</a:t>
+            </a:r>
+          </a:p>
+        </p:txBody>
+      </p:sp>
+      <p:cxnSp>
+        <p:nvCxnSpPr>
+          <p:cNvPr id="27" name="Connector 26"/>
+          <p:cNvCxnSpPr/>
+          <p:nvPr/>
+        </p:nvCxnSpPr>
+        <p:spPr>
+          <a:xfrm>
+            <a:off x="969264" y="4645152"/>
+            <a:ext cx="4453128" cy="0"/>
+          </a:xfrm>
+          <a:prstGeom prst="line">
+            <a:avLst/>
+          </a:prstGeom>
+          <a:ln w="7620">
+            <a:solidFill>
+              <a:srgbClr val="CFE3D8"/>
+            </a:solidFill>
+          </a:ln>
+          <a:effectLst/>
+        </p:spPr>
+        <p:style>
+          <a:lnRef idx="2">
+            <a:schemeClr val="accent1"/>
+          </a:lnRef>
+          <a:fillRef idx="0">
+            <a:schemeClr val="accent1"/>
+          </a:fillRef>
+          <a:effectRef idx="1">
+            <a:schemeClr val="accent1"/>
+          </a:effectRef>
+          <a:fontRef idx="minor">
+            <a:schemeClr val="tx1"/>
+          </a:fontRef>
+        </p:style>
+      </p:cxnSp>
+      <p:cxnSp>
+        <p:nvCxnSpPr>
+          <p:cNvPr id="28" name="Connector 27"/>
+          <p:cNvCxnSpPr/>
+          <p:nvPr/>
+        </p:nvCxnSpPr>
+        <p:spPr>
+          <a:xfrm>
+            <a:off x="6364223" y="4645152"/>
+            <a:ext cx="4453128" cy="0"/>
+          </a:xfrm>
+          <a:prstGeom prst="line">
+            <a:avLst/>
+          </a:prstGeom>
+          <a:ln w="7620">
+            <a:solidFill>
+              <a:srgbClr val="F3D3D5"/>
+            </a:solidFill>
+          </a:ln>
+          <a:effectLst/>
+        </p:spPr>
+        <p:style>
+          <a:lnRef idx="2">
+            <a:schemeClr val="accent1"/>
+          </a:lnRef>
+          <a:fillRef idx="0">
+            <a:schemeClr val="accent1"/>
+          </a:fillRef>
+          <a:effectRef idx="1">
+            <a:schemeClr val="accent1"/>
+          </a:effectRef>
+          <a:fontRef idx="minor">
+            <a:schemeClr val="tx1"/>
+          </a:fontRef>
+        </p:style>
+      </p:cxnSp>
+      <p:sp>
+        <p:nvSpPr>
+          <p:cNvPr id="29" name="TextBox 28"/>
+          <p:cNvSpPr txBox="1"/>
+          <p:nvPr/>
+        </p:nvSpPr>
+        <p:spPr>
+          <a:xfrm>
+            <a:off x="969264" y="4754880"/>
+            <a:ext cx="3520439" cy="237744"/>
+          </a:xfrm>
+          <a:prstGeom prst="rect">
+            <a:avLst/>
+          </a:prstGeom>
+          <a:noFill/>
+        </p:spPr>
+        <p:txBody>
+          <a:bodyPr wrap="square" anchor="t" lIns="0" rIns="0" tIns="0" bIns="0">
+            <a:spAutoFit/>
+          </a:bodyPr>
+          <a:lstStyle/>
+          <a:p>
+            <a:pPr algn="l"/>
+            <a:r>
+              <a:rPr sz="1030" b="0" i="0">
+                <a:solidFill>
+                  <a:srgbClr val="3B4A5F"/>
+                </a:solidFill>
+                <a:latin typeface="Aptos"/>
+              </a:rPr>
+              <a:t>CSAT interno (0–10)</a:t>
+            </a:r>
+          </a:p>
+        </p:txBody>
+      </p:sp>
+      <p:sp>
+        <p:nvSpPr>
+          <p:cNvPr id="30" name="TextBox 29"/>
+          <p:cNvSpPr txBox="1"/>
+          <p:nvPr/>
+        </p:nvSpPr>
+        <p:spPr>
+          <a:xfrm>
+            <a:off x="4361688" y="4727448"/>
+            <a:ext cx="1097280" cy="274320"/>
+          </a:xfrm>
+          <a:prstGeom prst="rect">
+            <a:avLst/>
+          </a:prstGeom>
+          <a:noFill/>
+        </p:spPr>
+        <p:txBody>
+          <a:bodyPr wrap="square" anchor="t" lIns="0" rIns="0" tIns="0" bIns="0">
+            <a:spAutoFit/>
+          </a:bodyPr>
+          <a:lstStyle/>
+          <a:p>
+            <a:pPr algn="r"/>
+            <a:r>
+              <a:rPr sz="1350" b="1" i="0">
+                <a:solidFill>
+                  <a:srgbClr val="16794F"/>
+                </a:solidFill>
+                <a:latin typeface="Aptos"/>
+              </a:rPr>
+              <a:t>6,1</a:t>
+            </a:r>
+          </a:p>
+        </p:txBody>
+      </p:sp>
+      <p:sp>
+        <p:nvSpPr>
+          <p:cNvPr id="31" name="TextBox 30"/>
+          <p:cNvSpPr txBox="1"/>
+          <p:nvPr/>
+        </p:nvSpPr>
+        <p:spPr>
+          <a:xfrm>
+            <a:off x="6364223" y="4754880"/>
+            <a:ext cx="3520439" cy="237744"/>
+          </a:xfrm>
+          <a:prstGeom prst="rect">
+            <a:avLst/>
+          </a:prstGeom>
+          <a:noFill/>
+        </p:spPr>
+        <p:txBody>
+          <a:bodyPr wrap="square" anchor="t" lIns="0" rIns="0" tIns="0" bIns="0">
+            <a:spAutoFit/>
+          </a:bodyPr>
+          <a:lstStyle/>
+          <a:p>
+            <a:pPr algn="l"/>
+            <a:r>
+              <a:rPr sz="1030" b="0" i="0">
+                <a:solidFill>
+                  <a:srgbClr val="3B4A5F"/>
+                </a:solidFill>
+                <a:latin typeface="Aptos"/>
+              </a:rPr>
+              <a:t>CSAT interno (0–10)</a:t>
+            </a:r>
+          </a:p>
+        </p:txBody>
+      </p:sp>
+      <p:sp>
+        <p:nvSpPr>
+          <p:cNvPr id="32" name="TextBox 31"/>
+          <p:cNvSpPr txBox="1"/>
+          <p:nvPr/>
+        </p:nvSpPr>
+        <p:spPr>
+          <a:xfrm>
+            <a:off x="9756647" y="4727448"/>
+            <a:ext cx="1097280" cy="274320"/>
+          </a:xfrm>
+          <a:prstGeom prst="rect">
+            <a:avLst/>
+          </a:prstGeom>
+          <a:noFill/>
+        </p:spPr>
+        <p:txBody>
+          <a:bodyPr wrap="square" anchor="t" lIns="0" rIns="0" tIns="0" bIns="0">
+            <a:spAutoFit/>
+          </a:bodyPr>
+          <a:lstStyle/>
+          <a:p>
+            <a:pPr algn="r"/>
+            <a:r>
+              <a:rPr sz="1350" b="1" i="0">
+                <a:solidFill>
+                  <a:srgbClr val="B23A40"/>
+                </a:solidFill>
+                <a:latin typeface="Aptos"/>
+              </a:rPr>
+              <a:t>2,6</a:t>
+            </a:r>
+          </a:p>
+        </p:txBody>
+      </p:sp>
+      <p:cxnSp>
+        <p:nvCxnSpPr>
+          <p:cNvPr id="33" name="Connector 32"/>
+          <p:cNvCxnSpPr/>
+          <p:nvPr/>
+        </p:nvCxnSpPr>
+        <p:spPr>
+          <a:xfrm>
+            <a:off x="969264" y="5157216"/>
+            <a:ext cx="4453128" cy="0"/>
+          </a:xfrm>
+          <a:prstGeom prst="line">
+            <a:avLst/>
+          </a:prstGeom>
+          <a:ln w="7620">
+            <a:solidFill>
+              <a:srgbClr val="CFE3D8"/>
+            </a:solidFill>
+          </a:ln>
+          <a:effectLst/>
+        </p:spPr>
+        <p:style>
+          <a:lnRef idx="2">
+            <a:schemeClr val="accent1"/>
+          </a:lnRef>
+          <a:fillRef idx="0">
+            <a:schemeClr val="accent1"/>
+          </a:fillRef>
+          <a:effectRef idx="1">
+            <a:schemeClr val="accent1"/>
+          </a:effectRef>
+          <a:fontRef idx="minor">
+            <a:schemeClr val="tx1"/>
+          </a:fontRef>
+        </p:style>
+      </p:cxnSp>
+      <p:cxnSp>
+        <p:nvCxnSpPr>
+          <p:cNvPr id="34" name="Connector 33"/>
+          <p:cNvCxnSpPr/>
+          <p:nvPr/>
+        </p:nvCxnSpPr>
+        <p:spPr>
+          <a:xfrm>
+            <a:off x="6364223" y="5157216"/>
+            <a:ext cx="4453128" cy="0"/>
+          </a:xfrm>
+          <a:prstGeom prst="line">
+            <a:avLst/>
+          </a:prstGeom>
+          <a:ln w="7620">
+            <a:solidFill>
+              <a:srgbClr val="F3D3D5"/>
+            </a:solidFill>
+          </a:ln>
+          <a:effectLst/>
+        </p:spPr>
+        <p:style>
+          <a:lnRef idx="2">
+            <a:schemeClr val="accent1"/>
+          </a:lnRef>
+          <a:fillRef idx="0">
+            <a:schemeClr val="accent1"/>
+          </a:fillRef>
+          <a:effectRef idx="1">
+            <a:schemeClr val="accent1"/>
+          </a:effectRef>
+          <a:fontRef idx="minor">
+            <a:schemeClr val="tx1"/>
+          </a:fontRef>
+        </p:style>
+      </p:cxnSp>
+      <p:sp>
+        <p:nvSpPr>
+          <p:cNvPr id="35" name="TextBox 34"/>
+          <p:cNvSpPr txBox="1"/>
+          <p:nvPr/>
+        </p:nvSpPr>
+        <p:spPr>
+          <a:xfrm>
+            <a:off x="969264" y="5266944"/>
+            <a:ext cx="3520439" cy="237744"/>
+          </a:xfrm>
+          <a:prstGeom prst="rect">
+            <a:avLst/>
+          </a:prstGeom>
+          <a:noFill/>
+        </p:spPr>
+        <p:txBody>
+          <a:bodyPr wrap="square" anchor="t" lIns="0" rIns="0" tIns="0" bIns="0">
+            <a:spAutoFit/>
+          </a:bodyPr>
+          <a:lstStyle/>
+          <a:p>
+            <a:pPr algn="l"/>
+            <a:r>
+              <a:rPr sz="1030" b="0" i="0">
+                <a:solidFill>
+                  <a:srgbClr val="3B4A5F"/>
+                </a:solidFill>
+                <a:latin typeface="Aptos"/>
+              </a:rPr>
+              <a:t>Recompra em 30 dias</a:t>
+            </a:r>
+          </a:p>
+        </p:txBody>
+      </p:sp>
+      <p:sp>
+        <p:nvSpPr>
+          <p:cNvPr id="36" name="TextBox 35"/>
+          <p:cNvSpPr txBox="1"/>
+          <p:nvPr/>
+        </p:nvSpPr>
+        <p:spPr>
+          <a:xfrm>
+            <a:off x="4361688" y="5239512"/>
+            <a:ext cx="1097280" cy="274320"/>
+          </a:xfrm>
+          <a:prstGeom prst="rect">
+            <a:avLst/>
+          </a:prstGeom>
+          <a:noFill/>
+        </p:spPr>
+        <p:txBody>
+          <a:bodyPr wrap="square" anchor="t" lIns="0" rIns="0" tIns="0" bIns="0">
+            <a:spAutoFit/>
+          </a:bodyPr>
+          <a:lstStyle/>
+          <a:p>
+            <a:pPr algn="r"/>
+            <a:r>
+              <a:rPr sz="1350" b="1" i="0">
+                <a:solidFill>
+                  <a:srgbClr val="16794F"/>
+                </a:solidFill>
+                <a:latin typeface="Aptos"/>
+              </a:rPr>
+              <a:t>100%</a:t>
+            </a:r>
+          </a:p>
+        </p:txBody>
+      </p:sp>
+      <p:sp>
+        <p:nvSpPr>
+          <p:cNvPr id="37" name="TextBox 36"/>
+          <p:cNvSpPr txBox="1"/>
+          <p:nvPr/>
+        </p:nvSpPr>
+        <p:spPr>
+          <a:xfrm>
+            <a:off x="6364223" y="5266944"/>
+            <a:ext cx="3520439" cy="237744"/>
+          </a:xfrm>
+          <a:prstGeom prst="rect">
+            <a:avLst/>
+          </a:prstGeom>
+          <a:noFill/>
+        </p:spPr>
+        <p:txBody>
+          <a:bodyPr wrap="square" anchor="t" lIns="0" rIns="0" tIns="0" bIns="0">
+            <a:spAutoFit/>
+          </a:bodyPr>
+          <a:lstStyle/>
+          <a:p>
+            <a:pPr algn="l"/>
+            <a:r>
+              <a:rPr sz="1030" b="0" i="0">
+                <a:solidFill>
+                  <a:srgbClr val="3B4A5F"/>
+                </a:solidFill>
+                <a:latin typeface="Aptos"/>
+              </a:rPr>
+              <a:t>Recompra em 30 dias</a:t>
+            </a:r>
+          </a:p>
+        </p:txBody>
+      </p:sp>
+      <p:sp>
+        <p:nvSpPr>
+          <p:cNvPr id="38" name="TextBox 37"/>
+          <p:cNvSpPr txBox="1"/>
+          <p:nvPr/>
+        </p:nvSpPr>
+        <p:spPr>
+          <a:xfrm>
+            <a:off x="9756647" y="5239512"/>
+            <a:ext cx="1097280" cy="274320"/>
+          </a:xfrm>
+          <a:prstGeom prst="rect">
+            <a:avLst/>
+          </a:prstGeom>
+          <a:noFill/>
+        </p:spPr>
+        <p:txBody>
+          <a:bodyPr wrap="square" anchor="t" lIns="0" rIns="0" tIns="0" bIns="0">
+            <a:spAutoFit/>
+          </a:bodyPr>
+          <a:lstStyle/>
+          <a:p>
+            <a:pPr algn="r"/>
+            <a:r>
+              <a:rPr sz="1350" b="1" i="0">
+                <a:solidFill>
+                  <a:srgbClr val="B23A40"/>
+                </a:solidFill>
+                <a:latin typeface="Aptos"/>
+              </a:rPr>
+              <a:t>0%</a:t>
+            </a:r>
+          </a:p>
+        </p:txBody>
+      </p:sp>
+      <p:sp>
+        <p:nvSpPr>
+          <p:cNvPr id="39" name="TextBox 38"/>
+          <p:cNvSpPr txBox="1"/>
+          <p:nvPr/>
+        </p:nvSpPr>
+        <p:spPr>
+          <a:xfrm>
+            <a:off x="658368" y="6080759"/>
+            <a:ext cx="10881360" cy="274320"/>
+          </a:xfrm>
+          <a:prstGeom prst="rect">
+            <a:avLst/>
+          </a:prstGeom>
+          <a:noFill/>
+        </p:spPr>
+        <p:txBody>
+          <a:bodyPr wrap="square" anchor="t" lIns="0" rIns="0" tIns="0" bIns="0">
+            <a:spAutoFit/>
+          </a:bodyPr>
+          <a:lstStyle/>
+          <a:p>
+            <a:pPr algn="l"/>
+            <a:r>
+              <a:rPr sz="1080" b="1" i="0">
+                <a:solidFill>
+                  <a:srgbClr val="667085"/>
+                </a:solidFill>
+                <a:latin typeface="Aptos"/>
+              </a:rPr>
+              <a:t>Idade, região e tempo de relacionamento variam pouco entre os grupos — a experiência de entrega e atendimento é o que decide.</a:t>
+            </a:r>
+          </a:p>
+        </p:txBody>
+      </p:sp>
+      <p:sp>
+        <p:nvSpPr>
+          <p:cNvPr id="40" name="TextBox 39"/>
+          <p:cNvSpPr txBox="1"/>
+          <p:nvPr/>
+        </p:nvSpPr>
+        <p:spPr>
+          <a:xfrm>
+            <a:off x="658368" y="6501384"/>
+            <a:ext cx="3749039" cy="164592"/>
+          </a:xfrm>
+          <a:prstGeom prst="rect">
+            <a:avLst/>
+          </a:prstGeom>
+          <a:noFill/>
+        </p:spPr>
+        <p:txBody>
+          <a:bodyPr wrap="square" anchor="t" lIns="0" rIns="0" tIns="0" bIns="0">
+            <a:spAutoFit/>
+          </a:bodyPr>
+          <a:lstStyle/>
+          <a:p>
+            <a:pPr algn="l"/>
+            <a:r>
+              <a:rPr sz="850" b="0" i="0">
+                <a:solidFill>
+                  <a:srgbClr val="98A2B3"/>
+                </a:solidFill>
+                <a:latin typeface="Aptos"/>
+              </a:rPr>
+              <a:t>NPS Preditivo  ·  Tech Challenge Fase 1</a:t>
+            </a:r>
+          </a:p>
+        </p:txBody>
+      </p:sp>
+      <p:sp>
+        <p:nvSpPr>
+          <p:cNvPr id="41" name="TextBox 40"/>
+          <p:cNvSpPr txBox="1"/>
+          <p:nvPr/>
+        </p:nvSpPr>
+        <p:spPr>
+          <a:xfrm>
+            <a:off x="11137392" y="6473952"/>
+            <a:ext cx="384048" cy="164592"/>
+          </a:xfrm>
+          <a:prstGeom prst="rect">
+            <a:avLst/>
+          </a:prstGeom>
+          <a:noFill/>
+        </p:spPr>
+        <p:txBody>
+          <a:bodyPr wrap="square" anchor="t" lIns="0" rIns="0" tIns="0" bIns="0">
+            <a:spAutoFit/>
+          </a:bodyPr>
+          <a:lstStyle/>
+          <a:p>
+            <a:pPr algn="r"/>
+            <a:r>
+              <a:rPr sz="850" b="0" i="0">
+                <a:solidFill>
+                  <a:srgbClr val="98A2B3"/>
+                </a:solidFill>
+                <a:latin typeface="Aptos"/>
+              </a:rPr>
+              <a:t>08</a:t>
+            </a:r>
+          </a:p>
+        </p:txBody>
+      </p:sp>
+    </p:spTree>
+  </p:cSld>
+  <p:clrMapOvr>
+    <a:masterClrMapping/>
+  </p:clrMapOvr>
+</p:sld>
+</file>
+
+<file path=ppt/slides/slide9.xml><?xml version="1.0" encoding="utf-8"?>
+<p:sld xmlns:a="http://schemas.openxmlformats.org/drawingml/2006/main" xmlns:p="http://schemas.openxmlformats.org/presentationml/2006/main" xmlns:r="http://schemas.openxmlformats.org/officeDocument/2006/relationships">
+  <p:cSld>
+    <p:bg>
+      <p:bgPr>
+        <a:solidFill>
+          <a:srgbClr val="091220"/>
+        </a:solidFill>
+        <a:effectLst/>
+      </p:bgPr>
+    </p:bg>
+    <p:spTree>
+      <p:nvGrpSpPr>
+        <p:cNvPr id="1" name=""/>
+        <p:cNvGrpSpPr/>
+        <p:nvPr/>
+      </p:nvGrpSpPr>
+      <p:grpSpPr/>
+      <p:sp>
+        <p:nvSpPr>
+          <p:cNvPr id="2" name="TextBox 1"/>
+          <p:cNvSpPr txBox="1"/>
+          <p:nvPr/>
+        </p:nvSpPr>
+        <p:spPr>
+          <a:xfrm>
+            <a:off x="658368" y="384048"/>
+            <a:ext cx="5943600" cy="201168"/>
+          </a:xfrm>
+          <a:prstGeom prst="rect">
+            <a:avLst/>
+          </a:prstGeom>
+          <a:noFill/>
+        </p:spPr>
+        <p:txBody>
+          <a:bodyPr wrap="square" anchor="t" lIns="0" rIns="0" tIns="0" bIns="0">
+            <a:spAutoFit/>
+          </a:bodyPr>
+          <a:lstStyle/>
+          <a:p>
+            <a:pPr algn="l"/>
+            <a:r>
+              <a:rPr sz="950" b="1" i="0">
+                <a:solidFill>
+                  <a:srgbClr val="25C7E5"/>
+                </a:solidFill>
+                <a:latin typeface="Aptos"/>
+              </a:rPr>
+              <a:t>PARTE 4 · RECOMENDAÇÕES</a:t>
+            </a:r>
+          </a:p>
+        </p:txBody>
+      </p:sp>
+      <p:sp>
+        <p:nvSpPr>
+          <p:cNvPr id="3" name="TextBox 2"/>
+          <p:cNvSpPr txBox="1"/>
+          <p:nvPr/>
+        </p:nvSpPr>
+        <p:spPr>
+          <a:xfrm>
+            <a:off x="658368" y="786384"/>
+            <a:ext cx="10881360" cy="749808"/>
+          </a:xfrm>
+          <a:prstGeom prst="rect">
+            <a:avLst/>
+          </a:prstGeom>
+          <a:noFill/>
+        </p:spPr>
+        <p:txBody>
+          <a:bodyPr wrap="square" anchor="t" lIns="0" rIns="0" tIns="0" bIns="0">
+            <a:spAutoFit/>
+          </a:bodyPr>
+          <a:lstStyle/>
+          <a:p>
+            <a:pPr algn="l">
+              <a:lnSpc>
+                <a:spcPct val="102000"/>
+              </a:lnSpc>
+            </a:pPr>
+            <a:r>
+              <a:rPr sz="2900" b="1" i="0">
+                <a:solidFill>
+                  <a:srgbClr val="FFFFFF"/>
+                </a:solidFill>
+                <a:latin typeface="Aptos Display"/>
+              </a:rPr>
+              <a:t>Três ações operacionais, priorizadas pelo impacto nos dados.</a:t>
+            </a:r>
+          </a:p>
+        </p:txBody>
+      </p:sp>
+      <p:sp>
+        <p:nvSpPr>
+          <p:cNvPr id="4" name="TextBox 3"/>
+          <p:cNvSpPr txBox="1"/>
+          <p:nvPr/>
+        </p:nvSpPr>
+        <p:spPr>
+          <a:xfrm>
+            <a:off x="658368" y="1572768"/>
+            <a:ext cx="10607040" cy="365760"/>
+          </a:xfrm>
+          <a:prstGeom prst="rect">
+            <a:avLst/>
+          </a:prstGeom>
+          <a:noFill/>
+        </p:spPr>
+        <p:txBody>
+          <a:bodyPr wrap="square" anchor="t" lIns="0" rIns="0" tIns="0" bIns="0">
+            <a:spAutoFit/>
+          </a:bodyPr>
+          <a:lstStyle/>
+          <a:p>
+            <a:pPr algn="l"/>
+            <a:r>
+              <a:rPr sz="1210" b="0" i="0">
+                <a:solidFill>
+                  <a:srgbClr val="9FB0C6"/>
+                </a:solidFill>
+                <a:latin typeface="Aptos"/>
+              </a:rPr>
+              <a:t>Construídas a partir dos achados da EDA — independentes do modelo preditivo (item opcional).</a:t>
+            </a:r>
+          </a:p>
+        </p:txBody>
+      </p:sp>
+      <p:sp>
+        <p:nvSpPr>
+          <p:cNvPr id="5" name="Rounded Rectangle 4"/>
+          <p:cNvSpPr/>
+          <p:nvPr/>
+        </p:nvSpPr>
+        <p:spPr>
+          <a:xfrm>
+            <a:off x="658368" y="2212848"/>
+            <a:ext cx="10881360" cy="1207008"/>
+          </a:xfrm>
+          <a:prstGeom prst="roundRect">
+            <a:avLst>
+              <a:gd name="adj" fmla="val 5000"/>
+            </a:avLst>
+          </a:prstGeom>
+          <a:solidFill>
+            <a:srgbClr val="0D1A2B"/>
+          </a:solidFill>
+          <a:ln>
+            <a:noFill/>
+          </a:ln>
+          <a:effectLst/>
+        </p:spPr>
+        <p:style>
+          <a:lnRef idx="1">
+            <a:schemeClr val="accent1"/>
+          </a:lnRef>
+          <a:fillRef idx="3">
+            <a:schemeClr val="accent1"/>
+          </a:fillRef>
+          <a:effectRef idx="2">
+            <a:schemeClr val="accent1"/>
+          </a:effectRef>
+          <a:fontRef idx="minor">
+            <a:schemeClr val="lt1"/>
+          </a:fontRef>
+        </p:style>
+        <p:txBody>
+          <a:bodyPr rtlCol="0" anchor="ctr"/>
+          <a:lstStyle/>
+          <a:p>
+            <a:pPr algn="ctr"/>
+          </a:p>
+        </p:txBody>
+      </p:sp>
+      <p:sp>
+        <p:nvSpPr>
+          <p:cNvPr id="6" name="Oval 5"/>
+          <p:cNvSpPr/>
+          <p:nvPr/>
+        </p:nvSpPr>
+        <p:spPr>
+          <a:xfrm>
+            <a:off x="932688" y="2395728"/>
+            <a:ext cx="457200" cy="457200"/>
+          </a:xfrm>
+          <a:prstGeom prst="ellipse">
+            <a:avLst/>
+          </a:prstGeom>
+          <a:solidFill>
+            <a:srgbClr val="25C7E5"/>
+          </a:solidFill>
+          <a:ln>
+            <a:noFill/>
+          </a:ln>
+          <a:effectLst/>
+        </p:spPr>
+        <p:style>
+          <a:lnRef idx="1">
+            <a:schemeClr val="accent1"/>
+          </a:lnRef>
+          <a:fillRef idx="3">
+            <a:schemeClr val="accent1"/>
+          </a:fillRef>
+          <a:effectRef idx="2">
+            <a:schemeClr val="accent1"/>
+          </a:effectRef>
+          <a:fontRef idx="minor">
+            <a:schemeClr val="lt1"/>
+          </a:fontRef>
+        </p:style>
+        <p:txBody>
+          <a:bodyPr rtlCol="0" anchor="ctr"/>
+          <a:lstStyle/>
+          <a:p>
+            <a:pPr algn="ctr"/>
+          </a:p>
+        </p:txBody>
+      </p:sp>
+      <p:sp>
+        <p:nvSpPr>
+          <p:cNvPr id="7" name="TextBox 6"/>
+          <p:cNvSpPr txBox="1"/>
+          <p:nvPr/>
+        </p:nvSpPr>
+        <p:spPr>
+          <a:xfrm>
+            <a:off x="932688" y="2478024"/>
+            <a:ext cx="457200" cy="256032"/>
+          </a:xfrm>
+          <a:prstGeom prst="rect">
+            <a:avLst/>
+          </a:prstGeom>
+          <a:noFill/>
+        </p:spPr>
+        <p:txBody>
+          <a:bodyPr wrap="square" anchor="t" lIns="0" rIns="0" tIns="0" bIns="0">
+            <a:spAutoFit/>
+          </a:bodyPr>
+          <a:lstStyle/>
+          <a:p>
+            <a:pPr algn="ctr"/>
+            <a:r>
+              <a:rPr sz="1150" b="1" i="0">
+                <a:solidFill>
+                  <a:srgbClr val="091220"/>
+                </a:solidFill>
+                <a:latin typeface="Aptos"/>
+              </a:rPr>
+              <a:t>01</a:t>
+            </a:r>
+          </a:p>
+        </p:txBody>
+      </p:sp>
+      <p:sp>
+        <p:nvSpPr>
+          <p:cNvPr id="8" name="TextBox 7"/>
+          <p:cNvSpPr txBox="1"/>
+          <p:nvPr/>
+        </p:nvSpPr>
+        <p:spPr>
+          <a:xfrm>
+            <a:off x="1627632" y="2359152"/>
+            <a:ext cx="5852160" cy="274320"/>
+          </a:xfrm>
+          <a:prstGeom prst="rect">
+            <a:avLst/>
+          </a:prstGeom>
+          <a:noFill/>
+        </p:spPr>
+        <p:txBody>
+          <a:bodyPr wrap="square" anchor="t" lIns="0" rIns="0" tIns="0" bIns="0">
+            <a:spAutoFit/>
+          </a:bodyPr>
+          <a:lstStyle/>
+          <a:p>
+            <a:pPr algn="l"/>
+            <a:r>
+              <a:rPr sz="1550" b="1" i="0">
+                <a:solidFill>
+                  <a:srgbClr val="FFFFFF"/>
+                </a:solidFill>
+                <a:latin typeface="Aptos Display"/>
+              </a:rPr>
+              <a:t>Eliminar o primeiro dia de atraso</a:t>
+            </a:r>
+          </a:p>
+        </p:txBody>
+      </p:sp>
+      <p:sp>
+        <p:nvSpPr>
+          <p:cNvPr id="9" name="Rounded Rectangle 8"/>
+          <p:cNvSpPr/>
+          <p:nvPr/>
+        </p:nvSpPr>
+        <p:spPr>
+          <a:xfrm>
+            <a:off x="7818120" y="2395728"/>
+            <a:ext cx="2651760" cy="256032"/>
+          </a:xfrm>
+          <a:prstGeom prst="roundRect">
+            <a:avLst>
+              <a:gd name="adj" fmla="val 50000"/>
+            </a:avLst>
+          </a:prstGeom>
+          <a:solidFill>
+            <a:srgbClr val="14243A"/>
+          </a:solidFill>
+          <a:ln>
+            <a:noFill/>
+          </a:ln>
+          <a:effectLst/>
+        </p:spPr>
+        <p:style>
+          <a:lnRef idx="1">
+            <a:schemeClr val="accent1"/>
+          </a:lnRef>
+          <a:fillRef idx="3">
+            <a:schemeClr val="accent1"/>
+          </a:fillRef>
+          <a:effectRef idx="2">
+            <a:schemeClr val="accent1"/>
+          </a:effectRef>
+          <a:fontRef idx="minor">
+            <a:schemeClr val="lt1"/>
+          </a:fontRef>
+        </p:style>
+        <p:txBody>
+          <a:bodyPr rtlCol="0" anchor="ctr"/>
+          <a:lstStyle/>
+          <a:p>
+            <a:pPr algn="ctr"/>
+          </a:p>
+        </p:txBody>
+      </p:sp>
+      <p:sp>
+        <p:nvSpPr>
+          <p:cNvPr id="10" name="TextBox 9"/>
+          <p:cNvSpPr txBox="1"/>
+          <p:nvPr/>
+        </p:nvSpPr>
+        <p:spPr>
+          <a:xfrm>
+            <a:off x="7818120" y="2414016"/>
+            <a:ext cx="2651760" cy="219456"/>
+          </a:xfrm>
+          <a:prstGeom prst="rect">
+            <a:avLst/>
+          </a:prstGeom>
+          <a:noFill/>
+        </p:spPr>
+        <p:txBody>
+          <a:bodyPr wrap="square" anchor="t" lIns="0" rIns="0" tIns="0" bIns="0">
+            <a:spAutoFit/>
+          </a:bodyPr>
+          <a:lstStyle/>
+          <a:p>
+            <a:pPr algn="ctr"/>
+            <a:r>
+              <a:rPr sz="860" b="1" i="0">
+                <a:solidFill>
+                  <a:srgbClr val="87E5F2"/>
+                </a:solidFill>
+                <a:latin typeface="Aptos"/>
+              </a:rPr>
+              <a:t>PRIORIDADE MÁXIMA</a:t>
+            </a:r>
+          </a:p>
+        </p:txBody>
+      </p:sp>
+      <p:sp>
+        <p:nvSpPr>
+          <p:cNvPr id="11" name="TextBox 10"/>
+          <p:cNvSpPr txBox="1"/>
+          <p:nvPr/>
+        </p:nvSpPr>
+        <p:spPr>
+          <a:xfrm>
+            <a:off x="1627632" y="2688336"/>
+            <a:ext cx="8823960" cy="621792"/>
+          </a:xfrm>
+          <a:prstGeom prst="rect">
+            <a:avLst/>
+          </a:prstGeom>
+          <a:noFill/>
+        </p:spPr>
+        <p:txBody>
+          <a:bodyPr wrap="square" anchor="t" lIns="0" rIns="0" tIns="0" bIns="0">
+            <a:spAutoFit/>
+          </a:bodyPr>
+          <a:lstStyle/>
+          <a:p>
+            <a:pPr algn="l">
+              <a:lnSpc>
+                <a:spcPct val="110000"/>
+              </a:lnSpc>
+            </a:pPr>
+            <a:r>
+              <a:rPr sz="1010" b="0" i="0">
+                <a:solidFill>
+                  <a:srgbClr val="A6B4C6"/>
+                </a:solidFill>
+                <a:latin typeface="Aptos"/>
+              </a:rPr>
+              <a:t>O salto de 0 para 1 dia de atraso já derruba o NPS em 1,3 pontos e aumenta os detratores em 22,3 p.p. Ação: revisar SLA logístico e gargalos da última milha.</a:t>
+            </a:r>
+          </a:p>
+        </p:txBody>
+      </p:sp>
+      <p:sp>
+        <p:nvSpPr>
+          <p:cNvPr id="12" name="Rounded Rectangle 11"/>
+          <p:cNvSpPr/>
+          <p:nvPr/>
+        </p:nvSpPr>
+        <p:spPr>
+          <a:xfrm>
+            <a:off x="658368" y="3566160"/>
+            <a:ext cx="10881360" cy="1207008"/>
+          </a:xfrm>
+          <a:prstGeom prst="roundRect">
+            <a:avLst>
+              <a:gd name="adj" fmla="val 5000"/>
+            </a:avLst>
+          </a:prstGeom>
+          <a:solidFill>
+            <a:srgbClr val="0D1A2B"/>
+          </a:solidFill>
+          <a:ln>
+            <a:noFill/>
+          </a:ln>
+          <a:effectLst/>
+        </p:spPr>
+        <p:style>
+          <a:lnRef idx="1">
+            <a:schemeClr val="accent1"/>
+          </a:lnRef>
+          <a:fillRef idx="3">
+            <a:schemeClr val="accent1"/>
+          </a:fillRef>
+          <a:effectRef idx="2">
+            <a:schemeClr val="accent1"/>
+          </a:effectRef>
+          <a:fontRef idx="minor">
+            <a:schemeClr val="lt1"/>
+          </a:fontRef>
+        </p:style>
+        <p:txBody>
+          <a:bodyPr rtlCol="0" anchor="ctr"/>
+          <a:lstStyle/>
+          <a:p>
+            <a:pPr algn="ctr"/>
+          </a:p>
+        </p:txBody>
+      </p:sp>
+      <p:sp>
+        <p:nvSpPr>
+          <p:cNvPr id="13" name="Oval 12"/>
+          <p:cNvSpPr/>
+          <p:nvPr/>
+        </p:nvSpPr>
+        <p:spPr>
+          <a:xfrm>
+            <a:off x="932688" y="3749039"/>
+            <a:ext cx="457200" cy="457200"/>
+          </a:xfrm>
+          <a:prstGeom prst="ellipse">
+            <a:avLst/>
+          </a:prstGeom>
+          <a:solidFill>
+            <a:srgbClr val="25C7E5"/>
+          </a:solidFill>
+          <a:ln>
+            <a:noFill/>
+          </a:ln>
+          <a:effectLst/>
+        </p:spPr>
+        <p:style>
+          <a:lnRef idx="1">
+            <a:schemeClr val="accent1"/>
+          </a:lnRef>
+          <a:fillRef idx="3">
+            <a:schemeClr val="accent1"/>
+          </a:fillRef>
+          <a:effectRef idx="2">
+            <a:schemeClr val="accent1"/>
+          </a:effectRef>
+          <a:fontRef idx="minor">
+            <a:schemeClr val="lt1"/>
+          </a:fontRef>
+        </p:style>
+        <p:txBody>
+          <a:bodyPr rtlCol="0" anchor="ctr"/>
+          <a:lstStyle/>
+          <a:p>
+            <a:pPr algn="ctr"/>
+          </a:p>
+        </p:txBody>
+      </p:sp>
+      <p:sp>
+        <p:nvSpPr>
+          <p:cNvPr id="14" name="TextBox 13"/>
+          <p:cNvSpPr txBox="1"/>
+          <p:nvPr/>
+        </p:nvSpPr>
+        <p:spPr>
+          <a:xfrm>
+            <a:off x="932688" y="3831335"/>
+            <a:ext cx="457200" cy="256032"/>
+          </a:xfrm>
+          <a:prstGeom prst="rect">
+            <a:avLst/>
+          </a:prstGeom>
+          <a:noFill/>
+        </p:spPr>
+        <p:txBody>
+          <a:bodyPr wrap="square" anchor="t" lIns="0" rIns="0" tIns="0" bIns="0">
+            <a:spAutoFit/>
+          </a:bodyPr>
+          <a:lstStyle/>
+          <a:p>
+            <a:pPr algn="ctr"/>
+            <a:r>
+              <a:rPr sz="1150" b="1" i="0">
+                <a:solidFill>
+                  <a:srgbClr val="091220"/>
+                </a:solidFill>
+                <a:latin typeface="Aptos"/>
+              </a:rPr>
+              <a:t>02</a:t>
+            </a:r>
+          </a:p>
+        </p:txBody>
+      </p:sp>
+      <p:sp>
+        <p:nvSpPr>
+          <p:cNvPr id="15" name="TextBox 14"/>
+          <p:cNvSpPr txBox="1"/>
+          <p:nvPr/>
+        </p:nvSpPr>
+        <p:spPr>
+          <a:xfrm>
+            <a:off x="1627632" y="3712463"/>
+            <a:ext cx="5852160" cy="274320"/>
+          </a:xfrm>
+          <a:prstGeom prst="rect">
+            <a:avLst/>
+          </a:prstGeom>
+          <a:noFill/>
+        </p:spPr>
+        <p:txBody>
+          <a:bodyPr wrap="square" anchor="t" lIns="0" rIns="0" tIns="0" bIns="0">
+            <a:spAutoFit/>
+          </a:bodyPr>
+          <a:lstStyle/>
+          <a:p>
+            <a:pPr algn="l"/>
+            <a:r>
+              <a:rPr sz="1550" b="1" i="0">
+                <a:solidFill>
+                  <a:srgbClr val="FFFFFF"/>
+                </a:solidFill>
+                <a:latin typeface="Aptos Display"/>
+              </a:rPr>
+              <a:t>Resolver antes de o cliente reclamar</a:t>
+            </a:r>
+          </a:p>
+        </p:txBody>
+      </p:sp>
+      <p:sp>
+        <p:nvSpPr>
+          <p:cNvPr id="16" name="Rounded Rectangle 15"/>
+          <p:cNvSpPr/>
+          <p:nvPr/>
+        </p:nvSpPr>
+        <p:spPr>
+          <a:xfrm>
+            <a:off x="7818120" y="3749039"/>
+            <a:ext cx="2651760" cy="256032"/>
+          </a:xfrm>
+          <a:prstGeom prst="roundRect">
+            <a:avLst>
+              <a:gd name="adj" fmla="val 50000"/>
+            </a:avLst>
+          </a:prstGeom>
+          <a:solidFill>
+            <a:srgbClr val="14243A"/>
+          </a:solidFill>
+          <a:ln>
+            <a:noFill/>
+          </a:ln>
+          <a:effectLst/>
+        </p:spPr>
+        <p:style>
+          <a:lnRef idx="1">
+            <a:schemeClr val="accent1"/>
+          </a:lnRef>
+          <a:fillRef idx="3">
+            <a:schemeClr val="accent1"/>
+          </a:fillRef>
+          <a:effectRef idx="2">
+            <a:schemeClr val="accent1"/>
+          </a:effectRef>
+          <a:fontRef idx="minor">
+            <a:schemeClr val="lt1"/>
+          </a:fontRef>
+        </p:style>
+        <p:txBody>
+          <a:bodyPr rtlCol="0" anchor="ctr"/>
+          <a:lstStyle/>
+          <a:p>
+            <a:pPr algn="ctr"/>
+          </a:p>
+        </p:txBody>
+      </p:sp>
+      <p:sp>
+        <p:nvSpPr>
+          <p:cNvPr id="17" name="TextBox 16"/>
+          <p:cNvSpPr txBox="1"/>
+          <p:nvPr/>
+        </p:nvSpPr>
+        <p:spPr>
+          <a:xfrm>
+            <a:off x="7818120" y="3767328"/>
+            <a:ext cx="2651760" cy="219456"/>
+          </a:xfrm>
+          <a:prstGeom prst="rect">
+            <a:avLst/>
+          </a:prstGeom>
+          <a:noFill/>
+        </p:spPr>
+        <p:txBody>
+          <a:bodyPr wrap="square" anchor="t" lIns="0" rIns="0" tIns="0" bIns="0">
+            <a:spAutoFit/>
+          </a:bodyPr>
+          <a:lstStyle/>
+          <a:p>
+            <a:pPr algn="ctr"/>
+            <a:r>
+              <a:rPr sz="860" b="1" i="0">
+                <a:solidFill>
+                  <a:srgbClr val="87E5F2"/>
+                </a:solidFill>
+                <a:latin typeface="Aptos"/>
+              </a:rPr>
+              <a:t>PRIORIDADE ALTA</a:t>
+            </a:r>
+          </a:p>
+        </p:txBody>
+      </p:sp>
+      <p:sp>
+        <p:nvSpPr>
+          <p:cNvPr id="18" name="TextBox 17"/>
+          <p:cNvSpPr txBox="1"/>
+          <p:nvPr/>
+        </p:nvSpPr>
+        <p:spPr>
+          <a:xfrm>
+            <a:off x="1627632" y="4041648"/>
+            <a:ext cx="8823960" cy="621792"/>
+          </a:xfrm>
+          <a:prstGeom prst="rect">
+            <a:avLst/>
+          </a:prstGeom>
+          <a:noFill/>
+        </p:spPr>
+        <p:txBody>
+          <a:bodyPr wrap="square" anchor="t" lIns="0" rIns="0" tIns="0" bIns="0">
+            <a:spAutoFit/>
+          </a:bodyPr>
+          <a:lstStyle/>
+          <a:p>
+            <a:pPr algn="l">
+              <a:lnSpc>
+                <a:spcPct val="110000"/>
+              </a:lnSpc>
+            </a:pPr>
+            <a:r>
+              <a:rPr sz="1010" b="0" i="0">
+                <a:solidFill>
+                  <a:srgbClr val="A6B4C6"/>
+                </a:solidFill>
+                <a:latin typeface="Aptos"/>
+              </a:rPr>
+              <a:t>Detratores fazem 75,3% mais contatos e 71,0% mais reclamações do que não-detratores. Ação: notificar e agir assim que um atraso é detectado, antes da reclamação.</a:t>
+            </a:r>
+          </a:p>
+        </p:txBody>
+      </p:sp>
+      <p:sp>
+        <p:nvSpPr>
+          <p:cNvPr id="19" name="Rounded Rectangle 18"/>
+          <p:cNvSpPr/>
+          <p:nvPr/>
+        </p:nvSpPr>
+        <p:spPr>
+          <a:xfrm>
+            <a:off x="658368" y="4919472"/>
+            <a:ext cx="10881360" cy="1207008"/>
+          </a:xfrm>
+          <a:prstGeom prst="roundRect">
+            <a:avLst>
+              <a:gd name="adj" fmla="val 5000"/>
+            </a:avLst>
+          </a:prstGeom>
+          <a:solidFill>
+            <a:srgbClr val="0D1A2B"/>
+          </a:solidFill>
+          <a:ln>
+            <a:noFill/>
+          </a:ln>
+          <a:effectLst/>
+        </p:spPr>
+        <p:style>
+          <a:lnRef idx="1">
+            <a:schemeClr val="accent1"/>
+          </a:lnRef>
+          <a:fillRef idx="3">
+            <a:schemeClr val="accent1"/>
+          </a:fillRef>
+          <a:effectRef idx="2">
+            <a:schemeClr val="accent1"/>
+          </a:effectRef>
+          <a:fontRef idx="minor">
+            <a:schemeClr val="lt1"/>
+          </a:fontRef>
+        </p:style>
+        <p:txBody>
+          <a:bodyPr rtlCol="0" anchor="ctr"/>
+          <a:lstStyle/>
+          <a:p>
+            <a:pPr algn="ctr"/>
+          </a:p>
+        </p:txBody>
+      </p:sp>
+      <p:sp>
+        <p:nvSpPr>
+          <p:cNvPr id="20" name="Oval 19"/>
+          <p:cNvSpPr/>
+          <p:nvPr/>
+        </p:nvSpPr>
+        <p:spPr>
+          <a:xfrm>
+            <a:off x="932688" y="5102352"/>
+            <a:ext cx="457200" cy="457200"/>
+          </a:xfrm>
+          <a:prstGeom prst="ellipse">
+            <a:avLst/>
+          </a:prstGeom>
+          <a:solidFill>
+            <a:srgbClr val="25C7E5"/>
+          </a:solidFill>
+          <a:ln>
+            <a:noFill/>
+          </a:ln>
+          <a:effectLst/>
+        </p:spPr>
+        <p:style>
+          <a:lnRef idx="1">
+            <a:schemeClr val="accent1"/>
+          </a:lnRef>
+          <a:fillRef idx="3">
+            <a:schemeClr val="accent1"/>
+          </a:fillRef>
+          <a:effectRef idx="2">
+            <a:schemeClr val="accent1"/>
+          </a:effectRef>
+          <a:fontRef idx="minor">
+            <a:schemeClr val="lt1"/>
+          </a:fontRef>
+        </p:style>
+        <p:txBody>
+          <a:bodyPr rtlCol="0" anchor="ctr"/>
+          <a:lstStyle/>
+          <a:p>
+            <a:pPr algn="ctr"/>
+          </a:p>
+        </p:txBody>
+      </p:sp>
+      <p:sp>
+        <p:nvSpPr>
+          <p:cNvPr id="21" name="TextBox 20"/>
+          <p:cNvSpPr txBox="1"/>
+          <p:nvPr/>
+        </p:nvSpPr>
+        <p:spPr>
+          <a:xfrm>
+            <a:off x="932688" y="5184648"/>
+            <a:ext cx="457200" cy="256032"/>
+          </a:xfrm>
+          <a:prstGeom prst="rect">
+            <a:avLst/>
+          </a:prstGeom>
+          <a:noFill/>
+        </p:spPr>
+        <p:txBody>
+          <a:bodyPr wrap="square" anchor="t" lIns="0" rIns="0" tIns="0" bIns="0">
+            <a:spAutoFit/>
+          </a:bodyPr>
+          <a:lstStyle/>
+          <a:p>
+            <a:pPr algn="ctr"/>
+            <a:r>
+              <a:rPr sz="1150" b="1" i="0">
+                <a:solidFill>
+                  <a:srgbClr val="091220"/>
+                </a:solidFill>
+                <a:latin typeface="Aptos"/>
+              </a:rPr>
+              <a:t>03</a:t>
+            </a:r>
+          </a:p>
+        </p:txBody>
+      </p:sp>
+      <p:sp>
+        <p:nvSpPr>
+          <p:cNvPr id="22" name="TextBox 21"/>
+          <p:cNvSpPr txBox="1"/>
+          <p:nvPr/>
+        </p:nvSpPr>
+        <p:spPr>
+          <a:xfrm>
+            <a:off x="1627632" y="5065776"/>
+            <a:ext cx="5852160" cy="274320"/>
+          </a:xfrm>
+          <a:prstGeom prst="rect">
+            <a:avLst/>
+          </a:prstGeom>
+          <a:noFill/>
+        </p:spPr>
+        <p:txBody>
+          <a:bodyPr wrap="square" anchor="t" lIns="0" rIns="0" tIns="0" bIns="0">
+            <a:spAutoFit/>
+          </a:bodyPr>
+          <a:lstStyle/>
+          <a:p>
+            <a:pPr algn="l"/>
+            <a:r>
+              <a:rPr sz="1550" b="1" i="0">
+                <a:solidFill>
+                  <a:srgbClr val="FFFFFF"/>
+                </a:solidFill>
+                <a:latin typeface="Aptos Display"/>
+              </a:rPr>
+              <a:t>Acompanhar recompra como termômetro</a:t>
+            </a:r>
+          </a:p>
+        </p:txBody>
+      </p:sp>
+      <p:sp>
+        <p:nvSpPr>
+          <p:cNvPr id="23" name="Rounded Rectangle 22"/>
+          <p:cNvSpPr/>
+          <p:nvPr/>
+        </p:nvSpPr>
+        <p:spPr>
+          <a:xfrm>
+            <a:off x="7818120" y="5102352"/>
+            <a:ext cx="2651760" cy="256032"/>
+          </a:xfrm>
+          <a:prstGeom prst="roundRect">
+            <a:avLst>
+              <a:gd name="adj" fmla="val 50000"/>
+            </a:avLst>
+          </a:prstGeom>
+          <a:solidFill>
+            <a:srgbClr val="14243A"/>
+          </a:solidFill>
+          <a:ln>
+            <a:noFill/>
+          </a:ln>
+          <a:effectLst/>
+        </p:spPr>
+        <p:style>
+          <a:lnRef idx="1">
+            <a:schemeClr val="accent1"/>
+          </a:lnRef>
+          <a:fillRef idx="3">
+            <a:schemeClr val="accent1"/>
+          </a:fillRef>
+          <a:effectRef idx="2">
+            <a:schemeClr val="accent1"/>
+          </a:effectRef>
+          <a:fontRef idx="minor">
+            <a:schemeClr val="lt1"/>
+          </a:fontRef>
+        </p:style>
+        <p:txBody>
+          <a:bodyPr rtlCol="0" anchor="ctr"/>
+          <a:lstStyle/>
+          <a:p>
+            <a:pPr algn="ctr"/>
+          </a:p>
+        </p:txBody>
+      </p:sp>
+      <p:sp>
+        <p:nvSpPr>
+          <p:cNvPr id="24" name="TextBox 23"/>
+          <p:cNvSpPr txBox="1"/>
+          <p:nvPr/>
+        </p:nvSpPr>
+        <p:spPr>
+          <a:xfrm>
+            <a:off x="7818120" y="5120640"/>
+            <a:ext cx="2651760" cy="219456"/>
+          </a:xfrm>
+          <a:prstGeom prst="rect">
+            <a:avLst/>
+          </a:prstGeom>
+          <a:noFill/>
+        </p:spPr>
+        <p:txBody>
+          <a:bodyPr wrap="square" anchor="t" lIns="0" rIns="0" tIns="0" bIns="0">
+            <a:spAutoFit/>
+          </a:bodyPr>
+          <a:lstStyle/>
+          <a:p>
+            <a:pPr algn="ctr"/>
+            <a:r>
+              <a:rPr sz="860" b="1" i="0">
+                <a:solidFill>
+                  <a:srgbClr val="87E5F2"/>
+                </a:solidFill>
+                <a:latin typeface="Aptos"/>
+              </a:rPr>
+              <a:t>PRIORIDADE CONTÍNUA</a:t>
+            </a:r>
+          </a:p>
+        </p:txBody>
+      </p:sp>
+      <p:sp>
+        <p:nvSpPr>
+          <p:cNvPr id="25" name="TextBox 24"/>
+          <p:cNvSpPr txBox="1"/>
+          <p:nvPr/>
+        </p:nvSpPr>
+        <p:spPr>
+          <a:xfrm>
+            <a:off x="1627632" y="5394960"/>
+            <a:ext cx="8823960" cy="621792"/>
+          </a:xfrm>
+          <a:prstGeom prst="rect">
+            <a:avLst/>
+          </a:prstGeom>
+          <a:noFill/>
+        </p:spPr>
+        <p:txBody>
+          <a:bodyPr wrap="square" anchor="t" lIns="0" rIns="0" tIns="0" bIns="0">
+            <a:spAutoFit/>
+          </a:bodyPr>
+          <a:lstStyle/>
+          <a:p>
+            <a:pPr algn="l">
+              <a:lnSpc>
+                <a:spcPct val="110000"/>
+              </a:lnSpc>
+            </a:pPr>
+            <a:r>
+              <a:rPr sz="1010" b="0" i="0">
+                <a:solidFill>
+                  <a:srgbClr val="A6B4C6"/>
+                </a:solidFill>
+                <a:latin typeface="Aptos"/>
+              </a:rPr>
+              <a:t>100% dos promotores recompram em 30 dias; 0% dos detratores recompram. Ação: monitorar recompra e CSAT interno como indicadores antecipados de satisfação.</a:t>
+            </a:r>
+          </a:p>
+        </p:txBody>
+      </p:sp>
+      <p:sp>
+        <p:nvSpPr>
+          <p:cNvPr id="26" name="TextBox 25"/>
+          <p:cNvSpPr txBox="1"/>
+          <p:nvPr/>
+        </p:nvSpPr>
+        <p:spPr>
+          <a:xfrm>
+            <a:off x="658368" y="6501384"/>
+            <a:ext cx="3749039" cy="164592"/>
+          </a:xfrm>
+          <a:prstGeom prst="rect">
+            <a:avLst/>
+          </a:prstGeom>
+          <a:noFill/>
+        </p:spPr>
+        <p:txBody>
+          <a:bodyPr wrap="square" anchor="t" lIns="0" rIns="0" tIns="0" bIns="0">
+            <a:spAutoFit/>
+          </a:bodyPr>
+          <a:lstStyle/>
+          <a:p>
+            <a:pPr algn="l"/>
+            <a:r>
+              <a:rPr sz="850" b="0" i="0">
+                <a:solidFill>
+                  <a:srgbClr val="718399"/>
+                </a:solidFill>
+                <a:latin typeface="Aptos"/>
+              </a:rPr>
+              <a:t>NPS Preditivo  ·  Tech Challenge Fase 1</a:t>
+            </a:r>
+          </a:p>
+        </p:txBody>
+      </p:sp>
+      <p:sp>
+        <p:nvSpPr>
+          <p:cNvPr id="27" name="TextBox 26"/>
+          <p:cNvSpPr txBox="1"/>
+          <p:nvPr/>
+        </p:nvSpPr>
+        <p:spPr>
+          <a:xfrm>
+            <a:off x="11137392" y="6473952"/>
+            <a:ext cx="384048" cy="164592"/>
+          </a:xfrm>
+          <a:prstGeom prst="rect">
+            <a:avLst/>
+          </a:prstGeom>
+          <a:noFill/>
+        </p:spPr>
+        <p:txBody>
+          <a:bodyPr wrap="square" anchor="t" lIns="0" rIns="0" tIns="0" bIns="0">
+            <a:spAutoFit/>
+          </a:bodyPr>
+          <a:lstStyle/>
+          <a:p>
+            <a:pPr algn="r"/>
+            <a:r>
+              <a:rPr sz="850" b="0" i="0">
+                <a:solidFill>
+                  <a:srgbClr val="718399"/>
+                </a:solidFill>
+                <a:latin typeface="Aptos"/>
+              </a:rPr>
+              <a:t>09</a:t>
+            </a:r>
           </a:p>
         </p:txBody>
       </p:sp>

--- a/Tech_Challenge_Fase1.pptx
+++ b/Tech_Challenge_Fase1.pptx
@@ -7501,7 +7501,7 @@
                 </a:solidFill>
                 <a:latin typeface="Aptos"/>
               </a:rPr>
-              <a:t>o padrão atraso → reclamação → detrator é consistente nos dados, mas não foi testado em um experimento controlado.</a:t>
+              <a:t>Atraso, reclamação e nota baixa andam juntos nos dados — mas isso não prova, sozinho, que um causa o outro.</a:t>
             </a:r>
           </a:p>
         </p:txBody>
@@ -7673,7 +7673,7 @@
                 </a:solidFill>
                 <a:latin typeface="Aptos"/>
               </a:rPr>
-              <a:t>os dados não incorporam sazonalidade, concorrência ou tipo de produto vendido.</a:t>
+              <a:t>Os dados são de um período fixo e não mostram época do ano, concorrência ou tipo de produto vendido.</a:t>
             </a:r>
           </a:p>
         </p:txBody>
@@ -7845,7 +7845,7 @@
                 </a:solidFill>
                 <a:latin typeface="Aptos"/>
               </a:rPr>
-              <a:t>83,1% dos pedidos são detratores, o que exige cautela ao validar conclusões sobre a minoria de promotores.</a:t>
+              <a:t>Só 106 pedidos (4,8%) são de promotores — poucos casos para afirmar com certeza total o que os deixa satisfeitos.</a:t>
             </a:r>
           </a:p>
         </p:txBody>

--- a/Tech_Challenge_Fase1.pptx
+++ b/Tech_Challenge_Fase1.pptx
@@ -8,6 +8,7 @@
     <p:notesMasterId r:id="rId6"/>
   </p:notesMasterIdLst>
   <p:sldIdLst>
+    <p:sldId id="266" r:id="rId17"/>
     <p:sldId id="256" r:id="rId2"/>
     <p:sldId id="257" r:id="rId3"/>
     <p:sldId id="258" r:id="rId4"/>
@@ -18,6 +19,7 @@
     <p:sldId id="263" r:id="rId14"/>
     <p:sldId id="264" r:id="rId15"/>
     <p:sldId id="265" r:id="rId16"/>
+    <p:sldId id="267" r:id="rId18"/>
   </p:sldIdLst>
   <p:sldSz cx="12192000" cy="6858000"/>
   <p:notesSz cx="6858000" cy="12192000"/>
@@ -8057,6 +8059,974 @@
 </p:sld>
 </file>
 
+<file path=ppt/slides/slide11.xml><?xml version="1.0" encoding="utf-8"?>
+<p:sld xmlns:a="http://schemas.openxmlformats.org/drawingml/2006/main" xmlns:p="http://schemas.openxmlformats.org/presentationml/2006/main" xmlns:r="http://schemas.openxmlformats.org/officeDocument/2006/relationships">
+  <p:cSld>
+    <p:bg>
+      <p:bgPr>
+        <a:solidFill>
+          <a:srgbClr val="091220"/>
+        </a:solidFill>
+        <a:effectLst/>
+      </p:bgPr>
+    </p:bg>
+    <p:spTree>
+      <p:nvGrpSpPr>
+        <p:cNvPr id="1" name=""/>
+        <p:cNvGrpSpPr/>
+        <p:nvPr/>
+      </p:nvGrpSpPr>
+      <p:grpSpPr/>
+      <p:sp>
+        <p:nvSpPr>
+          <p:cNvPr id="2" name="TextBox 1"/>
+          <p:cNvSpPr txBox="1"/>
+          <p:nvPr/>
+        </p:nvSpPr>
+        <p:spPr>
+          <a:xfrm>
+            <a:off x="658368" y="777240"/>
+            <a:ext cx="5943600" cy="219456"/>
+          </a:xfrm>
+          <a:prstGeom prst="rect">
+            <a:avLst/>
+          </a:prstGeom>
+          <a:noFill/>
+        </p:spPr>
+        <p:txBody>
+          <a:bodyPr wrap="square" anchor="t" lIns="0" rIns="0" tIns="0" bIns="0">
+            <a:spAutoFit/>
+          </a:bodyPr>
+          <a:lstStyle/>
+          <a:p>
+            <a:pPr algn="l"/>
+            <a:r>
+              <a:rPr sz="1000" b="1" i="0">
+                <a:solidFill>
+                  <a:srgbClr val="25C7E5"/>
+                </a:solidFill>
+                <a:latin typeface="Aptos"/>
+              </a:rPr>
+              <a:t>POS TECH  ·  TECH CHALLENGE FASE 1</a:t>
+            </a:r>
+          </a:p>
+        </p:txBody>
+      </p:sp>
+      <p:sp>
+        <p:nvSpPr>
+          <p:cNvPr id="3" name="TextBox 2"/>
+          <p:cNvSpPr txBox="1"/>
+          <p:nvPr/>
+        </p:nvSpPr>
+        <p:spPr>
+          <a:xfrm>
+            <a:off x="640080" y="2331720"/>
+            <a:ext cx="7315200" cy="1051560"/>
+          </a:xfrm>
+          <a:prstGeom prst="rect">
+            <a:avLst/>
+          </a:prstGeom>
+          <a:noFill/>
+        </p:spPr>
+        <p:txBody>
+          <a:bodyPr wrap="square" anchor="t" lIns="0" rIns="0" tIns="0" bIns="0">
+            <a:spAutoFit/>
+          </a:bodyPr>
+          <a:lstStyle/>
+          <a:p>
+            <a:pPr algn="l"/>
+            <a:r>
+              <a:rPr sz="5800" b="1" i="0">
+                <a:solidFill>
+                  <a:srgbClr val="FFFFFF"/>
+                </a:solidFill>
+                <a:latin typeface="Aptos Display"/>
+              </a:rPr>
+              <a:t>NPS Preditivo</a:t>
+            </a:r>
+          </a:p>
+        </p:txBody>
+      </p:sp>
+      <p:sp>
+        <p:nvSpPr>
+          <p:cNvPr id="4" name="TextBox 3"/>
+          <p:cNvSpPr txBox="1"/>
+          <p:nvPr/>
+        </p:nvSpPr>
+        <p:spPr>
+          <a:xfrm>
+            <a:off x="658368" y="3520440"/>
+            <a:ext cx="6675120" cy="685800"/>
+          </a:xfrm>
+          <a:prstGeom prst="rect">
+            <a:avLst/>
+          </a:prstGeom>
+          <a:noFill/>
+        </p:spPr>
+        <p:txBody>
+          <a:bodyPr wrap="square" anchor="t" lIns="0" rIns="0" tIns="0" bIns="0">
+            <a:spAutoFit/>
+          </a:bodyPr>
+          <a:lstStyle/>
+          <a:p>
+            <a:pPr algn="l">
+              <a:lnSpc>
+                <a:spcPct val="120000"/>
+              </a:lnSpc>
+            </a:pPr>
+            <a:r>
+              <a:rPr sz="1450" b="0" i="0">
+                <a:solidFill>
+                  <a:srgbClr val="9FB0C6"/>
+                </a:solidFill>
+                <a:latin typeface="Aptos"/>
+              </a:rPr>
+              <a:t>Fatores operacionais que explicam a satisfação do cliente — e como agir antes de o NPS cair.</a:t>
+            </a:r>
+          </a:p>
+        </p:txBody>
+      </p:sp>
+      <p:cxnSp>
+        <p:nvCxnSpPr>
+          <p:cNvPr id="5" name="Connector 4"/>
+          <p:cNvCxnSpPr/>
+          <p:nvPr/>
+        </p:nvCxnSpPr>
+        <p:spPr>
+          <a:xfrm>
+            <a:off x="667512" y="4434840"/>
+            <a:ext cx="6647688" cy="0"/>
+          </a:xfrm>
+          <a:prstGeom prst="line">
+            <a:avLst/>
+          </a:prstGeom>
+          <a:ln w="9525">
+            <a:solidFill>
+              <a:srgbClr val="263951"/>
+            </a:solidFill>
+          </a:ln>
+          <a:effectLst/>
+        </p:spPr>
+        <p:style>
+          <a:lnRef idx="2">
+            <a:schemeClr val="accent1"/>
+          </a:lnRef>
+          <a:fillRef idx="0">
+            <a:schemeClr val="accent1"/>
+          </a:fillRef>
+          <a:effectRef idx="1">
+            <a:schemeClr val="accent1"/>
+          </a:effectRef>
+          <a:fontRef idx="minor">
+            <a:schemeClr val="tx1"/>
+          </a:fontRef>
+        </p:style>
+      </p:cxnSp>
+      <p:sp>
+        <p:nvSpPr>
+          <p:cNvPr id="6" name="TextBox 5"/>
+          <p:cNvSpPr txBox="1"/>
+          <p:nvPr/>
+        </p:nvSpPr>
+        <p:spPr>
+          <a:xfrm>
+            <a:off x="658368" y="4645152"/>
+            <a:ext cx="1828800" cy="201168"/>
+          </a:xfrm>
+          <a:prstGeom prst="rect">
+            <a:avLst/>
+          </a:prstGeom>
+          <a:noFill/>
+        </p:spPr>
+        <p:txBody>
+          <a:bodyPr wrap="square" anchor="t" lIns="0" rIns="0" tIns="0" bIns="0">
+            <a:spAutoFit/>
+          </a:bodyPr>
+          <a:lstStyle/>
+          <a:p>
+            <a:pPr algn="l"/>
+            <a:r>
+              <a:rPr sz="940" b="1" i="0">
+                <a:solidFill>
+                  <a:srgbClr val="25C7E5"/>
+                </a:solidFill>
+                <a:latin typeface="Aptos"/>
+              </a:rPr>
+              <a:t>EQUIPE</a:t>
+            </a:r>
+          </a:p>
+        </p:txBody>
+      </p:sp>
+      <p:sp>
+        <p:nvSpPr>
+          <p:cNvPr id="7" name="TextBox 6"/>
+          <p:cNvSpPr txBox="1"/>
+          <p:nvPr/>
+        </p:nvSpPr>
+        <p:spPr>
+          <a:xfrm>
+            <a:off x="658368" y="4901184"/>
+            <a:ext cx="6766560" cy="502920"/>
+          </a:xfrm>
+          <a:prstGeom prst="rect">
+            <a:avLst/>
+          </a:prstGeom>
+          <a:noFill/>
+        </p:spPr>
+        <p:txBody>
+          <a:bodyPr wrap="square" anchor="t" lIns="0" rIns="0" tIns="0" bIns="0">
+            <a:spAutoFit/>
+          </a:bodyPr>
+          <a:lstStyle/>
+          <a:p>
+            <a:pPr algn="l">
+              <a:lnSpc>
+                <a:spcPct val="125000"/>
+              </a:lnSpc>
+            </a:pPr>
+            <a:r>
+              <a:rPr sz="1220" b="0" i="0">
+                <a:solidFill>
+                  <a:srgbClr val="FFFFFF"/>
+                </a:solidFill>
+                <a:latin typeface="Aptos"/>
+              </a:rPr>
+              <a:t>Amanda Alves de Lima Santos  ·  Fábio da Silva Costa  ·  Gabriel Victor  ·  Vanessa Partala</a:t>
+            </a:r>
+          </a:p>
+        </p:txBody>
+      </p:sp>
+      <p:cxnSp>
+        <p:nvCxnSpPr>
+          <p:cNvPr id="8" name="Connector 7"/>
+          <p:cNvCxnSpPr/>
+          <p:nvPr/>
+        </p:nvCxnSpPr>
+        <p:spPr>
+          <a:xfrm>
+            <a:off x="8275320" y="2331720"/>
+            <a:ext cx="0" cy="2377440"/>
+          </a:xfrm>
+          <a:prstGeom prst="line">
+            <a:avLst/>
+          </a:prstGeom>
+          <a:ln w="9525">
+            <a:solidFill>
+              <a:srgbClr val="263951"/>
+            </a:solidFill>
+          </a:ln>
+          <a:effectLst/>
+        </p:spPr>
+        <p:style>
+          <a:lnRef idx="2">
+            <a:schemeClr val="accent1"/>
+          </a:lnRef>
+          <a:fillRef idx="0">
+            <a:schemeClr val="accent1"/>
+          </a:fillRef>
+          <a:effectRef idx="1">
+            <a:schemeClr val="accent1"/>
+          </a:effectRef>
+          <a:fontRef idx="minor">
+            <a:schemeClr val="tx1"/>
+          </a:fontRef>
+        </p:style>
+      </p:cxnSp>
+      <p:sp>
+        <p:nvSpPr>
+          <p:cNvPr id="9" name="TextBox 8"/>
+          <p:cNvSpPr txBox="1"/>
+          <p:nvPr/>
+        </p:nvSpPr>
+        <p:spPr>
+          <a:xfrm>
+            <a:off x="8641080" y="2377440"/>
+            <a:ext cx="2743200" cy="219456"/>
+          </a:xfrm>
+          <a:prstGeom prst="rect">
+            <a:avLst/>
+          </a:prstGeom>
+          <a:noFill/>
+        </p:spPr>
+        <p:txBody>
+          <a:bodyPr wrap="square" anchor="t" lIns="0" rIns="0" tIns="0" bIns="0">
+            <a:spAutoFit/>
+          </a:bodyPr>
+          <a:lstStyle/>
+          <a:p>
+            <a:pPr algn="l"/>
+            <a:r>
+              <a:rPr sz="940" b="1" i="0">
+                <a:solidFill>
+                  <a:srgbClr val="25C7E5"/>
+                </a:solidFill>
+                <a:latin typeface="Aptos"/>
+              </a:rPr>
+              <a:t>ESCOPO DA ANÁLISE</a:t>
+            </a:r>
+          </a:p>
+        </p:txBody>
+      </p:sp>
+      <p:sp>
+        <p:nvSpPr>
+          <p:cNvPr id="10" name="TextBox 9"/>
+          <p:cNvSpPr txBox="1"/>
+          <p:nvPr/>
+        </p:nvSpPr>
+        <p:spPr>
+          <a:xfrm>
+            <a:off x="8613648" y="2670048"/>
+            <a:ext cx="2743200" cy="685800"/>
+          </a:xfrm>
+          <a:prstGeom prst="rect">
+            <a:avLst/>
+          </a:prstGeom>
+          <a:noFill/>
+        </p:spPr>
+        <p:txBody>
+          <a:bodyPr wrap="square" anchor="t" lIns="0" rIns="0" tIns="0" bIns="0">
+            <a:spAutoFit/>
+          </a:bodyPr>
+          <a:lstStyle/>
+          <a:p>
+            <a:pPr algn="l"/>
+            <a:r>
+              <a:rPr sz="4400" b="1" i="0">
+                <a:solidFill>
+                  <a:srgbClr val="FFFFFF"/>
+                </a:solidFill>
+                <a:latin typeface="Aptos Display"/>
+              </a:rPr>
+              <a:t>2.202</a:t>
+            </a:r>
+          </a:p>
+        </p:txBody>
+      </p:sp>
+      <p:sp>
+        <p:nvSpPr>
+          <p:cNvPr id="11" name="TextBox 10"/>
+          <p:cNvSpPr txBox="1"/>
+          <p:nvPr/>
+        </p:nvSpPr>
+        <p:spPr>
+          <a:xfrm>
+            <a:off x="8641080" y="3401568"/>
+            <a:ext cx="2743200" cy="237744"/>
+          </a:xfrm>
+          <a:prstGeom prst="rect">
+            <a:avLst/>
+          </a:prstGeom>
+          <a:noFill/>
+        </p:spPr>
+        <p:txBody>
+          <a:bodyPr wrap="square" anchor="t" lIns="0" rIns="0" tIns="0" bIns="0">
+            <a:spAutoFit/>
+          </a:bodyPr>
+          <a:lstStyle/>
+          <a:p>
+            <a:pPr algn="l"/>
+            <a:r>
+              <a:rPr sz="1150" b="0" i="0">
+                <a:solidFill>
+                  <a:srgbClr val="9FB0C6"/>
+                </a:solidFill>
+                <a:latin typeface="Aptos"/>
+              </a:rPr>
+              <a:t>pedidos tratados</a:t>
+            </a:r>
+          </a:p>
+        </p:txBody>
+      </p:sp>
+      <p:sp>
+        <p:nvSpPr>
+          <p:cNvPr id="12" name="Rounded Rectangle 11"/>
+          <p:cNvSpPr/>
+          <p:nvPr/>
+        </p:nvSpPr>
+        <p:spPr>
+          <a:xfrm>
+            <a:off x="8641080" y="3767328"/>
+            <a:ext cx="2331720" cy="310896"/>
+          </a:xfrm>
+          <a:prstGeom prst="roundRect">
+            <a:avLst>
+              <a:gd name="adj" fmla="val 50000"/>
+            </a:avLst>
+          </a:prstGeom>
+          <a:solidFill>
+            <a:srgbClr val="331A25"/>
+          </a:solidFill>
+          <a:ln>
+            <a:noFill/>
+          </a:ln>
+          <a:effectLst/>
+        </p:spPr>
+        <p:style>
+          <a:lnRef idx="1">
+            <a:schemeClr val="accent1"/>
+          </a:lnRef>
+          <a:fillRef idx="3">
+            <a:schemeClr val="accent1"/>
+          </a:fillRef>
+          <a:effectRef idx="2">
+            <a:schemeClr val="accent1"/>
+          </a:effectRef>
+          <a:fontRef idx="minor">
+            <a:schemeClr val="lt1"/>
+          </a:fontRef>
+        </p:style>
+        <p:txBody>
+          <a:bodyPr rtlCol="0" anchor="ctr"/>
+          <a:lstStyle/>
+          <a:p>
+            <a:pPr algn="ctr"/>
+          </a:p>
+        </p:txBody>
+      </p:sp>
+      <p:sp>
+        <p:nvSpPr>
+          <p:cNvPr id="13" name="TextBox 12"/>
+          <p:cNvSpPr txBox="1"/>
+          <p:nvPr/>
+        </p:nvSpPr>
+        <p:spPr>
+          <a:xfrm>
+            <a:off x="8641080" y="3785615"/>
+            <a:ext cx="2331720" cy="274320"/>
+          </a:xfrm>
+          <a:prstGeom prst="rect">
+            <a:avLst/>
+          </a:prstGeom>
+          <a:noFill/>
+        </p:spPr>
+        <p:txBody>
+          <a:bodyPr wrap="square" anchor="t" lIns="0" rIns="0" tIns="0" bIns="0">
+            <a:spAutoFit/>
+          </a:bodyPr>
+          <a:lstStyle/>
+          <a:p>
+            <a:pPr algn="ctr"/>
+            <a:r>
+              <a:rPr sz="930" b="1" i="0">
+                <a:solidFill>
+                  <a:srgbClr val="F6A5AA"/>
+                </a:solidFill>
+                <a:latin typeface="Aptos"/>
+              </a:rPr>
+              <a:t>83,1% são detratores hoje</a:t>
+            </a:r>
+          </a:p>
+        </p:txBody>
+      </p:sp>
+      <p:sp>
+        <p:nvSpPr>
+          <p:cNvPr id="14" name="TextBox 13"/>
+          <p:cNvSpPr txBox="1"/>
+          <p:nvPr/>
+        </p:nvSpPr>
+        <p:spPr>
+          <a:xfrm>
+            <a:off x="658368" y="6501384"/>
+            <a:ext cx="5486400" cy="182880"/>
+          </a:xfrm>
+          <a:prstGeom prst="rect">
+            <a:avLst/>
+          </a:prstGeom>
+          <a:noFill/>
+        </p:spPr>
+        <p:txBody>
+          <a:bodyPr wrap="square" anchor="t" lIns="0" rIns="0" tIns="0" bIns="0">
+            <a:spAutoFit/>
+          </a:bodyPr>
+          <a:lstStyle/>
+          <a:p>
+            <a:pPr algn="l"/>
+            <a:r>
+              <a:rPr sz="850" b="0" i="0">
+                <a:solidFill>
+                  <a:srgbClr val="718399"/>
+                </a:solidFill>
+                <a:latin typeface="Aptos"/>
+              </a:rPr>
+              <a:t>Case NPS Preditivo  ·  Business Understanding &amp; Data Analysis</a:t>
+            </a:r>
+          </a:p>
+        </p:txBody>
+      </p:sp>
+    </p:spTree>
+  </p:cSld>
+  <p:clrMapOvr>
+    <a:masterClrMapping/>
+  </p:clrMapOvr>
+</p:sld>
+</file>
+
+<file path=ppt/slides/slide12.xml><?xml version="1.0" encoding="utf-8"?>
+<p:sld xmlns:a="http://schemas.openxmlformats.org/drawingml/2006/main" xmlns:p="http://schemas.openxmlformats.org/presentationml/2006/main" xmlns:r="http://schemas.openxmlformats.org/officeDocument/2006/relationships">
+  <p:cSld>
+    <p:bg>
+      <p:bgPr>
+        <a:solidFill>
+          <a:srgbClr val="091220"/>
+        </a:solidFill>
+        <a:effectLst/>
+      </p:bgPr>
+    </p:bg>
+    <p:spTree>
+      <p:nvGrpSpPr>
+        <p:cNvPr id="1" name=""/>
+        <p:cNvGrpSpPr/>
+        <p:nvPr/>
+      </p:nvGrpSpPr>
+      <p:grpSpPr/>
+      <p:sp>
+        <p:nvSpPr>
+          <p:cNvPr id="2" name="TextBox 1"/>
+          <p:cNvSpPr txBox="1"/>
+          <p:nvPr/>
+        </p:nvSpPr>
+        <p:spPr>
+          <a:xfrm>
+            <a:off x="658368" y="685800"/>
+            <a:ext cx="5943600" cy="219456"/>
+          </a:xfrm>
+          <a:prstGeom prst="rect">
+            <a:avLst/>
+          </a:prstGeom>
+          <a:noFill/>
+        </p:spPr>
+        <p:txBody>
+          <a:bodyPr wrap="square" anchor="t" lIns="0" rIns="0" tIns="0" bIns="0">
+            <a:spAutoFit/>
+          </a:bodyPr>
+          <a:lstStyle/>
+          <a:p>
+            <a:pPr algn="l"/>
+            <a:r>
+              <a:rPr sz="1000" b="1" i="0">
+                <a:solidFill>
+                  <a:srgbClr val="25C7E5"/>
+                </a:solidFill>
+                <a:latin typeface="Aptos"/>
+              </a:rPr>
+              <a:t>OBRIGADO</a:t>
+            </a:r>
+          </a:p>
+        </p:txBody>
+      </p:sp>
+      <p:sp>
+        <p:nvSpPr>
+          <p:cNvPr id="3" name="TextBox 2"/>
+          <p:cNvSpPr txBox="1"/>
+          <p:nvPr/>
+        </p:nvSpPr>
+        <p:spPr>
+          <a:xfrm>
+            <a:off x="640080" y="1417320"/>
+            <a:ext cx="8686800" cy="960120"/>
+          </a:xfrm>
+          <a:prstGeom prst="rect">
+            <a:avLst/>
+          </a:prstGeom>
+          <a:noFill/>
+        </p:spPr>
+        <p:txBody>
+          <a:bodyPr wrap="square" anchor="t" lIns="0" rIns="0" tIns="0" bIns="0">
+            <a:spAutoFit/>
+          </a:bodyPr>
+          <a:lstStyle/>
+          <a:p>
+            <a:pPr algn="l">
+              <a:lnSpc>
+                <a:spcPct val="105000"/>
+              </a:lnSpc>
+            </a:pPr>
+            <a:r>
+              <a:rPr sz="3400" b="1" i="0">
+                <a:solidFill>
+                  <a:srgbClr val="FFFFFF"/>
+                </a:solidFill>
+                <a:latin typeface="Aptos Display"/>
+              </a:rPr>
+              <a:t>Sabemos o que muda o NPS. Agora é decidir o que priorizar.</a:t>
+            </a:r>
+          </a:p>
+        </p:txBody>
+      </p:sp>
+      <p:sp>
+        <p:nvSpPr>
+          <p:cNvPr id="4" name="TextBox 3"/>
+          <p:cNvSpPr txBox="1"/>
+          <p:nvPr/>
+        </p:nvSpPr>
+        <p:spPr>
+          <a:xfrm>
+            <a:off x="658368" y="2606040"/>
+            <a:ext cx="8961120" cy="457200"/>
+          </a:xfrm>
+          <a:prstGeom prst="rect">
+            <a:avLst/>
+          </a:prstGeom>
+          <a:noFill/>
+        </p:spPr>
+        <p:txBody>
+          <a:bodyPr wrap="square" anchor="t" lIns="0" rIns="0" tIns="0" bIns="0">
+            <a:spAutoFit/>
+          </a:bodyPr>
+          <a:lstStyle/>
+          <a:p>
+            <a:pPr algn="l">
+              <a:lnSpc>
+                <a:spcPct val="120000"/>
+              </a:lnSpc>
+            </a:pPr>
+            <a:r>
+              <a:rPr sz="1300" b="0" i="0">
+                <a:solidFill>
+                  <a:srgbClr val="9FB0C6"/>
+                </a:solidFill>
+                <a:latin typeface="Aptos"/>
+              </a:rPr>
+              <a:t>Notebooks, base tratada e este material completo estão no repositório público do projeto.</a:t>
+            </a:r>
+          </a:p>
+        </p:txBody>
+      </p:sp>
+      <p:sp>
+        <p:nvSpPr>
+          <p:cNvPr id="5" name="Rounded Rectangle 4"/>
+          <p:cNvSpPr/>
+          <p:nvPr/>
+        </p:nvSpPr>
+        <p:spPr>
+          <a:xfrm>
+            <a:off x="658368" y="3429000"/>
+            <a:ext cx="10881360" cy="1417320"/>
+          </a:xfrm>
+          <a:prstGeom prst="roundRect">
+            <a:avLst>
+              <a:gd name="adj" fmla="val 4500"/>
+            </a:avLst>
+          </a:prstGeom>
+          <a:solidFill>
+            <a:srgbClr val="0D1A2B"/>
+          </a:solidFill>
+          <a:ln>
+            <a:noFill/>
+          </a:ln>
+          <a:effectLst/>
+        </p:spPr>
+        <p:style>
+          <a:lnRef idx="1">
+            <a:schemeClr val="accent1"/>
+          </a:lnRef>
+          <a:fillRef idx="3">
+            <a:schemeClr val="accent1"/>
+          </a:fillRef>
+          <a:effectRef idx="2">
+            <a:schemeClr val="accent1"/>
+          </a:effectRef>
+          <a:fontRef idx="minor">
+            <a:schemeClr val="lt1"/>
+          </a:fontRef>
+        </p:style>
+        <p:txBody>
+          <a:bodyPr rtlCol="0" anchor="ctr"/>
+          <a:lstStyle/>
+          <a:p>
+            <a:pPr algn="ctr"/>
+          </a:p>
+        </p:txBody>
+      </p:sp>
+      <p:sp>
+        <p:nvSpPr>
+          <p:cNvPr id="6" name="TextBox 5"/>
+          <p:cNvSpPr txBox="1"/>
+          <p:nvPr/>
+        </p:nvSpPr>
+        <p:spPr>
+          <a:xfrm>
+            <a:off x="960120" y="3666744"/>
+            <a:ext cx="2743200" cy="219456"/>
+          </a:xfrm>
+          <a:prstGeom prst="rect">
+            <a:avLst/>
+          </a:prstGeom>
+          <a:noFill/>
+        </p:spPr>
+        <p:txBody>
+          <a:bodyPr wrap="square" anchor="t" lIns="0" rIns="0" tIns="0" bIns="0">
+            <a:spAutoFit/>
+          </a:bodyPr>
+          <a:lstStyle/>
+          <a:p>
+            <a:pPr algn="l"/>
+            <a:r>
+              <a:rPr sz="940" b="1" i="0">
+                <a:solidFill>
+                  <a:srgbClr val="25C7E5"/>
+                </a:solidFill>
+                <a:latin typeface="Aptos"/>
+              </a:rPr>
+              <a:t>REPOSITÓRIO GITHUB</a:t>
+            </a:r>
+          </a:p>
+        </p:txBody>
+      </p:sp>
+      <p:sp>
+        <p:nvSpPr>
+          <p:cNvPr id="7" name="TextBox 6"/>
+          <p:cNvSpPr txBox="1"/>
+          <p:nvPr/>
+        </p:nvSpPr>
+        <p:spPr>
+          <a:xfrm>
+            <a:off x="960120" y="3941064"/>
+            <a:ext cx="9966960" cy="365760"/>
+          </a:xfrm>
+          <a:prstGeom prst="rect">
+            <a:avLst/>
+          </a:prstGeom>
+          <a:noFill/>
+        </p:spPr>
+        <p:txBody>
+          <a:bodyPr wrap="square" anchor="t" lIns="0" rIns="0" tIns="0" bIns="0">
+            <a:spAutoFit/>
+          </a:bodyPr>
+          <a:lstStyle/>
+          <a:p>
+            <a:pPr algn="l"/>
+            <a:r>
+              <a:rPr sz="1400" b="1" i="0">
+                <a:solidFill>
+                  <a:srgbClr val="87E5F2"/>
+                </a:solidFill>
+                <a:latin typeface="Aptos"/>
+              </a:rPr>
+              <a:t>github.com/Fabio-Costa986/Business-understanding-and-data-analysis</a:t>
+            </a:r>
+          </a:p>
+        </p:txBody>
+      </p:sp>
+      <p:sp>
+        <p:nvSpPr>
+          <p:cNvPr id="8" name="TextBox 7"/>
+          <p:cNvSpPr txBox="1"/>
+          <p:nvPr/>
+        </p:nvSpPr>
+        <p:spPr>
+          <a:xfrm>
+            <a:off x="960120" y="4361688"/>
+            <a:ext cx="9966960" cy="320040"/>
+          </a:xfrm>
+          <a:prstGeom prst="rect">
+            <a:avLst/>
+          </a:prstGeom>
+          <a:noFill/>
+        </p:spPr>
+        <p:txBody>
+          <a:bodyPr wrap="square" anchor="t" lIns="0" rIns="0" tIns="0" bIns="0">
+            <a:spAutoFit/>
+          </a:bodyPr>
+          <a:lstStyle/>
+          <a:p>
+            <a:pPr algn="l"/>
+            <a:r>
+              <a:rPr sz="1050" b="0" i="0">
+                <a:solidFill>
+                  <a:srgbClr val="A6B4C6"/>
+                </a:solidFill>
+                <a:latin typeface="Aptos"/>
+              </a:rPr>
+              <a:t>Tratamento de dados · EDA completa · slides · vídeo executivo</a:t>
+            </a:r>
+          </a:p>
+        </p:txBody>
+      </p:sp>
+      <p:sp>
+        <p:nvSpPr>
+          <p:cNvPr id="9" name="TextBox 8"/>
+          <p:cNvSpPr txBox="1"/>
+          <p:nvPr/>
+        </p:nvSpPr>
+        <p:spPr>
+          <a:xfrm>
+            <a:off x="658368" y="5166360"/>
+            <a:ext cx="8686800" cy="365760"/>
+          </a:xfrm>
+          <a:prstGeom prst="rect">
+            <a:avLst/>
+          </a:prstGeom>
+          <a:noFill/>
+        </p:spPr>
+        <p:txBody>
+          <a:bodyPr wrap="square" anchor="t" lIns="0" rIns="0" tIns="0" bIns="0">
+            <a:spAutoFit/>
+          </a:bodyPr>
+          <a:lstStyle/>
+          <a:p>
+            <a:pPr algn="l"/>
+            <a:r>
+              <a:rPr sz="1800" b="1" i="0">
+                <a:solidFill>
+                  <a:srgbClr val="FFFFFF"/>
+                </a:solidFill>
+                <a:latin typeface="Aptos Display"/>
+              </a:rPr>
+              <a:t>Perguntas?</a:t>
+            </a:r>
+          </a:p>
+        </p:txBody>
+      </p:sp>
+      <p:cxnSp>
+        <p:nvCxnSpPr>
+          <p:cNvPr id="10" name="Connector 9"/>
+          <p:cNvCxnSpPr/>
+          <p:nvPr/>
+        </p:nvCxnSpPr>
+        <p:spPr>
+          <a:xfrm>
+            <a:off x="667512" y="5989320"/>
+            <a:ext cx="10853928" cy="0"/>
+          </a:xfrm>
+          <a:prstGeom prst="line">
+            <a:avLst/>
+          </a:prstGeom>
+          <a:ln w="9525">
+            <a:solidFill>
+              <a:srgbClr val="263951"/>
+            </a:solidFill>
+          </a:ln>
+          <a:effectLst/>
+        </p:spPr>
+        <p:style>
+          <a:lnRef idx="2">
+            <a:schemeClr val="accent1"/>
+          </a:lnRef>
+          <a:fillRef idx="0">
+            <a:schemeClr val="accent1"/>
+          </a:fillRef>
+          <a:effectRef idx="1">
+            <a:schemeClr val="accent1"/>
+          </a:effectRef>
+          <a:fontRef idx="minor">
+            <a:schemeClr val="tx1"/>
+          </a:fontRef>
+        </p:style>
+      </p:cxnSp>
+      <p:sp>
+        <p:nvSpPr>
+          <p:cNvPr id="11" name="TextBox 10"/>
+          <p:cNvSpPr txBox="1"/>
+          <p:nvPr/>
+        </p:nvSpPr>
+        <p:spPr>
+          <a:xfrm>
+            <a:off x="658368" y="6144768"/>
+            <a:ext cx="8229600" cy="274320"/>
+          </a:xfrm>
+          <a:prstGeom prst="rect">
+            <a:avLst/>
+          </a:prstGeom>
+          <a:noFill/>
+        </p:spPr>
+        <p:txBody>
+          <a:bodyPr wrap="square" anchor="t" lIns="0" rIns="0" tIns="0" bIns="0">
+            <a:spAutoFit/>
+          </a:bodyPr>
+          <a:lstStyle/>
+          <a:p>
+            <a:pPr algn="l"/>
+            <a:r>
+              <a:rPr sz="1050" b="0" i="0">
+                <a:solidFill>
+                  <a:srgbClr val="9FB0C6"/>
+                </a:solidFill>
+                <a:latin typeface="Aptos"/>
+              </a:rPr>
+              <a:t>Amanda Alves de Lima Santos  ·  Fábio da Silva Costa  ·  Gabriel Victor  ·  Vanessa Partala</a:t>
+            </a:r>
+          </a:p>
+        </p:txBody>
+      </p:sp>
+      <p:sp>
+        <p:nvSpPr>
+          <p:cNvPr id="12" name="TextBox 11"/>
+          <p:cNvSpPr txBox="1"/>
+          <p:nvPr/>
+        </p:nvSpPr>
+        <p:spPr>
+          <a:xfrm>
+            <a:off x="658368" y="6501384"/>
+            <a:ext cx="3749039" cy="164592"/>
+          </a:xfrm>
+          <a:prstGeom prst="rect">
+            <a:avLst/>
+          </a:prstGeom>
+          <a:noFill/>
+        </p:spPr>
+        <p:txBody>
+          <a:bodyPr wrap="square" anchor="t" lIns="0" rIns="0" tIns="0" bIns="0">
+            <a:spAutoFit/>
+          </a:bodyPr>
+          <a:lstStyle/>
+          <a:p>
+            <a:pPr algn="l"/>
+            <a:r>
+              <a:rPr sz="850" b="0" i="0">
+                <a:solidFill>
+                  <a:srgbClr val="718399"/>
+                </a:solidFill>
+                <a:latin typeface="Aptos"/>
+              </a:rPr>
+              <a:t>NPS Preditivo  ·  Tech Challenge Fase 1</a:t>
+            </a:r>
+          </a:p>
+        </p:txBody>
+      </p:sp>
+      <p:sp>
+        <p:nvSpPr>
+          <p:cNvPr id="13" name="TextBox 12"/>
+          <p:cNvSpPr txBox="1"/>
+          <p:nvPr/>
+        </p:nvSpPr>
+        <p:spPr>
+          <a:xfrm>
+            <a:off x="11137392" y="6473952"/>
+            <a:ext cx="384048" cy="164592"/>
+          </a:xfrm>
+          <a:prstGeom prst="rect">
+            <a:avLst/>
+          </a:prstGeom>
+          <a:noFill/>
+        </p:spPr>
+        <p:txBody>
+          <a:bodyPr wrap="square" anchor="t" lIns="0" rIns="0" tIns="0" bIns="0">
+            <a:spAutoFit/>
+          </a:bodyPr>
+          <a:lstStyle/>
+          <a:p>
+            <a:pPr algn="r"/>
+            <a:r>
+              <a:rPr sz="850" b="0" i="0">
+                <a:solidFill>
+                  <a:srgbClr val="718399"/>
+                </a:solidFill>
+                <a:latin typeface="Aptos"/>
+              </a:rPr>
+              <a:t>11</a:t>
+            </a:r>
+          </a:p>
+        </p:txBody>
+      </p:sp>
+    </p:spTree>
+  </p:cSld>
+  <p:clrMapOvr>
+    <a:masterClrMapping/>
+  </p:clrMapOvr>
+</p:sld>
+</file>
+
 <file path=ppt/slides/slide2.xml><?xml version="1.0" encoding="utf-8"?>
 <p:sld xmlns:a="http://schemas.openxmlformats.org/drawingml/2006/main" xmlns:r="http://schemas.openxmlformats.org/officeDocument/2006/relationships" xmlns:p="http://schemas.openxmlformats.org/presentationml/2006/main">
   <p:cSld>

--- a/Tech_Challenge_Fase1.pptx
+++ b/Tech_Challenge_Fase1.pptx
@@ -4823,7 +4823,7 @@
 </file>
 
 <file path=ppt/slides/slide1.xml><?xml version="1.0" encoding="utf-8"?>
-<p:sld xmlns:a="http://schemas.openxmlformats.org/drawingml/2006/main" xmlns:r="http://schemas.openxmlformats.org/officeDocument/2006/relationships" xmlns:p="http://schemas.openxmlformats.org/presentationml/2006/main">
+<p:sld xmlns:a="http://schemas.openxmlformats.org/drawingml/2006/main" xmlns:p="http://schemas.openxmlformats.org/presentationml/2006/main" xmlns:r="http://schemas.openxmlformats.org/officeDocument/2006/relationships">
   <p:cSld>
     <p:bg>
       <p:bgPr>
@@ -4839,462 +4839,377 @@
         <p:cNvGrpSpPr/>
         <p:nvPr/>
       </p:nvGrpSpPr>
-      <p:grpSpPr>
-        <a:xfrm>
-          <a:off x="0" y="0"/>
-          <a:ext cx="0" cy="0"/>
-          <a:chOff x="0" y="0"/>
-          <a:chExt cx="0" cy="0"/>
-        </a:xfrm>
-      </p:grpSpPr>
-      <p:sp>
-        <p:nvSpPr>
-          <p:cNvPr id="10" name="Text 0"/>
-          <p:cNvSpPr/>
-          <p:nvPr/>
-        </p:nvSpPr>
-        <p:spPr>
-          <a:xfrm>
-            <a:off x="658440" y="384120"/>
-            <a:ext cx="4388760" cy="200880"/>
-          </a:xfrm>
-          <a:prstGeom prst="rect">
-            <a:avLst/>
-          </a:prstGeom>
-          <a:noFill/>
-          <a:ln w="0">
-            <a:noFill/>
-          </a:ln>
+      <p:grpSpPr/>
+      <p:sp>
+        <p:nvSpPr>
+          <p:cNvPr id="2" name="TextBox 1"/>
+          <p:cNvSpPr txBox="1"/>
+          <p:nvPr/>
+        </p:nvSpPr>
+        <p:spPr>
+          <a:xfrm>
+            <a:off x="658368" y="777240"/>
+            <a:ext cx="5943600" cy="219456"/>
+          </a:xfrm>
+          <a:prstGeom prst="rect">
+            <a:avLst/>
+          </a:prstGeom>
+          <a:noFill/>
+        </p:spPr>
+        <p:txBody>
+          <a:bodyPr wrap="square" anchor="t" lIns="0" rIns="0" tIns="0" bIns="0">
+            <a:spAutoFit/>
+          </a:bodyPr>
+          <a:lstStyle/>
+          <a:p>
+            <a:pPr algn="l"/>
+            <a:r>
+              <a:rPr sz="1000" b="1" i="0">
+                <a:solidFill>
+                  <a:srgbClr val="25C7E5"/>
+                </a:solidFill>
+                <a:latin typeface="Aptos"/>
+              </a:rPr>
+              <a:t>POS TECH  ·  TECH CHALLENGE FASE 1</a:t>
+            </a:r>
+          </a:p>
+        </p:txBody>
+      </p:sp>
+      <p:sp>
+        <p:nvSpPr>
+          <p:cNvPr id="3" name="TextBox 2"/>
+          <p:cNvSpPr txBox="1"/>
+          <p:nvPr/>
+        </p:nvSpPr>
+        <p:spPr>
+          <a:xfrm>
+            <a:off x="640080" y="2331720"/>
+            <a:ext cx="7315200" cy="1051560"/>
+          </a:xfrm>
+          <a:prstGeom prst="rect">
+            <a:avLst/>
+          </a:prstGeom>
+          <a:noFill/>
+        </p:spPr>
+        <p:txBody>
+          <a:bodyPr wrap="square" anchor="t" lIns="0" rIns="0" tIns="0" bIns="0">
+            <a:spAutoFit/>
+          </a:bodyPr>
+          <a:lstStyle/>
+          <a:p>
+            <a:pPr algn="l"/>
+            <a:r>
+              <a:rPr sz="5800" b="1" i="0">
+                <a:solidFill>
+                  <a:srgbClr val="FFFFFF"/>
+                </a:solidFill>
+                <a:latin typeface="Aptos Display"/>
+              </a:rPr>
+              <a:t>NPS Preditivo</a:t>
+            </a:r>
+          </a:p>
+        </p:txBody>
+      </p:sp>
+      <p:sp>
+        <p:nvSpPr>
+          <p:cNvPr id="4" name="TextBox 3"/>
+          <p:cNvSpPr txBox="1"/>
+          <p:nvPr/>
+        </p:nvSpPr>
+        <p:spPr>
+          <a:xfrm>
+            <a:off x="658368" y="3520440"/>
+            <a:ext cx="6675120" cy="685800"/>
+          </a:xfrm>
+          <a:prstGeom prst="rect">
+            <a:avLst/>
+          </a:prstGeom>
+          <a:noFill/>
+        </p:spPr>
+        <p:txBody>
+          <a:bodyPr wrap="square" anchor="t" lIns="0" rIns="0" tIns="0" bIns="0">
+            <a:spAutoFit/>
+          </a:bodyPr>
+          <a:lstStyle/>
+          <a:p>
+            <a:pPr algn="l">
+              <a:lnSpc>
+                <a:spcPct val="120000"/>
+              </a:lnSpc>
+            </a:pPr>
+            <a:r>
+              <a:rPr sz="1450" b="0" i="0">
+                <a:solidFill>
+                  <a:srgbClr val="9FB0C6"/>
+                </a:solidFill>
+                <a:latin typeface="Aptos"/>
+              </a:rPr>
+              <a:t>Fatores operacionais que explicam a satisfação do cliente — e como agir antes de o NPS cair.</a:t>
+            </a:r>
+          </a:p>
+        </p:txBody>
+      </p:sp>
+      <p:cxnSp>
+        <p:nvCxnSpPr>
+          <p:cNvPr id="5" name="Connector 4"/>
+          <p:cNvCxnSpPr/>
+          <p:nvPr/>
+        </p:nvCxnSpPr>
+        <p:spPr>
+          <a:xfrm>
+            <a:off x="667512" y="4434840"/>
+            <a:ext cx="6647688" cy="0"/>
+          </a:xfrm>
+          <a:prstGeom prst="line">
+            <a:avLst/>
+          </a:prstGeom>
+          <a:ln w="9525">
+            <a:solidFill>
+              <a:srgbClr val="263951"/>
+            </a:solidFill>
+          </a:ln>
+          <a:effectLst/>
         </p:spPr>
         <p:style>
-          <a:lnRef idx="0">
-            <a:scrgbClr r="0" g="0" b="0"/>
+          <a:lnRef idx="2">
+            <a:schemeClr val="accent1"/>
           </a:lnRef>
           <a:fillRef idx="0">
-            <a:scrgbClr r="0" g="0" b="0"/>
+            <a:schemeClr val="accent1"/>
           </a:fillRef>
-          <a:effectRef idx="0">
-            <a:scrgbClr r="0" g="0" b="0"/>
+          <a:effectRef idx="1">
+            <a:schemeClr val="accent1"/>
           </a:effectRef>
-          <a:fontRef idx="minor"/>
+          <a:fontRef idx="minor">
+            <a:schemeClr val="tx1"/>
+          </a:fontRef>
         </p:style>
-        <p:txBody>
-          <a:bodyPr lIns="0" tIns="0" rIns="0" bIns="0" anchor="ctr">
-            <a:normAutofit/>
-          </a:bodyPr>
-          <a:lstStyle/>
-          <a:p>
-            <a:pPr defTabSz="914400">
+      </p:cxnSp>
+      <p:sp>
+        <p:nvSpPr>
+          <p:cNvPr id="6" name="TextBox 5"/>
+          <p:cNvSpPr txBox="1"/>
+          <p:nvPr/>
+        </p:nvSpPr>
+        <p:spPr>
+          <a:xfrm>
+            <a:off x="658368" y="4645152"/>
+            <a:ext cx="1828800" cy="201168"/>
+          </a:xfrm>
+          <a:prstGeom prst="rect">
+            <a:avLst/>
+          </a:prstGeom>
+          <a:noFill/>
+        </p:spPr>
+        <p:txBody>
+          <a:bodyPr wrap="square" anchor="t" lIns="0" rIns="0" tIns="0" bIns="0">
+            <a:spAutoFit/>
+          </a:bodyPr>
+          <a:lstStyle/>
+          <a:p>
+            <a:pPr algn="l"/>
+            <a:r>
+              <a:rPr sz="940" b="1" i="0">
+                <a:solidFill>
+                  <a:srgbClr val="25C7E5"/>
+                </a:solidFill>
+                <a:latin typeface="Aptos"/>
+              </a:rPr>
+              <a:t>EQUIPE</a:t>
+            </a:r>
+          </a:p>
+        </p:txBody>
+      </p:sp>
+      <p:sp>
+        <p:nvSpPr>
+          <p:cNvPr id="7" name="TextBox 6"/>
+          <p:cNvSpPr txBox="1"/>
+          <p:nvPr/>
+        </p:nvSpPr>
+        <p:spPr>
+          <a:xfrm>
+            <a:off x="658368" y="4901184"/>
+            <a:ext cx="6766560" cy="502920"/>
+          </a:xfrm>
+          <a:prstGeom prst="rect">
+            <a:avLst/>
+          </a:prstGeom>
+          <a:noFill/>
+        </p:spPr>
+        <p:txBody>
+          <a:bodyPr wrap="square" anchor="t" lIns="0" rIns="0" tIns="0" bIns="0">
+            <a:spAutoFit/>
+          </a:bodyPr>
+          <a:lstStyle/>
+          <a:p>
+            <a:pPr algn="l">
               <a:lnSpc>
-                <a:spcPct val="100000"/>
+                <a:spcPct val="125000"/>
               </a:lnSpc>
-              <a:tabLst>
-                <a:tab pos="0" algn="l"/>
-              </a:tabLst>
             </a:pPr>
             <a:r>
-              <a:rPr lang="pt-BR" sz="950" b="1" u="none" strike="noStrike" spc="170" noProof="0" dirty="0">
-                <a:solidFill>
-                  <a:srgbClr val="25C7E5"/>
-                </a:solidFill>
-                <a:effectLst/>
-                <a:uFillTx/>
+              <a:rPr sz="1220" b="0" i="0">
+                <a:solidFill>
+                  <a:srgbClr val="FFFFFF"/>
+                </a:solidFill>
                 <a:latin typeface="Aptos"/>
-                <a:ea typeface="Aptos"/>
-              </a:rPr>
-              <a:t>PARTE 1 · CONTEXTO DO PROBLEMA</a:t>
-            </a:r>
-            <a:endParaRPr lang="pt-BR" sz="950" b="0" u="none" strike="noStrike" noProof="0" dirty="0">
-              <a:solidFill>
-                <a:srgbClr val="FFFFFF"/>
-              </a:solidFill>
-              <a:effectLst/>
-              <a:uFillTx/>
-              <a:latin typeface="Arial"/>
-            </a:endParaRPr>
-          </a:p>
-        </p:txBody>
-      </p:sp>
-      <p:sp>
-        <p:nvSpPr>
-          <p:cNvPr id="11" name="Text 1"/>
-          <p:cNvSpPr/>
-          <p:nvPr/>
-        </p:nvSpPr>
-        <p:spPr>
-          <a:xfrm>
-            <a:off x="658440" y="786240"/>
-            <a:ext cx="10881000" cy="749520"/>
-          </a:xfrm>
-          <a:prstGeom prst="rect">
-            <a:avLst/>
-          </a:prstGeom>
-          <a:noFill/>
-          <a:ln w="0">
-            <a:noFill/>
-          </a:ln>
+              </a:rPr>
+              <a:t>Amanda Alves de Lima Santos  ·  Fábio da Silva Costa  ·  Gabriel Victor  ·  Vanessa Partala</a:t>
+            </a:r>
+          </a:p>
+        </p:txBody>
+      </p:sp>
+      <p:cxnSp>
+        <p:nvCxnSpPr>
+          <p:cNvPr id="8" name="Connector 7"/>
+          <p:cNvCxnSpPr/>
+          <p:nvPr/>
+        </p:nvCxnSpPr>
+        <p:spPr>
+          <a:xfrm>
+            <a:off x="8275320" y="2331720"/>
+            <a:ext cx="0" cy="2377440"/>
+          </a:xfrm>
+          <a:prstGeom prst="line">
+            <a:avLst/>
+          </a:prstGeom>
+          <a:ln w="9525">
+            <a:solidFill>
+              <a:srgbClr val="263951"/>
+            </a:solidFill>
+          </a:ln>
+          <a:effectLst/>
         </p:spPr>
         <p:style>
-          <a:lnRef idx="0">
-            <a:scrgbClr r="0" g="0" b="0"/>
+          <a:lnRef idx="2">
+            <a:schemeClr val="accent1"/>
           </a:lnRef>
           <a:fillRef idx="0">
-            <a:scrgbClr r="0" g="0" b="0"/>
+            <a:schemeClr val="accent1"/>
           </a:fillRef>
-          <a:effectRef idx="0">
-            <a:scrgbClr r="0" g="0" b="0"/>
+          <a:effectRef idx="1">
+            <a:schemeClr val="accent1"/>
           </a:effectRef>
-          <a:fontRef idx="minor"/>
+          <a:fontRef idx="minor">
+            <a:schemeClr val="tx1"/>
+          </a:fontRef>
         </p:style>
-        <p:txBody>
-          <a:bodyPr lIns="0" tIns="0" rIns="0" bIns="0" anchor="ctr">
-            <a:normAutofit fontScale="92500"/>
-          </a:bodyPr>
-          <a:lstStyle/>
-          <a:p>
-            <a:pPr defTabSz="914400">
-              <a:lnSpc>
-                <a:spcPct val="100000"/>
-              </a:lnSpc>
-              <a:tabLst>
-                <a:tab pos="0" algn="l"/>
-              </a:tabLst>
-            </a:pPr>
-            <a:r>
-              <a:rPr lang="pt-BR" sz="2900" b="1" u="none" strike="noStrike" noProof="0" dirty="0">
+      </p:cxnSp>
+      <p:sp>
+        <p:nvSpPr>
+          <p:cNvPr id="9" name="TextBox 8"/>
+          <p:cNvSpPr txBox="1"/>
+          <p:nvPr/>
+        </p:nvSpPr>
+        <p:spPr>
+          <a:xfrm>
+            <a:off x="8641080" y="2377440"/>
+            <a:ext cx="2743200" cy="219456"/>
+          </a:xfrm>
+          <a:prstGeom prst="rect">
+            <a:avLst/>
+          </a:prstGeom>
+          <a:noFill/>
+        </p:spPr>
+        <p:txBody>
+          <a:bodyPr wrap="square" anchor="t" lIns="0" rIns="0" tIns="0" bIns="0">
+            <a:spAutoFit/>
+          </a:bodyPr>
+          <a:lstStyle/>
+          <a:p>
+            <a:pPr algn="l"/>
+            <a:r>
+              <a:rPr sz="940" b="1" i="0">
+                <a:solidFill>
+                  <a:srgbClr val="25C7E5"/>
+                </a:solidFill>
+                <a:latin typeface="Aptos"/>
+              </a:rPr>
+              <a:t>ESCOPO DA ANÁLISE</a:t>
+            </a:r>
+          </a:p>
+        </p:txBody>
+      </p:sp>
+      <p:sp>
+        <p:nvSpPr>
+          <p:cNvPr id="10" name="TextBox 9"/>
+          <p:cNvSpPr txBox="1"/>
+          <p:nvPr/>
+        </p:nvSpPr>
+        <p:spPr>
+          <a:xfrm>
+            <a:off x="8613648" y="2670048"/>
+            <a:ext cx="2743200" cy="685800"/>
+          </a:xfrm>
+          <a:prstGeom prst="rect">
+            <a:avLst/>
+          </a:prstGeom>
+          <a:noFill/>
+        </p:spPr>
+        <p:txBody>
+          <a:bodyPr wrap="square" anchor="t" lIns="0" rIns="0" tIns="0" bIns="0">
+            <a:spAutoFit/>
+          </a:bodyPr>
+          <a:lstStyle/>
+          <a:p>
+            <a:pPr algn="l"/>
+            <a:r>
+              <a:rPr sz="4400" b="1" i="0">
                 <a:solidFill>
                   <a:srgbClr val="FFFFFF"/>
                 </a:solidFill>
-                <a:effectLst/>
-                <a:uFillTx/>
                 <a:latin typeface="Aptos Display"/>
-                <a:ea typeface="Aptos Display"/>
-              </a:rPr>
-              <a:t>O crescimento não é o problema. Descobrir a insatisfação tarde demais é.</a:t>
-            </a:r>
-            <a:endParaRPr lang="pt-BR" sz="2900" b="0" u="none" strike="noStrike" noProof="0" dirty="0">
-              <a:solidFill>
-                <a:srgbClr val="FFFFFF"/>
-              </a:solidFill>
-              <a:effectLst/>
-              <a:uFillTx/>
-              <a:latin typeface="Arial"/>
-            </a:endParaRPr>
-          </a:p>
-        </p:txBody>
-      </p:sp>
-      <p:sp>
-        <p:nvSpPr>
-          <p:cNvPr id="12" name="Text 2"/>
+              </a:rPr>
+              <a:t>2.202</a:t>
+            </a:r>
+          </a:p>
+        </p:txBody>
+      </p:sp>
+      <p:sp>
+        <p:nvSpPr>
+          <p:cNvPr id="11" name="TextBox 10"/>
+          <p:cNvSpPr txBox="1"/>
+          <p:nvPr/>
+        </p:nvSpPr>
+        <p:spPr>
+          <a:xfrm>
+            <a:off x="8641080" y="3401568"/>
+            <a:ext cx="2743200" cy="237744"/>
+          </a:xfrm>
+          <a:prstGeom prst="rect">
+            <a:avLst/>
+          </a:prstGeom>
+          <a:noFill/>
+        </p:spPr>
+        <p:txBody>
+          <a:bodyPr wrap="square" anchor="t" lIns="0" rIns="0" tIns="0" bIns="0">
+            <a:spAutoFit/>
+          </a:bodyPr>
+          <a:lstStyle/>
+          <a:p>
+            <a:pPr algn="l"/>
+            <a:r>
+              <a:rPr sz="1150" b="0" i="0">
+                <a:solidFill>
+                  <a:srgbClr val="9FB0C6"/>
+                </a:solidFill>
+                <a:latin typeface="Aptos"/>
+              </a:rPr>
+              <a:t>pedidos tratados</a:t>
+            </a:r>
+          </a:p>
+        </p:txBody>
+      </p:sp>
+      <p:sp>
+        <p:nvSpPr>
+          <p:cNvPr id="12" name="Rounded Rectangle 11"/>
           <p:cNvSpPr/>
           <p:nvPr/>
         </p:nvSpPr>
         <p:spPr>
           <a:xfrm>
-            <a:off x="658440" y="1572840"/>
-            <a:ext cx="10606680" cy="365400"/>
-          </a:xfrm>
-          <a:prstGeom prst="rect">
-            <a:avLst/>
-          </a:prstGeom>
-          <a:noFill/>
-          <a:ln w="0">
-            <a:noFill/>
-          </a:ln>
-        </p:spPr>
-        <p:style>
-          <a:lnRef idx="0">
-            <a:scrgbClr r="0" g="0" b="0"/>
-          </a:lnRef>
-          <a:fillRef idx="0">
-            <a:scrgbClr r="0" g="0" b="0"/>
-          </a:fillRef>
-          <a:effectRef idx="0">
-            <a:scrgbClr r="0" g="0" b="0"/>
-          </a:effectRef>
-          <a:fontRef idx="minor"/>
-        </p:style>
-        <p:txBody>
-          <a:bodyPr lIns="0" tIns="0" rIns="0" bIns="0" anchor="ctr">
-            <a:normAutofit/>
-          </a:bodyPr>
-          <a:lstStyle/>
-          <a:p>
-            <a:pPr defTabSz="914400">
-              <a:lnSpc>
-                <a:spcPct val="100000"/>
-              </a:lnSpc>
-              <a:tabLst>
-                <a:tab pos="0" algn="l"/>
-              </a:tabLst>
-            </a:pPr>
-            <a:r>
-              <a:rPr lang="pt-BR" sz="1210" b="0" u="none" strike="noStrike" noProof="0" dirty="0">
-                <a:solidFill>
-                  <a:srgbClr val="9FB0C6"/>
-                </a:solidFill>
-                <a:effectLst/>
-                <a:uFillTx/>
-                <a:latin typeface="Aptos"/>
-                <a:ea typeface="Aptos"/>
-              </a:rPr>
-              <a:t>O NPS chega no fim da jornada. A análise busca identificar sinais operacionais antes desse momento.</a:t>
-            </a:r>
-            <a:endParaRPr lang="pt-BR" sz="1210" b="0" u="none" strike="noStrike" noProof="0" dirty="0">
-              <a:solidFill>
-                <a:srgbClr val="FFFFFF"/>
-              </a:solidFill>
-              <a:effectLst/>
-              <a:uFillTx/>
-              <a:latin typeface="Arial"/>
-            </a:endParaRPr>
-          </a:p>
-        </p:txBody>
-      </p:sp>
-      <p:sp>
-        <p:nvSpPr>
-          <p:cNvPr id="13" name="Text 3"/>
-          <p:cNvSpPr/>
-          <p:nvPr/>
-        </p:nvSpPr>
-        <p:spPr>
-          <a:xfrm>
-            <a:off x="658440" y="2331720"/>
-            <a:ext cx="2331360" cy="658080"/>
-          </a:xfrm>
-          <a:prstGeom prst="rect">
-            <a:avLst/>
-          </a:prstGeom>
-          <a:noFill/>
-          <a:ln w="0">
-            <a:noFill/>
-          </a:ln>
-        </p:spPr>
-        <p:style>
-          <a:lnRef idx="0">
-            <a:scrgbClr r="0" g="0" b="0"/>
-          </a:lnRef>
-          <a:fillRef idx="0">
-            <a:scrgbClr r="0" g="0" b="0"/>
-          </a:fillRef>
-          <a:effectRef idx="0">
-            <a:scrgbClr r="0" g="0" b="0"/>
-          </a:effectRef>
-          <a:fontRef idx="minor"/>
-        </p:style>
-        <p:txBody>
-          <a:bodyPr lIns="0" tIns="0" rIns="0" bIns="0" anchor="ctr">
-            <a:normAutofit fontScale="92500" lnSpcReduction="10000"/>
-          </a:bodyPr>
-          <a:lstStyle/>
-          <a:p>
-            <a:pPr defTabSz="914400">
-              <a:lnSpc>
-                <a:spcPct val="100000"/>
-              </a:lnSpc>
-              <a:tabLst>
-                <a:tab pos="0" algn="l"/>
-              </a:tabLst>
-            </a:pPr>
-            <a:r>
-              <a:rPr lang="pt-BR" sz="4900" b="1" u="none" strike="noStrike" noProof="0" dirty="0">
-                <a:solidFill>
-                  <a:srgbClr val="EE5A62"/>
-                </a:solidFill>
-                <a:effectLst/>
-                <a:uFillTx/>
-                <a:latin typeface="Aptos Display"/>
-                <a:ea typeface="Aptos Display"/>
-              </a:rPr>
-              <a:t>83,1%</a:t>
-            </a:r>
-            <a:endParaRPr lang="pt-BR" sz="4900" b="0" u="none" strike="noStrike" noProof="0" dirty="0">
-              <a:solidFill>
-                <a:srgbClr val="FFFFFF"/>
-              </a:solidFill>
-              <a:effectLst/>
-              <a:uFillTx/>
-              <a:latin typeface="Arial"/>
-            </a:endParaRPr>
-          </a:p>
-        </p:txBody>
-      </p:sp>
-      <p:sp>
-        <p:nvSpPr>
-          <p:cNvPr id="14" name="Text 4"/>
-          <p:cNvSpPr/>
-          <p:nvPr/>
-        </p:nvSpPr>
-        <p:spPr>
-          <a:xfrm>
-            <a:off x="685800" y="3218760"/>
-            <a:ext cx="2422800" cy="603000"/>
-          </a:xfrm>
-          <a:prstGeom prst="rect">
-            <a:avLst/>
-          </a:prstGeom>
-          <a:noFill/>
-          <a:ln w="0">
-            <a:noFill/>
-          </a:ln>
-        </p:spPr>
-        <p:style>
-          <a:lnRef idx="0">
-            <a:scrgbClr r="0" g="0" b="0"/>
-          </a:lnRef>
-          <a:fillRef idx="0">
-            <a:scrgbClr r="0" g="0" b="0"/>
-          </a:fillRef>
-          <a:effectRef idx="0">
-            <a:scrgbClr r="0" g="0" b="0"/>
-          </a:effectRef>
-          <a:fontRef idx="minor"/>
-        </p:style>
-        <p:txBody>
-          <a:bodyPr lIns="0" tIns="0" rIns="0" bIns="0" anchor="ctr">
-            <a:normAutofit fontScale="92500"/>
-          </a:bodyPr>
-          <a:lstStyle/>
-          <a:p>
-            <a:pPr defTabSz="914400">
-              <a:lnSpc>
-                <a:spcPct val="100000"/>
-              </a:lnSpc>
-              <a:tabLst>
-                <a:tab pos="0" algn="l"/>
-              </a:tabLst>
-            </a:pPr>
-            <a:r>
-              <a:rPr lang="pt-BR" sz="1520" b="1" u="none" strike="noStrike" noProof="0" dirty="0">
-                <a:solidFill>
-                  <a:srgbClr val="FFFFFF"/>
-                </a:solidFill>
-                <a:effectLst/>
-                <a:uFillTx/>
-                <a:latin typeface="Aptos"/>
-                <a:ea typeface="Aptos"/>
-              </a:rPr>
-              <a:t>dos pedidos da base tratada</a:t>
-            </a:r>
-            <a:endParaRPr lang="pt-BR" sz="1520" b="0" u="none" strike="noStrike" noProof="0" dirty="0">
-              <a:solidFill>
-                <a:srgbClr val="FFFFFF"/>
-              </a:solidFill>
-              <a:effectLst/>
-              <a:uFillTx/>
-              <a:latin typeface="Arial"/>
-            </a:endParaRPr>
-          </a:p>
-          <a:p>
-            <a:pPr defTabSz="914400">
-              <a:lnSpc>
-                <a:spcPct val="100000"/>
-              </a:lnSpc>
-              <a:tabLst>
-                <a:tab pos="0" algn="l"/>
-              </a:tabLst>
-            </a:pPr>
-            <a:r>
-              <a:rPr lang="pt-BR" sz="1520" b="1" u="none" strike="noStrike" noProof="0" dirty="0">
-                <a:solidFill>
-                  <a:srgbClr val="FFFFFF"/>
-                </a:solidFill>
-                <a:effectLst/>
-                <a:uFillTx/>
-                <a:latin typeface="Aptos"/>
-                <a:ea typeface="Aptos"/>
-              </a:rPr>
-              <a:t>são detratores</a:t>
-            </a:r>
-            <a:endParaRPr lang="pt-BR" sz="1520" b="0" u="none" strike="noStrike" noProof="0" dirty="0">
-              <a:solidFill>
-                <a:srgbClr val="FFFFFF"/>
-              </a:solidFill>
-              <a:effectLst/>
-              <a:uFillTx/>
-              <a:latin typeface="Arial"/>
-            </a:endParaRPr>
-          </a:p>
-        </p:txBody>
-      </p:sp>
-      <p:sp>
-        <p:nvSpPr>
-          <p:cNvPr id="15" name="Text 5"/>
-          <p:cNvSpPr/>
-          <p:nvPr/>
-        </p:nvSpPr>
-        <p:spPr>
-          <a:xfrm>
-            <a:off x="685800" y="3931920"/>
-            <a:ext cx="2559960" cy="219240"/>
-          </a:xfrm>
-          <a:prstGeom prst="rect">
-            <a:avLst/>
-          </a:prstGeom>
-          <a:noFill/>
-          <a:ln w="0">
-            <a:noFill/>
-          </a:ln>
-        </p:spPr>
-        <p:style>
-          <a:lnRef idx="0">
-            <a:scrgbClr r="0" g="0" b="0"/>
-          </a:lnRef>
-          <a:fillRef idx="0">
-            <a:scrgbClr r="0" g="0" b="0"/>
-          </a:fillRef>
-          <a:effectRef idx="0">
-            <a:scrgbClr r="0" g="0" b="0"/>
-          </a:effectRef>
-          <a:fontRef idx="minor"/>
-        </p:style>
-        <p:txBody>
-          <a:bodyPr lIns="0" tIns="0" rIns="0" bIns="0" anchor="ctr">
-            <a:normAutofit/>
-          </a:bodyPr>
-          <a:lstStyle/>
-          <a:p>
-            <a:pPr defTabSz="914400">
-              <a:lnSpc>
-                <a:spcPct val="100000"/>
-              </a:lnSpc>
-              <a:tabLst>
-                <a:tab pos="0" algn="l"/>
-              </a:tabLst>
-            </a:pPr>
-            <a:r>
-              <a:rPr lang="pt-BR" sz="1040" b="0" u="none" strike="noStrike" noProof="0" dirty="0">
-                <a:solidFill>
-                  <a:srgbClr val="9FB0C6"/>
-                </a:solidFill>
-                <a:effectLst/>
-                <a:uFillTx/>
-                <a:latin typeface="Aptos"/>
-                <a:ea typeface="Aptos"/>
-              </a:rPr>
-              <a:t>1.829 de 2.202 pedidos analisados</a:t>
-            </a:r>
-            <a:endParaRPr lang="pt-BR" sz="1040" b="0" u="none" strike="noStrike" noProof="0" dirty="0">
-              <a:solidFill>
-                <a:srgbClr val="FFFFFF"/>
-              </a:solidFill>
-              <a:effectLst/>
-              <a:uFillTx/>
-              <a:latin typeface="Arial"/>
-            </a:endParaRPr>
-          </a:p>
-        </p:txBody>
-      </p:sp>
-      <p:sp>
-        <p:nvSpPr>
-          <p:cNvPr id="16" name="Shape 6"/>
-          <p:cNvSpPr/>
-          <p:nvPr/>
-        </p:nvSpPr>
-        <p:spPr>
-          <a:xfrm>
-            <a:off x="685800" y="4297680"/>
-            <a:ext cx="1535760" cy="292320"/>
+            <a:off x="8641080" y="3767328"/>
+            <a:ext cx="2331720" cy="310896"/>
           </a:xfrm>
           <a:prstGeom prst="roundRect">
             <a:avLst>
@@ -5304,1900 +5219,100 @@
           <a:solidFill>
             <a:srgbClr val="331A25"/>
           </a:solidFill>
-          <a:ln w="12600">
-            <a:solidFill>
-              <a:srgbClr val="331A25"/>
-            </a:solidFill>
-            <a:round/>
-          </a:ln>
+          <a:ln>
+            <a:noFill/>
+          </a:ln>
+          <a:effectLst/>
         </p:spPr>
         <p:style>
-          <a:lnRef idx="0">
-            <a:scrgbClr r="0" g="0" b="0"/>
+          <a:lnRef idx="1">
+            <a:schemeClr val="accent1"/>
           </a:lnRef>
-          <a:fillRef idx="0">
-            <a:scrgbClr r="0" g="0" b="0"/>
+          <a:fillRef idx="3">
+            <a:schemeClr val="accent1"/>
           </a:fillRef>
-          <a:effectRef idx="0">
-            <a:scrgbClr r="0" g="0" b="0"/>
+          <a:effectRef idx="2">
+            <a:schemeClr val="accent1"/>
           </a:effectRef>
-          <a:fontRef idx="minor"/>
+          <a:fontRef idx="minor">
+            <a:schemeClr val="lt1"/>
+          </a:fontRef>
         </p:style>
         <p:txBody>
-          <a:bodyPr lIns="90000" tIns="45000" rIns="90000" bIns="45000" anchor="t">
-            <a:noAutofit/>
-          </a:bodyPr>
-          <a:lstStyle/>
-          <a:p>
-            <a:endParaRPr lang="pt-BR" sz="1800" b="0" u="none" strike="noStrike" noProof="0" dirty="0">
-              <a:solidFill>
-                <a:srgbClr val="FFFFFF"/>
-              </a:solidFill>
-              <a:effectLst/>
-              <a:uFillTx/>
-              <a:latin typeface="Arial"/>
-            </a:endParaRPr>
-          </a:p>
-        </p:txBody>
-      </p:sp>
-      <p:sp>
-        <p:nvSpPr>
-          <p:cNvPr id="17" name="Text 7"/>
-          <p:cNvSpPr/>
-          <p:nvPr/>
-        </p:nvSpPr>
-        <p:spPr>
-          <a:xfrm>
-            <a:off x="758880" y="4316040"/>
-            <a:ext cx="1389600" cy="246600"/>
-          </a:xfrm>
-          <a:prstGeom prst="rect">
-            <a:avLst/>
-          </a:prstGeom>
-          <a:noFill/>
-          <a:ln w="0">
-            <a:noFill/>
-          </a:ln>
-        </p:spPr>
-        <p:style>
-          <a:lnRef idx="0">
-            <a:scrgbClr r="0" g="0" b="0"/>
-          </a:lnRef>
-          <a:fillRef idx="0">
-            <a:scrgbClr r="0" g="0" b="0"/>
-          </a:fillRef>
-          <a:effectRef idx="0">
-            <a:scrgbClr r="0" g="0" b="0"/>
-          </a:effectRef>
-          <a:fontRef idx="minor"/>
-        </p:style>
-        <p:txBody>
-          <a:bodyPr lIns="0" tIns="0" rIns="0" bIns="0" anchor="ctr">
-            <a:normAutofit/>
-          </a:bodyPr>
-          <a:lstStyle/>
-          <a:p>
-            <a:pPr algn="ctr" defTabSz="914400">
-              <a:lnSpc>
-                <a:spcPct val="100000"/>
-              </a:lnSpc>
-              <a:tabLst>
-                <a:tab pos="0" algn="l"/>
-              </a:tabLst>
-            </a:pPr>
-            <a:r>
-              <a:rPr lang="pt-BR" sz="930" b="1" u="none" strike="noStrike" noProof="0" dirty="0">
+          <a:bodyPr rtlCol="0" anchor="ctr"/>
+          <a:lstStyle/>
+          <a:p>
+            <a:pPr algn="ctr"/>
+          </a:p>
+        </p:txBody>
+      </p:sp>
+      <p:sp>
+        <p:nvSpPr>
+          <p:cNvPr id="13" name="TextBox 12"/>
+          <p:cNvSpPr txBox="1"/>
+          <p:nvPr/>
+        </p:nvSpPr>
+        <p:spPr>
+          <a:xfrm>
+            <a:off x="8641080" y="3785615"/>
+            <a:ext cx="2331720" cy="274320"/>
+          </a:xfrm>
+          <a:prstGeom prst="rect">
+            <a:avLst/>
+          </a:prstGeom>
+          <a:noFill/>
+        </p:spPr>
+        <p:txBody>
+          <a:bodyPr wrap="square" anchor="t" lIns="0" rIns="0" tIns="0" bIns="0">
+            <a:spAutoFit/>
+          </a:bodyPr>
+          <a:lstStyle/>
+          <a:p>
+            <a:pPr algn="ctr"/>
+            <a:r>
+              <a:rPr sz="930" b="1" i="0">
                 <a:solidFill>
                   <a:srgbClr val="F6A5AA"/>
                 </a:solidFill>
-                <a:effectLst/>
-                <a:uFillTx/>
                 <a:latin typeface="Aptos"/>
-                <a:ea typeface="Aptos"/>
-              </a:rPr>
-              <a:t>problema dominante</a:t>
-            </a:r>
-            <a:endParaRPr lang="pt-BR" sz="930" b="0" u="none" strike="noStrike" noProof="0" dirty="0">
-              <a:solidFill>
-                <a:srgbClr val="FFFFFF"/>
-              </a:solidFill>
-              <a:effectLst/>
-              <a:uFillTx/>
-              <a:latin typeface="Arial"/>
-            </a:endParaRPr>
-          </a:p>
-        </p:txBody>
-      </p:sp>
-      <p:sp>
-        <p:nvSpPr>
-          <p:cNvPr id="18" name="Shape 8"/>
-          <p:cNvSpPr/>
-          <p:nvPr/>
-        </p:nvSpPr>
-        <p:spPr>
-          <a:xfrm>
-            <a:off x="3529440" y="2249280"/>
-            <a:ext cx="7991640" cy="2002320"/>
-          </a:xfrm>
-          <a:prstGeom prst="roundRect">
-            <a:avLst>
-              <a:gd name="adj" fmla="val 3653"/>
-            </a:avLst>
-          </a:prstGeom>
-          <a:solidFill>
-            <a:srgbClr val="0D1A2B"/>
-          </a:solidFill>
-          <a:ln w="12600">
-            <a:solidFill>
-              <a:srgbClr val="263951"/>
-            </a:solidFill>
-            <a:round/>
-          </a:ln>
-        </p:spPr>
-        <p:style>
-          <a:lnRef idx="0">
-            <a:scrgbClr r="0" g="0" b="0"/>
-          </a:lnRef>
-          <a:fillRef idx="0">
-            <a:scrgbClr r="0" g="0" b="0"/>
-          </a:fillRef>
-          <a:effectRef idx="0">
-            <a:scrgbClr r="0" g="0" b="0"/>
-          </a:effectRef>
-          <a:fontRef idx="minor"/>
-        </p:style>
-        <p:txBody>
-          <a:bodyPr lIns="90000" tIns="45000" rIns="90000" bIns="45000" anchor="t">
-            <a:noAutofit/>
-          </a:bodyPr>
-          <a:lstStyle/>
-          <a:p>
-            <a:endParaRPr lang="pt-BR" sz="1800" b="0" u="none" strike="noStrike" noProof="0" dirty="0">
-              <a:solidFill>
-                <a:srgbClr val="FFFFFF"/>
-              </a:solidFill>
-              <a:effectLst/>
-              <a:uFillTx/>
-              <a:latin typeface="Arial"/>
-            </a:endParaRPr>
-          </a:p>
-        </p:txBody>
-      </p:sp>
-      <p:sp>
-        <p:nvSpPr>
-          <p:cNvPr id="19" name="Text 9"/>
-          <p:cNvSpPr/>
-          <p:nvPr/>
-        </p:nvSpPr>
-        <p:spPr>
-          <a:xfrm>
-            <a:off x="3822120" y="2523600"/>
-            <a:ext cx="2057040" cy="200880"/>
-          </a:xfrm>
-          <a:prstGeom prst="rect">
-            <a:avLst/>
-          </a:prstGeom>
-          <a:noFill/>
-          <a:ln w="0">
-            <a:noFill/>
-          </a:ln>
-        </p:spPr>
-        <p:style>
-          <a:lnRef idx="0">
-            <a:scrgbClr r="0" g="0" b="0"/>
-          </a:lnRef>
-          <a:fillRef idx="0">
-            <a:scrgbClr r="0" g="0" b="0"/>
-          </a:fillRef>
-          <a:effectRef idx="0">
-            <a:scrgbClr r="0" g="0" b="0"/>
-          </a:effectRef>
-          <a:fontRef idx="minor"/>
-        </p:style>
-        <p:txBody>
-          <a:bodyPr lIns="0" tIns="0" rIns="0" bIns="0" anchor="ctr">
-            <a:normAutofit/>
-          </a:bodyPr>
-          <a:lstStyle/>
-          <a:p>
-            <a:pPr defTabSz="914400">
-              <a:lnSpc>
-                <a:spcPct val="100000"/>
-              </a:lnSpc>
-              <a:tabLst>
-                <a:tab pos="0" algn="l"/>
-              </a:tabLst>
-            </a:pPr>
-            <a:r>
-              <a:rPr lang="pt-BR" sz="960" b="1" u="none" strike="noStrike" spc="125" noProof="0" dirty="0">
-                <a:solidFill>
-                  <a:srgbClr val="25C7E5"/>
-                </a:solidFill>
-                <a:effectLst/>
-                <a:uFillTx/>
+              </a:rPr>
+              <a:t>83,1% são detratores hoje</a:t>
+            </a:r>
+          </a:p>
+        </p:txBody>
+      </p:sp>
+      <p:sp>
+        <p:nvSpPr>
+          <p:cNvPr id="14" name="TextBox 13"/>
+          <p:cNvSpPr txBox="1"/>
+          <p:nvPr/>
+        </p:nvSpPr>
+        <p:spPr>
+          <a:xfrm>
+            <a:off x="658368" y="6501384"/>
+            <a:ext cx="5486400" cy="182880"/>
+          </a:xfrm>
+          <a:prstGeom prst="rect">
+            <a:avLst/>
+          </a:prstGeom>
+          <a:noFill/>
+        </p:spPr>
+        <p:txBody>
+          <a:bodyPr wrap="square" anchor="t" lIns="0" rIns="0" tIns="0" bIns="0">
+            <a:spAutoFit/>
+          </a:bodyPr>
+          <a:lstStyle/>
+          <a:p>
+            <a:pPr algn="l"/>
+            <a:r>
+              <a:rPr sz="850" b="0" i="0">
+                <a:solidFill>
+                  <a:srgbClr val="718399"/>
+                </a:solidFill>
                 <a:latin typeface="Aptos"/>
-                <a:ea typeface="Aptos"/>
-              </a:rPr>
-              <a:t>PERGUNTA NORTEADORA</a:t>
-            </a:r>
-            <a:endParaRPr lang="pt-BR" sz="960" b="0" u="none" strike="noStrike" noProof="0" dirty="0">
-              <a:solidFill>
-                <a:srgbClr val="FFFFFF"/>
-              </a:solidFill>
-              <a:effectLst/>
-              <a:uFillTx/>
-              <a:latin typeface="Arial"/>
-            </a:endParaRPr>
-          </a:p>
-        </p:txBody>
-      </p:sp>
-      <p:sp>
-        <p:nvSpPr>
-          <p:cNvPr id="20" name="Text 10"/>
-          <p:cNvSpPr/>
-          <p:nvPr/>
-        </p:nvSpPr>
-        <p:spPr>
-          <a:xfrm>
-            <a:off x="3822120" y="2853000"/>
-            <a:ext cx="7058880" cy="749520"/>
-          </a:xfrm>
-          <a:prstGeom prst="rect">
-            <a:avLst/>
-          </a:prstGeom>
-          <a:noFill/>
-          <a:ln w="0">
-            <a:noFill/>
-          </a:ln>
-        </p:spPr>
-        <p:style>
-          <a:lnRef idx="0">
-            <a:scrgbClr r="0" g="0" b="0"/>
-          </a:lnRef>
-          <a:fillRef idx="0">
-            <a:scrgbClr r="0" g="0" b="0"/>
-          </a:fillRef>
-          <a:effectRef idx="0">
-            <a:scrgbClr r="0" g="0" b="0"/>
-          </a:effectRef>
-          <a:fontRef idx="minor"/>
-        </p:style>
-        <p:txBody>
-          <a:bodyPr lIns="0" tIns="0" rIns="0" bIns="0" anchor="ctr">
-            <a:normAutofit/>
-          </a:bodyPr>
-          <a:lstStyle/>
-          <a:p>
-            <a:pPr defTabSz="914400">
-              <a:lnSpc>
-                <a:spcPct val="100000"/>
-              </a:lnSpc>
-              <a:tabLst>
-                <a:tab pos="0" algn="l"/>
-              </a:tabLst>
-            </a:pPr>
-            <a:r>
-              <a:rPr lang="pt-BR" sz="2400" b="1" u="none" strike="noStrike" noProof="0" dirty="0">
-                <a:solidFill>
-                  <a:srgbClr val="FFFFFF"/>
-                </a:solidFill>
-                <a:effectLst/>
-                <a:uFillTx/>
-                <a:latin typeface="Aptos Display"/>
-                <a:ea typeface="Aptos Display"/>
-              </a:rPr>
-              <a:t>Por que alguns clientes se tornam promotores</a:t>
-            </a:r>
-            <a:endParaRPr lang="pt-BR" sz="2400" b="0" u="none" strike="noStrike" noProof="0" dirty="0">
-              <a:solidFill>
-                <a:srgbClr val="FFFFFF"/>
-              </a:solidFill>
-              <a:effectLst/>
-              <a:uFillTx/>
-              <a:latin typeface="Arial"/>
-            </a:endParaRPr>
-          </a:p>
-          <a:p>
-            <a:pPr defTabSz="914400">
-              <a:lnSpc>
-                <a:spcPct val="100000"/>
-              </a:lnSpc>
-              <a:tabLst>
-                <a:tab pos="0" algn="l"/>
-              </a:tabLst>
-            </a:pPr>
-            <a:r>
-              <a:rPr lang="pt-BR" sz="2400" b="1" u="none" strike="noStrike" noProof="0" dirty="0">
-                <a:solidFill>
-                  <a:srgbClr val="FFFFFF"/>
-                </a:solidFill>
-                <a:effectLst/>
-                <a:uFillTx/>
-                <a:latin typeface="Aptos Display"/>
-                <a:ea typeface="Aptos Display"/>
-              </a:rPr>
-              <a:t>enquanto outros viram detratores?</a:t>
-            </a:r>
-            <a:endParaRPr lang="pt-BR" sz="2400" b="0" u="none" strike="noStrike" noProof="0" dirty="0">
-              <a:solidFill>
-                <a:srgbClr val="FFFFFF"/>
-              </a:solidFill>
-              <a:effectLst/>
-              <a:uFillTx/>
-              <a:latin typeface="Arial"/>
-            </a:endParaRPr>
-          </a:p>
-        </p:txBody>
-      </p:sp>
-      <p:sp>
-        <p:nvSpPr>
-          <p:cNvPr id="21" name="Text 11"/>
-          <p:cNvSpPr/>
-          <p:nvPr/>
-        </p:nvSpPr>
-        <p:spPr>
-          <a:xfrm>
-            <a:off x="3822120" y="3694320"/>
-            <a:ext cx="6309000" cy="319680"/>
-          </a:xfrm>
-          <a:prstGeom prst="rect">
-            <a:avLst/>
-          </a:prstGeom>
-          <a:noFill/>
-          <a:ln w="0">
-            <a:noFill/>
-          </a:ln>
-        </p:spPr>
-        <p:style>
-          <a:lnRef idx="0">
-            <a:scrgbClr r="0" g="0" b="0"/>
-          </a:lnRef>
-          <a:fillRef idx="0">
-            <a:scrgbClr r="0" g="0" b="0"/>
-          </a:fillRef>
-          <a:effectRef idx="0">
-            <a:scrgbClr r="0" g="0" b="0"/>
-          </a:effectRef>
-          <a:fontRef idx="minor"/>
-        </p:style>
-        <p:txBody>
-          <a:bodyPr lIns="0" tIns="0" rIns="0" bIns="0" anchor="ctr">
-            <a:normAutofit/>
-          </a:bodyPr>
-          <a:lstStyle/>
-          <a:p>
-            <a:pPr defTabSz="914400">
-              <a:lnSpc>
-                <a:spcPct val="100000"/>
-              </a:lnSpc>
-              <a:tabLst>
-                <a:tab pos="0" algn="l"/>
-              </a:tabLst>
-            </a:pPr>
-            <a:r>
-              <a:rPr lang="pt-BR" sz="1420" b="1" u="none" strike="noStrike" noProof="0" dirty="0">
-                <a:solidFill>
-                  <a:srgbClr val="87E5F2"/>
-                </a:solidFill>
-                <a:effectLst/>
-                <a:uFillTx/>
-                <a:latin typeface="Aptos"/>
-                <a:ea typeface="Aptos"/>
-              </a:rPr>
-              <a:t>E como antecipar o risco antes de o NPS ser medido?</a:t>
-            </a:r>
-            <a:endParaRPr lang="pt-BR" sz="1420" b="0" u="none" strike="noStrike" noProof="0" dirty="0">
-              <a:solidFill>
-                <a:srgbClr val="FFFFFF"/>
-              </a:solidFill>
-              <a:effectLst/>
-              <a:uFillTx/>
-              <a:latin typeface="Arial"/>
-            </a:endParaRPr>
-          </a:p>
-        </p:txBody>
-      </p:sp>
-      <p:sp>
-        <p:nvSpPr>
-          <p:cNvPr id="22" name="Text 12"/>
-          <p:cNvSpPr/>
-          <p:nvPr/>
-        </p:nvSpPr>
-        <p:spPr>
-          <a:xfrm>
-            <a:off x="3529440" y="4736520"/>
-            <a:ext cx="1096920" cy="182520"/>
-          </a:xfrm>
-          <a:prstGeom prst="rect">
-            <a:avLst/>
-          </a:prstGeom>
-          <a:noFill/>
-          <a:ln w="0">
-            <a:noFill/>
-          </a:ln>
-        </p:spPr>
-        <p:style>
-          <a:lnRef idx="0">
-            <a:scrgbClr r="0" g="0" b="0"/>
-          </a:lnRef>
-          <a:fillRef idx="0">
-            <a:scrgbClr r="0" g="0" b="0"/>
-          </a:fillRef>
-          <a:effectRef idx="0">
-            <a:scrgbClr r="0" g="0" b="0"/>
-          </a:effectRef>
-          <a:fontRef idx="minor"/>
-        </p:style>
-        <p:txBody>
-          <a:bodyPr lIns="0" tIns="0" rIns="0" bIns="0" anchor="ctr">
-            <a:normAutofit/>
-          </a:bodyPr>
-          <a:lstStyle/>
-          <a:p>
-            <a:pPr defTabSz="914400">
-              <a:lnSpc>
-                <a:spcPct val="100000"/>
-              </a:lnSpc>
-              <a:tabLst>
-                <a:tab pos="0" algn="l"/>
-              </a:tabLst>
-            </a:pPr>
-            <a:r>
-              <a:rPr lang="pt-BR" sz="950" b="1" u="none" strike="noStrike" spc="139" noProof="0" dirty="0">
-                <a:solidFill>
-                  <a:srgbClr val="25C7E5"/>
-                </a:solidFill>
-                <a:effectLst/>
-                <a:uFillTx/>
-                <a:latin typeface="Aptos"/>
-                <a:ea typeface="Aptos"/>
-              </a:rPr>
-              <a:t>A JORNADA</a:t>
-            </a:r>
-            <a:endParaRPr lang="pt-BR" sz="950" b="0" u="none" strike="noStrike" noProof="0" dirty="0">
-              <a:solidFill>
-                <a:srgbClr val="FFFFFF"/>
-              </a:solidFill>
-              <a:effectLst/>
-              <a:uFillTx/>
-              <a:latin typeface="Arial"/>
-            </a:endParaRPr>
-          </a:p>
-        </p:txBody>
-      </p:sp>
-      <p:sp>
-        <p:nvSpPr>
-          <p:cNvPr id="23" name="Shape 13"/>
-          <p:cNvSpPr/>
-          <p:nvPr/>
-        </p:nvSpPr>
-        <p:spPr>
-          <a:xfrm>
-            <a:off x="3767040" y="5440680"/>
-            <a:ext cx="6903720" cy="360"/>
-          </a:xfrm>
-          <a:prstGeom prst="line">
-            <a:avLst/>
-          </a:prstGeom>
-          <a:ln w="25560">
-            <a:solidFill>
-              <a:srgbClr val="263951"/>
-            </a:solidFill>
-            <a:round/>
-          </a:ln>
-        </p:spPr>
-        <p:style>
-          <a:lnRef idx="0">
-            <a:scrgbClr r="0" g="0" b="0"/>
-          </a:lnRef>
-          <a:fillRef idx="0">
-            <a:scrgbClr r="0" g="0" b="0"/>
-          </a:fillRef>
-          <a:effectRef idx="0">
-            <a:scrgbClr r="0" g="0" b="0"/>
-          </a:effectRef>
-          <a:fontRef idx="minor"/>
-        </p:style>
-        <p:txBody>
-          <a:bodyPr lIns="90000" tIns="-44640" rIns="90000" bIns="-44640" anchor="t" anchorCtr="1">
-            <a:noAutofit/>
-          </a:bodyPr>
-          <a:lstStyle/>
-          <a:p>
-            <a:endParaRPr lang="pt-BR" sz="1800" b="0" u="none" strike="noStrike" noProof="0" dirty="0">
-              <a:solidFill>
-                <a:srgbClr val="FFFFFF"/>
-              </a:solidFill>
-              <a:effectLst/>
-              <a:uFillTx/>
-              <a:latin typeface="Arial"/>
-            </a:endParaRPr>
-          </a:p>
-        </p:txBody>
-      </p:sp>
-      <p:sp>
-        <p:nvSpPr>
-          <p:cNvPr id="24" name="Shape 14"/>
-          <p:cNvSpPr/>
-          <p:nvPr/>
-        </p:nvSpPr>
-        <p:spPr>
-          <a:xfrm>
-            <a:off x="3794760" y="5212080"/>
-            <a:ext cx="438480" cy="438480"/>
-          </a:xfrm>
-          <a:prstGeom prst="ellipse">
-            <a:avLst/>
-          </a:prstGeom>
-          <a:solidFill>
-            <a:srgbClr val="14243A"/>
-          </a:solidFill>
-          <a:ln w="15120">
-            <a:solidFill>
-              <a:srgbClr val="87E5F2"/>
-            </a:solidFill>
-            <a:round/>
-          </a:ln>
-        </p:spPr>
-        <p:style>
-          <a:lnRef idx="0">
-            <a:scrgbClr r="0" g="0" b="0"/>
-          </a:lnRef>
-          <a:fillRef idx="0">
-            <a:scrgbClr r="0" g="0" b="0"/>
-          </a:fillRef>
-          <a:effectRef idx="0">
-            <a:scrgbClr r="0" g="0" b="0"/>
-          </a:effectRef>
-          <a:fontRef idx="minor"/>
-        </p:style>
-        <p:txBody>
-          <a:bodyPr lIns="90000" tIns="45000" rIns="90000" bIns="45000" anchor="t">
-            <a:noAutofit/>
-          </a:bodyPr>
-          <a:lstStyle/>
-          <a:p>
-            <a:endParaRPr lang="pt-BR" sz="1800" b="0" u="none" strike="noStrike" noProof="0" dirty="0">
-              <a:solidFill>
-                <a:srgbClr val="FFFFFF"/>
-              </a:solidFill>
-              <a:effectLst/>
-              <a:uFillTx/>
-              <a:latin typeface="Arial"/>
-            </a:endParaRPr>
-          </a:p>
-        </p:txBody>
-      </p:sp>
-      <p:sp>
-        <p:nvSpPr>
-          <p:cNvPr id="25" name="Shape 15"/>
-          <p:cNvSpPr/>
-          <p:nvPr/>
-        </p:nvSpPr>
-        <p:spPr>
-          <a:xfrm>
-            <a:off x="3922920" y="5349240"/>
-            <a:ext cx="182520" cy="155160"/>
-          </a:xfrm>
-          <a:prstGeom prst="rect">
-            <a:avLst/>
-          </a:prstGeom>
-          <a:noFill/>
-          <a:ln w="17640">
-            <a:solidFill>
-              <a:srgbClr val="87E5F2"/>
-            </a:solidFill>
-            <a:round/>
-          </a:ln>
-        </p:spPr>
-        <p:style>
-          <a:lnRef idx="0">
-            <a:scrgbClr r="0" g="0" b="0"/>
-          </a:lnRef>
-          <a:fillRef idx="0">
-            <a:scrgbClr r="0" g="0" b="0"/>
-          </a:fillRef>
-          <a:effectRef idx="0">
-            <a:scrgbClr r="0" g="0" b="0"/>
-          </a:effectRef>
-          <a:fontRef idx="minor"/>
-        </p:style>
-        <p:txBody>
-          <a:bodyPr lIns="90000" tIns="45000" rIns="90000" bIns="45000" anchor="t">
-            <a:noAutofit/>
-          </a:bodyPr>
-          <a:lstStyle/>
-          <a:p>
-            <a:endParaRPr lang="pt-BR" sz="1800" b="0" u="none" strike="noStrike" noProof="0" dirty="0">
-              <a:solidFill>
-                <a:srgbClr val="000000"/>
-              </a:solidFill>
-              <a:effectLst/>
-              <a:uFillTx/>
-              <a:latin typeface="Arial"/>
-            </a:endParaRPr>
-          </a:p>
-        </p:txBody>
-      </p:sp>
-      <p:sp>
-        <p:nvSpPr>
-          <p:cNvPr id="26" name="Shape 16"/>
-          <p:cNvSpPr/>
-          <p:nvPr/>
-        </p:nvSpPr>
-        <p:spPr>
-          <a:xfrm>
-            <a:off x="3949920" y="5394960"/>
-            <a:ext cx="128160" cy="360"/>
-          </a:xfrm>
-          <a:prstGeom prst="line">
-            <a:avLst/>
-          </a:prstGeom>
-          <a:ln w="12600">
-            <a:solidFill>
-              <a:srgbClr val="87E5F2"/>
-            </a:solidFill>
-            <a:round/>
-          </a:ln>
-        </p:spPr>
-        <p:style>
-          <a:lnRef idx="0">
-            <a:scrgbClr r="0" g="0" b="0"/>
-          </a:lnRef>
-          <a:fillRef idx="0">
-            <a:scrgbClr r="0" g="0" b="0"/>
-          </a:fillRef>
-          <a:effectRef idx="0">
-            <a:scrgbClr r="0" g="0" b="0"/>
-          </a:effectRef>
-          <a:fontRef idx="minor"/>
-        </p:style>
-        <p:txBody>
-          <a:bodyPr lIns="90000" tIns="-44640" rIns="90000" bIns="-44640" anchor="t" anchorCtr="1">
-            <a:noAutofit/>
-          </a:bodyPr>
-          <a:lstStyle/>
-          <a:p>
-            <a:endParaRPr lang="pt-BR" sz="1800" b="0" u="none" strike="noStrike" noProof="0" dirty="0">
-              <a:solidFill>
-                <a:srgbClr val="FFFFFF"/>
-              </a:solidFill>
-              <a:effectLst/>
-              <a:uFillTx/>
-              <a:latin typeface="Arial"/>
-            </a:endParaRPr>
-          </a:p>
-        </p:txBody>
-      </p:sp>
-      <p:sp>
-        <p:nvSpPr>
-          <p:cNvPr id="27" name="Text 17"/>
-          <p:cNvSpPr/>
-          <p:nvPr/>
-        </p:nvSpPr>
-        <p:spPr>
-          <a:xfrm>
-            <a:off x="3630240" y="5760720"/>
-            <a:ext cx="785880" cy="200880"/>
-          </a:xfrm>
-          <a:prstGeom prst="rect">
-            <a:avLst/>
-          </a:prstGeom>
-          <a:noFill/>
-          <a:ln w="0">
-            <a:noFill/>
-          </a:ln>
-        </p:spPr>
-        <p:style>
-          <a:lnRef idx="0">
-            <a:scrgbClr r="0" g="0" b="0"/>
-          </a:lnRef>
-          <a:fillRef idx="0">
-            <a:scrgbClr r="0" g="0" b="0"/>
-          </a:fillRef>
-          <a:effectRef idx="0">
-            <a:scrgbClr r="0" g="0" b="0"/>
-          </a:effectRef>
-          <a:fontRef idx="minor"/>
-        </p:style>
-        <p:txBody>
-          <a:bodyPr lIns="0" tIns="0" rIns="0" bIns="0" anchor="ctr">
-            <a:normAutofit/>
-          </a:bodyPr>
-          <a:lstStyle/>
-          <a:p>
-            <a:pPr algn="ctr" defTabSz="914400">
-              <a:lnSpc>
-                <a:spcPct val="100000"/>
-              </a:lnSpc>
-              <a:tabLst>
-                <a:tab pos="0" algn="l"/>
-              </a:tabLst>
-            </a:pPr>
-            <a:r>
-              <a:rPr lang="pt-BR" sz="1070" b="1" u="none" strike="noStrike" noProof="0" dirty="0">
-                <a:solidFill>
-                  <a:srgbClr val="FFFFFF"/>
-                </a:solidFill>
-                <a:effectLst/>
-                <a:uFillTx/>
-                <a:latin typeface="Aptos"/>
-                <a:ea typeface="Aptos"/>
-              </a:rPr>
-              <a:t>Pedido</a:t>
-            </a:r>
-            <a:endParaRPr lang="pt-BR" sz="1070" b="0" u="none" strike="noStrike" noProof="0" dirty="0">
-              <a:solidFill>
-                <a:srgbClr val="FFFFFF"/>
-              </a:solidFill>
-              <a:effectLst/>
-              <a:uFillTx/>
-              <a:latin typeface="Arial"/>
-            </a:endParaRPr>
-          </a:p>
-        </p:txBody>
-      </p:sp>
-      <p:sp>
-        <p:nvSpPr>
-          <p:cNvPr id="28" name="Text 18"/>
-          <p:cNvSpPr/>
-          <p:nvPr/>
-        </p:nvSpPr>
-        <p:spPr>
-          <a:xfrm>
-            <a:off x="3483720" y="6007680"/>
-            <a:ext cx="1078560" cy="164160"/>
-          </a:xfrm>
-          <a:prstGeom prst="rect">
-            <a:avLst/>
-          </a:prstGeom>
-          <a:noFill/>
-          <a:ln w="0">
-            <a:noFill/>
-          </a:ln>
-        </p:spPr>
-        <p:style>
-          <a:lnRef idx="0">
-            <a:scrgbClr r="0" g="0" b="0"/>
-          </a:lnRef>
-          <a:fillRef idx="0">
-            <a:scrgbClr r="0" g="0" b="0"/>
-          </a:fillRef>
-          <a:effectRef idx="0">
-            <a:scrgbClr r="0" g="0" b="0"/>
-          </a:effectRef>
-          <a:fontRef idx="minor"/>
-        </p:style>
-        <p:txBody>
-          <a:bodyPr lIns="0" tIns="0" rIns="0" bIns="0" anchor="ctr">
-            <a:normAutofit/>
-          </a:bodyPr>
-          <a:lstStyle/>
-          <a:p>
-            <a:pPr algn="ctr" defTabSz="914400">
-              <a:lnSpc>
-                <a:spcPct val="100000"/>
-              </a:lnSpc>
-              <a:tabLst>
-                <a:tab pos="0" algn="l"/>
-              </a:tabLst>
-            </a:pPr>
-            <a:r>
-              <a:rPr lang="pt-BR" sz="860" b="0" u="none" strike="noStrike" noProof="0" dirty="0">
-                <a:solidFill>
-                  <a:srgbClr val="8EA0B6"/>
-                </a:solidFill>
-                <a:effectLst/>
-                <a:uFillTx/>
-                <a:latin typeface="Aptos"/>
-                <a:ea typeface="Aptos"/>
-              </a:rPr>
-              <a:t>valor · itens</a:t>
-            </a:r>
-            <a:endParaRPr lang="pt-BR" sz="860" b="0" u="none" strike="noStrike" noProof="0" dirty="0">
-              <a:solidFill>
-                <a:srgbClr val="FFFFFF"/>
-              </a:solidFill>
-              <a:effectLst/>
-              <a:uFillTx/>
-              <a:latin typeface="Arial"/>
-            </a:endParaRPr>
-          </a:p>
-        </p:txBody>
-      </p:sp>
-      <p:sp>
-        <p:nvSpPr>
-          <p:cNvPr id="29" name="Shape 19"/>
-          <p:cNvSpPr/>
-          <p:nvPr/>
-        </p:nvSpPr>
-        <p:spPr>
-          <a:xfrm>
-            <a:off x="5742360" y="5212080"/>
-            <a:ext cx="438480" cy="438480"/>
-          </a:xfrm>
-          <a:prstGeom prst="ellipse">
-            <a:avLst/>
-          </a:prstGeom>
-          <a:solidFill>
-            <a:srgbClr val="14243A"/>
-          </a:solidFill>
-          <a:ln w="15120">
-            <a:solidFill>
-              <a:srgbClr val="87E5F2"/>
-            </a:solidFill>
-            <a:round/>
-          </a:ln>
-        </p:spPr>
-        <p:style>
-          <a:lnRef idx="0">
-            <a:scrgbClr r="0" g="0" b="0"/>
-          </a:lnRef>
-          <a:fillRef idx="0">
-            <a:scrgbClr r="0" g="0" b="0"/>
-          </a:fillRef>
-          <a:effectRef idx="0">
-            <a:scrgbClr r="0" g="0" b="0"/>
-          </a:effectRef>
-          <a:fontRef idx="minor"/>
-        </p:style>
-        <p:txBody>
-          <a:bodyPr lIns="90000" tIns="45000" rIns="90000" bIns="45000" anchor="t">
-            <a:noAutofit/>
-          </a:bodyPr>
-          <a:lstStyle/>
-          <a:p>
-            <a:endParaRPr lang="pt-BR" sz="1800" b="0" u="none" strike="noStrike" noProof="0" dirty="0">
-              <a:solidFill>
-                <a:srgbClr val="FFFFFF"/>
-              </a:solidFill>
-              <a:effectLst/>
-              <a:uFillTx/>
-              <a:latin typeface="Arial"/>
-            </a:endParaRPr>
-          </a:p>
-        </p:txBody>
-      </p:sp>
-      <p:sp>
-        <p:nvSpPr>
-          <p:cNvPr id="30" name="Shape 20"/>
-          <p:cNvSpPr/>
-          <p:nvPr/>
-        </p:nvSpPr>
-        <p:spPr>
-          <a:xfrm flipV="1">
-            <a:off x="5861160" y="5376600"/>
-            <a:ext cx="201240" cy="118800"/>
-          </a:xfrm>
-          <a:prstGeom prst="line">
-            <a:avLst/>
-          </a:prstGeom>
-          <a:ln w="20160">
-            <a:solidFill>
-              <a:srgbClr val="87E5F2"/>
-            </a:solidFill>
-            <a:round/>
-            <a:tailEnd type="triangle" w="med" len="med"/>
-          </a:ln>
-        </p:spPr>
-        <p:style>
-          <a:lnRef idx="0">
-            <a:scrgbClr r="0" g="0" b="0"/>
-          </a:lnRef>
-          <a:fillRef idx="0">
-            <a:scrgbClr r="0" g="0" b="0"/>
-          </a:fillRef>
-          <a:effectRef idx="0">
-            <a:scrgbClr r="0" g="0" b="0"/>
-          </a:effectRef>
-          <a:fontRef idx="minor"/>
-        </p:style>
-        <p:txBody>
-          <a:bodyPr lIns="90000" tIns="45000" rIns="90000" bIns="45000" anchor="t" anchorCtr="1">
-            <a:noAutofit/>
-          </a:bodyPr>
-          <a:lstStyle/>
-          <a:p>
-            <a:endParaRPr lang="pt-BR" sz="1800" b="0" u="none" strike="noStrike" noProof="0" dirty="0">
-              <a:solidFill>
-                <a:srgbClr val="FFFFFF"/>
-              </a:solidFill>
-              <a:effectLst/>
-              <a:uFillTx/>
-              <a:latin typeface="Arial"/>
-            </a:endParaRPr>
-          </a:p>
-        </p:txBody>
-      </p:sp>
-      <p:sp>
-        <p:nvSpPr>
-          <p:cNvPr id="31" name="Shape 21"/>
-          <p:cNvSpPr/>
-          <p:nvPr/>
-        </p:nvSpPr>
-        <p:spPr>
-          <a:xfrm>
-            <a:off x="5852160" y="5486400"/>
-            <a:ext cx="45360" cy="45360"/>
-          </a:xfrm>
-          <a:prstGeom prst="ellipse">
-            <a:avLst/>
-          </a:prstGeom>
-          <a:solidFill>
-            <a:srgbClr val="87E5F2"/>
-          </a:solidFill>
-          <a:ln w="12600">
-            <a:solidFill>
-              <a:srgbClr val="87E5F2"/>
-            </a:solidFill>
-            <a:round/>
-          </a:ln>
-        </p:spPr>
-        <p:style>
-          <a:lnRef idx="0">
-            <a:scrgbClr r="0" g="0" b="0"/>
-          </a:lnRef>
-          <a:fillRef idx="0">
-            <a:scrgbClr r="0" g="0" b="0"/>
-          </a:fillRef>
-          <a:effectRef idx="0">
-            <a:scrgbClr r="0" g="0" b="0"/>
-          </a:effectRef>
-          <a:fontRef idx="minor"/>
-        </p:style>
-        <p:txBody>
-          <a:bodyPr lIns="90000" tIns="-12600" rIns="90000" bIns="-12600" anchor="t">
-            <a:noAutofit/>
-          </a:bodyPr>
-          <a:lstStyle/>
-          <a:p>
-            <a:endParaRPr lang="pt-BR" sz="1800" b="0" u="none" strike="noStrike" noProof="0" dirty="0">
-              <a:solidFill>
-                <a:srgbClr val="000000"/>
-              </a:solidFill>
-              <a:effectLst/>
-              <a:uFillTx/>
-              <a:latin typeface="Arial"/>
-            </a:endParaRPr>
-          </a:p>
-        </p:txBody>
-      </p:sp>
-      <p:sp>
-        <p:nvSpPr>
-          <p:cNvPr id="32" name="Text 22"/>
-          <p:cNvSpPr/>
-          <p:nvPr/>
-        </p:nvSpPr>
-        <p:spPr>
-          <a:xfrm>
-            <a:off x="5577840" y="5760720"/>
-            <a:ext cx="785880" cy="200880"/>
-          </a:xfrm>
-          <a:prstGeom prst="rect">
-            <a:avLst/>
-          </a:prstGeom>
-          <a:noFill/>
-          <a:ln w="0">
-            <a:noFill/>
-          </a:ln>
-        </p:spPr>
-        <p:style>
-          <a:lnRef idx="0">
-            <a:scrgbClr r="0" g="0" b="0"/>
-          </a:lnRef>
-          <a:fillRef idx="0">
-            <a:scrgbClr r="0" g="0" b="0"/>
-          </a:fillRef>
-          <a:effectRef idx="0">
-            <a:scrgbClr r="0" g="0" b="0"/>
-          </a:effectRef>
-          <a:fontRef idx="minor"/>
-        </p:style>
-        <p:txBody>
-          <a:bodyPr lIns="0" tIns="0" rIns="0" bIns="0" anchor="ctr">
-            <a:normAutofit/>
-          </a:bodyPr>
-          <a:lstStyle/>
-          <a:p>
-            <a:pPr algn="ctr" defTabSz="914400">
-              <a:lnSpc>
-                <a:spcPct val="100000"/>
-              </a:lnSpc>
-              <a:tabLst>
-                <a:tab pos="0" algn="l"/>
-              </a:tabLst>
-            </a:pPr>
-            <a:r>
-              <a:rPr lang="pt-BR" sz="1070" b="1" u="none" strike="noStrike" noProof="0" dirty="0">
-                <a:solidFill>
-                  <a:srgbClr val="FFFFFF"/>
-                </a:solidFill>
-                <a:effectLst/>
-                <a:uFillTx/>
-                <a:latin typeface="Aptos"/>
-                <a:ea typeface="Aptos"/>
-              </a:rPr>
-              <a:t>Entrega</a:t>
-            </a:r>
-            <a:endParaRPr lang="pt-BR" sz="1070" b="0" u="none" strike="noStrike" noProof="0" dirty="0">
-              <a:solidFill>
-                <a:srgbClr val="FFFFFF"/>
-              </a:solidFill>
-              <a:effectLst/>
-              <a:uFillTx/>
-              <a:latin typeface="Arial"/>
-            </a:endParaRPr>
-          </a:p>
-        </p:txBody>
-      </p:sp>
-      <p:sp>
-        <p:nvSpPr>
-          <p:cNvPr id="33" name="Text 23"/>
-          <p:cNvSpPr/>
-          <p:nvPr/>
-        </p:nvSpPr>
-        <p:spPr>
-          <a:xfrm>
-            <a:off x="5431680" y="6007680"/>
-            <a:ext cx="1078560" cy="164160"/>
-          </a:xfrm>
-          <a:prstGeom prst="rect">
-            <a:avLst/>
-          </a:prstGeom>
-          <a:noFill/>
-          <a:ln w="0">
-            <a:noFill/>
-          </a:ln>
-        </p:spPr>
-        <p:style>
-          <a:lnRef idx="0">
-            <a:scrgbClr r="0" g="0" b="0"/>
-          </a:lnRef>
-          <a:fillRef idx="0">
-            <a:scrgbClr r="0" g="0" b="0"/>
-          </a:fillRef>
-          <a:effectRef idx="0">
-            <a:scrgbClr r="0" g="0" b="0"/>
-          </a:effectRef>
-          <a:fontRef idx="minor"/>
-        </p:style>
-        <p:txBody>
-          <a:bodyPr lIns="0" tIns="0" rIns="0" bIns="0" anchor="ctr">
-            <a:normAutofit/>
-          </a:bodyPr>
-          <a:lstStyle/>
-          <a:p>
-            <a:pPr algn="ctr" defTabSz="914400">
-              <a:lnSpc>
-                <a:spcPct val="100000"/>
-              </a:lnSpc>
-              <a:tabLst>
-                <a:tab pos="0" algn="l"/>
-              </a:tabLst>
-            </a:pPr>
-            <a:r>
-              <a:rPr lang="pt-BR" sz="860" b="0" u="none" strike="noStrike" noProof="0" dirty="0">
-                <a:solidFill>
-                  <a:srgbClr val="8EA0B6"/>
-                </a:solidFill>
-                <a:effectLst/>
-                <a:uFillTx/>
-                <a:latin typeface="Aptos"/>
-                <a:ea typeface="Aptos"/>
-              </a:rPr>
-              <a:t>prazo · atraso</a:t>
-            </a:r>
-            <a:endParaRPr lang="pt-BR" sz="860" b="0" u="none" strike="noStrike" noProof="0" dirty="0">
-              <a:solidFill>
-                <a:srgbClr val="FFFFFF"/>
-              </a:solidFill>
-              <a:effectLst/>
-              <a:uFillTx/>
-              <a:latin typeface="Arial"/>
-            </a:endParaRPr>
-          </a:p>
-        </p:txBody>
-      </p:sp>
-      <p:sp>
-        <p:nvSpPr>
-          <p:cNvPr id="34" name="Shape 24"/>
-          <p:cNvSpPr/>
-          <p:nvPr/>
-        </p:nvSpPr>
-        <p:spPr>
-          <a:xfrm>
-            <a:off x="7689960" y="5212080"/>
-            <a:ext cx="438480" cy="438480"/>
-          </a:xfrm>
-          <a:prstGeom prst="ellipse">
-            <a:avLst/>
-          </a:prstGeom>
-          <a:solidFill>
-            <a:srgbClr val="14243A"/>
-          </a:solidFill>
-          <a:ln w="15120">
-            <a:solidFill>
-              <a:srgbClr val="87E5F2"/>
-            </a:solidFill>
-            <a:round/>
-          </a:ln>
-        </p:spPr>
-        <p:style>
-          <a:lnRef idx="0">
-            <a:scrgbClr r="0" g="0" b="0"/>
-          </a:lnRef>
-          <a:fillRef idx="0">
-            <a:scrgbClr r="0" g="0" b="0"/>
-          </a:fillRef>
-          <a:effectRef idx="0">
-            <a:scrgbClr r="0" g="0" b="0"/>
-          </a:effectRef>
-          <a:fontRef idx="minor"/>
-        </p:style>
-        <p:txBody>
-          <a:bodyPr lIns="90000" tIns="45000" rIns="90000" bIns="45000" anchor="t">
-            <a:noAutofit/>
-          </a:bodyPr>
-          <a:lstStyle/>
-          <a:p>
-            <a:endParaRPr lang="pt-BR" sz="1800" b="0" u="none" strike="noStrike" noProof="0" dirty="0">
-              <a:solidFill>
-                <a:srgbClr val="FFFFFF"/>
-              </a:solidFill>
-              <a:effectLst/>
-              <a:uFillTx/>
-              <a:latin typeface="Arial"/>
-            </a:endParaRPr>
-          </a:p>
-        </p:txBody>
-      </p:sp>
-      <p:sp>
-        <p:nvSpPr>
-          <p:cNvPr id="35" name="Shape 25"/>
-          <p:cNvSpPr/>
-          <p:nvPr/>
-        </p:nvSpPr>
-        <p:spPr>
-          <a:xfrm>
-            <a:off x="7799760" y="5340240"/>
-            <a:ext cx="219240" cy="155160"/>
-          </a:xfrm>
-          <a:prstGeom prst="roundRect">
-            <a:avLst>
-              <a:gd name="adj" fmla="val 23529"/>
-            </a:avLst>
-          </a:prstGeom>
-          <a:noFill/>
-          <a:ln w="15120">
-            <a:solidFill>
-              <a:srgbClr val="87E5F2"/>
-            </a:solidFill>
-            <a:round/>
-          </a:ln>
-        </p:spPr>
-        <p:style>
-          <a:lnRef idx="0">
-            <a:scrgbClr r="0" g="0" b="0"/>
-          </a:lnRef>
-          <a:fillRef idx="0">
-            <a:scrgbClr r="0" g="0" b="0"/>
-          </a:fillRef>
-          <a:effectRef idx="0">
-            <a:scrgbClr r="0" g="0" b="0"/>
-          </a:effectRef>
-          <a:fontRef idx="minor"/>
-        </p:style>
-        <p:txBody>
-          <a:bodyPr lIns="90000" tIns="45000" rIns="90000" bIns="45000" anchor="t">
-            <a:noAutofit/>
-          </a:bodyPr>
-          <a:lstStyle/>
-          <a:p>
-            <a:endParaRPr lang="pt-BR" sz="1800" b="0" u="none" strike="noStrike" noProof="0" dirty="0">
-              <a:solidFill>
-                <a:srgbClr val="000000"/>
-              </a:solidFill>
-              <a:effectLst/>
-              <a:uFillTx/>
-              <a:latin typeface="Arial"/>
-            </a:endParaRPr>
-          </a:p>
-        </p:txBody>
-      </p:sp>
-      <p:sp>
-        <p:nvSpPr>
-          <p:cNvPr id="36" name="Shape 26"/>
-          <p:cNvSpPr/>
-          <p:nvPr/>
-        </p:nvSpPr>
-        <p:spPr>
-          <a:xfrm flipH="1">
-            <a:off x="7818120" y="5495400"/>
-            <a:ext cx="36360" cy="54720"/>
-          </a:xfrm>
-          <a:prstGeom prst="line">
-            <a:avLst/>
-          </a:prstGeom>
-          <a:ln w="15120">
-            <a:solidFill>
-              <a:srgbClr val="87E5F2"/>
-            </a:solidFill>
-            <a:round/>
-          </a:ln>
-        </p:spPr>
-        <p:style>
-          <a:lnRef idx="0">
-            <a:scrgbClr r="0" g="0" b="0"/>
-          </a:lnRef>
-          <a:fillRef idx="0">
-            <a:scrgbClr r="0" g="0" b="0"/>
-          </a:fillRef>
-          <a:effectRef idx="0">
-            <a:scrgbClr r="0" g="0" b="0"/>
-          </a:effectRef>
-          <a:fontRef idx="minor"/>
-        </p:style>
-        <p:txBody>
-          <a:bodyPr lIns="90000" tIns="9720" rIns="90000" bIns="9720" anchor="t" anchorCtr="1">
-            <a:noAutofit/>
-          </a:bodyPr>
-          <a:lstStyle/>
-          <a:p>
-            <a:endParaRPr lang="pt-BR" sz="1800" b="0" u="none" strike="noStrike" noProof="0" dirty="0">
-              <a:solidFill>
-                <a:srgbClr val="FFFFFF"/>
-              </a:solidFill>
-              <a:effectLst/>
-              <a:uFillTx/>
-              <a:latin typeface="Arial"/>
-            </a:endParaRPr>
-          </a:p>
-        </p:txBody>
-      </p:sp>
-      <p:sp>
-        <p:nvSpPr>
-          <p:cNvPr id="37" name="Text 27"/>
-          <p:cNvSpPr/>
-          <p:nvPr/>
-        </p:nvSpPr>
-        <p:spPr>
-          <a:xfrm>
-            <a:off x="7525440" y="5760720"/>
-            <a:ext cx="785880" cy="200880"/>
-          </a:xfrm>
-          <a:prstGeom prst="rect">
-            <a:avLst/>
-          </a:prstGeom>
-          <a:noFill/>
-          <a:ln w="0">
-            <a:noFill/>
-          </a:ln>
-        </p:spPr>
-        <p:style>
-          <a:lnRef idx="0">
-            <a:scrgbClr r="0" g="0" b="0"/>
-          </a:lnRef>
-          <a:fillRef idx="0">
-            <a:scrgbClr r="0" g="0" b="0"/>
-          </a:fillRef>
-          <a:effectRef idx="0">
-            <a:scrgbClr r="0" g="0" b="0"/>
-          </a:effectRef>
-          <a:fontRef idx="minor"/>
-        </p:style>
-        <p:txBody>
-          <a:bodyPr lIns="0" tIns="0" rIns="0" bIns="0" anchor="ctr">
-            <a:normAutofit fontScale="92500"/>
-          </a:bodyPr>
-          <a:lstStyle/>
-          <a:p>
-            <a:pPr algn="ctr" defTabSz="914400">
-              <a:lnSpc>
-                <a:spcPct val="100000"/>
-              </a:lnSpc>
-              <a:tabLst>
-                <a:tab pos="0" algn="l"/>
-              </a:tabLst>
-            </a:pPr>
-            <a:r>
-              <a:rPr lang="pt-BR" sz="1070" b="1" u="none" strike="noStrike" noProof="0" dirty="0">
-                <a:solidFill>
-                  <a:srgbClr val="FFFFFF"/>
-                </a:solidFill>
-                <a:effectLst/>
-                <a:uFillTx/>
-                <a:latin typeface="Aptos"/>
-                <a:ea typeface="Aptos"/>
-              </a:rPr>
-              <a:t>Atendimento</a:t>
-            </a:r>
-            <a:endParaRPr lang="pt-BR" sz="1070" b="0" u="none" strike="noStrike" noProof="0" dirty="0">
-              <a:solidFill>
-                <a:srgbClr val="FFFFFF"/>
-              </a:solidFill>
-              <a:effectLst/>
-              <a:uFillTx/>
-              <a:latin typeface="Arial"/>
-            </a:endParaRPr>
-          </a:p>
-        </p:txBody>
-      </p:sp>
-      <p:sp>
-        <p:nvSpPr>
-          <p:cNvPr id="38" name="Text 28"/>
-          <p:cNvSpPr/>
-          <p:nvPr/>
-        </p:nvSpPr>
-        <p:spPr>
-          <a:xfrm>
-            <a:off x="7379280" y="6007680"/>
-            <a:ext cx="1078560" cy="164160"/>
-          </a:xfrm>
-          <a:prstGeom prst="rect">
-            <a:avLst/>
-          </a:prstGeom>
-          <a:noFill/>
-          <a:ln w="0">
-            <a:noFill/>
-          </a:ln>
-        </p:spPr>
-        <p:style>
-          <a:lnRef idx="0">
-            <a:scrgbClr r="0" g="0" b="0"/>
-          </a:lnRef>
-          <a:fillRef idx="0">
-            <a:scrgbClr r="0" g="0" b="0"/>
-          </a:fillRef>
-          <a:effectRef idx="0">
-            <a:scrgbClr r="0" g="0" b="0"/>
-          </a:effectRef>
-          <a:fontRef idx="minor"/>
-        </p:style>
-        <p:txBody>
-          <a:bodyPr lIns="0" tIns="0" rIns="0" bIns="0" anchor="ctr">
-            <a:normAutofit fontScale="92500"/>
-          </a:bodyPr>
-          <a:lstStyle/>
-          <a:p>
-            <a:pPr algn="ctr" defTabSz="914400">
-              <a:lnSpc>
-                <a:spcPct val="100000"/>
-              </a:lnSpc>
-              <a:tabLst>
-                <a:tab pos="0" algn="l"/>
-              </a:tabLst>
-            </a:pPr>
-            <a:r>
-              <a:rPr lang="pt-BR" sz="860" b="0" u="none" strike="noStrike" noProof="0" dirty="0">
-                <a:solidFill>
-                  <a:srgbClr val="8EA0B6"/>
-                </a:solidFill>
-                <a:effectLst/>
-                <a:uFillTx/>
-                <a:latin typeface="Aptos"/>
-                <a:ea typeface="Aptos"/>
-              </a:rPr>
-              <a:t>contatos · reclamações</a:t>
-            </a:r>
-            <a:endParaRPr lang="pt-BR" sz="860" b="0" u="none" strike="noStrike" noProof="0" dirty="0">
-              <a:solidFill>
-                <a:srgbClr val="FFFFFF"/>
-              </a:solidFill>
-              <a:effectLst/>
-              <a:uFillTx/>
-              <a:latin typeface="Arial"/>
-            </a:endParaRPr>
-          </a:p>
-        </p:txBody>
-      </p:sp>
-      <p:sp>
-        <p:nvSpPr>
-          <p:cNvPr id="39" name="Shape 29"/>
-          <p:cNvSpPr/>
-          <p:nvPr/>
-        </p:nvSpPr>
-        <p:spPr>
-          <a:xfrm>
-            <a:off x="9637920" y="5212080"/>
-            <a:ext cx="438480" cy="438480"/>
-          </a:xfrm>
-          <a:prstGeom prst="ellipse">
-            <a:avLst/>
-          </a:prstGeom>
-          <a:solidFill>
-            <a:srgbClr val="14243A"/>
-          </a:solidFill>
-          <a:ln w="15120">
-            <a:solidFill>
-              <a:srgbClr val="87E5F2"/>
-            </a:solidFill>
-            <a:round/>
-          </a:ln>
-        </p:spPr>
-        <p:style>
-          <a:lnRef idx="0">
-            <a:scrgbClr r="0" g="0" b="0"/>
-          </a:lnRef>
-          <a:fillRef idx="0">
-            <a:scrgbClr r="0" g="0" b="0"/>
-          </a:fillRef>
-          <a:effectRef idx="0">
-            <a:scrgbClr r="0" g="0" b="0"/>
-          </a:effectRef>
-          <a:fontRef idx="minor"/>
-        </p:style>
-        <p:txBody>
-          <a:bodyPr lIns="90000" tIns="45000" rIns="90000" bIns="45000" anchor="t">
-            <a:noAutofit/>
-          </a:bodyPr>
-          <a:lstStyle/>
-          <a:p>
-            <a:endParaRPr lang="pt-BR" sz="1800" b="0" u="none" strike="noStrike" noProof="0" dirty="0">
-              <a:solidFill>
-                <a:srgbClr val="FFFFFF"/>
-              </a:solidFill>
-              <a:effectLst/>
-              <a:uFillTx/>
-              <a:latin typeface="Arial"/>
-            </a:endParaRPr>
-          </a:p>
-        </p:txBody>
-      </p:sp>
-      <p:sp>
-        <p:nvSpPr>
-          <p:cNvPr id="40" name="Text 30"/>
-          <p:cNvSpPr/>
-          <p:nvPr/>
-        </p:nvSpPr>
-        <p:spPr>
-          <a:xfrm>
-            <a:off x="9692640" y="5266800"/>
-            <a:ext cx="328680" cy="310680"/>
-          </a:xfrm>
-          <a:prstGeom prst="rect">
-            <a:avLst/>
-          </a:prstGeom>
-          <a:noFill/>
-          <a:ln w="0">
-            <a:noFill/>
-          </a:ln>
-        </p:spPr>
-        <p:style>
-          <a:lnRef idx="0">
-            <a:scrgbClr r="0" g="0" b="0"/>
-          </a:lnRef>
-          <a:fillRef idx="0">
-            <a:scrgbClr r="0" g="0" b="0"/>
-          </a:fillRef>
-          <a:effectRef idx="0">
-            <a:scrgbClr r="0" g="0" b="0"/>
-          </a:effectRef>
-          <a:fontRef idx="minor"/>
-        </p:style>
-        <p:txBody>
-          <a:bodyPr lIns="0" tIns="0" rIns="0" bIns="0" anchor="ctr">
-            <a:normAutofit/>
-          </a:bodyPr>
-          <a:lstStyle/>
-          <a:p>
-            <a:pPr algn="ctr" defTabSz="914400">
-              <a:lnSpc>
-                <a:spcPct val="100000"/>
-              </a:lnSpc>
-              <a:tabLst>
-                <a:tab pos="0" algn="l"/>
-              </a:tabLst>
-            </a:pPr>
-            <a:r>
-              <a:rPr lang="pt-BR" sz="1800" b="1" u="none" strike="noStrike" noProof="0" dirty="0">
-                <a:solidFill>
-                  <a:srgbClr val="87E5F2"/>
-                </a:solidFill>
-                <a:effectLst/>
-                <a:uFillTx/>
-                <a:latin typeface="Aptos"/>
-                <a:ea typeface="Aptos"/>
-              </a:rPr>
-              <a:t>9</a:t>
-            </a:r>
-            <a:endParaRPr lang="pt-BR" sz="1800" b="0" u="none" strike="noStrike" noProof="0" dirty="0">
-              <a:solidFill>
-                <a:srgbClr val="FFFFFF"/>
-              </a:solidFill>
-              <a:effectLst/>
-              <a:uFillTx/>
-              <a:latin typeface="Arial"/>
-            </a:endParaRPr>
-          </a:p>
-        </p:txBody>
-      </p:sp>
-      <p:sp>
-        <p:nvSpPr>
-          <p:cNvPr id="41" name="Text 31"/>
-          <p:cNvSpPr/>
-          <p:nvPr/>
-        </p:nvSpPr>
-        <p:spPr>
-          <a:xfrm>
-            <a:off x="9473040" y="5760720"/>
-            <a:ext cx="785880" cy="200880"/>
-          </a:xfrm>
-          <a:prstGeom prst="rect">
-            <a:avLst/>
-          </a:prstGeom>
-          <a:noFill/>
-          <a:ln w="0">
-            <a:noFill/>
-          </a:ln>
-        </p:spPr>
-        <p:style>
-          <a:lnRef idx="0">
-            <a:scrgbClr r="0" g="0" b="0"/>
-          </a:lnRef>
-          <a:fillRef idx="0">
-            <a:scrgbClr r="0" g="0" b="0"/>
-          </a:fillRef>
-          <a:effectRef idx="0">
-            <a:scrgbClr r="0" g="0" b="0"/>
-          </a:effectRef>
-          <a:fontRef idx="minor"/>
-        </p:style>
-        <p:txBody>
-          <a:bodyPr lIns="0" tIns="0" rIns="0" bIns="0" anchor="ctr">
-            <a:normAutofit/>
-          </a:bodyPr>
-          <a:lstStyle/>
-          <a:p>
-            <a:pPr algn="ctr" defTabSz="914400">
-              <a:lnSpc>
-                <a:spcPct val="100000"/>
-              </a:lnSpc>
-              <a:tabLst>
-                <a:tab pos="0" algn="l"/>
-              </a:tabLst>
-            </a:pPr>
-            <a:r>
-              <a:rPr lang="pt-BR" sz="1070" b="1" u="none" strike="noStrike" noProof="0" dirty="0">
-                <a:solidFill>
-                  <a:srgbClr val="FFFFFF"/>
-                </a:solidFill>
-                <a:effectLst/>
-                <a:uFillTx/>
-                <a:latin typeface="Aptos"/>
-                <a:ea typeface="Aptos"/>
-              </a:rPr>
-              <a:t>NPS</a:t>
-            </a:r>
-            <a:endParaRPr lang="pt-BR" sz="1070" b="0" u="none" strike="noStrike" noProof="0" dirty="0">
-              <a:solidFill>
-                <a:srgbClr val="FFFFFF"/>
-              </a:solidFill>
-              <a:effectLst/>
-              <a:uFillTx/>
-              <a:latin typeface="Arial"/>
-            </a:endParaRPr>
-          </a:p>
-        </p:txBody>
-      </p:sp>
-      <p:sp>
-        <p:nvSpPr>
-          <p:cNvPr id="42" name="Text 32"/>
-          <p:cNvSpPr/>
-          <p:nvPr/>
-        </p:nvSpPr>
-        <p:spPr>
-          <a:xfrm>
-            <a:off x="9326880" y="6007680"/>
-            <a:ext cx="1078560" cy="164160"/>
-          </a:xfrm>
-          <a:prstGeom prst="rect">
-            <a:avLst/>
-          </a:prstGeom>
-          <a:noFill/>
-          <a:ln w="0">
-            <a:noFill/>
-          </a:ln>
-        </p:spPr>
-        <p:style>
-          <a:lnRef idx="0">
-            <a:scrgbClr r="0" g="0" b="0"/>
-          </a:lnRef>
-          <a:fillRef idx="0">
-            <a:scrgbClr r="0" g="0" b="0"/>
-          </a:fillRef>
-          <a:effectRef idx="0">
-            <a:scrgbClr r="0" g="0" b="0"/>
-          </a:effectRef>
-          <a:fontRef idx="minor"/>
-        </p:style>
-        <p:txBody>
-          <a:bodyPr lIns="0" tIns="0" rIns="0" bIns="0" anchor="ctr">
-            <a:normAutofit/>
-          </a:bodyPr>
-          <a:lstStyle/>
-          <a:p>
-            <a:pPr algn="ctr" defTabSz="914400">
-              <a:lnSpc>
-                <a:spcPct val="100000"/>
-              </a:lnSpc>
-              <a:tabLst>
-                <a:tab pos="0" algn="l"/>
-              </a:tabLst>
-            </a:pPr>
-            <a:r>
-              <a:rPr lang="pt-BR" sz="860" b="0" u="none" strike="noStrike" noProof="0" dirty="0">
-                <a:solidFill>
-                  <a:srgbClr val="8EA0B6"/>
-                </a:solidFill>
-                <a:effectLst/>
-                <a:uFillTx/>
-                <a:latin typeface="Aptos"/>
-                <a:ea typeface="Aptos"/>
-              </a:rPr>
-              <a:t>medido depois</a:t>
-            </a:r>
-            <a:endParaRPr lang="pt-BR" sz="860" b="0" u="none" strike="noStrike" noProof="0" dirty="0">
-              <a:solidFill>
-                <a:srgbClr val="FFFFFF"/>
-              </a:solidFill>
-              <a:effectLst/>
-              <a:uFillTx/>
-              <a:latin typeface="Arial"/>
-            </a:endParaRPr>
-          </a:p>
-        </p:txBody>
-      </p:sp>
-      <p:sp>
-        <p:nvSpPr>
-          <p:cNvPr id="43" name="Shape 33"/>
-          <p:cNvSpPr/>
-          <p:nvPr/>
-        </p:nvSpPr>
-        <p:spPr>
-          <a:xfrm>
-            <a:off x="9875520" y="4928400"/>
-            <a:ext cx="360" cy="219600"/>
-          </a:xfrm>
-          <a:prstGeom prst="line">
-            <a:avLst/>
-          </a:prstGeom>
-          <a:ln w="25560">
-            <a:solidFill>
-              <a:srgbClr val="EE5A62"/>
-            </a:solidFill>
-            <a:round/>
-          </a:ln>
-        </p:spPr>
-        <p:style>
-          <a:lnRef idx="0">
-            <a:scrgbClr r="0" g="0" b="0"/>
-          </a:lnRef>
-          <a:fillRef idx="0">
-            <a:scrgbClr r="0" g="0" b="0"/>
-          </a:fillRef>
-          <a:effectRef idx="0">
-            <a:scrgbClr r="0" g="0" b="0"/>
-          </a:effectRef>
-          <a:fontRef idx="minor"/>
-        </p:style>
-        <p:txBody>
-          <a:bodyPr lIns="90000" tIns="45000" rIns="90000" bIns="45000" anchor="t" anchorCtr="1">
-            <a:noAutofit/>
-          </a:bodyPr>
-          <a:lstStyle/>
-          <a:p>
-            <a:endParaRPr lang="pt-BR" sz="1800" b="0" u="none" strike="noStrike" noProof="0" dirty="0">
-              <a:solidFill>
-                <a:srgbClr val="FFFFFF"/>
-              </a:solidFill>
-              <a:effectLst/>
-              <a:uFillTx/>
-              <a:latin typeface="Arial"/>
-            </a:endParaRPr>
-          </a:p>
-        </p:txBody>
-      </p:sp>
-      <p:sp>
-        <p:nvSpPr>
-          <p:cNvPr id="44" name="Text 34"/>
-          <p:cNvSpPr/>
-          <p:nvPr/>
-        </p:nvSpPr>
-        <p:spPr>
-          <a:xfrm>
-            <a:off x="9162360" y="4663440"/>
-            <a:ext cx="1874160" cy="182520"/>
-          </a:xfrm>
-          <a:prstGeom prst="rect">
-            <a:avLst/>
-          </a:prstGeom>
-          <a:noFill/>
-          <a:ln w="0">
-            <a:noFill/>
-          </a:ln>
-        </p:spPr>
-        <p:style>
-          <a:lnRef idx="0">
-            <a:scrgbClr r="0" g="0" b="0"/>
-          </a:lnRef>
-          <a:fillRef idx="0">
-            <a:scrgbClr r="0" g="0" b="0"/>
-          </a:fillRef>
-          <a:effectRef idx="0">
-            <a:scrgbClr r="0" g="0" b="0"/>
-          </a:effectRef>
-          <a:fontRef idx="minor"/>
-        </p:style>
-        <p:txBody>
-          <a:bodyPr lIns="0" tIns="0" rIns="0" bIns="0" anchor="ctr">
-            <a:normAutofit/>
-          </a:bodyPr>
-          <a:lstStyle/>
-          <a:p>
-            <a:pPr algn="ctr" defTabSz="914400">
-              <a:lnSpc>
-                <a:spcPct val="100000"/>
-              </a:lnSpc>
-              <a:tabLst>
-                <a:tab pos="0" algn="l"/>
-              </a:tabLst>
-            </a:pPr>
-            <a:r>
-              <a:rPr lang="pt-BR" sz="920" b="1" u="none" strike="noStrike" noProof="0" dirty="0">
-                <a:solidFill>
-                  <a:srgbClr val="EE5A62"/>
-                </a:solidFill>
-                <a:effectLst/>
-                <a:uFillTx/>
-                <a:latin typeface="Aptos"/>
-                <a:ea typeface="Aptos"/>
-              </a:rPr>
-              <a:t>janela de ação já passou</a:t>
-            </a:r>
-            <a:endParaRPr lang="pt-BR" sz="920" b="0" u="none" strike="noStrike" noProof="0" dirty="0">
-              <a:solidFill>
-                <a:srgbClr val="FFFFFF"/>
-              </a:solidFill>
-              <a:effectLst/>
-              <a:uFillTx/>
-              <a:latin typeface="Arial"/>
-            </a:endParaRPr>
-          </a:p>
-        </p:txBody>
-      </p:sp>
-      <p:sp>
-        <p:nvSpPr>
-          <p:cNvPr id="45" name="Text 35"/>
-          <p:cNvSpPr/>
-          <p:nvPr/>
-        </p:nvSpPr>
-        <p:spPr>
-          <a:xfrm>
-            <a:off x="658440" y="6501240"/>
-            <a:ext cx="3748680" cy="164160"/>
-          </a:xfrm>
-          <a:prstGeom prst="rect">
-            <a:avLst/>
-          </a:prstGeom>
-          <a:noFill/>
-          <a:ln w="0">
-            <a:noFill/>
-          </a:ln>
-        </p:spPr>
-        <p:style>
-          <a:lnRef idx="0">
-            <a:scrgbClr r="0" g="0" b="0"/>
-          </a:lnRef>
-          <a:fillRef idx="0">
-            <a:scrgbClr r="0" g="0" b="0"/>
-          </a:fillRef>
-          <a:effectRef idx="0">
-            <a:scrgbClr r="0" g="0" b="0"/>
-          </a:effectRef>
-          <a:fontRef idx="minor"/>
-        </p:style>
-        <p:txBody>
-          <a:bodyPr lIns="0" tIns="0" rIns="0" bIns="0" anchor="ctr">
-            <a:normAutofit/>
-          </a:bodyPr>
-          <a:lstStyle/>
-          <a:p>
-            <a:pPr defTabSz="914400">
-              <a:lnSpc>
-                <a:spcPct val="100000"/>
-              </a:lnSpc>
-              <a:tabLst>
-                <a:tab pos="0" algn="l"/>
-              </a:tabLst>
-            </a:pPr>
-            <a:r>
-              <a:rPr lang="pt-BR" sz="850" b="0" u="none" strike="noStrike" noProof="0" dirty="0">
-                <a:solidFill>
-                  <a:srgbClr val="718399"/>
-                </a:solidFill>
-                <a:effectLst/>
-                <a:uFillTx/>
-                <a:latin typeface="Aptos"/>
-                <a:ea typeface="Aptos"/>
-              </a:rPr>
-              <a:t>NPS Preditivo  ·  Tech Challenge Fase 1</a:t>
-            </a:r>
-            <a:endParaRPr lang="pt-BR" sz="850" b="0" u="none" strike="noStrike" noProof="0" dirty="0">
-              <a:solidFill>
-                <a:srgbClr val="FFFFFF"/>
-              </a:solidFill>
-              <a:effectLst/>
-              <a:uFillTx/>
-              <a:latin typeface="Arial"/>
-            </a:endParaRPr>
-          </a:p>
-        </p:txBody>
-      </p:sp>
-      <p:sp>
-        <p:nvSpPr>
-          <p:cNvPr id="46" name="Text 36"/>
-          <p:cNvSpPr/>
-          <p:nvPr/>
-        </p:nvSpPr>
-        <p:spPr>
-          <a:xfrm>
-            <a:off x="11137320" y="6473880"/>
-            <a:ext cx="383760" cy="164160"/>
-          </a:xfrm>
-          <a:prstGeom prst="rect">
-            <a:avLst/>
-          </a:prstGeom>
-          <a:noFill/>
-          <a:ln w="0">
-            <a:noFill/>
-          </a:ln>
-        </p:spPr>
-        <p:style>
-          <a:lnRef idx="0">
-            <a:scrgbClr r="0" g="0" b="0"/>
-          </a:lnRef>
-          <a:fillRef idx="0">
-            <a:scrgbClr r="0" g="0" b="0"/>
-          </a:fillRef>
-          <a:effectRef idx="0">
-            <a:scrgbClr r="0" g="0" b="0"/>
-          </a:effectRef>
-          <a:fontRef idx="minor"/>
-        </p:style>
-        <p:txBody>
-          <a:bodyPr lIns="0" tIns="0" rIns="0" bIns="0" anchor="ctr">
-            <a:normAutofit/>
-          </a:bodyPr>
-          <a:lstStyle/>
-          <a:p>
-            <a:pPr algn="r" defTabSz="914400">
-              <a:lnSpc>
-                <a:spcPct val="100000"/>
-              </a:lnSpc>
-              <a:tabLst>
-                <a:tab pos="0" algn="l"/>
-              </a:tabLst>
-            </a:pPr>
-            <a:r>
-              <a:rPr lang="pt-BR" sz="850" b="0" u="none" strike="noStrike" noProof="0" dirty="0">
-                <a:solidFill>
-                  <a:srgbClr val="718399"/>
-                </a:solidFill>
-                <a:effectLst/>
-                <a:uFillTx/>
-                <a:latin typeface="Aptos"/>
-                <a:ea typeface="Aptos"/>
-              </a:rPr>
-              <a:t>01</a:t>
-            </a:r>
-            <a:endParaRPr lang="pt-BR" sz="850" b="0" u="none" strike="noStrike" noProof="0" dirty="0">
-              <a:solidFill>
-                <a:srgbClr val="FFFFFF"/>
-              </a:solidFill>
-              <a:effectLst/>
-              <a:uFillTx/>
-              <a:latin typeface="Arial"/>
-            </a:endParaRPr>
+              </a:rPr>
+              <a:t>Case NPS Preditivo  ·  Business Understanding &amp; Data Analysis</a:t>
+            </a:r>
           </a:p>
         </p:txBody>
       </p:sp>
@@ -7210,6 +5325,1051 @@
 </file>
 
 <file path=ppt/slides/slide10.xml><?xml version="1.0" encoding="utf-8"?>
+<p:sld xmlns:a="http://schemas.openxmlformats.org/drawingml/2006/main" xmlns:p="http://schemas.openxmlformats.org/presentationml/2006/main" xmlns:r="http://schemas.openxmlformats.org/officeDocument/2006/relationships">
+  <p:cSld>
+    <p:bg>
+      <p:bgPr>
+        <a:solidFill>
+          <a:srgbClr val="091220"/>
+        </a:solidFill>
+        <a:effectLst/>
+      </p:bgPr>
+    </p:bg>
+    <p:spTree>
+      <p:nvGrpSpPr>
+        <p:cNvPr id="1" name=""/>
+        <p:cNvGrpSpPr/>
+        <p:nvPr/>
+      </p:nvGrpSpPr>
+      <p:grpSpPr/>
+      <p:sp>
+        <p:nvSpPr>
+          <p:cNvPr id="2" name="TextBox 1"/>
+          <p:cNvSpPr txBox="1"/>
+          <p:nvPr/>
+        </p:nvSpPr>
+        <p:spPr>
+          <a:xfrm>
+            <a:off x="658368" y="384048"/>
+            <a:ext cx="5943600" cy="201168"/>
+          </a:xfrm>
+          <a:prstGeom prst="rect">
+            <a:avLst/>
+          </a:prstGeom>
+          <a:noFill/>
+        </p:spPr>
+        <p:txBody>
+          <a:bodyPr wrap="square" anchor="t" lIns="0" rIns="0" tIns="0" bIns="0">
+            <a:spAutoFit/>
+          </a:bodyPr>
+          <a:lstStyle/>
+          <a:p>
+            <a:pPr algn="l"/>
+            <a:r>
+              <a:rPr sz="950" b="1" i="0">
+                <a:solidFill>
+                  <a:srgbClr val="25C7E5"/>
+                </a:solidFill>
+                <a:latin typeface="Aptos"/>
+              </a:rPr>
+              <a:t>PARTE 4 · RECOMENDAÇÕES</a:t>
+            </a:r>
+          </a:p>
+        </p:txBody>
+      </p:sp>
+      <p:sp>
+        <p:nvSpPr>
+          <p:cNvPr id="3" name="TextBox 2"/>
+          <p:cNvSpPr txBox="1"/>
+          <p:nvPr/>
+        </p:nvSpPr>
+        <p:spPr>
+          <a:xfrm>
+            <a:off x="658368" y="786384"/>
+            <a:ext cx="10881360" cy="749808"/>
+          </a:xfrm>
+          <a:prstGeom prst="rect">
+            <a:avLst/>
+          </a:prstGeom>
+          <a:noFill/>
+        </p:spPr>
+        <p:txBody>
+          <a:bodyPr wrap="square" anchor="t" lIns="0" rIns="0" tIns="0" bIns="0">
+            <a:spAutoFit/>
+          </a:bodyPr>
+          <a:lstStyle/>
+          <a:p>
+            <a:pPr algn="l">
+              <a:lnSpc>
+                <a:spcPct val="102000"/>
+              </a:lnSpc>
+            </a:pPr>
+            <a:r>
+              <a:rPr sz="2900" b="1" i="0">
+                <a:solidFill>
+                  <a:srgbClr val="FFFFFF"/>
+                </a:solidFill>
+                <a:latin typeface="Aptos Display"/>
+              </a:rPr>
+              <a:t>Três ações operacionais, priorizadas pelo impacto nos dados.</a:t>
+            </a:r>
+          </a:p>
+        </p:txBody>
+      </p:sp>
+      <p:sp>
+        <p:nvSpPr>
+          <p:cNvPr id="4" name="TextBox 3"/>
+          <p:cNvSpPr txBox="1"/>
+          <p:nvPr/>
+        </p:nvSpPr>
+        <p:spPr>
+          <a:xfrm>
+            <a:off x="658368" y="1572768"/>
+            <a:ext cx="10607040" cy="365760"/>
+          </a:xfrm>
+          <a:prstGeom prst="rect">
+            <a:avLst/>
+          </a:prstGeom>
+          <a:noFill/>
+        </p:spPr>
+        <p:txBody>
+          <a:bodyPr wrap="square" anchor="t" lIns="0" rIns="0" tIns="0" bIns="0">
+            <a:spAutoFit/>
+          </a:bodyPr>
+          <a:lstStyle/>
+          <a:p>
+            <a:pPr algn="l"/>
+            <a:r>
+              <a:rPr sz="1210" b="0" i="0">
+                <a:solidFill>
+                  <a:srgbClr val="9FB0C6"/>
+                </a:solidFill>
+                <a:latin typeface="Aptos"/>
+              </a:rPr>
+              <a:t>Construídas a partir dos achados da EDA — independentes do modelo preditivo (item opcional).</a:t>
+            </a:r>
+          </a:p>
+        </p:txBody>
+      </p:sp>
+      <p:sp>
+        <p:nvSpPr>
+          <p:cNvPr id="5" name="Rounded Rectangle 4"/>
+          <p:cNvSpPr/>
+          <p:nvPr/>
+        </p:nvSpPr>
+        <p:spPr>
+          <a:xfrm>
+            <a:off x="658368" y="2212848"/>
+            <a:ext cx="10881360" cy="1207008"/>
+          </a:xfrm>
+          <a:prstGeom prst="roundRect">
+            <a:avLst>
+              <a:gd name="adj" fmla="val 5000"/>
+            </a:avLst>
+          </a:prstGeom>
+          <a:solidFill>
+            <a:srgbClr val="0D1A2B"/>
+          </a:solidFill>
+          <a:ln>
+            <a:noFill/>
+          </a:ln>
+          <a:effectLst/>
+        </p:spPr>
+        <p:style>
+          <a:lnRef idx="1">
+            <a:schemeClr val="accent1"/>
+          </a:lnRef>
+          <a:fillRef idx="3">
+            <a:schemeClr val="accent1"/>
+          </a:fillRef>
+          <a:effectRef idx="2">
+            <a:schemeClr val="accent1"/>
+          </a:effectRef>
+          <a:fontRef idx="minor">
+            <a:schemeClr val="lt1"/>
+          </a:fontRef>
+        </p:style>
+        <p:txBody>
+          <a:bodyPr rtlCol="0" anchor="ctr"/>
+          <a:lstStyle/>
+          <a:p>
+            <a:pPr algn="ctr"/>
+          </a:p>
+        </p:txBody>
+      </p:sp>
+      <p:sp>
+        <p:nvSpPr>
+          <p:cNvPr id="6" name="Oval 5"/>
+          <p:cNvSpPr/>
+          <p:nvPr/>
+        </p:nvSpPr>
+        <p:spPr>
+          <a:xfrm>
+            <a:off x="932688" y="2395728"/>
+            <a:ext cx="457200" cy="457200"/>
+          </a:xfrm>
+          <a:prstGeom prst="ellipse">
+            <a:avLst/>
+          </a:prstGeom>
+          <a:solidFill>
+            <a:srgbClr val="25C7E5"/>
+          </a:solidFill>
+          <a:ln>
+            <a:noFill/>
+          </a:ln>
+          <a:effectLst/>
+        </p:spPr>
+        <p:style>
+          <a:lnRef idx="1">
+            <a:schemeClr val="accent1"/>
+          </a:lnRef>
+          <a:fillRef idx="3">
+            <a:schemeClr val="accent1"/>
+          </a:fillRef>
+          <a:effectRef idx="2">
+            <a:schemeClr val="accent1"/>
+          </a:effectRef>
+          <a:fontRef idx="minor">
+            <a:schemeClr val="lt1"/>
+          </a:fontRef>
+        </p:style>
+        <p:txBody>
+          <a:bodyPr rtlCol="0" anchor="ctr"/>
+          <a:lstStyle/>
+          <a:p>
+            <a:pPr algn="ctr"/>
+          </a:p>
+        </p:txBody>
+      </p:sp>
+      <p:sp>
+        <p:nvSpPr>
+          <p:cNvPr id="7" name="TextBox 6"/>
+          <p:cNvSpPr txBox="1"/>
+          <p:nvPr/>
+        </p:nvSpPr>
+        <p:spPr>
+          <a:xfrm>
+            <a:off x="932688" y="2478024"/>
+            <a:ext cx="457200" cy="256032"/>
+          </a:xfrm>
+          <a:prstGeom prst="rect">
+            <a:avLst/>
+          </a:prstGeom>
+          <a:noFill/>
+        </p:spPr>
+        <p:txBody>
+          <a:bodyPr wrap="square" anchor="t" lIns="0" rIns="0" tIns="0" bIns="0">
+            <a:spAutoFit/>
+          </a:bodyPr>
+          <a:lstStyle/>
+          <a:p>
+            <a:pPr algn="ctr"/>
+            <a:r>
+              <a:rPr sz="1150" b="1" i="0">
+                <a:solidFill>
+                  <a:srgbClr val="091220"/>
+                </a:solidFill>
+                <a:latin typeface="Aptos"/>
+              </a:rPr>
+              <a:t>01</a:t>
+            </a:r>
+          </a:p>
+        </p:txBody>
+      </p:sp>
+      <p:sp>
+        <p:nvSpPr>
+          <p:cNvPr id="8" name="TextBox 7"/>
+          <p:cNvSpPr txBox="1"/>
+          <p:nvPr/>
+        </p:nvSpPr>
+        <p:spPr>
+          <a:xfrm>
+            <a:off x="1627632" y="2359152"/>
+            <a:ext cx="5852160" cy="274320"/>
+          </a:xfrm>
+          <a:prstGeom prst="rect">
+            <a:avLst/>
+          </a:prstGeom>
+          <a:noFill/>
+        </p:spPr>
+        <p:txBody>
+          <a:bodyPr wrap="square" anchor="t" lIns="0" rIns="0" tIns="0" bIns="0">
+            <a:spAutoFit/>
+          </a:bodyPr>
+          <a:lstStyle/>
+          <a:p>
+            <a:pPr algn="l"/>
+            <a:r>
+              <a:rPr sz="1550" b="1" i="0">
+                <a:solidFill>
+                  <a:srgbClr val="FFFFFF"/>
+                </a:solidFill>
+                <a:latin typeface="Aptos Display"/>
+              </a:rPr>
+              <a:t>Eliminar o primeiro dia de atraso</a:t>
+            </a:r>
+          </a:p>
+        </p:txBody>
+      </p:sp>
+      <p:sp>
+        <p:nvSpPr>
+          <p:cNvPr id="9" name="Rounded Rectangle 8"/>
+          <p:cNvSpPr/>
+          <p:nvPr/>
+        </p:nvSpPr>
+        <p:spPr>
+          <a:xfrm>
+            <a:off x="7818120" y="2395728"/>
+            <a:ext cx="2651760" cy="256032"/>
+          </a:xfrm>
+          <a:prstGeom prst="roundRect">
+            <a:avLst>
+              <a:gd name="adj" fmla="val 50000"/>
+            </a:avLst>
+          </a:prstGeom>
+          <a:solidFill>
+            <a:srgbClr val="14243A"/>
+          </a:solidFill>
+          <a:ln>
+            <a:noFill/>
+          </a:ln>
+          <a:effectLst/>
+        </p:spPr>
+        <p:style>
+          <a:lnRef idx="1">
+            <a:schemeClr val="accent1"/>
+          </a:lnRef>
+          <a:fillRef idx="3">
+            <a:schemeClr val="accent1"/>
+          </a:fillRef>
+          <a:effectRef idx="2">
+            <a:schemeClr val="accent1"/>
+          </a:effectRef>
+          <a:fontRef idx="minor">
+            <a:schemeClr val="lt1"/>
+          </a:fontRef>
+        </p:style>
+        <p:txBody>
+          <a:bodyPr rtlCol="0" anchor="ctr"/>
+          <a:lstStyle/>
+          <a:p>
+            <a:pPr algn="ctr"/>
+          </a:p>
+        </p:txBody>
+      </p:sp>
+      <p:sp>
+        <p:nvSpPr>
+          <p:cNvPr id="10" name="TextBox 9"/>
+          <p:cNvSpPr txBox="1"/>
+          <p:nvPr/>
+        </p:nvSpPr>
+        <p:spPr>
+          <a:xfrm>
+            <a:off x="7818120" y="2414016"/>
+            <a:ext cx="2651760" cy="219456"/>
+          </a:xfrm>
+          <a:prstGeom prst="rect">
+            <a:avLst/>
+          </a:prstGeom>
+          <a:noFill/>
+        </p:spPr>
+        <p:txBody>
+          <a:bodyPr wrap="square" anchor="t" lIns="0" rIns="0" tIns="0" bIns="0">
+            <a:spAutoFit/>
+          </a:bodyPr>
+          <a:lstStyle/>
+          <a:p>
+            <a:pPr algn="ctr"/>
+            <a:r>
+              <a:rPr sz="860" b="1" i="0">
+                <a:solidFill>
+                  <a:srgbClr val="87E5F2"/>
+                </a:solidFill>
+                <a:latin typeface="Aptos"/>
+              </a:rPr>
+              <a:t>PRIORIDADE MÁXIMA</a:t>
+            </a:r>
+          </a:p>
+        </p:txBody>
+      </p:sp>
+      <p:sp>
+        <p:nvSpPr>
+          <p:cNvPr id="11" name="TextBox 10"/>
+          <p:cNvSpPr txBox="1"/>
+          <p:nvPr/>
+        </p:nvSpPr>
+        <p:spPr>
+          <a:xfrm>
+            <a:off x="1627632" y="2688336"/>
+            <a:ext cx="8823960" cy="621792"/>
+          </a:xfrm>
+          <a:prstGeom prst="rect">
+            <a:avLst/>
+          </a:prstGeom>
+          <a:noFill/>
+        </p:spPr>
+        <p:txBody>
+          <a:bodyPr wrap="square" anchor="t" lIns="0" rIns="0" tIns="0" bIns="0">
+            <a:spAutoFit/>
+          </a:bodyPr>
+          <a:lstStyle/>
+          <a:p>
+            <a:pPr algn="l">
+              <a:lnSpc>
+                <a:spcPct val="110000"/>
+              </a:lnSpc>
+            </a:pPr>
+            <a:r>
+              <a:rPr sz="1010" b="0" i="0">
+                <a:solidFill>
+                  <a:srgbClr val="A6B4C6"/>
+                </a:solidFill>
+                <a:latin typeface="Aptos"/>
+              </a:rPr>
+              <a:t>O salto de 0 para 1 dia de atraso já derruba o NPS em 1,3 pontos e aumenta os detratores em 22,3 p.p. Ação: revisar SLA logístico e gargalos da última milha.</a:t>
+            </a:r>
+          </a:p>
+        </p:txBody>
+      </p:sp>
+      <p:sp>
+        <p:nvSpPr>
+          <p:cNvPr id="12" name="Rounded Rectangle 11"/>
+          <p:cNvSpPr/>
+          <p:nvPr/>
+        </p:nvSpPr>
+        <p:spPr>
+          <a:xfrm>
+            <a:off x="658368" y="3566160"/>
+            <a:ext cx="10881360" cy="1207008"/>
+          </a:xfrm>
+          <a:prstGeom prst="roundRect">
+            <a:avLst>
+              <a:gd name="adj" fmla="val 5000"/>
+            </a:avLst>
+          </a:prstGeom>
+          <a:solidFill>
+            <a:srgbClr val="0D1A2B"/>
+          </a:solidFill>
+          <a:ln>
+            <a:noFill/>
+          </a:ln>
+          <a:effectLst/>
+        </p:spPr>
+        <p:style>
+          <a:lnRef idx="1">
+            <a:schemeClr val="accent1"/>
+          </a:lnRef>
+          <a:fillRef idx="3">
+            <a:schemeClr val="accent1"/>
+          </a:fillRef>
+          <a:effectRef idx="2">
+            <a:schemeClr val="accent1"/>
+          </a:effectRef>
+          <a:fontRef idx="minor">
+            <a:schemeClr val="lt1"/>
+          </a:fontRef>
+        </p:style>
+        <p:txBody>
+          <a:bodyPr rtlCol="0" anchor="ctr"/>
+          <a:lstStyle/>
+          <a:p>
+            <a:pPr algn="ctr"/>
+          </a:p>
+        </p:txBody>
+      </p:sp>
+      <p:sp>
+        <p:nvSpPr>
+          <p:cNvPr id="13" name="Oval 12"/>
+          <p:cNvSpPr/>
+          <p:nvPr/>
+        </p:nvSpPr>
+        <p:spPr>
+          <a:xfrm>
+            <a:off x="932688" y="3749039"/>
+            <a:ext cx="457200" cy="457200"/>
+          </a:xfrm>
+          <a:prstGeom prst="ellipse">
+            <a:avLst/>
+          </a:prstGeom>
+          <a:solidFill>
+            <a:srgbClr val="25C7E5"/>
+          </a:solidFill>
+          <a:ln>
+            <a:noFill/>
+          </a:ln>
+          <a:effectLst/>
+        </p:spPr>
+        <p:style>
+          <a:lnRef idx="1">
+            <a:schemeClr val="accent1"/>
+          </a:lnRef>
+          <a:fillRef idx="3">
+            <a:schemeClr val="accent1"/>
+          </a:fillRef>
+          <a:effectRef idx="2">
+            <a:schemeClr val="accent1"/>
+          </a:effectRef>
+          <a:fontRef idx="minor">
+            <a:schemeClr val="lt1"/>
+          </a:fontRef>
+        </p:style>
+        <p:txBody>
+          <a:bodyPr rtlCol="0" anchor="ctr"/>
+          <a:lstStyle/>
+          <a:p>
+            <a:pPr algn="ctr"/>
+          </a:p>
+        </p:txBody>
+      </p:sp>
+      <p:sp>
+        <p:nvSpPr>
+          <p:cNvPr id="14" name="TextBox 13"/>
+          <p:cNvSpPr txBox="1"/>
+          <p:nvPr/>
+        </p:nvSpPr>
+        <p:spPr>
+          <a:xfrm>
+            <a:off x="932688" y="3831335"/>
+            <a:ext cx="457200" cy="256032"/>
+          </a:xfrm>
+          <a:prstGeom prst="rect">
+            <a:avLst/>
+          </a:prstGeom>
+          <a:noFill/>
+        </p:spPr>
+        <p:txBody>
+          <a:bodyPr wrap="square" anchor="t" lIns="0" rIns="0" tIns="0" bIns="0">
+            <a:spAutoFit/>
+          </a:bodyPr>
+          <a:lstStyle/>
+          <a:p>
+            <a:pPr algn="ctr"/>
+            <a:r>
+              <a:rPr sz="1150" b="1" i="0">
+                <a:solidFill>
+                  <a:srgbClr val="091220"/>
+                </a:solidFill>
+                <a:latin typeface="Aptos"/>
+              </a:rPr>
+              <a:t>02</a:t>
+            </a:r>
+          </a:p>
+        </p:txBody>
+      </p:sp>
+      <p:sp>
+        <p:nvSpPr>
+          <p:cNvPr id="15" name="TextBox 14"/>
+          <p:cNvSpPr txBox="1"/>
+          <p:nvPr/>
+        </p:nvSpPr>
+        <p:spPr>
+          <a:xfrm>
+            <a:off x="1627632" y="3712463"/>
+            <a:ext cx="5852160" cy="274320"/>
+          </a:xfrm>
+          <a:prstGeom prst="rect">
+            <a:avLst/>
+          </a:prstGeom>
+          <a:noFill/>
+        </p:spPr>
+        <p:txBody>
+          <a:bodyPr wrap="square" anchor="t" lIns="0" rIns="0" tIns="0" bIns="0">
+            <a:spAutoFit/>
+          </a:bodyPr>
+          <a:lstStyle/>
+          <a:p>
+            <a:pPr algn="l"/>
+            <a:r>
+              <a:rPr sz="1550" b="1" i="0">
+                <a:solidFill>
+                  <a:srgbClr val="FFFFFF"/>
+                </a:solidFill>
+                <a:latin typeface="Aptos Display"/>
+              </a:rPr>
+              <a:t>Resolver antes de o cliente reclamar</a:t>
+            </a:r>
+          </a:p>
+        </p:txBody>
+      </p:sp>
+      <p:sp>
+        <p:nvSpPr>
+          <p:cNvPr id="16" name="Rounded Rectangle 15"/>
+          <p:cNvSpPr/>
+          <p:nvPr/>
+        </p:nvSpPr>
+        <p:spPr>
+          <a:xfrm>
+            <a:off x="7818120" y="3749039"/>
+            <a:ext cx="2651760" cy="256032"/>
+          </a:xfrm>
+          <a:prstGeom prst="roundRect">
+            <a:avLst>
+              <a:gd name="adj" fmla="val 50000"/>
+            </a:avLst>
+          </a:prstGeom>
+          <a:solidFill>
+            <a:srgbClr val="14243A"/>
+          </a:solidFill>
+          <a:ln>
+            <a:noFill/>
+          </a:ln>
+          <a:effectLst/>
+        </p:spPr>
+        <p:style>
+          <a:lnRef idx="1">
+            <a:schemeClr val="accent1"/>
+          </a:lnRef>
+          <a:fillRef idx="3">
+            <a:schemeClr val="accent1"/>
+          </a:fillRef>
+          <a:effectRef idx="2">
+            <a:schemeClr val="accent1"/>
+          </a:effectRef>
+          <a:fontRef idx="minor">
+            <a:schemeClr val="lt1"/>
+          </a:fontRef>
+        </p:style>
+        <p:txBody>
+          <a:bodyPr rtlCol="0" anchor="ctr"/>
+          <a:lstStyle/>
+          <a:p>
+            <a:pPr algn="ctr"/>
+          </a:p>
+        </p:txBody>
+      </p:sp>
+      <p:sp>
+        <p:nvSpPr>
+          <p:cNvPr id="17" name="TextBox 16"/>
+          <p:cNvSpPr txBox="1"/>
+          <p:nvPr/>
+        </p:nvSpPr>
+        <p:spPr>
+          <a:xfrm>
+            <a:off x="7818120" y="3767328"/>
+            <a:ext cx="2651760" cy="219456"/>
+          </a:xfrm>
+          <a:prstGeom prst="rect">
+            <a:avLst/>
+          </a:prstGeom>
+          <a:noFill/>
+        </p:spPr>
+        <p:txBody>
+          <a:bodyPr wrap="square" anchor="t" lIns="0" rIns="0" tIns="0" bIns="0">
+            <a:spAutoFit/>
+          </a:bodyPr>
+          <a:lstStyle/>
+          <a:p>
+            <a:pPr algn="ctr"/>
+            <a:r>
+              <a:rPr sz="860" b="1" i="0">
+                <a:solidFill>
+                  <a:srgbClr val="87E5F2"/>
+                </a:solidFill>
+                <a:latin typeface="Aptos"/>
+              </a:rPr>
+              <a:t>PRIORIDADE ALTA</a:t>
+            </a:r>
+          </a:p>
+        </p:txBody>
+      </p:sp>
+      <p:sp>
+        <p:nvSpPr>
+          <p:cNvPr id="18" name="TextBox 17"/>
+          <p:cNvSpPr txBox="1"/>
+          <p:nvPr/>
+        </p:nvSpPr>
+        <p:spPr>
+          <a:xfrm>
+            <a:off x="1627632" y="4041648"/>
+            <a:ext cx="8823960" cy="621792"/>
+          </a:xfrm>
+          <a:prstGeom prst="rect">
+            <a:avLst/>
+          </a:prstGeom>
+          <a:noFill/>
+        </p:spPr>
+        <p:txBody>
+          <a:bodyPr wrap="square" anchor="t" lIns="0" rIns="0" tIns="0" bIns="0">
+            <a:spAutoFit/>
+          </a:bodyPr>
+          <a:lstStyle/>
+          <a:p>
+            <a:pPr algn="l">
+              <a:lnSpc>
+                <a:spcPct val="110000"/>
+              </a:lnSpc>
+            </a:pPr>
+            <a:r>
+              <a:rPr sz="1010" b="0" i="0">
+                <a:solidFill>
+                  <a:srgbClr val="A6B4C6"/>
+                </a:solidFill>
+                <a:latin typeface="Aptos"/>
+              </a:rPr>
+              <a:t>Detratores fazem 75,3% mais contatos e 71,0% mais reclamações do que não-detratores. Ação: notificar e agir assim que um atraso é detectado, antes da reclamação.</a:t>
+            </a:r>
+          </a:p>
+        </p:txBody>
+      </p:sp>
+      <p:sp>
+        <p:nvSpPr>
+          <p:cNvPr id="19" name="Rounded Rectangle 18"/>
+          <p:cNvSpPr/>
+          <p:nvPr/>
+        </p:nvSpPr>
+        <p:spPr>
+          <a:xfrm>
+            <a:off x="658368" y="4919472"/>
+            <a:ext cx="10881360" cy="1207008"/>
+          </a:xfrm>
+          <a:prstGeom prst="roundRect">
+            <a:avLst>
+              <a:gd name="adj" fmla="val 5000"/>
+            </a:avLst>
+          </a:prstGeom>
+          <a:solidFill>
+            <a:srgbClr val="0D1A2B"/>
+          </a:solidFill>
+          <a:ln>
+            <a:noFill/>
+          </a:ln>
+          <a:effectLst/>
+        </p:spPr>
+        <p:style>
+          <a:lnRef idx="1">
+            <a:schemeClr val="accent1"/>
+          </a:lnRef>
+          <a:fillRef idx="3">
+            <a:schemeClr val="accent1"/>
+          </a:fillRef>
+          <a:effectRef idx="2">
+            <a:schemeClr val="accent1"/>
+          </a:effectRef>
+          <a:fontRef idx="minor">
+            <a:schemeClr val="lt1"/>
+          </a:fontRef>
+        </p:style>
+        <p:txBody>
+          <a:bodyPr rtlCol="0" anchor="ctr"/>
+          <a:lstStyle/>
+          <a:p>
+            <a:pPr algn="ctr"/>
+          </a:p>
+        </p:txBody>
+      </p:sp>
+      <p:sp>
+        <p:nvSpPr>
+          <p:cNvPr id="20" name="Oval 19"/>
+          <p:cNvSpPr/>
+          <p:nvPr/>
+        </p:nvSpPr>
+        <p:spPr>
+          <a:xfrm>
+            <a:off x="932688" y="5102352"/>
+            <a:ext cx="457200" cy="457200"/>
+          </a:xfrm>
+          <a:prstGeom prst="ellipse">
+            <a:avLst/>
+          </a:prstGeom>
+          <a:solidFill>
+            <a:srgbClr val="25C7E5"/>
+          </a:solidFill>
+          <a:ln>
+            <a:noFill/>
+          </a:ln>
+          <a:effectLst/>
+        </p:spPr>
+        <p:style>
+          <a:lnRef idx="1">
+            <a:schemeClr val="accent1"/>
+          </a:lnRef>
+          <a:fillRef idx="3">
+            <a:schemeClr val="accent1"/>
+          </a:fillRef>
+          <a:effectRef idx="2">
+            <a:schemeClr val="accent1"/>
+          </a:effectRef>
+          <a:fontRef idx="minor">
+            <a:schemeClr val="lt1"/>
+          </a:fontRef>
+        </p:style>
+        <p:txBody>
+          <a:bodyPr rtlCol="0" anchor="ctr"/>
+          <a:lstStyle/>
+          <a:p>
+            <a:pPr algn="ctr"/>
+          </a:p>
+        </p:txBody>
+      </p:sp>
+      <p:sp>
+        <p:nvSpPr>
+          <p:cNvPr id="21" name="TextBox 20"/>
+          <p:cNvSpPr txBox="1"/>
+          <p:nvPr/>
+        </p:nvSpPr>
+        <p:spPr>
+          <a:xfrm>
+            <a:off x="932688" y="5184648"/>
+            <a:ext cx="457200" cy="256032"/>
+          </a:xfrm>
+          <a:prstGeom prst="rect">
+            <a:avLst/>
+          </a:prstGeom>
+          <a:noFill/>
+        </p:spPr>
+        <p:txBody>
+          <a:bodyPr wrap="square" anchor="t" lIns="0" rIns="0" tIns="0" bIns="0">
+            <a:spAutoFit/>
+          </a:bodyPr>
+          <a:lstStyle/>
+          <a:p>
+            <a:pPr algn="ctr"/>
+            <a:r>
+              <a:rPr sz="1150" b="1" i="0">
+                <a:solidFill>
+                  <a:srgbClr val="091220"/>
+                </a:solidFill>
+                <a:latin typeface="Aptos"/>
+              </a:rPr>
+              <a:t>03</a:t>
+            </a:r>
+          </a:p>
+        </p:txBody>
+      </p:sp>
+      <p:sp>
+        <p:nvSpPr>
+          <p:cNvPr id="22" name="TextBox 21"/>
+          <p:cNvSpPr txBox="1"/>
+          <p:nvPr/>
+        </p:nvSpPr>
+        <p:spPr>
+          <a:xfrm>
+            <a:off x="1627632" y="5065776"/>
+            <a:ext cx="5852160" cy="274320"/>
+          </a:xfrm>
+          <a:prstGeom prst="rect">
+            <a:avLst/>
+          </a:prstGeom>
+          <a:noFill/>
+        </p:spPr>
+        <p:txBody>
+          <a:bodyPr wrap="square" anchor="t" lIns="0" rIns="0" tIns="0" bIns="0">
+            <a:spAutoFit/>
+          </a:bodyPr>
+          <a:lstStyle/>
+          <a:p>
+            <a:pPr algn="l"/>
+            <a:r>
+              <a:rPr sz="1550" b="1" i="0">
+                <a:solidFill>
+                  <a:srgbClr val="FFFFFF"/>
+                </a:solidFill>
+                <a:latin typeface="Aptos Display"/>
+              </a:rPr>
+              <a:t>Acompanhar recompra como termômetro</a:t>
+            </a:r>
+          </a:p>
+        </p:txBody>
+      </p:sp>
+      <p:sp>
+        <p:nvSpPr>
+          <p:cNvPr id="23" name="Rounded Rectangle 22"/>
+          <p:cNvSpPr/>
+          <p:nvPr/>
+        </p:nvSpPr>
+        <p:spPr>
+          <a:xfrm>
+            <a:off x="7818120" y="5102352"/>
+            <a:ext cx="2651760" cy="256032"/>
+          </a:xfrm>
+          <a:prstGeom prst="roundRect">
+            <a:avLst>
+              <a:gd name="adj" fmla="val 50000"/>
+            </a:avLst>
+          </a:prstGeom>
+          <a:solidFill>
+            <a:srgbClr val="14243A"/>
+          </a:solidFill>
+          <a:ln>
+            <a:noFill/>
+          </a:ln>
+          <a:effectLst/>
+        </p:spPr>
+        <p:style>
+          <a:lnRef idx="1">
+            <a:schemeClr val="accent1"/>
+          </a:lnRef>
+          <a:fillRef idx="3">
+            <a:schemeClr val="accent1"/>
+          </a:fillRef>
+          <a:effectRef idx="2">
+            <a:schemeClr val="accent1"/>
+          </a:effectRef>
+          <a:fontRef idx="minor">
+            <a:schemeClr val="lt1"/>
+          </a:fontRef>
+        </p:style>
+        <p:txBody>
+          <a:bodyPr rtlCol="0" anchor="ctr"/>
+          <a:lstStyle/>
+          <a:p>
+            <a:pPr algn="ctr"/>
+          </a:p>
+        </p:txBody>
+      </p:sp>
+      <p:sp>
+        <p:nvSpPr>
+          <p:cNvPr id="24" name="TextBox 23"/>
+          <p:cNvSpPr txBox="1"/>
+          <p:nvPr/>
+        </p:nvSpPr>
+        <p:spPr>
+          <a:xfrm>
+            <a:off x="7818120" y="5120640"/>
+            <a:ext cx="2651760" cy="219456"/>
+          </a:xfrm>
+          <a:prstGeom prst="rect">
+            <a:avLst/>
+          </a:prstGeom>
+          <a:noFill/>
+        </p:spPr>
+        <p:txBody>
+          <a:bodyPr wrap="square" anchor="t" lIns="0" rIns="0" tIns="0" bIns="0">
+            <a:spAutoFit/>
+          </a:bodyPr>
+          <a:lstStyle/>
+          <a:p>
+            <a:pPr algn="ctr"/>
+            <a:r>
+              <a:rPr sz="860" b="1" i="0">
+                <a:solidFill>
+                  <a:srgbClr val="87E5F2"/>
+                </a:solidFill>
+                <a:latin typeface="Aptos"/>
+              </a:rPr>
+              <a:t>PRIORIDADE CONTÍNUA</a:t>
+            </a:r>
+          </a:p>
+        </p:txBody>
+      </p:sp>
+      <p:sp>
+        <p:nvSpPr>
+          <p:cNvPr id="25" name="TextBox 24"/>
+          <p:cNvSpPr txBox="1"/>
+          <p:nvPr/>
+        </p:nvSpPr>
+        <p:spPr>
+          <a:xfrm>
+            <a:off x="1627632" y="5394960"/>
+            <a:ext cx="8823960" cy="621792"/>
+          </a:xfrm>
+          <a:prstGeom prst="rect">
+            <a:avLst/>
+          </a:prstGeom>
+          <a:noFill/>
+        </p:spPr>
+        <p:txBody>
+          <a:bodyPr wrap="square" anchor="t" lIns="0" rIns="0" tIns="0" bIns="0">
+            <a:spAutoFit/>
+          </a:bodyPr>
+          <a:lstStyle/>
+          <a:p>
+            <a:pPr algn="l">
+              <a:lnSpc>
+                <a:spcPct val="110000"/>
+              </a:lnSpc>
+            </a:pPr>
+            <a:r>
+              <a:rPr sz="1010" b="0" i="0">
+                <a:solidFill>
+                  <a:srgbClr val="A6B4C6"/>
+                </a:solidFill>
+                <a:latin typeface="Aptos"/>
+              </a:rPr>
+              <a:t>100% dos promotores recompram em 30 dias; 0% dos detratores recompram. Ação: monitorar recompra e CSAT interno como indicadores antecipados de satisfação.</a:t>
+            </a:r>
+          </a:p>
+        </p:txBody>
+      </p:sp>
+      <p:sp>
+        <p:nvSpPr>
+          <p:cNvPr id="26" name="TextBox 25"/>
+          <p:cNvSpPr txBox="1"/>
+          <p:nvPr/>
+        </p:nvSpPr>
+        <p:spPr>
+          <a:xfrm>
+            <a:off x="658368" y="6501384"/>
+            <a:ext cx="3749039" cy="164592"/>
+          </a:xfrm>
+          <a:prstGeom prst="rect">
+            <a:avLst/>
+          </a:prstGeom>
+          <a:noFill/>
+        </p:spPr>
+        <p:txBody>
+          <a:bodyPr wrap="square" anchor="t" lIns="0" rIns="0" tIns="0" bIns="0">
+            <a:spAutoFit/>
+          </a:bodyPr>
+          <a:lstStyle/>
+          <a:p>
+            <a:pPr algn="l"/>
+            <a:r>
+              <a:rPr sz="850" b="0" i="0">
+                <a:solidFill>
+                  <a:srgbClr val="718399"/>
+                </a:solidFill>
+                <a:latin typeface="Aptos"/>
+              </a:rPr>
+              <a:t>NPS Preditivo  ·  Tech Challenge Fase 1</a:t>
+            </a:r>
+          </a:p>
+        </p:txBody>
+      </p:sp>
+      <p:sp>
+        <p:nvSpPr>
+          <p:cNvPr id="27" name="TextBox 26"/>
+          <p:cNvSpPr txBox="1"/>
+          <p:nvPr/>
+        </p:nvSpPr>
+        <p:spPr>
+          <a:xfrm>
+            <a:off x="11137392" y="6473952"/>
+            <a:ext cx="384048" cy="164592"/>
+          </a:xfrm>
+          <a:prstGeom prst="rect">
+            <a:avLst/>
+          </a:prstGeom>
+          <a:noFill/>
+        </p:spPr>
+        <p:txBody>
+          <a:bodyPr wrap="square" anchor="t" lIns="0" rIns="0" tIns="0" bIns="0">
+            <a:spAutoFit/>
+          </a:bodyPr>
+          <a:lstStyle/>
+          <a:p>
+            <a:pPr algn="r"/>
+            <a:r>
+              <a:rPr sz="850" b="0" i="0">
+                <a:solidFill>
+                  <a:srgbClr val="718399"/>
+                </a:solidFill>
+                <a:latin typeface="Aptos"/>
+              </a:rPr>
+              <a:t>09</a:t>
+            </a:r>
+          </a:p>
+        </p:txBody>
+      </p:sp>
+    </p:spTree>
+  </p:cSld>
+  <p:clrMapOvr>
+    <a:masterClrMapping/>
+  </p:clrMapOvr>
+</p:sld>
+</file>
+
+<file path=ppt/slides/slide11.xml><?xml version="1.0" encoding="utf-8"?>
 <p:sld xmlns:a="http://schemas.openxmlformats.org/drawingml/2006/main" xmlns:p="http://schemas.openxmlformats.org/presentationml/2006/main" xmlns:r="http://schemas.openxmlformats.org/officeDocument/2006/relationships">
   <p:cSld>
     <p:bg>
@@ -8047,508 +7207,6 @@
                 <a:latin typeface="Aptos"/>
               </a:rPr>
               <a:t>10</a:t>
-            </a:r>
-          </a:p>
-        </p:txBody>
-      </p:sp>
-    </p:spTree>
-  </p:cSld>
-  <p:clrMapOvr>
-    <a:masterClrMapping/>
-  </p:clrMapOvr>
-</p:sld>
-</file>
-
-<file path=ppt/slides/slide11.xml><?xml version="1.0" encoding="utf-8"?>
-<p:sld xmlns:a="http://schemas.openxmlformats.org/drawingml/2006/main" xmlns:p="http://schemas.openxmlformats.org/presentationml/2006/main" xmlns:r="http://schemas.openxmlformats.org/officeDocument/2006/relationships">
-  <p:cSld>
-    <p:bg>
-      <p:bgPr>
-        <a:solidFill>
-          <a:srgbClr val="091220"/>
-        </a:solidFill>
-        <a:effectLst/>
-      </p:bgPr>
-    </p:bg>
-    <p:spTree>
-      <p:nvGrpSpPr>
-        <p:cNvPr id="1" name=""/>
-        <p:cNvGrpSpPr/>
-        <p:nvPr/>
-      </p:nvGrpSpPr>
-      <p:grpSpPr/>
-      <p:sp>
-        <p:nvSpPr>
-          <p:cNvPr id="2" name="TextBox 1"/>
-          <p:cNvSpPr txBox="1"/>
-          <p:nvPr/>
-        </p:nvSpPr>
-        <p:spPr>
-          <a:xfrm>
-            <a:off x="658368" y="777240"/>
-            <a:ext cx="5943600" cy="219456"/>
-          </a:xfrm>
-          <a:prstGeom prst="rect">
-            <a:avLst/>
-          </a:prstGeom>
-          <a:noFill/>
-        </p:spPr>
-        <p:txBody>
-          <a:bodyPr wrap="square" anchor="t" lIns="0" rIns="0" tIns="0" bIns="0">
-            <a:spAutoFit/>
-          </a:bodyPr>
-          <a:lstStyle/>
-          <a:p>
-            <a:pPr algn="l"/>
-            <a:r>
-              <a:rPr sz="1000" b="1" i="0">
-                <a:solidFill>
-                  <a:srgbClr val="25C7E5"/>
-                </a:solidFill>
-                <a:latin typeface="Aptos"/>
-              </a:rPr>
-              <a:t>POS TECH  ·  TECH CHALLENGE FASE 1</a:t>
-            </a:r>
-          </a:p>
-        </p:txBody>
-      </p:sp>
-      <p:sp>
-        <p:nvSpPr>
-          <p:cNvPr id="3" name="TextBox 2"/>
-          <p:cNvSpPr txBox="1"/>
-          <p:nvPr/>
-        </p:nvSpPr>
-        <p:spPr>
-          <a:xfrm>
-            <a:off x="640080" y="2331720"/>
-            <a:ext cx="7315200" cy="1051560"/>
-          </a:xfrm>
-          <a:prstGeom prst="rect">
-            <a:avLst/>
-          </a:prstGeom>
-          <a:noFill/>
-        </p:spPr>
-        <p:txBody>
-          <a:bodyPr wrap="square" anchor="t" lIns="0" rIns="0" tIns="0" bIns="0">
-            <a:spAutoFit/>
-          </a:bodyPr>
-          <a:lstStyle/>
-          <a:p>
-            <a:pPr algn="l"/>
-            <a:r>
-              <a:rPr sz="5800" b="1" i="0">
-                <a:solidFill>
-                  <a:srgbClr val="FFFFFF"/>
-                </a:solidFill>
-                <a:latin typeface="Aptos Display"/>
-              </a:rPr>
-              <a:t>NPS Preditivo</a:t>
-            </a:r>
-          </a:p>
-        </p:txBody>
-      </p:sp>
-      <p:sp>
-        <p:nvSpPr>
-          <p:cNvPr id="4" name="TextBox 3"/>
-          <p:cNvSpPr txBox="1"/>
-          <p:nvPr/>
-        </p:nvSpPr>
-        <p:spPr>
-          <a:xfrm>
-            <a:off x="658368" y="3520440"/>
-            <a:ext cx="6675120" cy="685800"/>
-          </a:xfrm>
-          <a:prstGeom prst="rect">
-            <a:avLst/>
-          </a:prstGeom>
-          <a:noFill/>
-        </p:spPr>
-        <p:txBody>
-          <a:bodyPr wrap="square" anchor="t" lIns="0" rIns="0" tIns="0" bIns="0">
-            <a:spAutoFit/>
-          </a:bodyPr>
-          <a:lstStyle/>
-          <a:p>
-            <a:pPr algn="l">
-              <a:lnSpc>
-                <a:spcPct val="120000"/>
-              </a:lnSpc>
-            </a:pPr>
-            <a:r>
-              <a:rPr sz="1450" b="0" i="0">
-                <a:solidFill>
-                  <a:srgbClr val="9FB0C6"/>
-                </a:solidFill>
-                <a:latin typeface="Aptos"/>
-              </a:rPr>
-              <a:t>Fatores operacionais que explicam a satisfação do cliente — e como agir antes de o NPS cair.</a:t>
-            </a:r>
-          </a:p>
-        </p:txBody>
-      </p:sp>
-      <p:cxnSp>
-        <p:nvCxnSpPr>
-          <p:cNvPr id="5" name="Connector 4"/>
-          <p:cNvCxnSpPr/>
-          <p:nvPr/>
-        </p:nvCxnSpPr>
-        <p:spPr>
-          <a:xfrm>
-            <a:off x="667512" y="4434840"/>
-            <a:ext cx="6647688" cy="0"/>
-          </a:xfrm>
-          <a:prstGeom prst="line">
-            <a:avLst/>
-          </a:prstGeom>
-          <a:ln w="9525">
-            <a:solidFill>
-              <a:srgbClr val="263951"/>
-            </a:solidFill>
-          </a:ln>
-          <a:effectLst/>
-        </p:spPr>
-        <p:style>
-          <a:lnRef idx="2">
-            <a:schemeClr val="accent1"/>
-          </a:lnRef>
-          <a:fillRef idx="0">
-            <a:schemeClr val="accent1"/>
-          </a:fillRef>
-          <a:effectRef idx="1">
-            <a:schemeClr val="accent1"/>
-          </a:effectRef>
-          <a:fontRef idx="minor">
-            <a:schemeClr val="tx1"/>
-          </a:fontRef>
-        </p:style>
-      </p:cxnSp>
-      <p:sp>
-        <p:nvSpPr>
-          <p:cNvPr id="6" name="TextBox 5"/>
-          <p:cNvSpPr txBox="1"/>
-          <p:nvPr/>
-        </p:nvSpPr>
-        <p:spPr>
-          <a:xfrm>
-            <a:off x="658368" y="4645152"/>
-            <a:ext cx="1828800" cy="201168"/>
-          </a:xfrm>
-          <a:prstGeom prst="rect">
-            <a:avLst/>
-          </a:prstGeom>
-          <a:noFill/>
-        </p:spPr>
-        <p:txBody>
-          <a:bodyPr wrap="square" anchor="t" lIns="0" rIns="0" tIns="0" bIns="0">
-            <a:spAutoFit/>
-          </a:bodyPr>
-          <a:lstStyle/>
-          <a:p>
-            <a:pPr algn="l"/>
-            <a:r>
-              <a:rPr sz="940" b="1" i="0">
-                <a:solidFill>
-                  <a:srgbClr val="25C7E5"/>
-                </a:solidFill>
-                <a:latin typeface="Aptos"/>
-              </a:rPr>
-              <a:t>EQUIPE</a:t>
-            </a:r>
-          </a:p>
-        </p:txBody>
-      </p:sp>
-      <p:sp>
-        <p:nvSpPr>
-          <p:cNvPr id="7" name="TextBox 6"/>
-          <p:cNvSpPr txBox="1"/>
-          <p:nvPr/>
-        </p:nvSpPr>
-        <p:spPr>
-          <a:xfrm>
-            <a:off x="658368" y="4901184"/>
-            <a:ext cx="6766560" cy="502920"/>
-          </a:xfrm>
-          <a:prstGeom prst="rect">
-            <a:avLst/>
-          </a:prstGeom>
-          <a:noFill/>
-        </p:spPr>
-        <p:txBody>
-          <a:bodyPr wrap="square" anchor="t" lIns="0" rIns="0" tIns="0" bIns="0">
-            <a:spAutoFit/>
-          </a:bodyPr>
-          <a:lstStyle/>
-          <a:p>
-            <a:pPr algn="l">
-              <a:lnSpc>
-                <a:spcPct val="125000"/>
-              </a:lnSpc>
-            </a:pPr>
-            <a:r>
-              <a:rPr sz="1220" b="0" i="0">
-                <a:solidFill>
-                  <a:srgbClr val="FFFFFF"/>
-                </a:solidFill>
-                <a:latin typeface="Aptos"/>
-              </a:rPr>
-              <a:t>Amanda Alves de Lima Santos  ·  Fábio da Silva Costa  ·  Gabriel Victor  ·  Vanessa Partala</a:t>
-            </a:r>
-          </a:p>
-        </p:txBody>
-      </p:sp>
-      <p:cxnSp>
-        <p:nvCxnSpPr>
-          <p:cNvPr id="8" name="Connector 7"/>
-          <p:cNvCxnSpPr/>
-          <p:nvPr/>
-        </p:nvCxnSpPr>
-        <p:spPr>
-          <a:xfrm>
-            <a:off x="8275320" y="2331720"/>
-            <a:ext cx="0" cy="2377440"/>
-          </a:xfrm>
-          <a:prstGeom prst="line">
-            <a:avLst/>
-          </a:prstGeom>
-          <a:ln w="9525">
-            <a:solidFill>
-              <a:srgbClr val="263951"/>
-            </a:solidFill>
-          </a:ln>
-          <a:effectLst/>
-        </p:spPr>
-        <p:style>
-          <a:lnRef idx="2">
-            <a:schemeClr val="accent1"/>
-          </a:lnRef>
-          <a:fillRef idx="0">
-            <a:schemeClr val="accent1"/>
-          </a:fillRef>
-          <a:effectRef idx="1">
-            <a:schemeClr val="accent1"/>
-          </a:effectRef>
-          <a:fontRef idx="minor">
-            <a:schemeClr val="tx1"/>
-          </a:fontRef>
-        </p:style>
-      </p:cxnSp>
-      <p:sp>
-        <p:nvSpPr>
-          <p:cNvPr id="9" name="TextBox 8"/>
-          <p:cNvSpPr txBox="1"/>
-          <p:nvPr/>
-        </p:nvSpPr>
-        <p:spPr>
-          <a:xfrm>
-            <a:off x="8641080" y="2377440"/>
-            <a:ext cx="2743200" cy="219456"/>
-          </a:xfrm>
-          <a:prstGeom prst="rect">
-            <a:avLst/>
-          </a:prstGeom>
-          <a:noFill/>
-        </p:spPr>
-        <p:txBody>
-          <a:bodyPr wrap="square" anchor="t" lIns="0" rIns="0" tIns="0" bIns="0">
-            <a:spAutoFit/>
-          </a:bodyPr>
-          <a:lstStyle/>
-          <a:p>
-            <a:pPr algn="l"/>
-            <a:r>
-              <a:rPr sz="940" b="1" i="0">
-                <a:solidFill>
-                  <a:srgbClr val="25C7E5"/>
-                </a:solidFill>
-                <a:latin typeface="Aptos"/>
-              </a:rPr>
-              <a:t>ESCOPO DA ANÁLISE</a:t>
-            </a:r>
-          </a:p>
-        </p:txBody>
-      </p:sp>
-      <p:sp>
-        <p:nvSpPr>
-          <p:cNvPr id="10" name="TextBox 9"/>
-          <p:cNvSpPr txBox="1"/>
-          <p:nvPr/>
-        </p:nvSpPr>
-        <p:spPr>
-          <a:xfrm>
-            <a:off x="8613648" y="2670048"/>
-            <a:ext cx="2743200" cy="685800"/>
-          </a:xfrm>
-          <a:prstGeom prst="rect">
-            <a:avLst/>
-          </a:prstGeom>
-          <a:noFill/>
-        </p:spPr>
-        <p:txBody>
-          <a:bodyPr wrap="square" anchor="t" lIns="0" rIns="0" tIns="0" bIns="0">
-            <a:spAutoFit/>
-          </a:bodyPr>
-          <a:lstStyle/>
-          <a:p>
-            <a:pPr algn="l"/>
-            <a:r>
-              <a:rPr sz="4400" b="1" i="0">
-                <a:solidFill>
-                  <a:srgbClr val="FFFFFF"/>
-                </a:solidFill>
-                <a:latin typeface="Aptos Display"/>
-              </a:rPr>
-              <a:t>2.202</a:t>
-            </a:r>
-          </a:p>
-        </p:txBody>
-      </p:sp>
-      <p:sp>
-        <p:nvSpPr>
-          <p:cNvPr id="11" name="TextBox 10"/>
-          <p:cNvSpPr txBox="1"/>
-          <p:nvPr/>
-        </p:nvSpPr>
-        <p:spPr>
-          <a:xfrm>
-            <a:off x="8641080" y="3401568"/>
-            <a:ext cx="2743200" cy="237744"/>
-          </a:xfrm>
-          <a:prstGeom prst="rect">
-            <a:avLst/>
-          </a:prstGeom>
-          <a:noFill/>
-        </p:spPr>
-        <p:txBody>
-          <a:bodyPr wrap="square" anchor="t" lIns="0" rIns="0" tIns="0" bIns="0">
-            <a:spAutoFit/>
-          </a:bodyPr>
-          <a:lstStyle/>
-          <a:p>
-            <a:pPr algn="l"/>
-            <a:r>
-              <a:rPr sz="1150" b="0" i="0">
-                <a:solidFill>
-                  <a:srgbClr val="9FB0C6"/>
-                </a:solidFill>
-                <a:latin typeface="Aptos"/>
-              </a:rPr>
-              <a:t>pedidos tratados</a:t>
-            </a:r>
-          </a:p>
-        </p:txBody>
-      </p:sp>
-      <p:sp>
-        <p:nvSpPr>
-          <p:cNvPr id="12" name="Rounded Rectangle 11"/>
-          <p:cNvSpPr/>
-          <p:nvPr/>
-        </p:nvSpPr>
-        <p:spPr>
-          <a:xfrm>
-            <a:off x="8641080" y="3767328"/>
-            <a:ext cx="2331720" cy="310896"/>
-          </a:xfrm>
-          <a:prstGeom prst="roundRect">
-            <a:avLst>
-              <a:gd name="adj" fmla="val 50000"/>
-            </a:avLst>
-          </a:prstGeom>
-          <a:solidFill>
-            <a:srgbClr val="331A25"/>
-          </a:solidFill>
-          <a:ln>
-            <a:noFill/>
-          </a:ln>
-          <a:effectLst/>
-        </p:spPr>
-        <p:style>
-          <a:lnRef idx="1">
-            <a:schemeClr val="accent1"/>
-          </a:lnRef>
-          <a:fillRef idx="3">
-            <a:schemeClr val="accent1"/>
-          </a:fillRef>
-          <a:effectRef idx="2">
-            <a:schemeClr val="accent1"/>
-          </a:effectRef>
-          <a:fontRef idx="minor">
-            <a:schemeClr val="lt1"/>
-          </a:fontRef>
-        </p:style>
-        <p:txBody>
-          <a:bodyPr rtlCol="0" anchor="ctr"/>
-          <a:lstStyle/>
-          <a:p>
-            <a:pPr algn="ctr"/>
-          </a:p>
-        </p:txBody>
-      </p:sp>
-      <p:sp>
-        <p:nvSpPr>
-          <p:cNvPr id="13" name="TextBox 12"/>
-          <p:cNvSpPr txBox="1"/>
-          <p:nvPr/>
-        </p:nvSpPr>
-        <p:spPr>
-          <a:xfrm>
-            <a:off x="8641080" y="3785615"/>
-            <a:ext cx="2331720" cy="274320"/>
-          </a:xfrm>
-          <a:prstGeom prst="rect">
-            <a:avLst/>
-          </a:prstGeom>
-          <a:noFill/>
-        </p:spPr>
-        <p:txBody>
-          <a:bodyPr wrap="square" anchor="t" lIns="0" rIns="0" tIns="0" bIns="0">
-            <a:spAutoFit/>
-          </a:bodyPr>
-          <a:lstStyle/>
-          <a:p>
-            <a:pPr algn="ctr"/>
-            <a:r>
-              <a:rPr sz="930" b="1" i="0">
-                <a:solidFill>
-                  <a:srgbClr val="F6A5AA"/>
-                </a:solidFill>
-                <a:latin typeface="Aptos"/>
-              </a:rPr>
-              <a:t>83,1% são detratores hoje</a:t>
-            </a:r>
-          </a:p>
-        </p:txBody>
-      </p:sp>
-      <p:sp>
-        <p:nvSpPr>
-          <p:cNvPr id="14" name="TextBox 13"/>
-          <p:cNvSpPr txBox="1"/>
-          <p:nvPr/>
-        </p:nvSpPr>
-        <p:spPr>
-          <a:xfrm>
-            <a:off x="658368" y="6501384"/>
-            <a:ext cx="5486400" cy="182880"/>
-          </a:xfrm>
-          <a:prstGeom prst="rect">
-            <a:avLst/>
-          </a:prstGeom>
-          <a:noFill/>
-        </p:spPr>
-        <p:txBody>
-          <a:bodyPr wrap="square" anchor="t" lIns="0" rIns="0" tIns="0" bIns="0">
-            <a:spAutoFit/>
-          </a:bodyPr>
-          <a:lstStyle/>
-          <a:p>
-            <a:pPr algn="l"/>
-            <a:r>
-              <a:rPr sz="850" b="0" i="0">
-                <a:solidFill>
-                  <a:srgbClr val="718399"/>
-                </a:solidFill>
-                <a:latin typeface="Aptos"/>
-              </a:rPr>
-              <a:t>Case NPS Preditivo  ·  Business Understanding &amp; Data Analysis</a:t>
             </a:r>
           </a:p>
         </p:txBody>
@@ -9033,6 +7691,2393 @@
     <p:bg>
       <p:bgPr>
         <a:solidFill>
+          <a:srgbClr val="091220"/>
+        </a:solidFill>
+        <a:effectLst/>
+      </p:bgPr>
+    </p:bg>
+    <p:spTree>
+      <p:nvGrpSpPr>
+        <p:cNvPr id="1" name=""/>
+        <p:cNvGrpSpPr/>
+        <p:nvPr/>
+      </p:nvGrpSpPr>
+      <p:grpSpPr>
+        <a:xfrm>
+          <a:off x="0" y="0"/>
+          <a:ext cx="0" cy="0"/>
+          <a:chOff x="0" y="0"/>
+          <a:chExt cx="0" cy="0"/>
+        </a:xfrm>
+      </p:grpSpPr>
+      <p:sp>
+        <p:nvSpPr>
+          <p:cNvPr id="10" name="Text 0"/>
+          <p:cNvSpPr/>
+          <p:nvPr/>
+        </p:nvSpPr>
+        <p:spPr>
+          <a:xfrm>
+            <a:off x="658440" y="384120"/>
+            <a:ext cx="4388760" cy="200880"/>
+          </a:xfrm>
+          <a:prstGeom prst="rect">
+            <a:avLst/>
+          </a:prstGeom>
+          <a:noFill/>
+          <a:ln w="0">
+            <a:noFill/>
+          </a:ln>
+        </p:spPr>
+        <p:style>
+          <a:lnRef idx="0">
+            <a:scrgbClr r="0" g="0" b="0"/>
+          </a:lnRef>
+          <a:fillRef idx="0">
+            <a:scrgbClr r="0" g="0" b="0"/>
+          </a:fillRef>
+          <a:effectRef idx="0">
+            <a:scrgbClr r="0" g="0" b="0"/>
+          </a:effectRef>
+          <a:fontRef idx="minor"/>
+        </p:style>
+        <p:txBody>
+          <a:bodyPr lIns="0" tIns="0" rIns="0" bIns="0" anchor="ctr">
+            <a:normAutofit/>
+          </a:bodyPr>
+          <a:lstStyle/>
+          <a:p>
+            <a:pPr defTabSz="914400">
+              <a:lnSpc>
+                <a:spcPct val="100000"/>
+              </a:lnSpc>
+              <a:tabLst>
+                <a:tab pos="0" algn="l"/>
+              </a:tabLst>
+            </a:pPr>
+            <a:r>
+              <a:rPr lang="pt-BR" sz="950" b="1" u="none" strike="noStrike" spc="170" noProof="0" dirty="0">
+                <a:solidFill>
+                  <a:srgbClr val="25C7E5"/>
+                </a:solidFill>
+                <a:effectLst/>
+                <a:uFillTx/>
+                <a:latin typeface="Aptos"/>
+                <a:ea typeface="Aptos"/>
+              </a:rPr>
+              <a:t>PARTE 1 · CONTEXTO DO PROBLEMA</a:t>
+            </a:r>
+            <a:endParaRPr lang="pt-BR" sz="950" b="0" u="none" strike="noStrike" noProof="0" dirty="0">
+              <a:solidFill>
+                <a:srgbClr val="FFFFFF"/>
+              </a:solidFill>
+              <a:effectLst/>
+              <a:uFillTx/>
+              <a:latin typeface="Arial"/>
+            </a:endParaRPr>
+          </a:p>
+        </p:txBody>
+      </p:sp>
+      <p:sp>
+        <p:nvSpPr>
+          <p:cNvPr id="11" name="Text 1"/>
+          <p:cNvSpPr/>
+          <p:nvPr/>
+        </p:nvSpPr>
+        <p:spPr>
+          <a:xfrm>
+            <a:off x="658440" y="786240"/>
+            <a:ext cx="10881000" cy="749520"/>
+          </a:xfrm>
+          <a:prstGeom prst="rect">
+            <a:avLst/>
+          </a:prstGeom>
+          <a:noFill/>
+          <a:ln w="0">
+            <a:noFill/>
+          </a:ln>
+        </p:spPr>
+        <p:style>
+          <a:lnRef idx="0">
+            <a:scrgbClr r="0" g="0" b="0"/>
+          </a:lnRef>
+          <a:fillRef idx="0">
+            <a:scrgbClr r="0" g="0" b="0"/>
+          </a:fillRef>
+          <a:effectRef idx="0">
+            <a:scrgbClr r="0" g="0" b="0"/>
+          </a:effectRef>
+          <a:fontRef idx="minor"/>
+        </p:style>
+        <p:txBody>
+          <a:bodyPr lIns="0" tIns="0" rIns="0" bIns="0" anchor="ctr">
+            <a:normAutofit fontScale="92500"/>
+          </a:bodyPr>
+          <a:lstStyle/>
+          <a:p>
+            <a:pPr defTabSz="914400">
+              <a:lnSpc>
+                <a:spcPct val="100000"/>
+              </a:lnSpc>
+              <a:tabLst>
+                <a:tab pos="0" algn="l"/>
+              </a:tabLst>
+            </a:pPr>
+            <a:r>
+              <a:rPr lang="pt-BR" sz="2900" b="1" u="none" strike="noStrike" noProof="0" dirty="0">
+                <a:solidFill>
+                  <a:srgbClr val="FFFFFF"/>
+                </a:solidFill>
+                <a:effectLst/>
+                <a:uFillTx/>
+                <a:latin typeface="Aptos Display"/>
+                <a:ea typeface="Aptos Display"/>
+              </a:rPr>
+              <a:t>O crescimento não é o problema. Descobrir a insatisfação tarde demais é.</a:t>
+            </a:r>
+            <a:endParaRPr lang="pt-BR" sz="2900" b="0" u="none" strike="noStrike" noProof="0" dirty="0">
+              <a:solidFill>
+                <a:srgbClr val="FFFFFF"/>
+              </a:solidFill>
+              <a:effectLst/>
+              <a:uFillTx/>
+              <a:latin typeface="Arial"/>
+            </a:endParaRPr>
+          </a:p>
+        </p:txBody>
+      </p:sp>
+      <p:sp>
+        <p:nvSpPr>
+          <p:cNvPr id="12" name="Text 2"/>
+          <p:cNvSpPr/>
+          <p:nvPr/>
+        </p:nvSpPr>
+        <p:spPr>
+          <a:xfrm>
+            <a:off x="658440" y="1572840"/>
+            <a:ext cx="10606680" cy="365400"/>
+          </a:xfrm>
+          <a:prstGeom prst="rect">
+            <a:avLst/>
+          </a:prstGeom>
+          <a:noFill/>
+          <a:ln w="0">
+            <a:noFill/>
+          </a:ln>
+        </p:spPr>
+        <p:style>
+          <a:lnRef idx="0">
+            <a:scrgbClr r="0" g="0" b="0"/>
+          </a:lnRef>
+          <a:fillRef idx="0">
+            <a:scrgbClr r="0" g="0" b="0"/>
+          </a:fillRef>
+          <a:effectRef idx="0">
+            <a:scrgbClr r="0" g="0" b="0"/>
+          </a:effectRef>
+          <a:fontRef idx="minor"/>
+        </p:style>
+        <p:txBody>
+          <a:bodyPr lIns="0" tIns="0" rIns="0" bIns="0" anchor="ctr">
+            <a:normAutofit/>
+          </a:bodyPr>
+          <a:lstStyle/>
+          <a:p>
+            <a:pPr defTabSz="914400">
+              <a:lnSpc>
+                <a:spcPct val="100000"/>
+              </a:lnSpc>
+              <a:tabLst>
+                <a:tab pos="0" algn="l"/>
+              </a:tabLst>
+            </a:pPr>
+            <a:r>
+              <a:rPr lang="pt-BR" sz="1210" b="0" u="none" strike="noStrike" noProof="0" dirty="0">
+                <a:solidFill>
+                  <a:srgbClr val="9FB0C6"/>
+                </a:solidFill>
+                <a:effectLst/>
+                <a:uFillTx/>
+                <a:latin typeface="Aptos"/>
+                <a:ea typeface="Aptos"/>
+              </a:rPr>
+              <a:t>O NPS chega no fim da jornada. A análise busca identificar sinais operacionais antes desse momento.</a:t>
+            </a:r>
+            <a:endParaRPr lang="pt-BR" sz="1210" b="0" u="none" strike="noStrike" noProof="0" dirty="0">
+              <a:solidFill>
+                <a:srgbClr val="FFFFFF"/>
+              </a:solidFill>
+              <a:effectLst/>
+              <a:uFillTx/>
+              <a:latin typeface="Arial"/>
+            </a:endParaRPr>
+          </a:p>
+        </p:txBody>
+      </p:sp>
+      <p:sp>
+        <p:nvSpPr>
+          <p:cNvPr id="13" name="Text 3"/>
+          <p:cNvSpPr/>
+          <p:nvPr/>
+        </p:nvSpPr>
+        <p:spPr>
+          <a:xfrm>
+            <a:off x="658440" y="2331720"/>
+            <a:ext cx="2331360" cy="658080"/>
+          </a:xfrm>
+          <a:prstGeom prst="rect">
+            <a:avLst/>
+          </a:prstGeom>
+          <a:noFill/>
+          <a:ln w="0">
+            <a:noFill/>
+          </a:ln>
+        </p:spPr>
+        <p:style>
+          <a:lnRef idx="0">
+            <a:scrgbClr r="0" g="0" b="0"/>
+          </a:lnRef>
+          <a:fillRef idx="0">
+            <a:scrgbClr r="0" g="0" b="0"/>
+          </a:fillRef>
+          <a:effectRef idx="0">
+            <a:scrgbClr r="0" g="0" b="0"/>
+          </a:effectRef>
+          <a:fontRef idx="minor"/>
+        </p:style>
+        <p:txBody>
+          <a:bodyPr lIns="0" tIns="0" rIns="0" bIns="0" anchor="ctr">
+            <a:normAutofit fontScale="92500" lnSpcReduction="10000"/>
+          </a:bodyPr>
+          <a:lstStyle/>
+          <a:p>
+            <a:pPr defTabSz="914400">
+              <a:lnSpc>
+                <a:spcPct val="100000"/>
+              </a:lnSpc>
+              <a:tabLst>
+                <a:tab pos="0" algn="l"/>
+              </a:tabLst>
+            </a:pPr>
+            <a:r>
+              <a:rPr lang="pt-BR" sz="4900" b="1" u="none" strike="noStrike" noProof="0" dirty="0">
+                <a:solidFill>
+                  <a:srgbClr val="EE5A62"/>
+                </a:solidFill>
+                <a:effectLst/>
+                <a:uFillTx/>
+                <a:latin typeface="Aptos Display"/>
+                <a:ea typeface="Aptos Display"/>
+              </a:rPr>
+              <a:t>83,1%</a:t>
+            </a:r>
+            <a:endParaRPr lang="pt-BR" sz="4900" b="0" u="none" strike="noStrike" noProof="0" dirty="0">
+              <a:solidFill>
+                <a:srgbClr val="FFFFFF"/>
+              </a:solidFill>
+              <a:effectLst/>
+              <a:uFillTx/>
+              <a:latin typeface="Arial"/>
+            </a:endParaRPr>
+          </a:p>
+        </p:txBody>
+      </p:sp>
+      <p:sp>
+        <p:nvSpPr>
+          <p:cNvPr id="14" name="Text 4"/>
+          <p:cNvSpPr/>
+          <p:nvPr/>
+        </p:nvSpPr>
+        <p:spPr>
+          <a:xfrm>
+            <a:off x="685800" y="3218760"/>
+            <a:ext cx="2422800" cy="603000"/>
+          </a:xfrm>
+          <a:prstGeom prst="rect">
+            <a:avLst/>
+          </a:prstGeom>
+          <a:noFill/>
+          <a:ln w="0">
+            <a:noFill/>
+          </a:ln>
+        </p:spPr>
+        <p:style>
+          <a:lnRef idx="0">
+            <a:scrgbClr r="0" g="0" b="0"/>
+          </a:lnRef>
+          <a:fillRef idx="0">
+            <a:scrgbClr r="0" g="0" b="0"/>
+          </a:fillRef>
+          <a:effectRef idx="0">
+            <a:scrgbClr r="0" g="0" b="0"/>
+          </a:effectRef>
+          <a:fontRef idx="minor"/>
+        </p:style>
+        <p:txBody>
+          <a:bodyPr lIns="0" tIns="0" rIns="0" bIns="0" anchor="ctr">
+            <a:normAutofit fontScale="92500"/>
+          </a:bodyPr>
+          <a:lstStyle/>
+          <a:p>
+            <a:pPr defTabSz="914400">
+              <a:lnSpc>
+                <a:spcPct val="100000"/>
+              </a:lnSpc>
+              <a:tabLst>
+                <a:tab pos="0" algn="l"/>
+              </a:tabLst>
+            </a:pPr>
+            <a:r>
+              <a:rPr lang="pt-BR" sz="1520" b="1" u="none" strike="noStrike" noProof="0" dirty="0">
+                <a:solidFill>
+                  <a:srgbClr val="FFFFFF"/>
+                </a:solidFill>
+                <a:effectLst/>
+                <a:uFillTx/>
+                <a:latin typeface="Aptos"/>
+                <a:ea typeface="Aptos"/>
+              </a:rPr>
+              <a:t>dos pedidos da base tratada</a:t>
+            </a:r>
+            <a:endParaRPr lang="pt-BR" sz="1520" b="0" u="none" strike="noStrike" noProof="0" dirty="0">
+              <a:solidFill>
+                <a:srgbClr val="FFFFFF"/>
+              </a:solidFill>
+              <a:effectLst/>
+              <a:uFillTx/>
+              <a:latin typeface="Arial"/>
+            </a:endParaRPr>
+          </a:p>
+          <a:p>
+            <a:pPr defTabSz="914400">
+              <a:lnSpc>
+                <a:spcPct val="100000"/>
+              </a:lnSpc>
+              <a:tabLst>
+                <a:tab pos="0" algn="l"/>
+              </a:tabLst>
+            </a:pPr>
+            <a:r>
+              <a:rPr lang="pt-BR" sz="1520" b="1" u="none" strike="noStrike" noProof="0" dirty="0">
+                <a:solidFill>
+                  <a:srgbClr val="FFFFFF"/>
+                </a:solidFill>
+                <a:effectLst/>
+                <a:uFillTx/>
+                <a:latin typeface="Aptos"/>
+                <a:ea typeface="Aptos"/>
+              </a:rPr>
+              <a:t>são detratores</a:t>
+            </a:r>
+            <a:endParaRPr lang="pt-BR" sz="1520" b="0" u="none" strike="noStrike" noProof="0" dirty="0">
+              <a:solidFill>
+                <a:srgbClr val="FFFFFF"/>
+              </a:solidFill>
+              <a:effectLst/>
+              <a:uFillTx/>
+              <a:latin typeface="Arial"/>
+            </a:endParaRPr>
+          </a:p>
+        </p:txBody>
+      </p:sp>
+      <p:sp>
+        <p:nvSpPr>
+          <p:cNvPr id="15" name="Text 5"/>
+          <p:cNvSpPr/>
+          <p:nvPr/>
+        </p:nvSpPr>
+        <p:spPr>
+          <a:xfrm>
+            <a:off x="685800" y="3931920"/>
+            <a:ext cx="2559960" cy="219240"/>
+          </a:xfrm>
+          <a:prstGeom prst="rect">
+            <a:avLst/>
+          </a:prstGeom>
+          <a:noFill/>
+          <a:ln w="0">
+            <a:noFill/>
+          </a:ln>
+        </p:spPr>
+        <p:style>
+          <a:lnRef idx="0">
+            <a:scrgbClr r="0" g="0" b="0"/>
+          </a:lnRef>
+          <a:fillRef idx="0">
+            <a:scrgbClr r="0" g="0" b="0"/>
+          </a:fillRef>
+          <a:effectRef idx="0">
+            <a:scrgbClr r="0" g="0" b="0"/>
+          </a:effectRef>
+          <a:fontRef idx="minor"/>
+        </p:style>
+        <p:txBody>
+          <a:bodyPr lIns="0" tIns="0" rIns="0" bIns="0" anchor="ctr">
+            <a:normAutofit/>
+          </a:bodyPr>
+          <a:lstStyle/>
+          <a:p>
+            <a:pPr defTabSz="914400">
+              <a:lnSpc>
+                <a:spcPct val="100000"/>
+              </a:lnSpc>
+              <a:tabLst>
+                <a:tab pos="0" algn="l"/>
+              </a:tabLst>
+            </a:pPr>
+            <a:r>
+              <a:rPr lang="pt-BR" sz="1040" b="0" u="none" strike="noStrike" noProof="0" dirty="0">
+                <a:solidFill>
+                  <a:srgbClr val="9FB0C6"/>
+                </a:solidFill>
+                <a:effectLst/>
+                <a:uFillTx/>
+                <a:latin typeface="Aptos"/>
+                <a:ea typeface="Aptos"/>
+              </a:rPr>
+              <a:t>1.829 de 2.202 pedidos analisados</a:t>
+            </a:r>
+            <a:endParaRPr lang="pt-BR" sz="1040" b="0" u="none" strike="noStrike" noProof="0" dirty="0">
+              <a:solidFill>
+                <a:srgbClr val="FFFFFF"/>
+              </a:solidFill>
+              <a:effectLst/>
+              <a:uFillTx/>
+              <a:latin typeface="Arial"/>
+            </a:endParaRPr>
+          </a:p>
+        </p:txBody>
+      </p:sp>
+      <p:sp>
+        <p:nvSpPr>
+          <p:cNvPr id="16" name="Shape 6"/>
+          <p:cNvSpPr/>
+          <p:nvPr/>
+        </p:nvSpPr>
+        <p:spPr>
+          <a:xfrm>
+            <a:off x="685800" y="4297680"/>
+            <a:ext cx="1535760" cy="292320"/>
+          </a:xfrm>
+          <a:prstGeom prst="roundRect">
+            <a:avLst>
+              <a:gd name="adj" fmla="val 50000"/>
+            </a:avLst>
+          </a:prstGeom>
+          <a:solidFill>
+            <a:srgbClr val="331A25"/>
+          </a:solidFill>
+          <a:ln w="12600">
+            <a:solidFill>
+              <a:srgbClr val="331A25"/>
+            </a:solidFill>
+            <a:round/>
+          </a:ln>
+        </p:spPr>
+        <p:style>
+          <a:lnRef idx="0">
+            <a:scrgbClr r="0" g="0" b="0"/>
+          </a:lnRef>
+          <a:fillRef idx="0">
+            <a:scrgbClr r="0" g="0" b="0"/>
+          </a:fillRef>
+          <a:effectRef idx="0">
+            <a:scrgbClr r="0" g="0" b="0"/>
+          </a:effectRef>
+          <a:fontRef idx="minor"/>
+        </p:style>
+        <p:txBody>
+          <a:bodyPr lIns="90000" tIns="45000" rIns="90000" bIns="45000" anchor="t">
+            <a:noAutofit/>
+          </a:bodyPr>
+          <a:lstStyle/>
+          <a:p>
+            <a:endParaRPr lang="pt-BR" sz="1800" b="0" u="none" strike="noStrike" noProof="0" dirty="0">
+              <a:solidFill>
+                <a:srgbClr val="FFFFFF"/>
+              </a:solidFill>
+              <a:effectLst/>
+              <a:uFillTx/>
+              <a:latin typeface="Arial"/>
+            </a:endParaRPr>
+          </a:p>
+        </p:txBody>
+      </p:sp>
+      <p:sp>
+        <p:nvSpPr>
+          <p:cNvPr id="17" name="Text 7"/>
+          <p:cNvSpPr/>
+          <p:nvPr/>
+        </p:nvSpPr>
+        <p:spPr>
+          <a:xfrm>
+            <a:off x="758880" y="4316040"/>
+            <a:ext cx="1389600" cy="246600"/>
+          </a:xfrm>
+          <a:prstGeom prst="rect">
+            <a:avLst/>
+          </a:prstGeom>
+          <a:noFill/>
+          <a:ln w="0">
+            <a:noFill/>
+          </a:ln>
+        </p:spPr>
+        <p:style>
+          <a:lnRef idx="0">
+            <a:scrgbClr r="0" g="0" b="0"/>
+          </a:lnRef>
+          <a:fillRef idx="0">
+            <a:scrgbClr r="0" g="0" b="0"/>
+          </a:fillRef>
+          <a:effectRef idx="0">
+            <a:scrgbClr r="0" g="0" b="0"/>
+          </a:effectRef>
+          <a:fontRef idx="minor"/>
+        </p:style>
+        <p:txBody>
+          <a:bodyPr lIns="0" tIns="0" rIns="0" bIns="0" anchor="ctr">
+            <a:normAutofit/>
+          </a:bodyPr>
+          <a:lstStyle/>
+          <a:p>
+            <a:pPr algn="ctr" defTabSz="914400">
+              <a:lnSpc>
+                <a:spcPct val="100000"/>
+              </a:lnSpc>
+              <a:tabLst>
+                <a:tab pos="0" algn="l"/>
+              </a:tabLst>
+            </a:pPr>
+            <a:r>
+              <a:rPr lang="pt-BR" sz="930" b="1" u="none" strike="noStrike" noProof="0" dirty="0">
+                <a:solidFill>
+                  <a:srgbClr val="F6A5AA"/>
+                </a:solidFill>
+                <a:effectLst/>
+                <a:uFillTx/>
+                <a:latin typeface="Aptos"/>
+                <a:ea typeface="Aptos"/>
+              </a:rPr>
+              <a:t>problema dominante</a:t>
+            </a:r>
+            <a:endParaRPr lang="pt-BR" sz="930" b="0" u="none" strike="noStrike" noProof="0" dirty="0">
+              <a:solidFill>
+                <a:srgbClr val="FFFFFF"/>
+              </a:solidFill>
+              <a:effectLst/>
+              <a:uFillTx/>
+              <a:latin typeface="Arial"/>
+            </a:endParaRPr>
+          </a:p>
+        </p:txBody>
+      </p:sp>
+      <p:sp>
+        <p:nvSpPr>
+          <p:cNvPr id="18" name="Shape 8"/>
+          <p:cNvSpPr/>
+          <p:nvPr/>
+        </p:nvSpPr>
+        <p:spPr>
+          <a:xfrm>
+            <a:off x="3529440" y="2249280"/>
+            <a:ext cx="7991640" cy="2002320"/>
+          </a:xfrm>
+          <a:prstGeom prst="roundRect">
+            <a:avLst>
+              <a:gd name="adj" fmla="val 3653"/>
+            </a:avLst>
+          </a:prstGeom>
+          <a:solidFill>
+            <a:srgbClr val="0D1A2B"/>
+          </a:solidFill>
+          <a:ln w="12600">
+            <a:solidFill>
+              <a:srgbClr val="263951"/>
+            </a:solidFill>
+            <a:round/>
+          </a:ln>
+        </p:spPr>
+        <p:style>
+          <a:lnRef idx="0">
+            <a:scrgbClr r="0" g="0" b="0"/>
+          </a:lnRef>
+          <a:fillRef idx="0">
+            <a:scrgbClr r="0" g="0" b="0"/>
+          </a:fillRef>
+          <a:effectRef idx="0">
+            <a:scrgbClr r="0" g="0" b="0"/>
+          </a:effectRef>
+          <a:fontRef idx="minor"/>
+        </p:style>
+        <p:txBody>
+          <a:bodyPr lIns="90000" tIns="45000" rIns="90000" bIns="45000" anchor="t">
+            <a:noAutofit/>
+          </a:bodyPr>
+          <a:lstStyle/>
+          <a:p>
+            <a:endParaRPr lang="pt-BR" sz="1800" b="0" u="none" strike="noStrike" noProof="0" dirty="0">
+              <a:solidFill>
+                <a:srgbClr val="FFFFFF"/>
+              </a:solidFill>
+              <a:effectLst/>
+              <a:uFillTx/>
+              <a:latin typeface="Arial"/>
+            </a:endParaRPr>
+          </a:p>
+        </p:txBody>
+      </p:sp>
+      <p:sp>
+        <p:nvSpPr>
+          <p:cNvPr id="19" name="Text 9"/>
+          <p:cNvSpPr/>
+          <p:nvPr/>
+        </p:nvSpPr>
+        <p:spPr>
+          <a:xfrm>
+            <a:off x="3822120" y="2523600"/>
+            <a:ext cx="2057040" cy="200880"/>
+          </a:xfrm>
+          <a:prstGeom prst="rect">
+            <a:avLst/>
+          </a:prstGeom>
+          <a:noFill/>
+          <a:ln w="0">
+            <a:noFill/>
+          </a:ln>
+        </p:spPr>
+        <p:style>
+          <a:lnRef idx="0">
+            <a:scrgbClr r="0" g="0" b="0"/>
+          </a:lnRef>
+          <a:fillRef idx="0">
+            <a:scrgbClr r="0" g="0" b="0"/>
+          </a:fillRef>
+          <a:effectRef idx="0">
+            <a:scrgbClr r="0" g="0" b="0"/>
+          </a:effectRef>
+          <a:fontRef idx="minor"/>
+        </p:style>
+        <p:txBody>
+          <a:bodyPr lIns="0" tIns="0" rIns="0" bIns="0" anchor="ctr">
+            <a:normAutofit/>
+          </a:bodyPr>
+          <a:lstStyle/>
+          <a:p>
+            <a:pPr defTabSz="914400">
+              <a:lnSpc>
+                <a:spcPct val="100000"/>
+              </a:lnSpc>
+              <a:tabLst>
+                <a:tab pos="0" algn="l"/>
+              </a:tabLst>
+            </a:pPr>
+            <a:r>
+              <a:rPr lang="pt-BR" sz="960" b="1" u="none" strike="noStrike" spc="125" noProof="0" dirty="0">
+                <a:solidFill>
+                  <a:srgbClr val="25C7E5"/>
+                </a:solidFill>
+                <a:effectLst/>
+                <a:uFillTx/>
+                <a:latin typeface="Aptos"/>
+                <a:ea typeface="Aptos"/>
+              </a:rPr>
+              <a:t>PERGUNTA NORTEADORA</a:t>
+            </a:r>
+            <a:endParaRPr lang="pt-BR" sz="960" b="0" u="none" strike="noStrike" noProof="0" dirty="0">
+              <a:solidFill>
+                <a:srgbClr val="FFFFFF"/>
+              </a:solidFill>
+              <a:effectLst/>
+              <a:uFillTx/>
+              <a:latin typeface="Arial"/>
+            </a:endParaRPr>
+          </a:p>
+        </p:txBody>
+      </p:sp>
+      <p:sp>
+        <p:nvSpPr>
+          <p:cNvPr id="20" name="Text 10"/>
+          <p:cNvSpPr/>
+          <p:nvPr/>
+        </p:nvSpPr>
+        <p:spPr>
+          <a:xfrm>
+            <a:off x="3822120" y="2853000"/>
+            <a:ext cx="7058880" cy="749520"/>
+          </a:xfrm>
+          <a:prstGeom prst="rect">
+            <a:avLst/>
+          </a:prstGeom>
+          <a:noFill/>
+          <a:ln w="0">
+            <a:noFill/>
+          </a:ln>
+        </p:spPr>
+        <p:style>
+          <a:lnRef idx="0">
+            <a:scrgbClr r="0" g="0" b="0"/>
+          </a:lnRef>
+          <a:fillRef idx="0">
+            <a:scrgbClr r="0" g="0" b="0"/>
+          </a:fillRef>
+          <a:effectRef idx="0">
+            <a:scrgbClr r="0" g="0" b="0"/>
+          </a:effectRef>
+          <a:fontRef idx="minor"/>
+        </p:style>
+        <p:txBody>
+          <a:bodyPr lIns="0" tIns="0" rIns="0" bIns="0" anchor="ctr">
+            <a:normAutofit/>
+          </a:bodyPr>
+          <a:lstStyle/>
+          <a:p>
+            <a:pPr defTabSz="914400">
+              <a:lnSpc>
+                <a:spcPct val="100000"/>
+              </a:lnSpc>
+              <a:tabLst>
+                <a:tab pos="0" algn="l"/>
+              </a:tabLst>
+            </a:pPr>
+            <a:r>
+              <a:rPr lang="pt-BR" sz="2400" b="1" u="none" strike="noStrike" noProof="0" dirty="0">
+                <a:solidFill>
+                  <a:srgbClr val="FFFFFF"/>
+                </a:solidFill>
+                <a:effectLst/>
+                <a:uFillTx/>
+                <a:latin typeface="Aptos Display"/>
+                <a:ea typeface="Aptos Display"/>
+              </a:rPr>
+              <a:t>Por que alguns clientes se tornam promotores</a:t>
+            </a:r>
+            <a:endParaRPr lang="pt-BR" sz="2400" b="0" u="none" strike="noStrike" noProof="0" dirty="0">
+              <a:solidFill>
+                <a:srgbClr val="FFFFFF"/>
+              </a:solidFill>
+              <a:effectLst/>
+              <a:uFillTx/>
+              <a:latin typeface="Arial"/>
+            </a:endParaRPr>
+          </a:p>
+          <a:p>
+            <a:pPr defTabSz="914400">
+              <a:lnSpc>
+                <a:spcPct val="100000"/>
+              </a:lnSpc>
+              <a:tabLst>
+                <a:tab pos="0" algn="l"/>
+              </a:tabLst>
+            </a:pPr>
+            <a:r>
+              <a:rPr lang="pt-BR" sz="2400" b="1" u="none" strike="noStrike" noProof="0" dirty="0">
+                <a:solidFill>
+                  <a:srgbClr val="FFFFFF"/>
+                </a:solidFill>
+                <a:effectLst/>
+                <a:uFillTx/>
+                <a:latin typeface="Aptos Display"/>
+                <a:ea typeface="Aptos Display"/>
+              </a:rPr>
+              <a:t>enquanto outros viram detratores?</a:t>
+            </a:r>
+            <a:endParaRPr lang="pt-BR" sz="2400" b="0" u="none" strike="noStrike" noProof="0" dirty="0">
+              <a:solidFill>
+                <a:srgbClr val="FFFFFF"/>
+              </a:solidFill>
+              <a:effectLst/>
+              <a:uFillTx/>
+              <a:latin typeface="Arial"/>
+            </a:endParaRPr>
+          </a:p>
+        </p:txBody>
+      </p:sp>
+      <p:sp>
+        <p:nvSpPr>
+          <p:cNvPr id="21" name="Text 11"/>
+          <p:cNvSpPr/>
+          <p:nvPr/>
+        </p:nvSpPr>
+        <p:spPr>
+          <a:xfrm>
+            <a:off x="3822120" y="3694320"/>
+            <a:ext cx="6309000" cy="319680"/>
+          </a:xfrm>
+          <a:prstGeom prst="rect">
+            <a:avLst/>
+          </a:prstGeom>
+          <a:noFill/>
+          <a:ln w="0">
+            <a:noFill/>
+          </a:ln>
+        </p:spPr>
+        <p:style>
+          <a:lnRef idx="0">
+            <a:scrgbClr r="0" g="0" b="0"/>
+          </a:lnRef>
+          <a:fillRef idx="0">
+            <a:scrgbClr r="0" g="0" b="0"/>
+          </a:fillRef>
+          <a:effectRef idx="0">
+            <a:scrgbClr r="0" g="0" b="0"/>
+          </a:effectRef>
+          <a:fontRef idx="minor"/>
+        </p:style>
+        <p:txBody>
+          <a:bodyPr lIns="0" tIns="0" rIns="0" bIns="0" anchor="ctr">
+            <a:normAutofit/>
+          </a:bodyPr>
+          <a:lstStyle/>
+          <a:p>
+            <a:pPr defTabSz="914400">
+              <a:lnSpc>
+                <a:spcPct val="100000"/>
+              </a:lnSpc>
+              <a:tabLst>
+                <a:tab pos="0" algn="l"/>
+              </a:tabLst>
+            </a:pPr>
+            <a:r>
+              <a:rPr lang="pt-BR" sz="1420" b="1" u="none" strike="noStrike" noProof="0" dirty="0">
+                <a:solidFill>
+                  <a:srgbClr val="87E5F2"/>
+                </a:solidFill>
+                <a:effectLst/>
+                <a:uFillTx/>
+                <a:latin typeface="Aptos"/>
+                <a:ea typeface="Aptos"/>
+              </a:rPr>
+              <a:t>E como antecipar o risco antes de o NPS ser medido?</a:t>
+            </a:r>
+            <a:endParaRPr lang="pt-BR" sz="1420" b="0" u="none" strike="noStrike" noProof="0" dirty="0">
+              <a:solidFill>
+                <a:srgbClr val="FFFFFF"/>
+              </a:solidFill>
+              <a:effectLst/>
+              <a:uFillTx/>
+              <a:latin typeface="Arial"/>
+            </a:endParaRPr>
+          </a:p>
+        </p:txBody>
+      </p:sp>
+      <p:sp>
+        <p:nvSpPr>
+          <p:cNvPr id="22" name="Text 12"/>
+          <p:cNvSpPr/>
+          <p:nvPr/>
+        </p:nvSpPr>
+        <p:spPr>
+          <a:xfrm>
+            <a:off x="3529440" y="4736520"/>
+            <a:ext cx="1096920" cy="182520"/>
+          </a:xfrm>
+          <a:prstGeom prst="rect">
+            <a:avLst/>
+          </a:prstGeom>
+          <a:noFill/>
+          <a:ln w="0">
+            <a:noFill/>
+          </a:ln>
+        </p:spPr>
+        <p:style>
+          <a:lnRef idx="0">
+            <a:scrgbClr r="0" g="0" b="0"/>
+          </a:lnRef>
+          <a:fillRef idx="0">
+            <a:scrgbClr r="0" g="0" b="0"/>
+          </a:fillRef>
+          <a:effectRef idx="0">
+            <a:scrgbClr r="0" g="0" b="0"/>
+          </a:effectRef>
+          <a:fontRef idx="minor"/>
+        </p:style>
+        <p:txBody>
+          <a:bodyPr lIns="0" tIns="0" rIns="0" bIns="0" anchor="ctr">
+            <a:normAutofit/>
+          </a:bodyPr>
+          <a:lstStyle/>
+          <a:p>
+            <a:pPr defTabSz="914400">
+              <a:lnSpc>
+                <a:spcPct val="100000"/>
+              </a:lnSpc>
+              <a:tabLst>
+                <a:tab pos="0" algn="l"/>
+              </a:tabLst>
+            </a:pPr>
+            <a:r>
+              <a:rPr lang="pt-BR" sz="950" b="1" u="none" strike="noStrike" spc="139" noProof="0" dirty="0">
+                <a:solidFill>
+                  <a:srgbClr val="25C7E5"/>
+                </a:solidFill>
+                <a:effectLst/>
+                <a:uFillTx/>
+                <a:latin typeface="Aptos"/>
+                <a:ea typeface="Aptos"/>
+              </a:rPr>
+              <a:t>A JORNADA</a:t>
+            </a:r>
+            <a:endParaRPr lang="pt-BR" sz="950" b="0" u="none" strike="noStrike" noProof="0" dirty="0">
+              <a:solidFill>
+                <a:srgbClr val="FFFFFF"/>
+              </a:solidFill>
+              <a:effectLst/>
+              <a:uFillTx/>
+              <a:latin typeface="Arial"/>
+            </a:endParaRPr>
+          </a:p>
+        </p:txBody>
+      </p:sp>
+      <p:sp>
+        <p:nvSpPr>
+          <p:cNvPr id="23" name="Shape 13"/>
+          <p:cNvSpPr/>
+          <p:nvPr/>
+        </p:nvSpPr>
+        <p:spPr>
+          <a:xfrm>
+            <a:off x="3767040" y="5440680"/>
+            <a:ext cx="6903720" cy="360"/>
+          </a:xfrm>
+          <a:prstGeom prst="line">
+            <a:avLst/>
+          </a:prstGeom>
+          <a:ln w="25560">
+            <a:solidFill>
+              <a:srgbClr val="263951"/>
+            </a:solidFill>
+            <a:round/>
+          </a:ln>
+        </p:spPr>
+        <p:style>
+          <a:lnRef idx="0">
+            <a:scrgbClr r="0" g="0" b="0"/>
+          </a:lnRef>
+          <a:fillRef idx="0">
+            <a:scrgbClr r="0" g="0" b="0"/>
+          </a:fillRef>
+          <a:effectRef idx="0">
+            <a:scrgbClr r="0" g="0" b="0"/>
+          </a:effectRef>
+          <a:fontRef idx="minor"/>
+        </p:style>
+        <p:txBody>
+          <a:bodyPr lIns="90000" tIns="-44640" rIns="90000" bIns="-44640" anchor="t" anchorCtr="1">
+            <a:noAutofit/>
+          </a:bodyPr>
+          <a:lstStyle/>
+          <a:p>
+            <a:endParaRPr lang="pt-BR" sz="1800" b="0" u="none" strike="noStrike" noProof="0" dirty="0">
+              <a:solidFill>
+                <a:srgbClr val="FFFFFF"/>
+              </a:solidFill>
+              <a:effectLst/>
+              <a:uFillTx/>
+              <a:latin typeface="Arial"/>
+            </a:endParaRPr>
+          </a:p>
+        </p:txBody>
+      </p:sp>
+      <p:sp>
+        <p:nvSpPr>
+          <p:cNvPr id="24" name="Shape 14"/>
+          <p:cNvSpPr/>
+          <p:nvPr/>
+        </p:nvSpPr>
+        <p:spPr>
+          <a:xfrm>
+            <a:off x="3794760" y="5212080"/>
+            <a:ext cx="438480" cy="438480"/>
+          </a:xfrm>
+          <a:prstGeom prst="ellipse">
+            <a:avLst/>
+          </a:prstGeom>
+          <a:solidFill>
+            <a:srgbClr val="14243A"/>
+          </a:solidFill>
+          <a:ln w="15120">
+            <a:solidFill>
+              <a:srgbClr val="87E5F2"/>
+            </a:solidFill>
+            <a:round/>
+          </a:ln>
+        </p:spPr>
+        <p:style>
+          <a:lnRef idx="0">
+            <a:scrgbClr r="0" g="0" b="0"/>
+          </a:lnRef>
+          <a:fillRef idx="0">
+            <a:scrgbClr r="0" g="0" b="0"/>
+          </a:fillRef>
+          <a:effectRef idx="0">
+            <a:scrgbClr r="0" g="0" b="0"/>
+          </a:effectRef>
+          <a:fontRef idx="minor"/>
+        </p:style>
+        <p:txBody>
+          <a:bodyPr lIns="90000" tIns="45000" rIns="90000" bIns="45000" anchor="t">
+            <a:noAutofit/>
+          </a:bodyPr>
+          <a:lstStyle/>
+          <a:p>
+            <a:endParaRPr lang="pt-BR" sz="1800" b="0" u="none" strike="noStrike" noProof="0" dirty="0">
+              <a:solidFill>
+                <a:srgbClr val="FFFFFF"/>
+              </a:solidFill>
+              <a:effectLst/>
+              <a:uFillTx/>
+              <a:latin typeface="Arial"/>
+            </a:endParaRPr>
+          </a:p>
+        </p:txBody>
+      </p:sp>
+      <p:sp>
+        <p:nvSpPr>
+          <p:cNvPr id="25" name="Shape 15"/>
+          <p:cNvSpPr/>
+          <p:nvPr/>
+        </p:nvSpPr>
+        <p:spPr>
+          <a:xfrm>
+            <a:off x="3922920" y="5349240"/>
+            <a:ext cx="182520" cy="155160"/>
+          </a:xfrm>
+          <a:prstGeom prst="rect">
+            <a:avLst/>
+          </a:prstGeom>
+          <a:noFill/>
+          <a:ln w="17640">
+            <a:solidFill>
+              <a:srgbClr val="87E5F2"/>
+            </a:solidFill>
+            <a:round/>
+          </a:ln>
+        </p:spPr>
+        <p:style>
+          <a:lnRef idx="0">
+            <a:scrgbClr r="0" g="0" b="0"/>
+          </a:lnRef>
+          <a:fillRef idx="0">
+            <a:scrgbClr r="0" g="0" b="0"/>
+          </a:fillRef>
+          <a:effectRef idx="0">
+            <a:scrgbClr r="0" g="0" b="0"/>
+          </a:effectRef>
+          <a:fontRef idx="minor"/>
+        </p:style>
+        <p:txBody>
+          <a:bodyPr lIns="90000" tIns="45000" rIns="90000" bIns="45000" anchor="t">
+            <a:noAutofit/>
+          </a:bodyPr>
+          <a:lstStyle/>
+          <a:p>
+            <a:endParaRPr lang="pt-BR" sz="1800" b="0" u="none" strike="noStrike" noProof="0" dirty="0">
+              <a:solidFill>
+                <a:srgbClr val="000000"/>
+              </a:solidFill>
+              <a:effectLst/>
+              <a:uFillTx/>
+              <a:latin typeface="Arial"/>
+            </a:endParaRPr>
+          </a:p>
+        </p:txBody>
+      </p:sp>
+      <p:sp>
+        <p:nvSpPr>
+          <p:cNvPr id="26" name="Shape 16"/>
+          <p:cNvSpPr/>
+          <p:nvPr/>
+        </p:nvSpPr>
+        <p:spPr>
+          <a:xfrm>
+            <a:off x="3949920" y="5394960"/>
+            <a:ext cx="128160" cy="360"/>
+          </a:xfrm>
+          <a:prstGeom prst="line">
+            <a:avLst/>
+          </a:prstGeom>
+          <a:ln w="12600">
+            <a:solidFill>
+              <a:srgbClr val="87E5F2"/>
+            </a:solidFill>
+            <a:round/>
+          </a:ln>
+        </p:spPr>
+        <p:style>
+          <a:lnRef idx="0">
+            <a:scrgbClr r="0" g="0" b="0"/>
+          </a:lnRef>
+          <a:fillRef idx="0">
+            <a:scrgbClr r="0" g="0" b="0"/>
+          </a:fillRef>
+          <a:effectRef idx="0">
+            <a:scrgbClr r="0" g="0" b="0"/>
+          </a:effectRef>
+          <a:fontRef idx="minor"/>
+        </p:style>
+        <p:txBody>
+          <a:bodyPr lIns="90000" tIns="-44640" rIns="90000" bIns="-44640" anchor="t" anchorCtr="1">
+            <a:noAutofit/>
+          </a:bodyPr>
+          <a:lstStyle/>
+          <a:p>
+            <a:endParaRPr lang="pt-BR" sz="1800" b="0" u="none" strike="noStrike" noProof="0" dirty="0">
+              <a:solidFill>
+                <a:srgbClr val="FFFFFF"/>
+              </a:solidFill>
+              <a:effectLst/>
+              <a:uFillTx/>
+              <a:latin typeface="Arial"/>
+            </a:endParaRPr>
+          </a:p>
+        </p:txBody>
+      </p:sp>
+      <p:sp>
+        <p:nvSpPr>
+          <p:cNvPr id="27" name="Text 17"/>
+          <p:cNvSpPr/>
+          <p:nvPr/>
+        </p:nvSpPr>
+        <p:spPr>
+          <a:xfrm>
+            <a:off x="3630240" y="5760720"/>
+            <a:ext cx="785880" cy="200880"/>
+          </a:xfrm>
+          <a:prstGeom prst="rect">
+            <a:avLst/>
+          </a:prstGeom>
+          <a:noFill/>
+          <a:ln w="0">
+            <a:noFill/>
+          </a:ln>
+        </p:spPr>
+        <p:style>
+          <a:lnRef idx="0">
+            <a:scrgbClr r="0" g="0" b="0"/>
+          </a:lnRef>
+          <a:fillRef idx="0">
+            <a:scrgbClr r="0" g="0" b="0"/>
+          </a:fillRef>
+          <a:effectRef idx="0">
+            <a:scrgbClr r="0" g="0" b="0"/>
+          </a:effectRef>
+          <a:fontRef idx="minor"/>
+        </p:style>
+        <p:txBody>
+          <a:bodyPr lIns="0" tIns="0" rIns="0" bIns="0" anchor="ctr">
+            <a:normAutofit/>
+          </a:bodyPr>
+          <a:lstStyle/>
+          <a:p>
+            <a:pPr algn="ctr" defTabSz="914400">
+              <a:lnSpc>
+                <a:spcPct val="100000"/>
+              </a:lnSpc>
+              <a:tabLst>
+                <a:tab pos="0" algn="l"/>
+              </a:tabLst>
+            </a:pPr>
+            <a:r>
+              <a:rPr lang="pt-BR" sz="1070" b="1" u="none" strike="noStrike" noProof="0" dirty="0">
+                <a:solidFill>
+                  <a:srgbClr val="FFFFFF"/>
+                </a:solidFill>
+                <a:effectLst/>
+                <a:uFillTx/>
+                <a:latin typeface="Aptos"/>
+                <a:ea typeface="Aptos"/>
+              </a:rPr>
+              <a:t>Pedido</a:t>
+            </a:r>
+            <a:endParaRPr lang="pt-BR" sz="1070" b="0" u="none" strike="noStrike" noProof="0" dirty="0">
+              <a:solidFill>
+                <a:srgbClr val="FFFFFF"/>
+              </a:solidFill>
+              <a:effectLst/>
+              <a:uFillTx/>
+              <a:latin typeface="Arial"/>
+            </a:endParaRPr>
+          </a:p>
+        </p:txBody>
+      </p:sp>
+      <p:sp>
+        <p:nvSpPr>
+          <p:cNvPr id="28" name="Text 18"/>
+          <p:cNvSpPr/>
+          <p:nvPr/>
+        </p:nvSpPr>
+        <p:spPr>
+          <a:xfrm>
+            <a:off x="3483720" y="6007680"/>
+            <a:ext cx="1078560" cy="164160"/>
+          </a:xfrm>
+          <a:prstGeom prst="rect">
+            <a:avLst/>
+          </a:prstGeom>
+          <a:noFill/>
+          <a:ln w="0">
+            <a:noFill/>
+          </a:ln>
+        </p:spPr>
+        <p:style>
+          <a:lnRef idx="0">
+            <a:scrgbClr r="0" g="0" b="0"/>
+          </a:lnRef>
+          <a:fillRef idx="0">
+            <a:scrgbClr r="0" g="0" b="0"/>
+          </a:fillRef>
+          <a:effectRef idx="0">
+            <a:scrgbClr r="0" g="0" b="0"/>
+          </a:effectRef>
+          <a:fontRef idx="minor"/>
+        </p:style>
+        <p:txBody>
+          <a:bodyPr lIns="0" tIns="0" rIns="0" bIns="0" anchor="ctr">
+            <a:normAutofit/>
+          </a:bodyPr>
+          <a:lstStyle/>
+          <a:p>
+            <a:pPr algn="ctr" defTabSz="914400">
+              <a:lnSpc>
+                <a:spcPct val="100000"/>
+              </a:lnSpc>
+              <a:tabLst>
+                <a:tab pos="0" algn="l"/>
+              </a:tabLst>
+            </a:pPr>
+            <a:r>
+              <a:rPr lang="pt-BR" sz="860" b="0" u="none" strike="noStrike" noProof="0" dirty="0">
+                <a:solidFill>
+                  <a:srgbClr val="8EA0B6"/>
+                </a:solidFill>
+                <a:effectLst/>
+                <a:uFillTx/>
+                <a:latin typeface="Aptos"/>
+                <a:ea typeface="Aptos"/>
+              </a:rPr>
+              <a:t>valor · itens</a:t>
+            </a:r>
+            <a:endParaRPr lang="pt-BR" sz="860" b="0" u="none" strike="noStrike" noProof="0" dirty="0">
+              <a:solidFill>
+                <a:srgbClr val="FFFFFF"/>
+              </a:solidFill>
+              <a:effectLst/>
+              <a:uFillTx/>
+              <a:latin typeface="Arial"/>
+            </a:endParaRPr>
+          </a:p>
+        </p:txBody>
+      </p:sp>
+      <p:sp>
+        <p:nvSpPr>
+          <p:cNvPr id="29" name="Shape 19"/>
+          <p:cNvSpPr/>
+          <p:nvPr/>
+        </p:nvSpPr>
+        <p:spPr>
+          <a:xfrm>
+            <a:off x="5742360" y="5212080"/>
+            <a:ext cx="438480" cy="438480"/>
+          </a:xfrm>
+          <a:prstGeom prst="ellipse">
+            <a:avLst/>
+          </a:prstGeom>
+          <a:solidFill>
+            <a:srgbClr val="14243A"/>
+          </a:solidFill>
+          <a:ln w="15120">
+            <a:solidFill>
+              <a:srgbClr val="87E5F2"/>
+            </a:solidFill>
+            <a:round/>
+          </a:ln>
+        </p:spPr>
+        <p:style>
+          <a:lnRef idx="0">
+            <a:scrgbClr r="0" g="0" b="0"/>
+          </a:lnRef>
+          <a:fillRef idx="0">
+            <a:scrgbClr r="0" g="0" b="0"/>
+          </a:fillRef>
+          <a:effectRef idx="0">
+            <a:scrgbClr r="0" g="0" b="0"/>
+          </a:effectRef>
+          <a:fontRef idx="minor"/>
+        </p:style>
+        <p:txBody>
+          <a:bodyPr lIns="90000" tIns="45000" rIns="90000" bIns="45000" anchor="t">
+            <a:noAutofit/>
+          </a:bodyPr>
+          <a:lstStyle/>
+          <a:p>
+            <a:endParaRPr lang="pt-BR" sz="1800" b="0" u="none" strike="noStrike" noProof="0" dirty="0">
+              <a:solidFill>
+                <a:srgbClr val="FFFFFF"/>
+              </a:solidFill>
+              <a:effectLst/>
+              <a:uFillTx/>
+              <a:latin typeface="Arial"/>
+            </a:endParaRPr>
+          </a:p>
+        </p:txBody>
+      </p:sp>
+      <p:sp>
+        <p:nvSpPr>
+          <p:cNvPr id="30" name="Shape 20"/>
+          <p:cNvSpPr/>
+          <p:nvPr/>
+        </p:nvSpPr>
+        <p:spPr>
+          <a:xfrm flipV="1">
+            <a:off x="5861160" y="5376600"/>
+            <a:ext cx="201240" cy="118800"/>
+          </a:xfrm>
+          <a:prstGeom prst="line">
+            <a:avLst/>
+          </a:prstGeom>
+          <a:ln w="20160">
+            <a:solidFill>
+              <a:srgbClr val="87E5F2"/>
+            </a:solidFill>
+            <a:round/>
+            <a:tailEnd type="triangle" w="med" len="med"/>
+          </a:ln>
+        </p:spPr>
+        <p:style>
+          <a:lnRef idx="0">
+            <a:scrgbClr r="0" g="0" b="0"/>
+          </a:lnRef>
+          <a:fillRef idx="0">
+            <a:scrgbClr r="0" g="0" b="0"/>
+          </a:fillRef>
+          <a:effectRef idx="0">
+            <a:scrgbClr r="0" g="0" b="0"/>
+          </a:effectRef>
+          <a:fontRef idx="minor"/>
+        </p:style>
+        <p:txBody>
+          <a:bodyPr lIns="90000" tIns="45000" rIns="90000" bIns="45000" anchor="t" anchorCtr="1">
+            <a:noAutofit/>
+          </a:bodyPr>
+          <a:lstStyle/>
+          <a:p>
+            <a:endParaRPr lang="pt-BR" sz="1800" b="0" u="none" strike="noStrike" noProof="0" dirty="0">
+              <a:solidFill>
+                <a:srgbClr val="FFFFFF"/>
+              </a:solidFill>
+              <a:effectLst/>
+              <a:uFillTx/>
+              <a:latin typeface="Arial"/>
+            </a:endParaRPr>
+          </a:p>
+        </p:txBody>
+      </p:sp>
+      <p:sp>
+        <p:nvSpPr>
+          <p:cNvPr id="31" name="Shape 21"/>
+          <p:cNvSpPr/>
+          <p:nvPr/>
+        </p:nvSpPr>
+        <p:spPr>
+          <a:xfrm>
+            <a:off x="5852160" y="5486400"/>
+            <a:ext cx="45360" cy="45360"/>
+          </a:xfrm>
+          <a:prstGeom prst="ellipse">
+            <a:avLst/>
+          </a:prstGeom>
+          <a:solidFill>
+            <a:srgbClr val="87E5F2"/>
+          </a:solidFill>
+          <a:ln w="12600">
+            <a:solidFill>
+              <a:srgbClr val="87E5F2"/>
+            </a:solidFill>
+            <a:round/>
+          </a:ln>
+        </p:spPr>
+        <p:style>
+          <a:lnRef idx="0">
+            <a:scrgbClr r="0" g="0" b="0"/>
+          </a:lnRef>
+          <a:fillRef idx="0">
+            <a:scrgbClr r="0" g="0" b="0"/>
+          </a:fillRef>
+          <a:effectRef idx="0">
+            <a:scrgbClr r="0" g="0" b="0"/>
+          </a:effectRef>
+          <a:fontRef idx="minor"/>
+        </p:style>
+        <p:txBody>
+          <a:bodyPr lIns="90000" tIns="-12600" rIns="90000" bIns="-12600" anchor="t">
+            <a:noAutofit/>
+          </a:bodyPr>
+          <a:lstStyle/>
+          <a:p>
+            <a:endParaRPr lang="pt-BR" sz="1800" b="0" u="none" strike="noStrike" noProof="0" dirty="0">
+              <a:solidFill>
+                <a:srgbClr val="000000"/>
+              </a:solidFill>
+              <a:effectLst/>
+              <a:uFillTx/>
+              <a:latin typeface="Arial"/>
+            </a:endParaRPr>
+          </a:p>
+        </p:txBody>
+      </p:sp>
+      <p:sp>
+        <p:nvSpPr>
+          <p:cNvPr id="32" name="Text 22"/>
+          <p:cNvSpPr/>
+          <p:nvPr/>
+        </p:nvSpPr>
+        <p:spPr>
+          <a:xfrm>
+            <a:off x="5577840" y="5760720"/>
+            <a:ext cx="785880" cy="200880"/>
+          </a:xfrm>
+          <a:prstGeom prst="rect">
+            <a:avLst/>
+          </a:prstGeom>
+          <a:noFill/>
+          <a:ln w="0">
+            <a:noFill/>
+          </a:ln>
+        </p:spPr>
+        <p:style>
+          <a:lnRef idx="0">
+            <a:scrgbClr r="0" g="0" b="0"/>
+          </a:lnRef>
+          <a:fillRef idx="0">
+            <a:scrgbClr r="0" g="0" b="0"/>
+          </a:fillRef>
+          <a:effectRef idx="0">
+            <a:scrgbClr r="0" g="0" b="0"/>
+          </a:effectRef>
+          <a:fontRef idx="minor"/>
+        </p:style>
+        <p:txBody>
+          <a:bodyPr lIns="0" tIns="0" rIns="0" bIns="0" anchor="ctr">
+            <a:normAutofit/>
+          </a:bodyPr>
+          <a:lstStyle/>
+          <a:p>
+            <a:pPr algn="ctr" defTabSz="914400">
+              <a:lnSpc>
+                <a:spcPct val="100000"/>
+              </a:lnSpc>
+              <a:tabLst>
+                <a:tab pos="0" algn="l"/>
+              </a:tabLst>
+            </a:pPr>
+            <a:r>
+              <a:rPr lang="pt-BR" sz="1070" b="1" u="none" strike="noStrike" noProof="0" dirty="0">
+                <a:solidFill>
+                  <a:srgbClr val="FFFFFF"/>
+                </a:solidFill>
+                <a:effectLst/>
+                <a:uFillTx/>
+                <a:latin typeface="Aptos"/>
+                <a:ea typeface="Aptos"/>
+              </a:rPr>
+              <a:t>Entrega</a:t>
+            </a:r>
+            <a:endParaRPr lang="pt-BR" sz="1070" b="0" u="none" strike="noStrike" noProof="0" dirty="0">
+              <a:solidFill>
+                <a:srgbClr val="FFFFFF"/>
+              </a:solidFill>
+              <a:effectLst/>
+              <a:uFillTx/>
+              <a:latin typeface="Arial"/>
+            </a:endParaRPr>
+          </a:p>
+        </p:txBody>
+      </p:sp>
+      <p:sp>
+        <p:nvSpPr>
+          <p:cNvPr id="33" name="Text 23"/>
+          <p:cNvSpPr/>
+          <p:nvPr/>
+        </p:nvSpPr>
+        <p:spPr>
+          <a:xfrm>
+            <a:off x="5431680" y="6007680"/>
+            <a:ext cx="1078560" cy="164160"/>
+          </a:xfrm>
+          <a:prstGeom prst="rect">
+            <a:avLst/>
+          </a:prstGeom>
+          <a:noFill/>
+          <a:ln w="0">
+            <a:noFill/>
+          </a:ln>
+        </p:spPr>
+        <p:style>
+          <a:lnRef idx="0">
+            <a:scrgbClr r="0" g="0" b="0"/>
+          </a:lnRef>
+          <a:fillRef idx="0">
+            <a:scrgbClr r="0" g="0" b="0"/>
+          </a:fillRef>
+          <a:effectRef idx="0">
+            <a:scrgbClr r="0" g="0" b="0"/>
+          </a:effectRef>
+          <a:fontRef idx="minor"/>
+        </p:style>
+        <p:txBody>
+          <a:bodyPr lIns="0" tIns="0" rIns="0" bIns="0" anchor="ctr">
+            <a:normAutofit/>
+          </a:bodyPr>
+          <a:lstStyle/>
+          <a:p>
+            <a:pPr algn="ctr" defTabSz="914400">
+              <a:lnSpc>
+                <a:spcPct val="100000"/>
+              </a:lnSpc>
+              <a:tabLst>
+                <a:tab pos="0" algn="l"/>
+              </a:tabLst>
+            </a:pPr>
+            <a:r>
+              <a:rPr lang="pt-BR" sz="860" b="0" u="none" strike="noStrike" noProof="0" dirty="0">
+                <a:solidFill>
+                  <a:srgbClr val="8EA0B6"/>
+                </a:solidFill>
+                <a:effectLst/>
+                <a:uFillTx/>
+                <a:latin typeface="Aptos"/>
+                <a:ea typeface="Aptos"/>
+              </a:rPr>
+              <a:t>prazo · atraso</a:t>
+            </a:r>
+            <a:endParaRPr lang="pt-BR" sz="860" b="0" u="none" strike="noStrike" noProof="0" dirty="0">
+              <a:solidFill>
+                <a:srgbClr val="FFFFFF"/>
+              </a:solidFill>
+              <a:effectLst/>
+              <a:uFillTx/>
+              <a:latin typeface="Arial"/>
+            </a:endParaRPr>
+          </a:p>
+        </p:txBody>
+      </p:sp>
+      <p:sp>
+        <p:nvSpPr>
+          <p:cNvPr id="34" name="Shape 24"/>
+          <p:cNvSpPr/>
+          <p:nvPr/>
+        </p:nvSpPr>
+        <p:spPr>
+          <a:xfrm>
+            <a:off x="7689960" y="5212080"/>
+            <a:ext cx="438480" cy="438480"/>
+          </a:xfrm>
+          <a:prstGeom prst="ellipse">
+            <a:avLst/>
+          </a:prstGeom>
+          <a:solidFill>
+            <a:srgbClr val="14243A"/>
+          </a:solidFill>
+          <a:ln w="15120">
+            <a:solidFill>
+              <a:srgbClr val="87E5F2"/>
+            </a:solidFill>
+            <a:round/>
+          </a:ln>
+        </p:spPr>
+        <p:style>
+          <a:lnRef idx="0">
+            <a:scrgbClr r="0" g="0" b="0"/>
+          </a:lnRef>
+          <a:fillRef idx="0">
+            <a:scrgbClr r="0" g="0" b="0"/>
+          </a:fillRef>
+          <a:effectRef idx="0">
+            <a:scrgbClr r="0" g="0" b="0"/>
+          </a:effectRef>
+          <a:fontRef idx="minor"/>
+        </p:style>
+        <p:txBody>
+          <a:bodyPr lIns="90000" tIns="45000" rIns="90000" bIns="45000" anchor="t">
+            <a:noAutofit/>
+          </a:bodyPr>
+          <a:lstStyle/>
+          <a:p>
+            <a:endParaRPr lang="pt-BR" sz="1800" b="0" u="none" strike="noStrike" noProof="0" dirty="0">
+              <a:solidFill>
+                <a:srgbClr val="FFFFFF"/>
+              </a:solidFill>
+              <a:effectLst/>
+              <a:uFillTx/>
+              <a:latin typeface="Arial"/>
+            </a:endParaRPr>
+          </a:p>
+        </p:txBody>
+      </p:sp>
+      <p:sp>
+        <p:nvSpPr>
+          <p:cNvPr id="35" name="Shape 25"/>
+          <p:cNvSpPr/>
+          <p:nvPr/>
+        </p:nvSpPr>
+        <p:spPr>
+          <a:xfrm>
+            <a:off x="7799760" y="5340240"/>
+            <a:ext cx="219240" cy="155160"/>
+          </a:xfrm>
+          <a:prstGeom prst="roundRect">
+            <a:avLst>
+              <a:gd name="adj" fmla="val 23529"/>
+            </a:avLst>
+          </a:prstGeom>
+          <a:noFill/>
+          <a:ln w="15120">
+            <a:solidFill>
+              <a:srgbClr val="87E5F2"/>
+            </a:solidFill>
+            <a:round/>
+          </a:ln>
+        </p:spPr>
+        <p:style>
+          <a:lnRef idx="0">
+            <a:scrgbClr r="0" g="0" b="0"/>
+          </a:lnRef>
+          <a:fillRef idx="0">
+            <a:scrgbClr r="0" g="0" b="0"/>
+          </a:fillRef>
+          <a:effectRef idx="0">
+            <a:scrgbClr r="0" g="0" b="0"/>
+          </a:effectRef>
+          <a:fontRef idx="minor"/>
+        </p:style>
+        <p:txBody>
+          <a:bodyPr lIns="90000" tIns="45000" rIns="90000" bIns="45000" anchor="t">
+            <a:noAutofit/>
+          </a:bodyPr>
+          <a:lstStyle/>
+          <a:p>
+            <a:endParaRPr lang="pt-BR" sz="1800" b="0" u="none" strike="noStrike" noProof="0" dirty="0">
+              <a:solidFill>
+                <a:srgbClr val="000000"/>
+              </a:solidFill>
+              <a:effectLst/>
+              <a:uFillTx/>
+              <a:latin typeface="Arial"/>
+            </a:endParaRPr>
+          </a:p>
+        </p:txBody>
+      </p:sp>
+      <p:sp>
+        <p:nvSpPr>
+          <p:cNvPr id="36" name="Shape 26"/>
+          <p:cNvSpPr/>
+          <p:nvPr/>
+        </p:nvSpPr>
+        <p:spPr>
+          <a:xfrm flipH="1">
+            <a:off x="7818120" y="5495400"/>
+            <a:ext cx="36360" cy="54720"/>
+          </a:xfrm>
+          <a:prstGeom prst="line">
+            <a:avLst/>
+          </a:prstGeom>
+          <a:ln w="15120">
+            <a:solidFill>
+              <a:srgbClr val="87E5F2"/>
+            </a:solidFill>
+            <a:round/>
+          </a:ln>
+        </p:spPr>
+        <p:style>
+          <a:lnRef idx="0">
+            <a:scrgbClr r="0" g="0" b="0"/>
+          </a:lnRef>
+          <a:fillRef idx="0">
+            <a:scrgbClr r="0" g="0" b="0"/>
+          </a:fillRef>
+          <a:effectRef idx="0">
+            <a:scrgbClr r="0" g="0" b="0"/>
+          </a:effectRef>
+          <a:fontRef idx="minor"/>
+        </p:style>
+        <p:txBody>
+          <a:bodyPr lIns="90000" tIns="9720" rIns="90000" bIns="9720" anchor="t" anchorCtr="1">
+            <a:noAutofit/>
+          </a:bodyPr>
+          <a:lstStyle/>
+          <a:p>
+            <a:endParaRPr lang="pt-BR" sz="1800" b="0" u="none" strike="noStrike" noProof="0" dirty="0">
+              <a:solidFill>
+                <a:srgbClr val="FFFFFF"/>
+              </a:solidFill>
+              <a:effectLst/>
+              <a:uFillTx/>
+              <a:latin typeface="Arial"/>
+            </a:endParaRPr>
+          </a:p>
+        </p:txBody>
+      </p:sp>
+      <p:sp>
+        <p:nvSpPr>
+          <p:cNvPr id="37" name="Text 27"/>
+          <p:cNvSpPr/>
+          <p:nvPr/>
+        </p:nvSpPr>
+        <p:spPr>
+          <a:xfrm>
+            <a:off x="7525440" y="5760720"/>
+            <a:ext cx="785880" cy="200880"/>
+          </a:xfrm>
+          <a:prstGeom prst="rect">
+            <a:avLst/>
+          </a:prstGeom>
+          <a:noFill/>
+          <a:ln w="0">
+            <a:noFill/>
+          </a:ln>
+        </p:spPr>
+        <p:style>
+          <a:lnRef idx="0">
+            <a:scrgbClr r="0" g="0" b="0"/>
+          </a:lnRef>
+          <a:fillRef idx="0">
+            <a:scrgbClr r="0" g="0" b="0"/>
+          </a:fillRef>
+          <a:effectRef idx="0">
+            <a:scrgbClr r="0" g="0" b="0"/>
+          </a:effectRef>
+          <a:fontRef idx="minor"/>
+        </p:style>
+        <p:txBody>
+          <a:bodyPr lIns="0" tIns="0" rIns="0" bIns="0" anchor="ctr">
+            <a:normAutofit fontScale="92500"/>
+          </a:bodyPr>
+          <a:lstStyle/>
+          <a:p>
+            <a:pPr algn="ctr" defTabSz="914400">
+              <a:lnSpc>
+                <a:spcPct val="100000"/>
+              </a:lnSpc>
+              <a:tabLst>
+                <a:tab pos="0" algn="l"/>
+              </a:tabLst>
+            </a:pPr>
+            <a:r>
+              <a:rPr lang="pt-BR" sz="1070" b="1" u="none" strike="noStrike" noProof="0" dirty="0">
+                <a:solidFill>
+                  <a:srgbClr val="FFFFFF"/>
+                </a:solidFill>
+                <a:effectLst/>
+                <a:uFillTx/>
+                <a:latin typeface="Aptos"/>
+                <a:ea typeface="Aptos"/>
+              </a:rPr>
+              <a:t>Atendimento</a:t>
+            </a:r>
+            <a:endParaRPr lang="pt-BR" sz="1070" b="0" u="none" strike="noStrike" noProof="0" dirty="0">
+              <a:solidFill>
+                <a:srgbClr val="FFFFFF"/>
+              </a:solidFill>
+              <a:effectLst/>
+              <a:uFillTx/>
+              <a:latin typeface="Arial"/>
+            </a:endParaRPr>
+          </a:p>
+        </p:txBody>
+      </p:sp>
+      <p:sp>
+        <p:nvSpPr>
+          <p:cNvPr id="38" name="Text 28"/>
+          <p:cNvSpPr/>
+          <p:nvPr/>
+        </p:nvSpPr>
+        <p:spPr>
+          <a:xfrm>
+            <a:off x="7379280" y="6007680"/>
+            <a:ext cx="1078560" cy="164160"/>
+          </a:xfrm>
+          <a:prstGeom prst="rect">
+            <a:avLst/>
+          </a:prstGeom>
+          <a:noFill/>
+          <a:ln w="0">
+            <a:noFill/>
+          </a:ln>
+        </p:spPr>
+        <p:style>
+          <a:lnRef idx="0">
+            <a:scrgbClr r="0" g="0" b="0"/>
+          </a:lnRef>
+          <a:fillRef idx="0">
+            <a:scrgbClr r="0" g="0" b="0"/>
+          </a:fillRef>
+          <a:effectRef idx="0">
+            <a:scrgbClr r="0" g="0" b="0"/>
+          </a:effectRef>
+          <a:fontRef idx="minor"/>
+        </p:style>
+        <p:txBody>
+          <a:bodyPr lIns="0" tIns="0" rIns="0" bIns="0" anchor="ctr">
+            <a:normAutofit fontScale="92500"/>
+          </a:bodyPr>
+          <a:lstStyle/>
+          <a:p>
+            <a:pPr algn="ctr" defTabSz="914400">
+              <a:lnSpc>
+                <a:spcPct val="100000"/>
+              </a:lnSpc>
+              <a:tabLst>
+                <a:tab pos="0" algn="l"/>
+              </a:tabLst>
+            </a:pPr>
+            <a:r>
+              <a:rPr lang="pt-BR" sz="860" b="0" u="none" strike="noStrike" noProof="0" dirty="0">
+                <a:solidFill>
+                  <a:srgbClr val="8EA0B6"/>
+                </a:solidFill>
+                <a:effectLst/>
+                <a:uFillTx/>
+                <a:latin typeface="Aptos"/>
+                <a:ea typeface="Aptos"/>
+              </a:rPr>
+              <a:t>contatos · reclamações</a:t>
+            </a:r>
+            <a:endParaRPr lang="pt-BR" sz="860" b="0" u="none" strike="noStrike" noProof="0" dirty="0">
+              <a:solidFill>
+                <a:srgbClr val="FFFFFF"/>
+              </a:solidFill>
+              <a:effectLst/>
+              <a:uFillTx/>
+              <a:latin typeface="Arial"/>
+            </a:endParaRPr>
+          </a:p>
+        </p:txBody>
+      </p:sp>
+      <p:sp>
+        <p:nvSpPr>
+          <p:cNvPr id="39" name="Shape 29"/>
+          <p:cNvSpPr/>
+          <p:nvPr/>
+        </p:nvSpPr>
+        <p:spPr>
+          <a:xfrm>
+            <a:off x="9637920" y="5212080"/>
+            <a:ext cx="438480" cy="438480"/>
+          </a:xfrm>
+          <a:prstGeom prst="ellipse">
+            <a:avLst/>
+          </a:prstGeom>
+          <a:solidFill>
+            <a:srgbClr val="14243A"/>
+          </a:solidFill>
+          <a:ln w="15120">
+            <a:solidFill>
+              <a:srgbClr val="87E5F2"/>
+            </a:solidFill>
+            <a:round/>
+          </a:ln>
+        </p:spPr>
+        <p:style>
+          <a:lnRef idx="0">
+            <a:scrgbClr r="0" g="0" b="0"/>
+          </a:lnRef>
+          <a:fillRef idx="0">
+            <a:scrgbClr r="0" g="0" b="0"/>
+          </a:fillRef>
+          <a:effectRef idx="0">
+            <a:scrgbClr r="0" g="0" b="0"/>
+          </a:effectRef>
+          <a:fontRef idx="minor"/>
+        </p:style>
+        <p:txBody>
+          <a:bodyPr lIns="90000" tIns="45000" rIns="90000" bIns="45000" anchor="t">
+            <a:noAutofit/>
+          </a:bodyPr>
+          <a:lstStyle/>
+          <a:p>
+            <a:endParaRPr lang="pt-BR" sz="1800" b="0" u="none" strike="noStrike" noProof="0" dirty="0">
+              <a:solidFill>
+                <a:srgbClr val="FFFFFF"/>
+              </a:solidFill>
+              <a:effectLst/>
+              <a:uFillTx/>
+              <a:latin typeface="Arial"/>
+            </a:endParaRPr>
+          </a:p>
+        </p:txBody>
+      </p:sp>
+      <p:sp>
+        <p:nvSpPr>
+          <p:cNvPr id="40" name="Text 30"/>
+          <p:cNvSpPr/>
+          <p:nvPr/>
+        </p:nvSpPr>
+        <p:spPr>
+          <a:xfrm>
+            <a:off x="9692640" y="5266800"/>
+            <a:ext cx="328680" cy="310680"/>
+          </a:xfrm>
+          <a:prstGeom prst="rect">
+            <a:avLst/>
+          </a:prstGeom>
+          <a:noFill/>
+          <a:ln w="0">
+            <a:noFill/>
+          </a:ln>
+        </p:spPr>
+        <p:style>
+          <a:lnRef idx="0">
+            <a:scrgbClr r="0" g="0" b="0"/>
+          </a:lnRef>
+          <a:fillRef idx="0">
+            <a:scrgbClr r="0" g="0" b="0"/>
+          </a:fillRef>
+          <a:effectRef idx="0">
+            <a:scrgbClr r="0" g="0" b="0"/>
+          </a:effectRef>
+          <a:fontRef idx="minor"/>
+        </p:style>
+        <p:txBody>
+          <a:bodyPr lIns="0" tIns="0" rIns="0" bIns="0" anchor="ctr">
+            <a:normAutofit/>
+          </a:bodyPr>
+          <a:lstStyle/>
+          <a:p>
+            <a:pPr algn="ctr" defTabSz="914400">
+              <a:lnSpc>
+                <a:spcPct val="100000"/>
+              </a:lnSpc>
+              <a:tabLst>
+                <a:tab pos="0" algn="l"/>
+              </a:tabLst>
+            </a:pPr>
+            <a:r>
+              <a:rPr lang="pt-BR" sz="1800" b="1" u="none" strike="noStrike" noProof="0" dirty="0">
+                <a:solidFill>
+                  <a:srgbClr val="87E5F2"/>
+                </a:solidFill>
+                <a:effectLst/>
+                <a:uFillTx/>
+                <a:latin typeface="Aptos"/>
+                <a:ea typeface="Aptos"/>
+              </a:rPr>
+              <a:t>9</a:t>
+            </a:r>
+            <a:endParaRPr lang="pt-BR" sz="1800" b="0" u="none" strike="noStrike" noProof="0" dirty="0">
+              <a:solidFill>
+                <a:srgbClr val="FFFFFF"/>
+              </a:solidFill>
+              <a:effectLst/>
+              <a:uFillTx/>
+              <a:latin typeface="Arial"/>
+            </a:endParaRPr>
+          </a:p>
+        </p:txBody>
+      </p:sp>
+      <p:sp>
+        <p:nvSpPr>
+          <p:cNvPr id="41" name="Text 31"/>
+          <p:cNvSpPr/>
+          <p:nvPr/>
+        </p:nvSpPr>
+        <p:spPr>
+          <a:xfrm>
+            <a:off x="9473040" y="5760720"/>
+            <a:ext cx="785880" cy="200880"/>
+          </a:xfrm>
+          <a:prstGeom prst="rect">
+            <a:avLst/>
+          </a:prstGeom>
+          <a:noFill/>
+          <a:ln w="0">
+            <a:noFill/>
+          </a:ln>
+        </p:spPr>
+        <p:style>
+          <a:lnRef idx="0">
+            <a:scrgbClr r="0" g="0" b="0"/>
+          </a:lnRef>
+          <a:fillRef idx="0">
+            <a:scrgbClr r="0" g="0" b="0"/>
+          </a:fillRef>
+          <a:effectRef idx="0">
+            <a:scrgbClr r="0" g="0" b="0"/>
+          </a:effectRef>
+          <a:fontRef idx="minor"/>
+        </p:style>
+        <p:txBody>
+          <a:bodyPr lIns="0" tIns="0" rIns="0" bIns="0" anchor="ctr">
+            <a:normAutofit/>
+          </a:bodyPr>
+          <a:lstStyle/>
+          <a:p>
+            <a:pPr algn="ctr" defTabSz="914400">
+              <a:lnSpc>
+                <a:spcPct val="100000"/>
+              </a:lnSpc>
+              <a:tabLst>
+                <a:tab pos="0" algn="l"/>
+              </a:tabLst>
+            </a:pPr>
+            <a:r>
+              <a:rPr lang="pt-BR" sz="1070" b="1" u="none" strike="noStrike" noProof="0" dirty="0">
+                <a:solidFill>
+                  <a:srgbClr val="FFFFFF"/>
+                </a:solidFill>
+                <a:effectLst/>
+                <a:uFillTx/>
+                <a:latin typeface="Aptos"/>
+                <a:ea typeface="Aptos"/>
+              </a:rPr>
+              <a:t>NPS</a:t>
+            </a:r>
+            <a:endParaRPr lang="pt-BR" sz="1070" b="0" u="none" strike="noStrike" noProof="0" dirty="0">
+              <a:solidFill>
+                <a:srgbClr val="FFFFFF"/>
+              </a:solidFill>
+              <a:effectLst/>
+              <a:uFillTx/>
+              <a:latin typeface="Arial"/>
+            </a:endParaRPr>
+          </a:p>
+        </p:txBody>
+      </p:sp>
+      <p:sp>
+        <p:nvSpPr>
+          <p:cNvPr id="42" name="Text 32"/>
+          <p:cNvSpPr/>
+          <p:nvPr/>
+        </p:nvSpPr>
+        <p:spPr>
+          <a:xfrm>
+            <a:off x="9326880" y="6007680"/>
+            <a:ext cx="1078560" cy="164160"/>
+          </a:xfrm>
+          <a:prstGeom prst="rect">
+            <a:avLst/>
+          </a:prstGeom>
+          <a:noFill/>
+          <a:ln w="0">
+            <a:noFill/>
+          </a:ln>
+        </p:spPr>
+        <p:style>
+          <a:lnRef idx="0">
+            <a:scrgbClr r="0" g="0" b="0"/>
+          </a:lnRef>
+          <a:fillRef idx="0">
+            <a:scrgbClr r="0" g="0" b="0"/>
+          </a:fillRef>
+          <a:effectRef idx="0">
+            <a:scrgbClr r="0" g="0" b="0"/>
+          </a:effectRef>
+          <a:fontRef idx="minor"/>
+        </p:style>
+        <p:txBody>
+          <a:bodyPr lIns="0" tIns="0" rIns="0" bIns="0" anchor="ctr">
+            <a:normAutofit/>
+          </a:bodyPr>
+          <a:lstStyle/>
+          <a:p>
+            <a:pPr algn="ctr" defTabSz="914400">
+              <a:lnSpc>
+                <a:spcPct val="100000"/>
+              </a:lnSpc>
+              <a:tabLst>
+                <a:tab pos="0" algn="l"/>
+              </a:tabLst>
+            </a:pPr>
+            <a:r>
+              <a:rPr lang="pt-BR" sz="860" b="0" u="none" strike="noStrike" noProof="0" dirty="0">
+                <a:solidFill>
+                  <a:srgbClr val="8EA0B6"/>
+                </a:solidFill>
+                <a:effectLst/>
+                <a:uFillTx/>
+                <a:latin typeface="Aptos"/>
+                <a:ea typeface="Aptos"/>
+              </a:rPr>
+              <a:t>medido depois</a:t>
+            </a:r>
+            <a:endParaRPr lang="pt-BR" sz="860" b="0" u="none" strike="noStrike" noProof="0" dirty="0">
+              <a:solidFill>
+                <a:srgbClr val="FFFFFF"/>
+              </a:solidFill>
+              <a:effectLst/>
+              <a:uFillTx/>
+              <a:latin typeface="Arial"/>
+            </a:endParaRPr>
+          </a:p>
+        </p:txBody>
+      </p:sp>
+      <p:sp>
+        <p:nvSpPr>
+          <p:cNvPr id="43" name="Shape 33"/>
+          <p:cNvSpPr/>
+          <p:nvPr/>
+        </p:nvSpPr>
+        <p:spPr>
+          <a:xfrm>
+            <a:off x="9875520" y="4928400"/>
+            <a:ext cx="360" cy="219600"/>
+          </a:xfrm>
+          <a:prstGeom prst="line">
+            <a:avLst/>
+          </a:prstGeom>
+          <a:ln w="25560">
+            <a:solidFill>
+              <a:srgbClr val="EE5A62"/>
+            </a:solidFill>
+            <a:round/>
+          </a:ln>
+        </p:spPr>
+        <p:style>
+          <a:lnRef idx="0">
+            <a:scrgbClr r="0" g="0" b="0"/>
+          </a:lnRef>
+          <a:fillRef idx="0">
+            <a:scrgbClr r="0" g="0" b="0"/>
+          </a:fillRef>
+          <a:effectRef idx="0">
+            <a:scrgbClr r="0" g="0" b="0"/>
+          </a:effectRef>
+          <a:fontRef idx="minor"/>
+        </p:style>
+        <p:txBody>
+          <a:bodyPr lIns="90000" tIns="45000" rIns="90000" bIns="45000" anchor="t" anchorCtr="1">
+            <a:noAutofit/>
+          </a:bodyPr>
+          <a:lstStyle/>
+          <a:p>
+            <a:endParaRPr lang="pt-BR" sz="1800" b="0" u="none" strike="noStrike" noProof="0" dirty="0">
+              <a:solidFill>
+                <a:srgbClr val="FFFFFF"/>
+              </a:solidFill>
+              <a:effectLst/>
+              <a:uFillTx/>
+              <a:latin typeface="Arial"/>
+            </a:endParaRPr>
+          </a:p>
+        </p:txBody>
+      </p:sp>
+      <p:sp>
+        <p:nvSpPr>
+          <p:cNvPr id="44" name="Text 34"/>
+          <p:cNvSpPr/>
+          <p:nvPr/>
+        </p:nvSpPr>
+        <p:spPr>
+          <a:xfrm>
+            <a:off x="9162360" y="4663440"/>
+            <a:ext cx="1874160" cy="182520"/>
+          </a:xfrm>
+          <a:prstGeom prst="rect">
+            <a:avLst/>
+          </a:prstGeom>
+          <a:noFill/>
+          <a:ln w="0">
+            <a:noFill/>
+          </a:ln>
+        </p:spPr>
+        <p:style>
+          <a:lnRef idx="0">
+            <a:scrgbClr r="0" g="0" b="0"/>
+          </a:lnRef>
+          <a:fillRef idx="0">
+            <a:scrgbClr r="0" g="0" b="0"/>
+          </a:fillRef>
+          <a:effectRef idx="0">
+            <a:scrgbClr r="0" g="0" b="0"/>
+          </a:effectRef>
+          <a:fontRef idx="minor"/>
+        </p:style>
+        <p:txBody>
+          <a:bodyPr lIns="0" tIns="0" rIns="0" bIns="0" anchor="ctr">
+            <a:normAutofit/>
+          </a:bodyPr>
+          <a:lstStyle/>
+          <a:p>
+            <a:pPr algn="ctr" defTabSz="914400">
+              <a:lnSpc>
+                <a:spcPct val="100000"/>
+              </a:lnSpc>
+              <a:tabLst>
+                <a:tab pos="0" algn="l"/>
+              </a:tabLst>
+            </a:pPr>
+            <a:r>
+              <a:rPr lang="pt-BR" sz="920" b="1" u="none" strike="noStrike" noProof="0" dirty="0">
+                <a:solidFill>
+                  <a:srgbClr val="EE5A62"/>
+                </a:solidFill>
+                <a:effectLst/>
+                <a:uFillTx/>
+                <a:latin typeface="Aptos"/>
+                <a:ea typeface="Aptos"/>
+              </a:rPr>
+              <a:t>janela de ação já passou</a:t>
+            </a:r>
+            <a:endParaRPr lang="pt-BR" sz="920" b="0" u="none" strike="noStrike" noProof="0" dirty="0">
+              <a:solidFill>
+                <a:srgbClr val="FFFFFF"/>
+              </a:solidFill>
+              <a:effectLst/>
+              <a:uFillTx/>
+              <a:latin typeface="Arial"/>
+            </a:endParaRPr>
+          </a:p>
+        </p:txBody>
+      </p:sp>
+      <p:sp>
+        <p:nvSpPr>
+          <p:cNvPr id="45" name="Text 35"/>
+          <p:cNvSpPr/>
+          <p:nvPr/>
+        </p:nvSpPr>
+        <p:spPr>
+          <a:xfrm>
+            <a:off x="658440" y="6501240"/>
+            <a:ext cx="3748680" cy="164160"/>
+          </a:xfrm>
+          <a:prstGeom prst="rect">
+            <a:avLst/>
+          </a:prstGeom>
+          <a:noFill/>
+          <a:ln w="0">
+            <a:noFill/>
+          </a:ln>
+        </p:spPr>
+        <p:style>
+          <a:lnRef idx="0">
+            <a:scrgbClr r="0" g="0" b="0"/>
+          </a:lnRef>
+          <a:fillRef idx="0">
+            <a:scrgbClr r="0" g="0" b="0"/>
+          </a:fillRef>
+          <a:effectRef idx="0">
+            <a:scrgbClr r="0" g="0" b="0"/>
+          </a:effectRef>
+          <a:fontRef idx="minor"/>
+        </p:style>
+        <p:txBody>
+          <a:bodyPr lIns="0" tIns="0" rIns="0" bIns="0" anchor="ctr">
+            <a:normAutofit/>
+          </a:bodyPr>
+          <a:lstStyle/>
+          <a:p>
+            <a:pPr defTabSz="914400">
+              <a:lnSpc>
+                <a:spcPct val="100000"/>
+              </a:lnSpc>
+              <a:tabLst>
+                <a:tab pos="0" algn="l"/>
+              </a:tabLst>
+            </a:pPr>
+            <a:r>
+              <a:rPr lang="pt-BR" sz="850" b="0" u="none" strike="noStrike" noProof="0" dirty="0">
+                <a:solidFill>
+                  <a:srgbClr val="718399"/>
+                </a:solidFill>
+                <a:effectLst/>
+                <a:uFillTx/>
+                <a:latin typeface="Aptos"/>
+                <a:ea typeface="Aptos"/>
+              </a:rPr>
+              <a:t>NPS Preditivo  ·  Tech Challenge Fase 1</a:t>
+            </a:r>
+            <a:endParaRPr lang="pt-BR" sz="850" b="0" u="none" strike="noStrike" noProof="0" dirty="0">
+              <a:solidFill>
+                <a:srgbClr val="FFFFFF"/>
+              </a:solidFill>
+              <a:effectLst/>
+              <a:uFillTx/>
+              <a:latin typeface="Arial"/>
+            </a:endParaRPr>
+          </a:p>
+        </p:txBody>
+      </p:sp>
+      <p:sp>
+        <p:nvSpPr>
+          <p:cNvPr id="46" name="Text 36"/>
+          <p:cNvSpPr/>
+          <p:nvPr/>
+        </p:nvSpPr>
+        <p:spPr>
+          <a:xfrm>
+            <a:off x="11137320" y="6473880"/>
+            <a:ext cx="383760" cy="164160"/>
+          </a:xfrm>
+          <a:prstGeom prst="rect">
+            <a:avLst/>
+          </a:prstGeom>
+          <a:noFill/>
+          <a:ln w="0">
+            <a:noFill/>
+          </a:ln>
+        </p:spPr>
+        <p:style>
+          <a:lnRef idx="0">
+            <a:scrgbClr r="0" g="0" b="0"/>
+          </a:lnRef>
+          <a:fillRef idx="0">
+            <a:scrgbClr r="0" g="0" b="0"/>
+          </a:fillRef>
+          <a:effectRef idx="0">
+            <a:scrgbClr r="0" g="0" b="0"/>
+          </a:effectRef>
+          <a:fontRef idx="minor"/>
+        </p:style>
+        <p:txBody>
+          <a:bodyPr lIns="0" tIns="0" rIns="0" bIns="0" anchor="ctr">
+            <a:normAutofit/>
+          </a:bodyPr>
+          <a:lstStyle/>
+          <a:p>
+            <a:pPr algn="r" defTabSz="914400">
+              <a:lnSpc>
+                <a:spcPct val="100000"/>
+              </a:lnSpc>
+              <a:tabLst>
+                <a:tab pos="0" algn="l"/>
+              </a:tabLst>
+            </a:pPr>
+            <a:r>
+              <a:rPr lang="pt-BR" sz="850" b="0" u="none" strike="noStrike" noProof="0" dirty="0">
+                <a:solidFill>
+                  <a:srgbClr val="718399"/>
+                </a:solidFill>
+                <a:effectLst/>
+                <a:uFillTx/>
+                <a:latin typeface="Aptos"/>
+                <a:ea typeface="Aptos"/>
+              </a:rPr>
+              <a:t>01</a:t>
+            </a:r>
+            <a:endParaRPr lang="pt-BR" sz="850" b="0" u="none" strike="noStrike" noProof="0" dirty="0">
+              <a:solidFill>
+                <a:srgbClr val="FFFFFF"/>
+              </a:solidFill>
+              <a:effectLst/>
+              <a:uFillTx/>
+              <a:latin typeface="Arial"/>
+            </a:endParaRPr>
+          </a:p>
+        </p:txBody>
+      </p:sp>
+    </p:spTree>
+  </p:cSld>
+  <p:clrMapOvr>
+    <a:masterClrMapping/>
+  </p:clrMapOvr>
+</p:sld>
+</file>
+
+<file path=ppt/slides/slide3.xml><?xml version="1.0" encoding="utf-8"?>
+<p:sld xmlns:a="http://schemas.openxmlformats.org/drawingml/2006/main" xmlns:r="http://schemas.openxmlformats.org/officeDocument/2006/relationships" xmlns:p="http://schemas.openxmlformats.org/presentationml/2006/main">
+  <p:cSld>
+    <p:bg>
+      <p:bgPr>
+        <a:solidFill>
           <a:srgbClr val="F5F6F8"/>
         </a:solidFill>
         <a:effectLst/>
@@ -11431,7 +12476,7 @@
 </p:sld>
 </file>
 
-<file path=ppt/slides/slide3.xml><?xml version="1.0" encoding="utf-8"?>
+<file path=ppt/slides/slide4.xml><?xml version="1.0" encoding="utf-8"?>
 <p:sld xmlns:a="http://schemas.openxmlformats.org/drawingml/2006/main" xmlns:r="http://schemas.openxmlformats.org/officeDocument/2006/relationships" xmlns:p="http://schemas.openxmlformats.org/presentationml/2006/main">
   <p:cSld>
     <p:bg>
@@ -14700,7 +15745,7 @@
 </p:sld>
 </file>
 
-<file path=ppt/slides/slide4.xml><?xml version="1.0" encoding="utf-8"?>
+<file path=ppt/slides/slide5.xml><?xml version="1.0" encoding="utf-8"?>
 <p:sld xmlns:a="http://schemas.openxmlformats.org/drawingml/2006/main" xmlns:r="http://schemas.openxmlformats.org/officeDocument/2006/relationships" xmlns:p="http://schemas.openxmlformats.org/presentationml/2006/main">
   <p:cSld>
     <p:bg>
@@ -18052,7 +19097,7 @@
 </p:sld>
 </file>
 
-<file path=ppt/slides/slide5.xml><?xml version="1.0" encoding="utf-8"?>
+<file path=ppt/slides/slide6.xml><?xml version="1.0" encoding="utf-8"?>
 <p:sld xmlns:a="http://schemas.openxmlformats.org/drawingml/2006/main" xmlns:p="http://schemas.openxmlformats.org/presentationml/2006/main" xmlns:r="http://schemas.openxmlformats.org/officeDocument/2006/relationships">
   <p:cSld>
     <p:bg>
@@ -19249,7 +20294,7 @@
 </p:sld>
 </file>
 
-<file path=ppt/slides/slide6.xml><?xml version="1.0" encoding="utf-8"?>
+<file path=ppt/slides/slide7.xml><?xml version="1.0" encoding="utf-8"?>
 <p:sld xmlns:a="http://schemas.openxmlformats.org/drawingml/2006/main" xmlns:p="http://schemas.openxmlformats.org/presentationml/2006/main" xmlns:r="http://schemas.openxmlformats.org/officeDocument/2006/relationships">
   <p:cSld>
     <p:bg>
@@ -20470,7 +21515,7 @@
 </p:sld>
 </file>
 
-<file path=ppt/slides/slide7.xml><?xml version="1.0" encoding="utf-8"?>
+<file path=ppt/slides/slide8.xml><?xml version="1.0" encoding="utf-8"?>
 <p:sld xmlns:a="http://schemas.openxmlformats.org/drawingml/2006/main" xmlns:p="http://schemas.openxmlformats.org/presentationml/2006/main" xmlns:r="http://schemas.openxmlformats.org/officeDocument/2006/relationships">
   <p:cSld>
     <p:bg>
@@ -20599,14 +21644,14 @@
       </p:sp>
       <p:sp>
         <p:nvSpPr>
-          <p:cNvPr id="5" name="TextBox 4"/>
+          <p:cNvPr id="31" name="TextBox 30"/>
           <p:cNvSpPr txBox="1"/>
           <p:nvPr/>
         </p:nvSpPr>
         <p:spPr>
           <a:xfrm>
-            <a:off x="658368" y="2286000"/>
-            <a:ext cx="2240280" cy="219456"/>
+            <a:off x="658368" y="6501384"/>
+            <a:ext cx="3749039" cy="164592"/>
           </a:xfrm>
           <a:prstGeom prst="rect">
             <a:avLst/>
@@ -20621,27 +21666,27 @@
           <a:p>
             <a:pPr algn="l"/>
             <a:r>
-              <a:rPr sz="1019" b="1" i="0">
-                <a:solidFill>
-                  <a:srgbClr val="9FB0C6"/>
+              <a:rPr sz="850" b="0" i="0">
+                <a:solidFill>
+                  <a:srgbClr val="718399"/>
                 </a:solidFill>
                 <a:latin typeface="Aptos"/>
               </a:rPr>
-              <a:t>0 DIAS</a:t>
-            </a:r>
-          </a:p>
-        </p:txBody>
-      </p:sp>
-      <p:sp>
-        <p:nvSpPr>
-          <p:cNvPr id="6" name="TextBox 5"/>
+              <a:t>NPS Preditivo  ·  Tech Challenge Fase 1</a:t>
+            </a:r>
+          </a:p>
+        </p:txBody>
+      </p:sp>
+      <p:sp>
+        <p:nvSpPr>
+          <p:cNvPr id="32" name="TextBox 31"/>
           <p:cNvSpPr txBox="1"/>
           <p:nvPr/>
         </p:nvSpPr>
         <p:spPr>
           <a:xfrm>
-            <a:off x="658368" y="2560320"/>
-            <a:ext cx="2331720" cy="548640"/>
+            <a:off x="11137392" y="6473952"/>
+            <a:ext cx="384048" cy="164592"/>
           </a:xfrm>
           <a:prstGeom prst="rect">
             <a:avLst/>
@@ -20654,29 +21699,99 @@
           </a:bodyPr>
           <a:lstStyle/>
           <a:p>
-            <a:pPr algn="l"/>
-            <a:r>
-              <a:rPr sz="3400" b="1" i="0">
-                <a:solidFill>
-                  <a:srgbClr val="87E5F2"/>
-                </a:solidFill>
-                <a:latin typeface="Aptos Display"/>
-              </a:rPr>
-              <a:t>6,85</a:t>
-            </a:r>
-          </a:p>
-        </p:txBody>
-      </p:sp>
-      <p:sp>
-        <p:nvSpPr>
-          <p:cNvPr id="7" name="TextBox 6"/>
+            <a:pPr algn="r"/>
+            <a:r>
+              <a:rPr sz="850" b="0" i="0">
+                <a:solidFill>
+                  <a:srgbClr val="718399"/>
+                </a:solidFill>
+                <a:latin typeface="Aptos"/>
+              </a:rPr>
+              <a:t>07</a:t>
+            </a:r>
+          </a:p>
+        </p:txBody>
+      </p:sp>
+      <p:pic>
+        <p:nvPicPr>
+          <p:cNvPr id="33" name="Picture 32" descr="rupture_chart.png"/>
+          <p:cNvPicPr>
+            <a:picLocks noChangeAspect="1"/>
+          </p:cNvPicPr>
+          <p:nvPr/>
+        </p:nvPicPr>
+        <p:blipFill>
+          <a:blip r:embed="rId2"/>
+          <a:stretch>
+            <a:fillRect/>
+          </a:stretch>
+        </p:blipFill>
+        <p:spPr>
+          <a:xfrm>
+            <a:off x="658368" y="2212848"/>
+            <a:ext cx="6903720" cy="3182112"/>
+          </a:xfrm>
+          <a:prstGeom prst="rect">
+            <a:avLst/>
+          </a:prstGeom>
+        </p:spPr>
+      </p:pic>
+      <p:sp>
+        <p:nvSpPr>
+          <p:cNvPr id="34" name="Rounded Rectangle 33"/>
+          <p:cNvSpPr/>
+          <p:nvPr/>
+        </p:nvSpPr>
+        <p:spPr>
+          <a:xfrm>
+            <a:off x="7818120" y="2212848"/>
+            <a:ext cx="3712463" cy="3182112"/>
+          </a:xfrm>
+          <a:prstGeom prst="roundRect">
+            <a:avLst>
+              <a:gd name="adj" fmla="val 5000"/>
+            </a:avLst>
+          </a:prstGeom>
+          <a:solidFill>
+            <a:srgbClr val="0D1A2B"/>
+          </a:solidFill>
+          <a:ln>
+            <a:noFill/>
+          </a:ln>
+          <a:effectLst/>
+        </p:spPr>
+        <p:style>
+          <a:lnRef idx="1">
+            <a:schemeClr val="accent1"/>
+          </a:lnRef>
+          <a:fillRef idx="3">
+            <a:schemeClr val="accent1"/>
+          </a:fillRef>
+          <a:effectRef idx="2">
+            <a:schemeClr val="accent1"/>
+          </a:effectRef>
+          <a:fontRef idx="minor">
+            <a:schemeClr val="lt1"/>
+          </a:fontRef>
+        </p:style>
+        <p:txBody>
+          <a:bodyPr rtlCol="0" anchor="ctr"/>
+          <a:lstStyle/>
+          <a:p>
+            <a:pPr algn="ctr"/>
+          </a:p>
+        </p:txBody>
+      </p:sp>
+      <p:sp>
+        <p:nvSpPr>
+          <p:cNvPr id="35" name="TextBox 34"/>
           <p:cNvSpPr txBox="1"/>
           <p:nvPr/>
         </p:nvSpPr>
         <p:spPr>
           <a:xfrm>
-            <a:off x="658368" y="3182112"/>
-            <a:ext cx="2240280" cy="219456"/>
+            <a:off x="8092440" y="2450591"/>
+            <a:ext cx="3163823" cy="219456"/>
           </a:xfrm>
           <a:prstGeom prst="rect">
             <a:avLst/>
@@ -20691,27 +21806,27 @@
           <a:p>
             <a:pPr algn="l"/>
             <a:r>
-              <a:rPr sz="1120" b="1" i="0">
-                <a:solidFill>
-                  <a:srgbClr val="FFFFFF"/>
+              <a:rPr sz="940" b="1" i="0">
+                <a:solidFill>
+                  <a:srgbClr val="25C7E5"/>
                 </a:solidFill>
                 <a:latin typeface="Aptos"/>
               </a:rPr>
-              <a:t>51,8% detratores</a:t>
-            </a:r>
-          </a:p>
-        </p:txBody>
-      </p:sp>
-      <p:sp>
-        <p:nvSpPr>
-          <p:cNvPr id="8" name="TextBox 7"/>
+              <a:t>O IMPACTO DO 1º DIA</a:t>
+            </a:r>
+          </a:p>
+        </p:txBody>
+      </p:sp>
+      <p:sp>
+        <p:nvSpPr>
+          <p:cNvPr id="36" name="TextBox 35"/>
           <p:cNvSpPr txBox="1"/>
           <p:nvPr/>
         </p:nvSpPr>
         <p:spPr>
           <a:xfrm>
-            <a:off x="658368" y="3438144"/>
-            <a:ext cx="2240280" cy="201168"/>
+            <a:off x="8092440" y="2779776"/>
+            <a:ext cx="3163823" cy="566928"/>
           </a:xfrm>
           <a:prstGeom prst="rect">
             <a:avLst/>
@@ -20726,27 +21841,62 @@
           <a:p>
             <a:pPr algn="l"/>
             <a:r>
-              <a:rPr sz="960" b="0" i="0">
-                <a:solidFill>
-                  <a:srgbClr val="9FB0C6"/>
+              <a:rPr sz="3600" b="1" i="0">
+                <a:solidFill>
+                  <a:srgbClr val="EE5A62"/>
+                </a:solidFill>
+                <a:latin typeface="Aptos Display"/>
+              </a:rPr>
+              <a:t>−1,3</a:t>
+            </a:r>
+          </a:p>
+        </p:txBody>
+      </p:sp>
+      <p:sp>
+        <p:nvSpPr>
+          <p:cNvPr id="37" name="TextBox 36"/>
+          <p:cNvSpPr txBox="1"/>
+          <p:nvPr/>
+        </p:nvSpPr>
+        <p:spPr>
+          <a:xfrm>
+            <a:off x="8092440" y="3364991"/>
+            <a:ext cx="3163823" cy="237744"/>
+          </a:xfrm>
+          <a:prstGeom prst="rect">
+            <a:avLst/>
+          </a:prstGeom>
+          <a:noFill/>
+        </p:spPr>
+        <p:txBody>
+          <a:bodyPr wrap="square" anchor="t" lIns="0" rIns="0" tIns="0" bIns="0">
+            <a:spAutoFit/>
+          </a:bodyPr>
+          <a:lstStyle/>
+          <a:p>
+            <a:pPr algn="l"/>
+            <a:r>
+              <a:rPr sz="1150" b="1" i="0">
+                <a:solidFill>
+                  <a:srgbClr val="FFFFFF"/>
                 </a:solidFill>
                 <a:latin typeface="Aptos"/>
               </a:rPr>
-              <a:t>ainda aceitável</a:t>
+              <a:t>pontos de NPS</a:t>
             </a:r>
           </a:p>
         </p:txBody>
       </p:sp>
       <p:cxnSp>
         <p:nvCxnSpPr>
-          <p:cNvPr id="9" name="Connector 8"/>
+          <p:cNvPr id="38" name="Connector 37"/>
           <p:cNvCxnSpPr/>
           <p:nvPr/>
         </p:nvCxnSpPr>
         <p:spPr>
           <a:xfrm>
-            <a:off x="3063239" y="2331720"/>
-            <a:ext cx="0" cy="1371600"/>
+            <a:off x="8092440" y="3730752"/>
+            <a:ext cx="3163823" cy="0"/>
           </a:xfrm>
           <a:prstGeom prst="line">
             <a:avLst/>
@@ -20775,14 +21925,14 @@
       </p:cxnSp>
       <p:sp>
         <p:nvSpPr>
-          <p:cNvPr id="10" name="TextBox 9"/>
+          <p:cNvPr id="39" name="TextBox 38"/>
           <p:cNvSpPr txBox="1"/>
           <p:nvPr/>
         </p:nvSpPr>
         <p:spPr>
           <a:xfrm>
-            <a:off x="3172968" y="2286000"/>
-            <a:ext cx="2240280" cy="219456"/>
+            <a:off x="8092440" y="3913632"/>
+            <a:ext cx="3163823" cy="566928"/>
           </a:xfrm>
           <a:prstGeom prst="rect">
             <a:avLst/>
@@ -20797,27 +21947,27 @@
           <a:p>
             <a:pPr algn="l"/>
             <a:r>
-              <a:rPr sz="1019" b="1" i="0">
-                <a:solidFill>
-                  <a:srgbClr val="9FB0C6"/>
-                </a:solidFill>
-                <a:latin typeface="Aptos"/>
-              </a:rPr>
-              <a:t>1 DIA</a:t>
-            </a:r>
-          </a:p>
-        </p:txBody>
-      </p:sp>
-      <p:sp>
-        <p:nvSpPr>
-          <p:cNvPr id="11" name="TextBox 10"/>
+              <a:rPr sz="3600" b="1" i="0">
+                <a:solidFill>
+                  <a:srgbClr val="EE5A62"/>
+                </a:solidFill>
+                <a:latin typeface="Aptos Display"/>
+              </a:rPr>
+              <a:t>+22,3</a:t>
+            </a:r>
+          </a:p>
+        </p:txBody>
+      </p:sp>
+      <p:sp>
+        <p:nvSpPr>
+          <p:cNvPr id="40" name="TextBox 39"/>
           <p:cNvSpPr txBox="1"/>
           <p:nvPr/>
         </p:nvSpPr>
         <p:spPr>
           <a:xfrm>
-            <a:off x="3172968" y="2560320"/>
-            <a:ext cx="2331720" cy="548640"/>
+            <a:off x="8092440" y="4498848"/>
+            <a:ext cx="3163823" cy="237744"/>
           </a:xfrm>
           <a:prstGeom prst="rect">
             <a:avLst/>
@@ -20832,97 +21982,27 @@
           <a:p>
             <a:pPr algn="l"/>
             <a:r>
-              <a:rPr sz="3400" b="1" i="0">
-                <a:solidFill>
-                  <a:srgbClr val="F4B64A"/>
-                </a:solidFill>
-                <a:latin typeface="Aptos Display"/>
-              </a:rPr>
-              <a:t>5,55</a:t>
-            </a:r>
-          </a:p>
-        </p:txBody>
-      </p:sp>
-      <p:sp>
-        <p:nvSpPr>
-          <p:cNvPr id="12" name="TextBox 11"/>
-          <p:cNvSpPr txBox="1"/>
-          <p:nvPr/>
-        </p:nvSpPr>
-        <p:spPr>
-          <a:xfrm>
-            <a:off x="3172968" y="3182112"/>
-            <a:ext cx="2240280" cy="219456"/>
-          </a:xfrm>
-          <a:prstGeom prst="rect">
-            <a:avLst/>
-          </a:prstGeom>
-          <a:noFill/>
-        </p:spPr>
-        <p:txBody>
-          <a:bodyPr wrap="square" anchor="t" lIns="0" rIns="0" tIns="0" bIns="0">
-            <a:spAutoFit/>
-          </a:bodyPr>
-          <a:lstStyle/>
-          <a:p>
-            <a:pPr algn="l"/>
-            <a:r>
-              <a:rPr sz="1120" b="1" i="0">
+              <a:rPr sz="1150" b="1" i="0">
                 <a:solidFill>
                   <a:srgbClr val="FFFFFF"/>
                 </a:solidFill>
                 <a:latin typeface="Aptos"/>
               </a:rPr>
-              <a:t>74,1% detratores</a:t>
-            </a:r>
-          </a:p>
-        </p:txBody>
-      </p:sp>
-      <p:sp>
-        <p:nvSpPr>
-          <p:cNvPr id="13" name="TextBox 12"/>
-          <p:cNvSpPr txBox="1"/>
-          <p:nvPr/>
-        </p:nvSpPr>
-        <p:spPr>
-          <a:xfrm>
-            <a:off x="3172968" y="3438144"/>
-            <a:ext cx="2240280" cy="201168"/>
-          </a:xfrm>
-          <a:prstGeom prst="rect">
-            <a:avLst/>
-          </a:prstGeom>
-          <a:noFill/>
-        </p:spPr>
-        <p:txBody>
-          <a:bodyPr wrap="square" anchor="t" lIns="0" rIns="0" tIns="0" bIns="0">
-            <a:spAutoFit/>
-          </a:bodyPr>
-          <a:lstStyle/>
-          <a:p>
-            <a:pPr algn="l"/>
-            <a:r>
-              <a:rPr sz="960" b="0" i="0">
-                <a:solidFill>
-                  <a:srgbClr val="9FB0C6"/>
-                </a:solidFill>
-                <a:latin typeface="Aptos"/>
-              </a:rPr>
-              <a:t>zona crítica</a:t>
+              <a:t>p.p. a mais de detratores</a:t>
             </a:r>
           </a:p>
         </p:txBody>
       </p:sp>
       <p:cxnSp>
         <p:nvCxnSpPr>
-          <p:cNvPr id="14" name="Connector 13"/>
+          <p:cNvPr id="41" name="Connector 40"/>
           <p:cNvCxnSpPr/>
           <p:nvPr/>
         </p:nvCxnSpPr>
         <p:spPr>
           <a:xfrm>
-            <a:off x="5577840" y="2331720"/>
-            <a:ext cx="0" cy="1371600"/>
+            <a:off x="8092440" y="4864608"/>
+            <a:ext cx="3163823" cy="0"/>
           </a:xfrm>
           <a:prstGeom prst="line">
             <a:avLst/>
@@ -20951,14 +22031,14 @@
       </p:cxnSp>
       <p:sp>
         <p:nvSpPr>
-          <p:cNvPr id="15" name="TextBox 14"/>
+          <p:cNvPr id="42" name="TextBox 41"/>
           <p:cNvSpPr txBox="1"/>
           <p:nvPr/>
         </p:nvSpPr>
         <p:spPr>
           <a:xfrm>
-            <a:off x="5687568" y="2286000"/>
-            <a:ext cx="2240280" cy="219456"/>
+            <a:off x="8092440" y="4974336"/>
+            <a:ext cx="3163823" cy="365760"/>
           </a:xfrm>
           <a:prstGeom prst="rect">
             <a:avLst/>
@@ -20971,350 +22051,37 @@
           </a:bodyPr>
           <a:lstStyle/>
           <a:p>
-            <a:pPr algn="l"/>
-            <a:r>
-              <a:rPr sz="1019" b="1" i="0">
-                <a:solidFill>
-                  <a:srgbClr val="9FB0C6"/>
+            <a:pPr algn="l">
+              <a:lnSpc>
+                <a:spcPct val="110000"/>
+              </a:lnSpc>
+            </a:pPr>
+            <a:r>
+              <a:rPr sz="960" b="0" i="0">
+                <a:solidFill>
+                  <a:srgbClr val="A6B4C6"/>
                 </a:solidFill>
                 <a:latin typeface="Aptos"/>
               </a:rPr>
-              <a:t>2 DIAS</a:t>
-            </a:r>
-          </a:p>
-        </p:txBody>
-      </p:sp>
-      <p:sp>
-        <p:nvSpPr>
-          <p:cNvPr id="16" name="TextBox 15"/>
-          <p:cNvSpPr txBox="1"/>
-          <p:nvPr/>
-        </p:nvSpPr>
-        <p:spPr>
-          <a:xfrm>
-            <a:off x="5687568" y="2560320"/>
-            <a:ext cx="2331720" cy="548640"/>
-          </a:xfrm>
-          <a:prstGeom prst="rect">
-            <a:avLst/>
-          </a:prstGeom>
-          <a:noFill/>
-        </p:spPr>
-        <p:txBody>
-          <a:bodyPr wrap="square" anchor="t" lIns="0" rIns="0" tIns="0" bIns="0">
-            <a:spAutoFit/>
-          </a:bodyPr>
-          <a:lstStyle/>
-          <a:p>
-            <a:pPr algn="l"/>
-            <a:r>
-              <a:rPr sz="3400" b="1" i="0">
-                <a:solidFill>
-                  <a:srgbClr val="F08B4C"/>
-                </a:solidFill>
-                <a:latin typeface="Aptos Display"/>
-              </a:rPr>
-              <a:t>4,57</a:t>
-            </a:r>
-          </a:p>
-        </p:txBody>
-      </p:sp>
-      <p:sp>
-        <p:nvSpPr>
-          <p:cNvPr id="17" name="TextBox 16"/>
-          <p:cNvSpPr txBox="1"/>
-          <p:nvPr/>
-        </p:nvSpPr>
-        <p:spPr>
-          <a:xfrm>
-            <a:off x="5687568" y="3182112"/>
-            <a:ext cx="2240280" cy="219456"/>
-          </a:xfrm>
-          <a:prstGeom prst="rect">
-            <a:avLst/>
-          </a:prstGeom>
-          <a:noFill/>
-        </p:spPr>
-        <p:txBody>
-          <a:bodyPr wrap="square" anchor="t" lIns="0" rIns="0" tIns="0" bIns="0">
-            <a:spAutoFit/>
-          </a:bodyPr>
-          <a:lstStyle/>
-          <a:p>
-            <a:pPr algn="l"/>
-            <a:r>
-              <a:rPr sz="1120" b="1" i="0">
-                <a:solidFill>
-                  <a:srgbClr val="FFFFFF"/>
-                </a:solidFill>
-                <a:latin typeface="Aptos"/>
-              </a:rPr>
-              <a:t>87,9% detratores</a:t>
-            </a:r>
-          </a:p>
-        </p:txBody>
-      </p:sp>
-      <p:sp>
-        <p:nvSpPr>
-          <p:cNvPr id="18" name="TextBox 17"/>
-          <p:cNvSpPr txBox="1"/>
-          <p:nvPr/>
-        </p:nvSpPr>
-        <p:spPr>
-          <a:xfrm>
-            <a:off x="5687568" y="3438144"/>
-            <a:ext cx="2240280" cy="201168"/>
-          </a:xfrm>
-          <a:prstGeom prst="rect">
-            <a:avLst/>
-          </a:prstGeom>
-          <a:noFill/>
-        </p:spPr>
-        <p:txBody>
-          <a:bodyPr wrap="square" anchor="t" lIns="0" rIns="0" tIns="0" bIns="0">
-            <a:spAutoFit/>
-          </a:bodyPr>
-          <a:lstStyle/>
-          <a:p>
-            <a:pPr algn="l"/>
-            <a:r>
-              <a:rPr sz="960" b="0" i="0">
-                <a:solidFill>
-                  <a:srgbClr val="9FB0C6"/>
-                </a:solidFill>
-                <a:latin typeface="Aptos"/>
-              </a:rPr>
-              <a:t>deteriora</a:t>
-            </a:r>
-          </a:p>
-        </p:txBody>
-      </p:sp>
-      <p:cxnSp>
-        <p:nvCxnSpPr>
-          <p:cNvPr id="19" name="Connector 18"/>
-          <p:cNvCxnSpPr/>
-          <p:nvPr/>
-        </p:nvCxnSpPr>
-        <p:spPr>
-          <a:xfrm>
-            <a:off x="8092440" y="2331720"/>
-            <a:ext cx="0" cy="1371600"/>
-          </a:xfrm>
-          <a:prstGeom prst="line">
-            <a:avLst/>
-          </a:prstGeom>
-          <a:ln w="9525">
-            <a:solidFill>
-              <a:srgbClr val="263951"/>
-            </a:solidFill>
-          </a:ln>
-          <a:effectLst/>
-        </p:spPr>
-        <p:style>
-          <a:lnRef idx="2">
-            <a:schemeClr val="accent1"/>
-          </a:lnRef>
-          <a:fillRef idx="0">
-            <a:schemeClr val="accent1"/>
-          </a:fillRef>
-          <a:effectRef idx="1">
-            <a:schemeClr val="accent1"/>
-          </a:effectRef>
-          <a:fontRef idx="minor">
-            <a:schemeClr val="tx1"/>
-          </a:fontRef>
-        </p:style>
-      </p:cxnSp>
-      <p:sp>
-        <p:nvSpPr>
-          <p:cNvPr id="20" name="TextBox 19"/>
-          <p:cNvSpPr txBox="1"/>
-          <p:nvPr/>
-        </p:nvSpPr>
-        <p:spPr>
-          <a:xfrm>
-            <a:off x="8202168" y="2286000"/>
-            <a:ext cx="2240280" cy="219456"/>
-          </a:xfrm>
-          <a:prstGeom prst="rect">
-            <a:avLst/>
-          </a:prstGeom>
-          <a:noFill/>
-        </p:spPr>
-        <p:txBody>
-          <a:bodyPr wrap="square" anchor="t" lIns="0" rIns="0" tIns="0" bIns="0">
-            <a:spAutoFit/>
-          </a:bodyPr>
-          <a:lstStyle/>
-          <a:p>
-            <a:pPr algn="l"/>
-            <a:r>
-              <a:rPr sz="1019" b="1" i="0">
-                <a:solidFill>
-                  <a:srgbClr val="9FB0C6"/>
-                </a:solidFill>
-                <a:latin typeface="Aptos"/>
-              </a:rPr>
-              <a:t>3+ DIAS</a:t>
-            </a:r>
-          </a:p>
-        </p:txBody>
-      </p:sp>
-      <p:sp>
-        <p:nvSpPr>
-          <p:cNvPr id="21" name="TextBox 20"/>
-          <p:cNvSpPr txBox="1"/>
-          <p:nvPr/>
-        </p:nvSpPr>
-        <p:spPr>
-          <a:xfrm>
-            <a:off x="8202168" y="2560320"/>
-            <a:ext cx="2331720" cy="548640"/>
-          </a:xfrm>
-          <a:prstGeom prst="rect">
-            <a:avLst/>
-          </a:prstGeom>
-          <a:noFill/>
-        </p:spPr>
-        <p:txBody>
-          <a:bodyPr wrap="square" anchor="t" lIns="0" rIns="0" tIns="0" bIns="0">
-            <a:spAutoFit/>
-          </a:bodyPr>
-          <a:lstStyle/>
-          <a:p>
-            <a:pPr algn="l"/>
-            <a:r>
-              <a:rPr sz="3400" b="1" i="0">
-                <a:solidFill>
-                  <a:srgbClr val="EE5A62"/>
-                </a:solidFill>
-                <a:latin typeface="Aptos Display"/>
-              </a:rPr>
-              <a:t>&lt; 3,50</a:t>
-            </a:r>
-          </a:p>
-        </p:txBody>
-      </p:sp>
-      <p:sp>
-        <p:nvSpPr>
-          <p:cNvPr id="22" name="TextBox 21"/>
-          <p:cNvSpPr txBox="1"/>
-          <p:nvPr/>
-        </p:nvSpPr>
-        <p:spPr>
-          <a:xfrm>
-            <a:off x="8202168" y="3182112"/>
-            <a:ext cx="2240280" cy="219456"/>
-          </a:xfrm>
-          <a:prstGeom prst="rect">
-            <a:avLst/>
-          </a:prstGeom>
-          <a:noFill/>
-        </p:spPr>
-        <p:txBody>
-          <a:bodyPr wrap="square" anchor="t" lIns="0" rIns="0" tIns="0" bIns="0">
-            <a:spAutoFit/>
-          </a:bodyPr>
-          <a:lstStyle/>
-          <a:p>
-            <a:pPr algn="l"/>
-            <a:r>
-              <a:rPr sz="1120" b="1" i="0">
-                <a:solidFill>
-                  <a:srgbClr val="FFFFFF"/>
-                </a:solidFill>
-                <a:latin typeface="Aptos"/>
-              </a:rPr>
-              <a:t>&gt; 95% detratores</a:t>
-            </a:r>
-          </a:p>
-        </p:txBody>
-      </p:sp>
-      <p:sp>
-        <p:nvSpPr>
-          <p:cNvPr id="23" name="TextBox 22"/>
-          <p:cNvSpPr txBox="1"/>
-          <p:nvPr/>
-        </p:nvSpPr>
-        <p:spPr>
-          <a:xfrm>
-            <a:off x="8202168" y="3438144"/>
-            <a:ext cx="2240280" cy="201168"/>
-          </a:xfrm>
-          <a:prstGeom prst="rect">
-            <a:avLst/>
-          </a:prstGeom>
-          <a:noFill/>
-        </p:spPr>
-        <p:txBody>
-          <a:bodyPr wrap="square" anchor="t" lIns="0" rIns="0" tIns="0" bIns="0">
-            <a:spAutoFit/>
-          </a:bodyPr>
-          <a:lstStyle/>
-          <a:p>
-            <a:pPr algn="l"/>
-            <a:r>
-              <a:rPr sz="960" b="0" i="0">
-                <a:solidFill>
-                  <a:srgbClr val="9FB0C6"/>
-                </a:solidFill>
-                <a:latin typeface="Aptos"/>
-              </a:rPr>
-              <a:t>quase perdido</a:t>
-            </a:r>
-          </a:p>
-        </p:txBody>
-      </p:sp>
-      <p:cxnSp>
-        <p:nvCxnSpPr>
-          <p:cNvPr id="24" name="Connector 23"/>
-          <p:cNvCxnSpPr/>
-          <p:nvPr/>
-        </p:nvCxnSpPr>
-        <p:spPr>
-          <a:xfrm>
-            <a:off x="658368" y="3840480"/>
-            <a:ext cx="10863072" cy="0"/>
-          </a:xfrm>
-          <a:prstGeom prst="line">
-            <a:avLst/>
-          </a:prstGeom>
-          <a:ln w="9525">
-            <a:solidFill>
-              <a:srgbClr val="263951"/>
-            </a:solidFill>
-          </a:ln>
-          <a:effectLst/>
-        </p:spPr>
-        <p:style>
-          <a:lnRef idx="2">
-            <a:schemeClr val="accent1"/>
-          </a:lnRef>
-          <a:fillRef idx="0">
-            <a:schemeClr val="accent1"/>
-          </a:fillRef>
-          <a:effectRef idx="1">
-            <a:schemeClr val="accent1"/>
-          </a:effectRef>
-          <a:fontRef idx="minor">
-            <a:schemeClr val="tx1"/>
-          </a:fontRef>
-        </p:style>
-      </p:cxnSp>
-      <p:sp>
-        <p:nvSpPr>
-          <p:cNvPr id="25" name="Rounded Rectangle 24"/>
+              <a:t>comparando 0 dia vs. 1 dia de atraso</a:t>
+            </a:r>
+          </a:p>
+        </p:txBody>
+      </p:sp>
+      <p:sp>
+        <p:nvSpPr>
+          <p:cNvPr id="43" name="Rounded Rectangle 42"/>
           <p:cNvSpPr/>
           <p:nvPr/>
         </p:nvSpPr>
         <p:spPr>
           <a:xfrm>
-            <a:off x="658368" y="4069080"/>
-            <a:ext cx="10881360" cy="868680"/>
+            <a:off x="658368" y="5577840"/>
+            <a:ext cx="10881360" cy="777240"/>
           </a:xfrm>
           <a:prstGeom prst="roundRect">
             <a:avLst>
-              <a:gd name="adj" fmla="val 8000"/>
+              <a:gd name="adj" fmla="val 10000"/>
             </a:avLst>
           </a:prstGeom>
           <a:solidFill>
@@ -21349,307 +22116,48 @@
       </p:sp>
       <p:sp>
         <p:nvSpPr>
-          <p:cNvPr id="26" name="TextBox 25"/>
+          <p:cNvPr id="44" name="TextBox 43"/>
           <p:cNvSpPr txBox="1"/>
           <p:nvPr/>
         </p:nvSpPr>
         <p:spPr>
           <a:xfrm>
-            <a:off x="932688" y="4215384"/>
-            <a:ext cx="1828800" cy="566928"/>
-          </a:xfrm>
-          <a:prstGeom prst="rect">
-            <a:avLst/>
-          </a:prstGeom>
-          <a:noFill/>
-        </p:spPr>
-        <p:txBody>
-          <a:bodyPr wrap="square" anchor="t" lIns="0" rIns="0" tIns="0" bIns="0">
+            <a:off x="960120" y="5705855"/>
+            <a:ext cx="10241280" cy="530352"/>
+          </a:xfrm>
+          <a:prstGeom prst="rect">
+            <a:avLst/>
+          </a:prstGeom>
+          <a:noFill/>
+        </p:spPr>
+        <p:txBody>
+          <a:bodyPr wrap="square" anchor="ctr" lIns="0" rIns="0" tIns="0" bIns="0">
             <a:spAutoFit/>
           </a:bodyPr>
           <a:lstStyle/>
           <a:p>
             <a:pPr algn="l">
               <a:lnSpc>
-                <a:spcPct val="100000"/>
+                <a:spcPct val="115000"/>
               </a:lnSpc>
             </a:pPr>
             <a:r>
-              <a:rPr sz="2600" b="1" i="0">
-                <a:solidFill>
-                  <a:srgbClr val="EE5A62"/>
-                </a:solidFill>
-                <a:latin typeface="Aptos Display"/>
-              </a:rPr>
-              <a:t>−1,3</a:t>
-            </a:r>
-          </a:p>
-          <a:p>
-            <a:pPr algn="l">
-              <a:lnSpc>
-                <a:spcPct val="100000"/>
-              </a:lnSpc>
-            </a:pPr>
-            <a:r>
-              <a:rPr sz="950" b="0" i="0">
-                <a:solidFill>
-                  <a:srgbClr val="A6B4C6"/>
+              <a:rPr sz="1200" b="1" i="0">
+                <a:solidFill>
+                  <a:srgbClr val="FFFFFF"/>
                 </a:solidFill>
                 <a:latin typeface="Aptos"/>
               </a:rPr>
-              <a:t>pontos de NPS</a:t>
-            </a:r>
-          </a:p>
-        </p:txBody>
-      </p:sp>
-      <p:cxnSp>
-        <p:nvCxnSpPr>
-          <p:cNvPr id="27" name="Connector 26"/>
-          <p:cNvCxnSpPr/>
-          <p:nvPr/>
-        </p:nvCxnSpPr>
-        <p:spPr>
-          <a:xfrm>
-            <a:off x="3063240" y="4233672"/>
-            <a:ext cx="0" cy="548640"/>
-          </a:xfrm>
-          <a:prstGeom prst="line">
-            <a:avLst/>
-          </a:prstGeom>
-          <a:ln w="9525">
-            <a:solidFill>
-              <a:srgbClr val="263951"/>
-            </a:solidFill>
-          </a:ln>
-          <a:effectLst/>
-        </p:spPr>
-        <p:style>
-          <a:lnRef idx="2">
-            <a:schemeClr val="accent1"/>
-          </a:lnRef>
-          <a:fillRef idx="0">
-            <a:schemeClr val="accent1"/>
-          </a:fillRef>
-          <a:effectRef idx="1">
-            <a:schemeClr val="accent1"/>
-          </a:effectRef>
-          <a:fontRef idx="minor">
-            <a:schemeClr val="tx1"/>
-          </a:fontRef>
-        </p:style>
-      </p:cxnSp>
-      <p:sp>
-        <p:nvSpPr>
-          <p:cNvPr id="28" name="TextBox 27"/>
-          <p:cNvSpPr txBox="1"/>
-          <p:nvPr/>
-        </p:nvSpPr>
-        <p:spPr>
-          <a:xfrm>
-            <a:off x="3337560" y="4215384"/>
-            <a:ext cx="1828800" cy="566928"/>
-          </a:xfrm>
-          <a:prstGeom prst="rect">
-            <a:avLst/>
-          </a:prstGeom>
-          <a:noFill/>
-        </p:spPr>
-        <p:txBody>
-          <a:bodyPr wrap="square" anchor="t" lIns="0" rIns="0" tIns="0" bIns="0">
-            <a:spAutoFit/>
-          </a:bodyPr>
-          <a:lstStyle/>
-          <a:p>
-            <a:pPr algn="l">
-              <a:lnSpc>
-                <a:spcPct val="100000"/>
-              </a:lnSpc>
-            </a:pPr>
-            <a:r>
-              <a:rPr sz="2600" b="1" i="0">
-                <a:solidFill>
-                  <a:srgbClr val="EE5A62"/>
-                </a:solidFill>
-                <a:latin typeface="Aptos Display"/>
-              </a:rPr>
-              <a:t>+22,3 p.p.</a:t>
-            </a:r>
-          </a:p>
-          <a:p>
-            <a:pPr algn="l">
-              <a:lnSpc>
-                <a:spcPct val="100000"/>
-              </a:lnSpc>
-            </a:pPr>
-            <a:r>
-              <a:rPr sz="950" b="0" i="0">
-                <a:solidFill>
-                  <a:srgbClr val="A6B4C6"/>
+              <a:t>Não existe “atraso aceitável” na percepção do cliente — </a:t>
+            </a:r>
+            <a:r>
+              <a:rPr sz="1200" b="1" i="0">
+                <a:solidFill>
+                  <a:srgbClr val="87E5F2"/>
                 </a:solidFill>
                 <a:latin typeface="Aptos"/>
               </a:rPr>
-              <a:t>mais detratores</a:t>
-            </a:r>
-          </a:p>
-        </p:txBody>
-      </p:sp>
-      <p:cxnSp>
-        <p:nvCxnSpPr>
-          <p:cNvPr id="29" name="Connector 28"/>
-          <p:cNvCxnSpPr/>
-          <p:nvPr/>
-        </p:nvCxnSpPr>
-        <p:spPr>
-          <a:xfrm>
-            <a:off x="5532120" y="4233672"/>
-            <a:ext cx="0" cy="548640"/>
-          </a:xfrm>
-          <a:prstGeom prst="line">
-            <a:avLst/>
-          </a:prstGeom>
-          <a:ln w="9525">
-            <a:solidFill>
-              <a:srgbClr val="263951"/>
-            </a:solidFill>
-          </a:ln>
-          <a:effectLst/>
-        </p:spPr>
-        <p:style>
-          <a:lnRef idx="2">
-            <a:schemeClr val="accent1"/>
-          </a:lnRef>
-          <a:fillRef idx="0">
-            <a:schemeClr val="accent1"/>
-          </a:fillRef>
-          <a:effectRef idx="1">
-            <a:schemeClr val="accent1"/>
-          </a:effectRef>
-          <a:fontRef idx="minor">
-            <a:schemeClr val="tx1"/>
-          </a:fontRef>
-        </p:style>
-      </p:cxnSp>
-      <p:sp>
-        <p:nvSpPr>
-          <p:cNvPr id="30" name="TextBox 29"/>
-          <p:cNvSpPr txBox="1"/>
-          <p:nvPr/>
-        </p:nvSpPr>
-        <p:spPr>
-          <a:xfrm>
-            <a:off x="5806440" y="4251960"/>
-            <a:ext cx="5486400" cy="530352"/>
-          </a:xfrm>
-          <a:prstGeom prst="rect">
-            <a:avLst/>
-          </a:prstGeom>
-          <a:noFill/>
-        </p:spPr>
-        <p:txBody>
-          <a:bodyPr wrap="square" anchor="t" lIns="0" rIns="0" tIns="0" bIns="0">
-            <a:spAutoFit/>
-          </a:bodyPr>
-          <a:lstStyle/>
-          <a:p>
-            <a:pPr algn="l">
-              <a:lnSpc>
-                <a:spcPct val="108000"/>
-              </a:lnSpc>
-            </a:pPr>
-            <a:r>
-              <a:rPr sz="1130" b="1" i="0">
-                <a:solidFill>
-                  <a:srgbClr val="FFFFFF"/>
-                </a:solidFill>
-                <a:latin typeface="Aptos"/>
-              </a:rPr>
-              <a:t>Não existe “atraso aceitável” na percepção do cliente —</a:t>
-            </a:r>
-          </a:p>
-          <a:p>
-            <a:pPr algn="l">
-              <a:lnSpc>
-                <a:spcPct val="108000"/>
-              </a:lnSpc>
-            </a:pPr>
-            <a:r>
-              <a:rPr sz="1130" b="1" i="0">
-                <a:solidFill>
-                  <a:srgbClr val="87E5F2"/>
-                </a:solidFill>
-                <a:latin typeface="Aptos"/>
-              </a:rPr>
               <a:t>o salto de 0 para 1 dia já é o maior choque de satisfação da jornada.</a:t>
-            </a:r>
-          </a:p>
-        </p:txBody>
-      </p:sp>
-      <p:sp>
-        <p:nvSpPr>
-          <p:cNvPr id="31" name="TextBox 30"/>
-          <p:cNvSpPr txBox="1"/>
-          <p:nvPr/>
-        </p:nvSpPr>
-        <p:spPr>
-          <a:xfrm>
-            <a:off x="658368" y="6501384"/>
-            <a:ext cx="3749039" cy="164592"/>
-          </a:xfrm>
-          <a:prstGeom prst="rect">
-            <a:avLst/>
-          </a:prstGeom>
-          <a:noFill/>
-        </p:spPr>
-        <p:txBody>
-          <a:bodyPr wrap="square" anchor="t" lIns="0" rIns="0" tIns="0" bIns="0">
-            <a:spAutoFit/>
-          </a:bodyPr>
-          <a:lstStyle/>
-          <a:p>
-            <a:pPr algn="l"/>
-            <a:r>
-              <a:rPr sz="850" b="0" i="0">
-                <a:solidFill>
-                  <a:srgbClr val="718399"/>
-                </a:solidFill>
-                <a:latin typeface="Aptos"/>
-              </a:rPr>
-              <a:t>NPS Preditivo  ·  Tech Challenge Fase 1</a:t>
-            </a:r>
-          </a:p>
-        </p:txBody>
-      </p:sp>
-      <p:sp>
-        <p:nvSpPr>
-          <p:cNvPr id="32" name="TextBox 31"/>
-          <p:cNvSpPr txBox="1"/>
-          <p:nvPr/>
-        </p:nvSpPr>
-        <p:spPr>
-          <a:xfrm>
-            <a:off x="11137392" y="6473952"/>
-            <a:ext cx="384048" cy="164592"/>
-          </a:xfrm>
-          <a:prstGeom prst="rect">
-            <a:avLst/>
-          </a:prstGeom>
-          <a:noFill/>
-        </p:spPr>
-        <p:txBody>
-          <a:bodyPr wrap="square" anchor="t" lIns="0" rIns="0" tIns="0" bIns="0">
-            <a:spAutoFit/>
-          </a:bodyPr>
-          <a:lstStyle/>
-          <a:p>
-            <a:pPr algn="r"/>
-            <a:r>
-              <a:rPr sz="850" b="0" i="0">
-                <a:solidFill>
-                  <a:srgbClr val="718399"/>
-                </a:solidFill>
-                <a:latin typeface="Aptos"/>
-              </a:rPr>
-              <a:t>07</a:t>
             </a:r>
           </a:p>
         </p:txBody>
@@ -21662,7 +22170,7 @@
 </p:sld>
 </file>
 
-<file path=ppt/slides/slide8.xml><?xml version="1.0" encoding="utf-8"?>
+<file path=ppt/slides/slide9.xml><?xml version="1.0" encoding="utf-8"?>
 <p:sld xmlns:a="http://schemas.openxmlformats.org/drawingml/2006/main" xmlns:p="http://schemas.openxmlformats.org/presentationml/2006/main" xmlns:r="http://schemas.openxmlformats.org/officeDocument/2006/relationships">
   <p:cSld>
     <p:bg>
@@ -23110,1051 +23618,6 @@
                 <a:latin typeface="Aptos"/>
               </a:rPr>
               <a:t>08</a:t>
-            </a:r>
-          </a:p>
-        </p:txBody>
-      </p:sp>
-    </p:spTree>
-  </p:cSld>
-  <p:clrMapOvr>
-    <a:masterClrMapping/>
-  </p:clrMapOvr>
-</p:sld>
-</file>
-
-<file path=ppt/slides/slide9.xml><?xml version="1.0" encoding="utf-8"?>
-<p:sld xmlns:a="http://schemas.openxmlformats.org/drawingml/2006/main" xmlns:p="http://schemas.openxmlformats.org/presentationml/2006/main" xmlns:r="http://schemas.openxmlformats.org/officeDocument/2006/relationships">
-  <p:cSld>
-    <p:bg>
-      <p:bgPr>
-        <a:solidFill>
-          <a:srgbClr val="091220"/>
-        </a:solidFill>
-        <a:effectLst/>
-      </p:bgPr>
-    </p:bg>
-    <p:spTree>
-      <p:nvGrpSpPr>
-        <p:cNvPr id="1" name=""/>
-        <p:cNvGrpSpPr/>
-        <p:nvPr/>
-      </p:nvGrpSpPr>
-      <p:grpSpPr/>
-      <p:sp>
-        <p:nvSpPr>
-          <p:cNvPr id="2" name="TextBox 1"/>
-          <p:cNvSpPr txBox="1"/>
-          <p:nvPr/>
-        </p:nvSpPr>
-        <p:spPr>
-          <a:xfrm>
-            <a:off x="658368" y="384048"/>
-            <a:ext cx="5943600" cy="201168"/>
-          </a:xfrm>
-          <a:prstGeom prst="rect">
-            <a:avLst/>
-          </a:prstGeom>
-          <a:noFill/>
-        </p:spPr>
-        <p:txBody>
-          <a:bodyPr wrap="square" anchor="t" lIns="0" rIns="0" tIns="0" bIns="0">
-            <a:spAutoFit/>
-          </a:bodyPr>
-          <a:lstStyle/>
-          <a:p>
-            <a:pPr algn="l"/>
-            <a:r>
-              <a:rPr sz="950" b="1" i="0">
-                <a:solidFill>
-                  <a:srgbClr val="25C7E5"/>
-                </a:solidFill>
-                <a:latin typeface="Aptos"/>
-              </a:rPr>
-              <a:t>PARTE 4 · RECOMENDAÇÕES</a:t>
-            </a:r>
-          </a:p>
-        </p:txBody>
-      </p:sp>
-      <p:sp>
-        <p:nvSpPr>
-          <p:cNvPr id="3" name="TextBox 2"/>
-          <p:cNvSpPr txBox="1"/>
-          <p:nvPr/>
-        </p:nvSpPr>
-        <p:spPr>
-          <a:xfrm>
-            <a:off x="658368" y="786384"/>
-            <a:ext cx="10881360" cy="749808"/>
-          </a:xfrm>
-          <a:prstGeom prst="rect">
-            <a:avLst/>
-          </a:prstGeom>
-          <a:noFill/>
-        </p:spPr>
-        <p:txBody>
-          <a:bodyPr wrap="square" anchor="t" lIns="0" rIns="0" tIns="0" bIns="0">
-            <a:spAutoFit/>
-          </a:bodyPr>
-          <a:lstStyle/>
-          <a:p>
-            <a:pPr algn="l">
-              <a:lnSpc>
-                <a:spcPct val="102000"/>
-              </a:lnSpc>
-            </a:pPr>
-            <a:r>
-              <a:rPr sz="2900" b="1" i="0">
-                <a:solidFill>
-                  <a:srgbClr val="FFFFFF"/>
-                </a:solidFill>
-                <a:latin typeface="Aptos Display"/>
-              </a:rPr>
-              <a:t>Três ações operacionais, priorizadas pelo impacto nos dados.</a:t>
-            </a:r>
-          </a:p>
-        </p:txBody>
-      </p:sp>
-      <p:sp>
-        <p:nvSpPr>
-          <p:cNvPr id="4" name="TextBox 3"/>
-          <p:cNvSpPr txBox="1"/>
-          <p:nvPr/>
-        </p:nvSpPr>
-        <p:spPr>
-          <a:xfrm>
-            <a:off x="658368" y="1572768"/>
-            <a:ext cx="10607040" cy="365760"/>
-          </a:xfrm>
-          <a:prstGeom prst="rect">
-            <a:avLst/>
-          </a:prstGeom>
-          <a:noFill/>
-        </p:spPr>
-        <p:txBody>
-          <a:bodyPr wrap="square" anchor="t" lIns="0" rIns="0" tIns="0" bIns="0">
-            <a:spAutoFit/>
-          </a:bodyPr>
-          <a:lstStyle/>
-          <a:p>
-            <a:pPr algn="l"/>
-            <a:r>
-              <a:rPr sz="1210" b="0" i="0">
-                <a:solidFill>
-                  <a:srgbClr val="9FB0C6"/>
-                </a:solidFill>
-                <a:latin typeface="Aptos"/>
-              </a:rPr>
-              <a:t>Construídas a partir dos achados da EDA — independentes do modelo preditivo (item opcional).</a:t>
-            </a:r>
-          </a:p>
-        </p:txBody>
-      </p:sp>
-      <p:sp>
-        <p:nvSpPr>
-          <p:cNvPr id="5" name="Rounded Rectangle 4"/>
-          <p:cNvSpPr/>
-          <p:nvPr/>
-        </p:nvSpPr>
-        <p:spPr>
-          <a:xfrm>
-            <a:off x="658368" y="2212848"/>
-            <a:ext cx="10881360" cy="1207008"/>
-          </a:xfrm>
-          <a:prstGeom prst="roundRect">
-            <a:avLst>
-              <a:gd name="adj" fmla="val 5000"/>
-            </a:avLst>
-          </a:prstGeom>
-          <a:solidFill>
-            <a:srgbClr val="0D1A2B"/>
-          </a:solidFill>
-          <a:ln>
-            <a:noFill/>
-          </a:ln>
-          <a:effectLst/>
-        </p:spPr>
-        <p:style>
-          <a:lnRef idx="1">
-            <a:schemeClr val="accent1"/>
-          </a:lnRef>
-          <a:fillRef idx="3">
-            <a:schemeClr val="accent1"/>
-          </a:fillRef>
-          <a:effectRef idx="2">
-            <a:schemeClr val="accent1"/>
-          </a:effectRef>
-          <a:fontRef idx="minor">
-            <a:schemeClr val="lt1"/>
-          </a:fontRef>
-        </p:style>
-        <p:txBody>
-          <a:bodyPr rtlCol="0" anchor="ctr"/>
-          <a:lstStyle/>
-          <a:p>
-            <a:pPr algn="ctr"/>
-          </a:p>
-        </p:txBody>
-      </p:sp>
-      <p:sp>
-        <p:nvSpPr>
-          <p:cNvPr id="6" name="Oval 5"/>
-          <p:cNvSpPr/>
-          <p:nvPr/>
-        </p:nvSpPr>
-        <p:spPr>
-          <a:xfrm>
-            <a:off x="932688" y="2395728"/>
-            <a:ext cx="457200" cy="457200"/>
-          </a:xfrm>
-          <a:prstGeom prst="ellipse">
-            <a:avLst/>
-          </a:prstGeom>
-          <a:solidFill>
-            <a:srgbClr val="25C7E5"/>
-          </a:solidFill>
-          <a:ln>
-            <a:noFill/>
-          </a:ln>
-          <a:effectLst/>
-        </p:spPr>
-        <p:style>
-          <a:lnRef idx="1">
-            <a:schemeClr val="accent1"/>
-          </a:lnRef>
-          <a:fillRef idx="3">
-            <a:schemeClr val="accent1"/>
-          </a:fillRef>
-          <a:effectRef idx="2">
-            <a:schemeClr val="accent1"/>
-          </a:effectRef>
-          <a:fontRef idx="minor">
-            <a:schemeClr val="lt1"/>
-          </a:fontRef>
-        </p:style>
-        <p:txBody>
-          <a:bodyPr rtlCol="0" anchor="ctr"/>
-          <a:lstStyle/>
-          <a:p>
-            <a:pPr algn="ctr"/>
-          </a:p>
-        </p:txBody>
-      </p:sp>
-      <p:sp>
-        <p:nvSpPr>
-          <p:cNvPr id="7" name="TextBox 6"/>
-          <p:cNvSpPr txBox="1"/>
-          <p:nvPr/>
-        </p:nvSpPr>
-        <p:spPr>
-          <a:xfrm>
-            <a:off x="932688" y="2478024"/>
-            <a:ext cx="457200" cy="256032"/>
-          </a:xfrm>
-          <a:prstGeom prst="rect">
-            <a:avLst/>
-          </a:prstGeom>
-          <a:noFill/>
-        </p:spPr>
-        <p:txBody>
-          <a:bodyPr wrap="square" anchor="t" lIns="0" rIns="0" tIns="0" bIns="0">
-            <a:spAutoFit/>
-          </a:bodyPr>
-          <a:lstStyle/>
-          <a:p>
-            <a:pPr algn="ctr"/>
-            <a:r>
-              <a:rPr sz="1150" b="1" i="0">
-                <a:solidFill>
-                  <a:srgbClr val="091220"/>
-                </a:solidFill>
-                <a:latin typeface="Aptos"/>
-              </a:rPr>
-              <a:t>01</a:t>
-            </a:r>
-          </a:p>
-        </p:txBody>
-      </p:sp>
-      <p:sp>
-        <p:nvSpPr>
-          <p:cNvPr id="8" name="TextBox 7"/>
-          <p:cNvSpPr txBox="1"/>
-          <p:nvPr/>
-        </p:nvSpPr>
-        <p:spPr>
-          <a:xfrm>
-            <a:off x="1627632" y="2359152"/>
-            <a:ext cx="5852160" cy="274320"/>
-          </a:xfrm>
-          <a:prstGeom prst="rect">
-            <a:avLst/>
-          </a:prstGeom>
-          <a:noFill/>
-        </p:spPr>
-        <p:txBody>
-          <a:bodyPr wrap="square" anchor="t" lIns="0" rIns="0" tIns="0" bIns="0">
-            <a:spAutoFit/>
-          </a:bodyPr>
-          <a:lstStyle/>
-          <a:p>
-            <a:pPr algn="l"/>
-            <a:r>
-              <a:rPr sz="1550" b="1" i="0">
-                <a:solidFill>
-                  <a:srgbClr val="FFFFFF"/>
-                </a:solidFill>
-                <a:latin typeface="Aptos Display"/>
-              </a:rPr>
-              <a:t>Eliminar o primeiro dia de atraso</a:t>
-            </a:r>
-          </a:p>
-        </p:txBody>
-      </p:sp>
-      <p:sp>
-        <p:nvSpPr>
-          <p:cNvPr id="9" name="Rounded Rectangle 8"/>
-          <p:cNvSpPr/>
-          <p:nvPr/>
-        </p:nvSpPr>
-        <p:spPr>
-          <a:xfrm>
-            <a:off x="7818120" y="2395728"/>
-            <a:ext cx="2651760" cy="256032"/>
-          </a:xfrm>
-          <a:prstGeom prst="roundRect">
-            <a:avLst>
-              <a:gd name="adj" fmla="val 50000"/>
-            </a:avLst>
-          </a:prstGeom>
-          <a:solidFill>
-            <a:srgbClr val="14243A"/>
-          </a:solidFill>
-          <a:ln>
-            <a:noFill/>
-          </a:ln>
-          <a:effectLst/>
-        </p:spPr>
-        <p:style>
-          <a:lnRef idx="1">
-            <a:schemeClr val="accent1"/>
-          </a:lnRef>
-          <a:fillRef idx="3">
-            <a:schemeClr val="accent1"/>
-          </a:fillRef>
-          <a:effectRef idx="2">
-            <a:schemeClr val="accent1"/>
-          </a:effectRef>
-          <a:fontRef idx="minor">
-            <a:schemeClr val="lt1"/>
-          </a:fontRef>
-        </p:style>
-        <p:txBody>
-          <a:bodyPr rtlCol="0" anchor="ctr"/>
-          <a:lstStyle/>
-          <a:p>
-            <a:pPr algn="ctr"/>
-          </a:p>
-        </p:txBody>
-      </p:sp>
-      <p:sp>
-        <p:nvSpPr>
-          <p:cNvPr id="10" name="TextBox 9"/>
-          <p:cNvSpPr txBox="1"/>
-          <p:nvPr/>
-        </p:nvSpPr>
-        <p:spPr>
-          <a:xfrm>
-            <a:off x="7818120" y="2414016"/>
-            <a:ext cx="2651760" cy="219456"/>
-          </a:xfrm>
-          <a:prstGeom prst="rect">
-            <a:avLst/>
-          </a:prstGeom>
-          <a:noFill/>
-        </p:spPr>
-        <p:txBody>
-          <a:bodyPr wrap="square" anchor="t" lIns="0" rIns="0" tIns="0" bIns="0">
-            <a:spAutoFit/>
-          </a:bodyPr>
-          <a:lstStyle/>
-          <a:p>
-            <a:pPr algn="ctr"/>
-            <a:r>
-              <a:rPr sz="860" b="1" i="0">
-                <a:solidFill>
-                  <a:srgbClr val="87E5F2"/>
-                </a:solidFill>
-                <a:latin typeface="Aptos"/>
-              </a:rPr>
-              <a:t>PRIORIDADE MÁXIMA</a:t>
-            </a:r>
-          </a:p>
-        </p:txBody>
-      </p:sp>
-      <p:sp>
-        <p:nvSpPr>
-          <p:cNvPr id="11" name="TextBox 10"/>
-          <p:cNvSpPr txBox="1"/>
-          <p:nvPr/>
-        </p:nvSpPr>
-        <p:spPr>
-          <a:xfrm>
-            <a:off x="1627632" y="2688336"/>
-            <a:ext cx="8823960" cy="621792"/>
-          </a:xfrm>
-          <a:prstGeom prst="rect">
-            <a:avLst/>
-          </a:prstGeom>
-          <a:noFill/>
-        </p:spPr>
-        <p:txBody>
-          <a:bodyPr wrap="square" anchor="t" lIns="0" rIns="0" tIns="0" bIns="0">
-            <a:spAutoFit/>
-          </a:bodyPr>
-          <a:lstStyle/>
-          <a:p>
-            <a:pPr algn="l">
-              <a:lnSpc>
-                <a:spcPct val="110000"/>
-              </a:lnSpc>
-            </a:pPr>
-            <a:r>
-              <a:rPr sz="1010" b="0" i="0">
-                <a:solidFill>
-                  <a:srgbClr val="A6B4C6"/>
-                </a:solidFill>
-                <a:latin typeface="Aptos"/>
-              </a:rPr>
-              <a:t>O salto de 0 para 1 dia de atraso já derruba o NPS em 1,3 pontos e aumenta os detratores em 22,3 p.p. Ação: revisar SLA logístico e gargalos da última milha.</a:t>
-            </a:r>
-          </a:p>
-        </p:txBody>
-      </p:sp>
-      <p:sp>
-        <p:nvSpPr>
-          <p:cNvPr id="12" name="Rounded Rectangle 11"/>
-          <p:cNvSpPr/>
-          <p:nvPr/>
-        </p:nvSpPr>
-        <p:spPr>
-          <a:xfrm>
-            <a:off x="658368" y="3566160"/>
-            <a:ext cx="10881360" cy="1207008"/>
-          </a:xfrm>
-          <a:prstGeom prst="roundRect">
-            <a:avLst>
-              <a:gd name="adj" fmla="val 5000"/>
-            </a:avLst>
-          </a:prstGeom>
-          <a:solidFill>
-            <a:srgbClr val="0D1A2B"/>
-          </a:solidFill>
-          <a:ln>
-            <a:noFill/>
-          </a:ln>
-          <a:effectLst/>
-        </p:spPr>
-        <p:style>
-          <a:lnRef idx="1">
-            <a:schemeClr val="accent1"/>
-          </a:lnRef>
-          <a:fillRef idx="3">
-            <a:schemeClr val="accent1"/>
-          </a:fillRef>
-          <a:effectRef idx="2">
-            <a:schemeClr val="accent1"/>
-          </a:effectRef>
-          <a:fontRef idx="minor">
-            <a:schemeClr val="lt1"/>
-          </a:fontRef>
-        </p:style>
-        <p:txBody>
-          <a:bodyPr rtlCol="0" anchor="ctr"/>
-          <a:lstStyle/>
-          <a:p>
-            <a:pPr algn="ctr"/>
-          </a:p>
-        </p:txBody>
-      </p:sp>
-      <p:sp>
-        <p:nvSpPr>
-          <p:cNvPr id="13" name="Oval 12"/>
-          <p:cNvSpPr/>
-          <p:nvPr/>
-        </p:nvSpPr>
-        <p:spPr>
-          <a:xfrm>
-            <a:off x="932688" y="3749039"/>
-            <a:ext cx="457200" cy="457200"/>
-          </a:xfrm>
-          <a:prstGeom prst="ellipse">
-            <a:avLst/>
-          </a:prstGeom>
-          <a:solidFill>
-            <a:srgbClr val="25C7E5"/>
-          </a:solidFill>
-          <a:ln>
-            <a:noFill/>
-          </a:ln>
-          <a:effectLst/>
-        </p:spPr>
-        <p:style>
-          <a:lnRef idx="1">
-            <a:schemeClr val="accent1"/>
-          </a:lnRef>
-          <a:fillRef idx="3">
-            <a:schemeClr val="accent1"/>
-          </a:fillRef>
-          <a:effectRef idx="2">
-            <a:schemeClr val="accent1"/>
-          </a:effectRef>
-          <a:fontRef idx="minor">
-            <a:schemeClr val="lt1"/>
-          </a:fontRef>
-        </p:style>
-        <p:txBody>
-          <a:bodyPr rtlCol="0" anchor="ctr"/>
-          <a:lstStyle/>
-          <a:p>
-            <a:pPr algn="ctr"/>
-          </a:p>
-        </p:txBody>
-      </p:sp>
-      <p:sp>
-        <p:nvSpPr>
-          <p:cNvPr id="14" name="TextBox 13"/>
-          <p:cNvSpPr txBox="1"/>
-          <p:nvPr/>
-        </p:nvSpPr>
-        <p:spPr>
-          <a:xfrm>
-            <a:off x="932688" y="3831335"/>
-            <a:ext cx="457200" cy="256032"/>
-          </a:xfrm>
-          <a:prstGeom prst="rect">
-            <a:avLst/>
-          </a:prstGeom>
-          <a:noFill/>
-        </p:spPr>
-        <p:txBody>
-          <a:bodyPr wrap="square" anchor="t" lIns="0" rIns="0" tIns="0" bIns="0">
-            <a:spAutoFit/>
-          </a:bodyPr>
-          <a:lstStyle/>
-          <a:p>
-            <a:pPr algn="ctr"/>
-            <a:r>
-              <a:rPr sz="1150" b="1" i="0">
-                <a:solidFill>
-                  <a:srgbClr val="091220"/>
-                </a:solidFill>
-                <a:latin typeface="Aptos"/>
-              </a:rPr>
-              <a:t>02</a:t>
-            </a:r>
-          </a:p>
-        </p:txBody>
-      </p:sp>
-      <p:sp>
-        <p:nvSpPr>
-          <p:cNvPr id="15" name="TextBox 14"/>
-          <p:cNvSpPr txBox="1"/>
-          <p:nvPr/>
-        </p:nvSpPr>
-        <p:spPr>
-          <a:xfrm>
-            <a:off x="1627632" y="3712463"/>
-            <a:ext cx="5852160" cy="274320"/>
-          </a:xfrm>
-          <a:prstGeom prst="rect">
-            <a:avLst/>
-          </a:prstGeom>
-          <a:noFill/>
-        </p:spPr>
-        <p:txBody>
-          <a:bodyPr wrap="square" anchor="t" lIns="0" rIns="0" tIns="0" bIns="0">
-            <a:spAutoFit/>
-          </a:bodyPr>
-          <a:lstStyle/>
-          <a:p>
-            <a:pPr algn="l"/>
-            <a:r>
-              <a:rPr sz="1550" b="1" i="0">
-                <a:solidFill>
-                  <a:srgbClr val="FFFFFF"/>
-                </a:solidFill>
-                <a:latin typeface="Aptos Display"/>
-              </a:rPr>
-              <a:t>Resolver antes de o cliente reclamar</a:t>
-            </a:r>
-          </a:p>
-        </p:txBody>
-      </p:sp>
-      <p:sp>
-        <p:nvSpPr>
-          <p:cNvPr id="16" name="Rounded Rectangle 15"/>
-          <p:cNvSpPr/>
-          <p:nvPr/>
-        </p:nvSpPr>
-        <p:spPr>
-          <a:xfrm>
-            <a:off x="7818120" y="3749039"/>
-            <a:ext cx="2651760" cy="256032"/>
-          </a:xfrm>
-          <a:prstGeom prst="roundRect">
-            <a:avLst>
-              <a:gd name="adj" fmla="val 50000"/>
-            </a:avLst>
-          </a:prstGeom>
-          <a:solidFill>
-            <a:srgbClr val="14243A"/>
-          </a:solidFill>
-          <a:ln>
-            <a:noFill/>
-          </a:ln>
-          <a:effectLst/>
-        </p:spPr>
-        <p:style>
-          <a:lnRef idx="1">
-            <a:schemeClr val="accent1"/>
-          </a:lnRef>
-          <a:fillRef idx="3">
-            <a:schemeClr val="accent1"/>
-          </a:fillRef>
-          <a:effectRef idx="2">
-            <a:schemeClr val="accent1"/>
-          </a:effectRef>
-          <a:fontRef idx="minor">
-            <a:schemeClr val="lt1"/>
-          </a:fontRef>
-        </p:style>
-        <p:txBody>
-          <a:bodyPr rtlCol="0" anchor="ctr"/>
-          <a:lstStyle/>
-          <a:p>
-            <a:pPr algn="ctr"/>
-          </a:p>
-        </p:txBody>
-      </p:sp>
-      <p:sp>
-        <p:nvSpPr>
-          <p:cNvPr id="17" name="TextBox 16"/>
-          <p:cNvSpPr txBox="1"/>
-          <p:nvPr/>
-        </p:nvSpPr>
-        <p:spPr>
-          <a:xfrm>
-            <a:off x="7818120" y="3767328"/>
-            <a:ext cx="2651760" cy="219456"/>
-          </a:xfrm>
-          <a:prstGeom prst="rect">
-            <a:avLst/>
-          </a:prstGeom>
-          <a:noFill/>
-        </p:spPr>
-        <p:txBody>
-          <a:bodyPr wrap="square" anchor="t" lIns="0" rIns="0" tIns="0" bIns="0">
-            <a:spAutoFit/>
-          </a:bodyPr>
-          <a:lstStyle/>
-          <a:p>
-            <a:pPr algn="ctr"/>
-            <a:r>
-              <a:rPr sz="860" b="1" i="0">
-                <a:solidFill>
-                  <a:srgbClr val="87E5F2"/>
-                </a:solidFill>
-                <a:latin typeface="Aptos"/>
-              </a:rPr>
-              <a:t>PRIORIDADE ALTA</a:t>
-            </a:r>
-          </a:p>
-        </p:txBody>
-      </p:sp>
-      <p:sp>
-        <p:nvSpPr>
-          <p:cNvPr id="18" name="TextBox 17"/>
-          <p:cNvSpPr txBox="1"/>
-          <p:nvPr/>
-        </p:nvSpPr>
-        <p:spPr>
-          <a:xfrm>
-            <a:off x="1627632" y="4041648"/>
-            <a:ext cx="8823960" cy="621792"/>
-          </a:xfrm>
-          <a:prstGeom prst="rect">
-            <a:avLst/>
-          </a:prstGeom>
-          <a:noFill/>
-        </p:spPr>
-        <p:txBody>
-          <a:bodyPr wrap="square" anchor="t" lIns="0" rIns="0" tIns="0" bIns="0">
-            <a:spAutoFit/>
-          </a:bodyPr>
-          <a:lstStyle/>
-          <a:p>
-            <a:pPr algn="l">
-              <a:lnSpc>
-                <a:spcPct val="110000"/>
-              </a:lnSpc>
-            </a:pPr>
-            <a:r>
-              <a:rPr sz="1010" b="0" i="0">
-                <a:solidFill>
-                  <a:srgbClr val="A6B4C6"/>
-                </a:solidFill>
-                <a:latin typeface="Aptos"/>
-              </a:rPr>
-              <a:t>Detratores fazem 75,3% mais contatos e 71,0% mais reclamações do que não-detratores. Ação: notificar e agir assim que um atraso é detectado, antes da reclamação.</a:t>
-            </a:r>
-          </a:p>
-        </p:txBody>
-      </p:sp>
-      <p:sp>
-        <p:nvSpPr>
-          <p:cNvPr id="19" name="Rounded Rectangle 18"/>
-          <p:cNvSpPr/>
-          <p:nvPr/>
-        </p:nvSpPr>
-        <p:spPr>
-          <a:xfrm>
-            <a:off x="658368" y="4919472"/>
-            <a:ext cx="10881360" cy="1207008"/>
-          </a:xfrm>
-          <a:prstGeom prst="roundRect">
-            <a:avLst>
-              <a:gd name="adj" fmla="val 5000"/>
-            </a:avLst>
-          </a:prstGeom>
-          <a:solidFill>
-            <a:srgbClr val="0D1A2B"/>
-          </a:solidFill>
-          <a:ln>
-            <a:noFill/>
-          </a:ln>
-          <a:effectLst/>
-        </p:spPr>
-        <p:style>
-          <a:lnRef idx="1">
-            <a:schemeClr val="accent1"/>
-          </a:lnRef>
-          <a:fillRef idx="3">
-            <a:schemeClr val="accent1"/>
-          </a:fillRef>
-          <a:effectRef idx="2">
-            <a:schemeClr val="accent1"/>
-          </a:effectRef>
-          <a:fontRef idx="minor">
-            <a:schemeClr val="lt1"/>
-          </a:fontRef>
-        </p:style>
-        <p:txBody>
-          <a:bodyPr rtlCol="0" anchor="ctr"/>
-          <a:lstStyle/>
-          <a:p>
-            <a:pPr algn="ctr"/>
-          </a:p>
-        </p:txBody>
-      </p:sp>
-      <p:sp>
-        <p:nvSpPr>
-          <p:cNvPr id="20" name="Oval 19"/>
-          <p:cNvSpPr/>
-          <p:nvPr/>
-        </p:nvSpPr>
-        <p:spPr>
-          <a:xfrm>
-            <a:off x="932688" y="5102352"/>
-            <a:ext cx="457200" cy="457200"/>
-          </a:xfrm>
-          <a:prstGeom prst="ellipse">
-            <a:avLst/>
-          </a:prstGeom>
-          <a:solidFill>
-            <a:srgbClr val="25C7E5"/>
-          </a:solidFill>
-          <a:ln>
-            <a:noFill/>
-          </a:ln>
-          <a:effectLst/>
-        </p:spPr>
-        <p:style>
-          <a:lnRef idx="1">
-            <a:schemeClr val="accent1"/>
-          </a:lnRef>
-          <a:fillRef idx="3">
-            <a:schemeClr val="accent1"/>
-          </a:fillRef>
-          <a:effectRef idx="2">
-            <a:schemeClr val="accent1"/>
-          </a:effectRef>
-          <a:fontRef idx="minor">
-            <a:schemeClr val="lt1"/>
-          </a:fontRef>
-        </p:style>
-        <p:txBody>
-          <a:bodyPr rtlCol="0" anchor="ctr"/>
-          <a:lstStyle/>
-          <a:p>
-            <a:pPr algn="ctr"/>
-          </a:p>
-        </p:txBody>
-      </p:sp>
-      <p:sp>
-        <p:nvSpPr>
-          <p:cNvPr id="21" name="TextBox 20"/>
-          <p:cNvSpPr txBox="1"/>
-          <p:nvPr/>
-        </p:nvSpPr>
-        <p:spPr>
-          <a:xfrm>
-            <a:off x="932688" y="5184648"/>
-            <a:ext cx="457200" cy="256032"/>
-          </a:xfrm>
-          <a:prstGeom prst="rect">
-            <a:avLst/>
-          </a:prstGeom>
-          <a:noFill/>
-        </p:spPr>
-        <p:txBody>
-          <a:bodyPr wrap="square" anchor="t" lIns="0" rIns="0" tIns="0" bIns="0">
-            <a:spAutoFit/>
-          </a:bodyPr>
-          <a:lstStyle/>
-          <a:p>
-            <a:pPr algn="ctr"/>
-            <a:r>
-              <a:rPr sz="1150" b="1" i="0">
-                <a:solidFill>
-                  <a:srgbClr val="091220"/>
-                </a:solidFill>
-                <a:latin typeface="Aptos"/>
-              </a:rPr>
-              <a:t>03</a:t>
-            </a:r>
-          </a:p>
-        </p:txBody>
-      </p:sp>
-      <p:sp>
-        <p:nvSpPr>
-          <p:cNvPr id="22" name="TextBox 21"/>
-          <p:cNvSpPr txBox="1"/>
-          <p:nvPr/>
-        </p:nvSpPr>
-        <p:spPr>
-          <a:xfrm>
-            <a:off x="1627632" y="5065776"/>
-            <a:ext cx="5852160" cy="274320"/>
-          </a:xfrm>
-          <a:prstGeom prst="rect">
-            <a:avLst/>
-          </a:prstGeom>
-          <a:noFill/>
-        </p:spPr>
-        <p:txBody>
-          <a:bodyPr wrap="square" anchor="t" lIns="0" rIns="0" tIns="0" bIns="0">
-            <a:spAutoFit/>
-          </a:bodyPr>
-          <a:lstStyle/>
-          <a:p>
-            <a:pPr algn="l"/>
-            <a:r>
-              <a:rPr sz="1550" b="1" i="0">
-                <a:solidFill>
-                  <a:srgbClr val="FFFFFF"/>
-                </a:solidFill>
-                <a:latin typeface="Aptos Display"/>
-              </a:rPr>
-              <a:t>Acompanhar recompra como termômetro</a:t>
-            </a:r>
-          </a:p>
-        </p:txBody>
-      </p:sp>
-      <p:sp>
-        <p:nvSpPr>
-          <p:cNvPr id="23" name="Rounded Rectangle 22"/>
-          <p:cNvSpPr/>
-          <p:nvPr/>
-        </p:nvSpPr>
-        <p:spPr>
-          <a:xfrm>
-            <a:off x="7818120" y="5102352"/>
-            <a:ext cx="2651760" cy="256032"/>
-          </a:xfrm>
-          <a:prstGeom prst="roundRect">
-            <a:avLst>
-              <a:gd name="adj" fmla="val 50000"/>
-            </a:avLst>
-          </a:prstGeom>
-          <a:solidFill>
-            <a:srgbClr val="14243A"/>
-          </a:solidFill>
-          <a:ln>
-            <a:noFill/>
-          </a:ln>
-          <a:effectLst/>
-        </p:spPr>
-        <p:style>
-          <a:lnRef idx="1">
-            <a:schemeClr val="accent1"/>
-          </a:lnRef>
-          <a:fillRef idx="3">
-            <a:schemeClr val="accent1"/>
-          </a:fillRef>
-          <a:effectRef idx="2">
-            <a:schemeClr val="accent1"/>
-          </a:effectRef>
-          <a:fontRef idx="minor">
-            <a:schemeClr val="lt1"/>
-          </a:fontRef>
-        </p:style>
-        <p:txBody>
-          <a:bodyPr rtlCol="0" anchor="ctr"/>
-          <a:lstStyle/>
-          <a:p>
-            <a:pPr algn="ctr"/>
-          </a:p>
-        </p:txBody>
-      </p:sp>
-      <p:sp>
-        <p:nvSpPr>
-          <p:cNvPr id="24" name="TextBox 23"/>
-          <p:cNvSpPr txBox="1"/>
-          <p:nvPr/>
-        </p:nvSpPr>
-        <p:spPr>
-          <a:xfrm>
-            <a:off x="7818120" y="5120640"/>
-            <a:ext cx="2651760" cy="219456"/>
-          </a:xfrm>
-          <a:prstGeom prst="rect">
-            <a:avLst/>
-          </a:prstGeom>
-          <a:noFill/>
-        </p:spPr>
-        <p:txBody>
-          <a:bodyPr wrap="square" anchor="t" lIns="0" rIns="0" tIns="0" bIns="0">
-            <a:spAutoFit/>
-          </a:bodyPr>
-          <a:lstStyle/>
-          <a:p>
-            <a:pPr algn="ctr"/>
-            <a:r>
-              <a:rPr sz="860" b="1" i="0">
-                <a:solidFill>
-                  <a:srgbClr val="87E5F2"/>
-                </a:solidFill>
-                <a:latin typeface="Aptos"/>
-              </a:rPr>
-              <a:t>PRIORIDADE CONTÍNUA</a:t>
-            </a:r>
-          </a:p>
-        </p:txBody>
-      </p:sp>
-      <p:sp>
-        <p:nvSpPr>
-          <p:cNvPr id="25" name="TextBox 24"/>
-          <p:cNvSpPr txBox="1"/>
-          <p:nvPr/>
-        </p:nvSpPr>
-        <p:spPr>
-          <a:xfrm>
-            <a:off x="1627632" y="5394960"/>
-            <a:ext cx="8823960" cy="621792"/>
-          </a:xfrm>
-          <a:prstGeom prst="rect">
-            <a:avLst/>
-          </a:prstGeom>
-          <a:noFill/>
-        </p:spPr>
-        <p:txBody>
-          <a:bodyPr wrap="square" anchor="t" lIns="0" rIns="0" tIns="0" bIns="0">
-            <a:spAutoFit/>
-          </a:bodyPr>
-          <a:lstStyle/>
-          <a:p>
-            <a:pPr algn="l">
-              <a:lnSpc>
-                <a:spcPct val="110000"/>
-              </a:lnSpc>
-            </a:pPr>
-            <a:r>
-              <a:rPr sz="1010" b="0" i="0">
-                <a:solidFill>
-                  <a:srgbClr val="A6B4C6"/>
-                </a:solidFill>
-                <a:latin typeface="Aptos"/>
-              </a:rPr>
-              <a:t>100% dos promotores recompram em 30 dias; 0% dos detratores recompram. Ação: monitorar recompra e CSAT interno como indicadores antecipados de satisfação.</a:t>
-            </a:r>
-          </a:p>
-        </p:txBody>
-      </p:sp>
-      <p:sp>
-        <p:nvSpPr>
-          <p:cNvPr id="26" name="TextBox 25"/>
-          <p:cNvSpPr txBox="1"/>
-          <p:nvPr/>
-        </p:nvSpPr>
-        <p:spPr>
-          <a:xfrm>
-            <a:off x="658368" y="6501384"/>
-            <a:ext cx="3749039" cy="164592"/>
-          </a:xfrm>
-          <a:prstGeom prst="rect">
-            <a:avLst/>
-          </a:prstGeom>
-          <a:noFill/>
-        </p:spPr>
-        <p:txBody>
-          <a:bodyPr wrap="square" anchor="t" lIns="0" rIns="0" tIns="0" bIns="0">
-            <a:spAutoFit/>
-          </a:bodyPr>
-          <a:lstStyle/>
-          <a:p>
-            <a:pPr algn="l"/>
-            <a:r>
-              <a:rPr sz="850" b="0" i="0">
-                <a:solidFill>
-                  <a:srgbClr val="718399"/>
-                </a:solidFill>
-                <a:latin typeface="Aptos"/>
-              </a:rPr>
-              <a:t>NPS Preditivo  ·  Tech Challenge Fase 1</a:t>
-            </a:r>
-          </a:p>
-        </p:txBody>
-      </p:sp>
-      <p:sp>
-        <p:nvSpPr>
-          <p:cNvPr id="27" name="TextBox 26"/>
-          <p:cNvSpPr txBox="1"/>
-          <p:nvPr/>
-        </p:nvSpPr>
-        <p:spPr>
-          <a:xfrm>
-            <a:off x="11137392" y="6473952"/>
-            <a:ext cx="384048" cy="164592"/>
-          </a:xfrm>
-          <a:prstGeom prst="rect">
-            <a:avLst/>
-          </a:prstGeom>
-          <a:noFill/>
-        </p:spPr>
-        <p:txBody>
-          <a:bodyPr wrap="square" anchor="t" lIns="0" rIns="0" tIns="0" bIns="0">
-            <a:spAutoFit/>
-          </a:bodyPr>
-          <a:lstStyle/>
-          <a:p>
-            <a:pPr algn="r"/>
-            <a:r>
-              <a:rPr sz="850" b="0" i="0">
-                <a:solidFill>
-                  <a:srgbClr val="718399"/>
-                </a:solidFill>
-                <a:latin typeface="Aptos"/>
-              </a:rPr>
-              <a:t>09</a:t>
             </a:r>
           </a:p>
         </p:txBody>

--- a/Tech_Challenge_Fase1.pptx
+++ b/Tech_Challenge_Fase1.pptx
@@ -5054,7 +5054,7 @@
                 </a:solidFill>
                 <a:latin typeface="Aptos"/>
               </a:rPr>
-              <a:t>Amanda Alves de Lima Santos  ·  Fábio da Silva Costa  ·  Gabriel Victor  ·  Vanessa Partala</a:t>
+              <a:t>Amanda Alves de Lima Santos  ·  Fábio da Silva Costa  ·  Gabriel Victor Santos Oliveira  ·  Vanessa Partala  ·  Humberto Henrique Alves Moreira dos Santos</a:t>
             </a:r>
           </a:p>
         </p:txBody>
@@ -7580,8 +7580,8 @@
         </p:nvSpPr>
         <p:spPr>
           <a:xfrm>
-            <a:off x="658368" y="6144768"/>
-            <a:ext cx="8229600" cy="274320"/>
+            <a:off x="658368" y="6089904"/>
+            <a:ext cx="8229600" cy="365760"/>
           </a:xfrm>
           <a:prstGeom prst="rect">
             <a:avLst/>
@@ -7596,13 +7596,13 @@
           <a:p>
             <a:pPr algn="l"/>
             <a:r>
-              <a:rPr sz="1050" b="0" i="0">
+              <a:rPr sz="950" b="0" i="0">
                 <a:solidFill>
                   <a:srgbClr val="9FB0C6"/>
                 </a:solidFill>
                 <a:latin typeface="Aptos"/>
               </a:rPr>
-              <a:t>Amanda Alves de Lima Santos  ·  Fábio da Silva Costa  ·  Gabriel Victor  ·  Vanessa Partala</a:t>
+              <a:t>Amanda Alves de Lima Santos  ·  Fábio da Silva Costa  ·  Gabriel Victor Santos Oliveira  ·  Vanessa Partala  ·  Humberto Henrique Alves Moreira dos Santos</a:t>
             </a:r>
           </a:p>
         </p:txBody>
